--- a/presentation/Graph-of-Shots.pptx
+++ b/presentation/Graph-of-Shots.pptx
@@ -18010,8 +18010,8 @@
         </p:nvCxnSpPr>
         <p:spPr>
           <a:xfrm>
-            <a:off x="8275320" y="2628900.0"/>
-            <a:ext cx="2423160" cy="0.0"/>
+            <a:off x="8275320" y="2628900"/>
+            <a:ext cx="2423160" cy="0"/>
           </a:xfrm>
           <a:prstGeom prst="line">
             <a:avLst/>
@@ -18045,8 +18045,8 @@
         </p:nvCxnSpPr>
         <p:spPr>
           <a:xfrm>
-            <a:off x="8275320" y="2628900.0"/>
-            <a:ext cx="2423160" cy="731520.0"/>
+            <a:off x="8275320" y="2628900"/>
+            <a:ext cx="2423160" cy="731520"/>
           </a:xfrm>
           <a:prstGeom prst="line">
             <a:avLst/>
@@ -18080,8 +18080,8 @@
         </p:nvCxnSpPr>
         <p:spPr>
           <a:xfrm>
-            <a:off x="8275320" y="2628900.0"/>
-            <a:ext cx="2423160" cy="1463040.0"/>
+            <a:off x="8275320" y="2628900"/>
+            <a:ext cx="2423160" cy="1463040"/>
           </a:xfrm>
           <a:prstGeom prst="line">
             <a:avLst/>
@@ -18115,8 +18115,8 @@
         </p:nvCxnSpPr>
         <p:spPr>
           <a:xfrm flipV="1">
-            <a:off x="8275320" y="2628900.0"/>
-            <a:ext cx="2423160" cy="731520.0"/>
+            <a:off x="8275320" y="2628900"/>
+            <a:ext cx="2423160" cy="731520"/>
           </a:xfrm>
           <a:prstGeom prst="line">
             <a:avLst/>
@@ -18150,8 +18150,8 @@
         </p:nvCxnSpPr>
         <p:spPr>
           <a:xfrm>
-            <a:off x="8275320" y="3360420.0"/>
-            <a:ext cx="2423160" cy="0.0"/>
+            <a:off x="8275320" y="3360420"/>
+            <a:ext cx="2423160" cy="0"/>
           </a:xfrm>
           <a:prstGeom prst="line">
             <a:avLst/>
@@ -18185,8 +18185,8 @@
         </p:nvCxnSpPr>
         <p:spPr>
           <a:xfrm>
-            <a:off x="8275320" y="3360420.0"/>
-            <a:ext cx="2423160" cy="731520.0"/>
+            <a:off x="8275320" y="3360420"/>
+            <a:ext cx="2423160" cy="731520"/>
           </a:xfrm>
           <a:prstGeom prst="line">
             <a:avLst/>
@@ -18220,8 +18220,8 @@
         </p:nvCxnSpPr>
         <p:spPr>
           <a:xfrm flipV="1">
-            <a:off x="8275320" y="2628900.0"/>
-            <a:ext cx="2423160" cy="1463040.0"/>
+            <a:off x="8275320" y="2628900"/>
+            <a:ext cx="2423160" cy="1463040"/>
           </a:xfrm>
           <a:prstGeom prst="line">
             <a:avLst/>
@@ -18255,8 +18255,8 @@
         </p:nvCxnSpPr>
         <p:spPr>
           <a:xfrm flipV="1">
-            <a:off x="8275320" y="3360420.0"/>
-            <a:ext cx="2423160" cy="731520.0"/>
+            <a:off x="8275320" y="3360420"/>
+            <a:ext cx="2423160" cy="731520"/>
           </a:xfrm>
           <a:prstGeom prst="line">
             <a:avLst/>
@@ -18290,8 +18290,8 @@
         </p:nvCxnSpPr>
         <p:spPr>
           <a:xfrm>
-            <a:off x="8275320" y="4091940.0"/>
-            <a:ext cx="2423160" cy="0.0"/>
+            <a:off x="8275320" y="4091940"/>
+            <a:ext cx="2423160" cy="0"/>
           </a:xfrm>
           <a:prstGeom prst="line">
             <a:avLst/>

--- a/presentation/Graph-of-Shots.pptx
+++ b/presentation/Graph-of-Shots.pptx
@@ -17,8 +17,6 @@
     <p:sldId id="265" r:id="rId17"/>
     <p:sldId id="266" r:id="rId18"/>
     <p:sldId id="267" r:id="rId19"/>
-    <p:sldId id="268" r:id="rId20"/>
-    <p:sldId id="269" r:id="rId21"/>
   </p:sldIdLst>
   <p:sldSz cx="12191695" cy="6858000" type="screen4x3"/>
   <p:notesSz cx="6858000" cy="9144000"/>
@@ -515,917 +513,7 @@
           <a:lstStyle/>
           <a:p>
             <a:r>
-              <a:t>Course project: Graph-of-Shots.</a:t>
-            </a:r>
-          </a:p>
-        </p:txBody>
-      </p:sp>
-      <p:sp>
-        <p:nvSpPr>
-          <p:cNvPr id="4" name="Slide Number Placeholder 3"/>
-          <p:cNvSpPr>
-            <a:spLocks noGrp="1"/>
-          </p:cNvSpPr>
-          <p:nvPr>
-            <p:ph type="sldNum" idx="5" sz="quarter"/>
-          </p:nvPr>
-        </p:nvSpPr>
-        <p:spPr/>
-      </p:sp>
-    </p:spTree>
-  </p:cSld>
-  <p:clrMapOvr>
-    <a:masterClrMapping/>
-  </p:clrMapOvr>
-</p:notes>
-</file>
-
-<file path=ppt/notesSlides/notesSlide10.xml><?xml version="1.0" encoding="utf-8"?>
-<p:notes xmlns:a="http://schemas.openxmlformats.org/drawingml/2006/main" xmlns:p="http://schemas.openxmlformats.org/presentationml/2006/main" xmlns:r="http://schemas.openxmlformats.org/officeDocument/2006/relationships">
-  <p:cSld>
-    <p:spTree>
-      <p:nvGrpSpPr>
-        <p:cNvPr id="1" name=""/>
-        <p:cNvGrpSpPr/>
-        <p:nvPr/>
-      </p:nvGrpSpPr>
-      <p:grpSpPr>
-        <a:xfrm>
-          <a:off x="0" y="0"/>
-          <a:ext cx="0" cy="0"/>
-          <a:chOff x="0" y="0"/>
-          <a:chExt cx="0" cy="0"/>
-        </a:xfrm>
-      </p:grpSpPr>
-      <p:sp>
-        <p:nvSpPr>
-          <p:cNvPr id="2" name="Slide Image Placeholder 1"/>
-          <p:cNvSpPr>
-            <a:spLocks noGrp="1"/>
-          </p:cNvSpPr>
-          <p:nvPr>
-            <p:ph type="sldImg" idx="2"/>
-          </p:nvPr>
-        </p:nvSpPr>
-        <p:spPr/>
-      </p:sp>
-      <p:sp>
-        <p:nvSpPr>
-          <p:cNvPr id="3" name="Notes Placeholder 2"/>
-          <p:cNvSpPr>
-            <a:spLocks noGrp="1"/>
-          </p:cNvSpPr>
-          <p:nvPr>
-            <p:ph type="body" idx="3" sz="quarter"/>
-          </p:nvPr>
-        </p:nvSpPr>
-        <p:spPr/>
-        <p:txBody>
-          <a:bodyPr/>
-          <a:lstStyle/>
-          <a:p>
-            <a:r>
-              <a:t>Affinity vs sparsification ablation.</a:t>
-            </a:r>
-          </a:p>
-        </p:txBody>
-      </p:sp>
-      <p:sp>
-        <p:nvSpPr>
-          <p:cNvPr id="4" name="Slide Number Placeholder 3"/>
-          <p:cNvSpPr>
-            <a:spLocks noGrp="1"/>
-          </p:cNvSpPr>
-          <p:nvPr>
-            <p:ph type="sldNum" idx="5" sz="quarter"/>
-          </p:nvPr>
-        </p:nvSpPr>
-        <p:spPr/>
-      </p:sp>
-    </p:spTree>
-  </p:cSld>
-  <p:clrMapOvr>
-    <a:masterClrMapping/>
-  </p:clrMapOvr>
-</p:notes>
-</file>
-
-<file path=ppt/notesSlides/notesSlide11.xml><?xml version="1.0" encoding="utf-8"?>
-<p:notes xmlns:a="http://schemas.openxmlformats.org/drawingml/2006/main" xmlns:p="http://schemas.openxmlformats.org/presentationml/2006/main" xmlns:r="http://schemas.openxmlformats.org/officeDocument/2006/relationships">
-  <p:cSld>
-    <p:spTree>
-      <p:nvGrpSpPr>
-        <p:cNvPr id="1" name=""/>
-        <p:cNvGrpSpPr/>
-        <p:nvPr/>
-      </p:nvGrpSpPr>
-      <p:grpSpPr>
-        <a:xfrm>
-          <a:off x="0" y="0"/>
-          <a:ext cx="0" cy="0"/>
-          <a:chOff x="0" y="0"/>
-          <a:chExt cx="0" cy="0"/>
-        </a:xfrm>
-      </p:grpSpPr>
-      <p:sp>
-        <p:nvSpPr>
-          <p:cNvPr id="2" name="Slide Image Placeholder 1"/>
-          <p:cNvSpPr>
-            <a:spLocks noGrp="1"/>
-          </p:cNvSpPr>
-          <p:nvPr>
-            <p:ph type="sldImg" idx="2"/>
-          </p:nvPr>
-        </p:nvSpPr>
-        <p:spPr/>
-      </p:sp>
-      <p:sp>
-        <p:nvSpPr>
-          <p:cNvPr id="3" name="Notes Placeholder 2"/>
-          <p:cNvSpPr>
-            <a:spLocks noGrp="1"/>
-          </p:cNvSpPr>
-          <p:nvPr>
-            <p:ph type="body" idx="3" sz="quarter"/>
-          </p:nvPr>
-        </p:nvSpPr>
-        <p:spPr/>
-        <p:txBody>
-          <a:bodyPr/>
-          <a:lstStyle/>
-          <a:p>
-            <a:r>
-              <a:t>Sample efficiency and training dynamics.</a:t>
-            </a:r>
-          </a:p>
-        </p:txBody>
-      </p:sp>
-      <p:sp>
-        <p:nvSpPr>
-          <p:cNvPr id="4" name="Slide Number Placeholder 3"/>
-          <p:cNvSpPr>
-            <a:spLocks noGrp="1"/>
-          </p:cNvSpPr>
-          <p:nvPr>
-            <p:ph type="sldNum" idx="5" sz="quarter"/>
-          </p:nvPr>
-        </p:nvSpPr>
-        <p:spPr/>
-      </p:sp>
-    </p:spTree>
-  </p:cSld>
-  <p:clrMapOvr>
-    <a:masterClrMapping/>
-  </p:clrMapOvr>
-</p:notes>
-</file>
-
-<file path=ppt/notesSlides/notesSlide12.xml><?xml version="1.0" encoding="utf-8"?>
-<p:notes xmlns:a="http://schemas.openxmlformats.org/drawingml/2006/main" xmlns:p="http://schemas.openxmlformats.org/presentationml/2006/main" xmlns:r="http://schemas.openxmlformats.org/officeDocument/2006/relationships">
-  <p:cSld>
-    <p:spTree>
-      <p:nvGrpSpPr>
-        <p:cNvPr id="1" name=""/>
-        <p:cNvGrpSpPr/>
-        <p:nvPr/>
-      </p:nvGrpSpPr>
-      <p:grpSpPr>
-        <a:xfrm>
-          <a:off x="0" y="0"/>
-          <a:ext cx="0" cy="0"/>
-          <a:chOff x="0" y="0"/>
-          <a:chExt cx="0" cy="0"/>
-        </a:xfrm>
-      </p:grpSpPr>
-      <p:sp>
-        <p:nvSpPr>
-          <p:cNvPr id="2" name="Slide Image Placeholder 1"/>
-          <p:cNvSpPr>
-            <a:spLocks noGrp="1"/>
-          </p:cNvSpPr>
-          <p:nvPr>
-            <p:ph type="sldImg" idx="2"/>
-          </p:nvPr>
-        </p:nvSpPr>
-        <p:spPr/>
-      </p:sp>
-      <p:sp>
-        <p:nvSpPr>
-          <p:cNvPr id="3" name="Notes Placeholder 2"/>
-          <p:cNvSpPr>
-            <a:spLocks noGrp="1"/>
-          </p:cNvSpPr>
-          <p:nvPr>
-            <p:ph type="body" idx="3" sz="quarter"/>
-          </p:nvPr>
-        </p:nvSpPr>
-        <p:spPr/>
-        <p:txBody>
-          <a:bodyPr/>
-          <a:lstStyle/>
-          <a:p>
-            <a:r>
-              <a:t>Five v2 ablation studies.</a:t>
-            </a:r>
-          </a:p>
-        </p:txBody>
-      </p:sp>
-      <p:sp>
-        <p:nvSpPr>
-          <p:cNvPr id="4" name="Slide Number Placeholder 3"/>
-          <p:cNvSpPr>
-            <a:spLocks noGrp="1"/>
-          </p:cNvSpPr>
-          <p:nvPr>
-            <p:ph type="sldNum" idx="5" sz="quarter"/>
-          </p:nvPr>
-        </p:nvSpPr>
-        <p:spPr/>
-      </p:sp>
-    </p:spTree>
-  </p:cSld>
-  <p:clrMapOvr>
-    <a:masterClrMapping/>
-  </p:clrMapOvr>
-</p:notes>
-</file>
-
-<file path=ppt/notesSlides/notesSlide13.xml><?xml version="1.0" encoding="utf-8"?>
-<p:notes xmlns:a="http://schemas.openxmlformats.org/drawingml/2006/main" xmlns:p="http://schemas.openxmlformats.org/presentationml/2006/main" xmlns:r="http://schemas.openxmlformats.org/officeDocument/2006/relationships">
-  <p:cSld>
-    <p:spTree>
-      <p:nvGrpSpPr>
-        <p:cNvPr id="1" name=""/>
-        <p:cNvGrpSpPr/>
-        <p:nvPr/>
-      </p:nvGrpSpPr>
-      <p:grpSpPr>
-        <a:xfrm>
-          <a:off x="0" y="0"/>
-          <a:ext cx="0" cy="0"/>
-          <a:chOff x="0" y="0"/>
-          <a:chExt cx="0" cy="0"/>
-        </a:xfrm>
-      </p:grpSpPr>
-      <p:sp>
-        <p:nvSpPr>
-          <p:cNvPr id="2" name="Slide Image Placeholder 1"/>
-          <p:cNvSpPr>
-            <a:spLocks noGrp="1"/>
-          </p:cNvSpPr>
-          <p:nvPr>
-            <p:ph type="sldImg" idx="2"/>
-          </p:nvPr>
-        </p:nvSpPr>
-        <p:spPr/>
-      </p:sp>
-      <p:sp>
-        <p:nvSpPr>
-          <p:cNvPr id="3" name="Notes Placeholder 2"/>
-          <p:cNvSpPr>
-            <a:spLocks noGrp="1"/>
-          </p:cNvSpPr>
-          <p:nvPr>
-            <p:ph type="body" idx="3" sz="quarter"/>
-          </p:nvPr>
-        </p:nvSpPr>
-        <p:spPr/>
-        <p:txBody>
-          <a:bodyPr/>
-          <a:lstStyle/>
-          <a:p>
-            <a:r>
-              <a:t>Expected v2 performance.</a:t>
-            </a:r>
-          </a:p>
-        </p:txBody>
-      </p:sp>
-      <p:sp>
-        <p:nvSpPr>
-          <p:cNvPr id="4" name="Slide Number Placeholder 3"/>
-          <p:cNvSpPr>
-            <a:spLocks noGrp="1"/>
-          </p:cNvSpPr>
-          <p:nvPr>
-            <p:ph type="sldNum" idx="5" sz="quarter"/>
-          </p:nvPr>
-        </p:nvSpPr>
-        <p:spPr/>
-      </p:sp>
-    </p:spTree>
-  </p:cSld>
-  <p:clrMapOvr>
-    <a:masterClrMapping/>
-  </p:clrMapOvr>
-</p:notes>
-</file>
-
-<file path=ppt/notesSlides/notesSlide14.xml><?xml version="1.0" encoding="utf-8"?>
-<p:notes xmlns:a="http://schemas.openxmlformats.org/drawingml/2006/main" xmlns:p="http://schemas.openxmlformats.org/presentationml/2006/main" xmlns:r="http://schemas.openxmlformats.org/officeDocument/2006/relationships">
-  <p:cSld>
-    <p:spTree>
-      <p:nvGrpSpPr>
-        <p:cNvPr id="1" name=""/>
-        <p:cNvGrpSpPr/>
-        <p:nvPr/>
-      </p:nvGrpSpPr>
-      <p:grpSpPr>
-        <a:xfrm>
-          <a:off x="0" y="0"/>
-          <a:ext cx="0" cy="0"/>
-          <a:chOff x="0" y="0"/>
-          <a:chExt cx="0" cy="0"/>
-        </a:xfrm>
-      </p:grpSpPr>
-      <p:sp>
-        <p:nvSpPr>
-          <p:cNvPr id="2" name="Slide Image Placeholder 1"/>
-          <p:cNvSpPr>
-            <a:spLocks noGrp="1"/>
-          </p:cNvSpPr>
-          <p:nvPr>
-            <p:ph type="sldImg" idx="2"/>
-          </p:nvPr>
-        </p:nvSpPr>
-        <p:spPr/>
-      </p:sp>
-      <p:sp>
-        <p:nvSpPr>
-          <p:cNvPr id="3" name="Notes Placeholder 2"/>
-          <p:cNvSpPr>
-            <a:spLocks noGrp="1"/>
-          </p:cNvSpPr>
-          <p:nvPr>
-            <p:ph type="body" idx="3" sz="quarter"/>
-          </p:nvPr>
-        </p:nvSpPr>
-        <p:spPr/>
-        <p:txBody>
-          <a:bodyPr/>
-          <a:lstStyle/>
-          <a:p>
-            <a:r>
-              <a:t>Thank you.</a:t>
-            </a:r>
-          </a:p>
-        </p:txBody>
-      </p:sp>
-      <p:sp>
-        <p:nvSpPr>
-          <p:cNvPr id="4" name="Slide Number Placeholder 3"/>
-          <p:cNvSpPr>
-            <a:spLocks noGrp="1"/>
-          </p:cNvSpPr>
-          <p:nvPr>
-            <p:ph type="sldNum" idx="5" sz="quarter"/>
-          </p:nvPr>
-        </p:nvSpPr>
-        <p:spPr/>
-      </p:sp>
-    </p:spTree>
-  </p:cSld>
-  <p:clrMapOvr>
-    <a:masterClrMapping/>
-  </p:clrMapOvr>
-</p:notes>
-</file>
-
-<file path=ppt/notesSlides/notesSlide2.xml><?xml version="1.0" encoding="utf-8"?>
-<p:notes xmlns:a="http://schemas.openxmlformats.org/drawingml/2006/main" xmlns:p="http://schemas.openxmlformats.org/presentationml/2006/main" xmlns:r="http://schemas.openxmlformats.org/officeDocument/2006/relationships">
-  <p:cSld>
-    <p:spTree>
-      <p:nvGrpSpPr>
-        <p:cNvPr id="1" name=""/>
-        <p:cNvGrpSpPr/>
-        <p:nvPr/>
-      </p:nvGrpSpPr>
-      <p:grpSpPr>
-        <a:xfrm>
-          <a:off x="0" y="0"/>
-          <a:ext cx="0" cy="0"/>
-          <a:chOff x="0" y="0"/>
-          <a:chExt cx="0" cy="0"/>
-        </a:xfrm>
-      </p:grpSpPr>
-      <p:sp>
-        <p:nvSpPr>
-          <p:cNvPr id="2" name="Slide Image Placeholder 1"/>
-          <p:cNvSpPr>
-            <a:spLocks noGrp="1"/>
-          </p:cNvSpPr>
-          <p:nvPr>
-            <p:ph type="sldImg" idx="2"/>
-          </p:nvPr>
-        </p:nvSpPr>
-        <p:spPr/>
-      </p:sp>
-      <p:sp>
-        <p:nvSpPr>
-          <p:cNvPr id="3" name="Notes Placeholder 2"/>
-          <p:cNvSpPr>
-            <a:spLocks noGrp="1"/>
-          </p:cNvSpPr>
-          <p:nvPr>
-            <p:ph type="body" idx="3" sz="quarter"/>
-          </p:nvPr>
-        </p:nvSpPr>
-        <p:spPr/>
-        <p:txBody>
-          <a:bodyPr/>
-          <a:lstStyle/>
-          <a:p>
-            <a:r>
-              <a:t>Few-shot molecular learning is driven by label scarcity.</a:t>
-            </a:r>
-          </a:p>
-        </p:txBody>
-      </p:sp>
-      <p:sp>
-        <p:nvSpPr>
-          <p:cNvPr id="4" name="Slide Number Placeholder 3"/>
-          <p:cNvSpPr>
-            <a:spLocks noGrp="1"/>
-          </p:cNvSpPr>
-          <p:nvPr>
-            <p:ph type="sldNum" idx="5" sz="quarter"/>
-          </p:nvPr>
-        </p:nvSpPr>
-        <p:spPr/>
-      </p:sp>
-    </p:spTree>
-  </p:cSld>
-  <p:clrMapOvr>
-    <a:masterClrMapping/>
-  </p:clrMapOvr>
-</p:notes>
-</file>
-
-<file path=ppt/notesSlides/notesSlide3.xml><?xml version="1.0" encoding="utf-8"?>
-<p:notes xmlns:a="http://schemas.openxmlformats.org/drawingml/2006/main" xmlns:p="http://schemas.openxmlformats.org/presentationml/2006/main" xmlns:r="http://schemas.openxmlformats.org/officeDocument/2006/relationships">
-  <p:cSld>
-    <p:spTree>
-      <p:nvGrpSpPr>
-        <p:cNvPr id="1" name=""/>
-        <p:cNvGrpSpPr/>
-        <p:nvPr/>
-      </p:nvGrpSpPr>
-      <p:grpSpPr>
-        <a:xfrm>
-          <a:off x="0" y="0"/>
-          <a:ext cx="0" cy="0"/>
-          <a:chOff x="0" y="0"/>
-          <a:chExt cx="0" cy="0"/>
-        </a:xfrm>
-      </p:grpSpPr>
-      <p:sp>
-        <p:nvSpPr>
-          <p:cNvPr id="2" name="Slide Image Placeholder 1"/>
-          <p:cNvSpPr>
-            <a:spLocks noGrp="1"/>
-          </p:cNvSpPr>
-          <p:nvPr>
-            <p:ph type="sldImg" idx="2"/>
-          </p:nvPr>
-        </p:nvSpPr>
-        <p:spPr/>
-      </p:sp>
-      <p:sp>
-        <p:nvSpPr>
-          <p:cNvPr id="3" name="Notes Placeholder 2"/>
-          <p:cNvSpPr>
-            <a:spLocks noGrp="1"/>
-          </p:cNvSpPr>
-          <p:nvPr>
-            <p:ph type="body" idx="3" sz="quarter"/>
-          </p:nvPr>
-        </p:nvSpPr>
-        <p:spPr/>
-        <p:txBody>
-          <a:bodyPr/>
-          <a:lstStyle/>
-          <a:p>
-            <a:r>
-              <a:t>Episodic formulation + 673-task merged pool.</a:t>
-            </a:r>
-          </a:p>
-        </p:txBody>
-      </p:sp>
-      <p:sp>
-        <p:nvSpPr>
-          <p:cNvPr id="4" name="Slide Number Placeholder 3"/>
-          <p:cNvSpPr>
-            <a:spLocks noGrp="1"/>
-          </p:cNvSpPr>
-          <p:nvPr>
-            <p:ph type="sldNum" idx="5" sz="quarter"/>
-          </p:nvPr>
-        </p:nvSpPr>
-        <p:spPr/>
-      </p:sp>
-    </p:spTree>
-  </p:cSld>
-  <p:clrMapOvr>
-    <a:masterClrMapping/>
-  </p:clrMapOvr>
-</p:notes>
-</file>
-
-<file path=ppt/notesSlides/notesSlide4.xml><?xml version="1.0" encoding="utf-8"?>
-<p:notes xmlns:a="http://schemas.openxmlformats.org/drawingml/2006/main" xmlns:p="http://schemas.openxmlformats.org/presentationml/2006/main" xmlns:r="http://schemas.openxmlformats.org/officeDocument/2006/relationships">
-  <p:cSld>
-    <p:spTree>
-      <p:nvGrpSpPr>
-        <p:cNvPr id="1" name=""/>
-        <p:cNvGrpSpPr/>
-        <p:nvPr/>
-      </p:nvGrpSpPr>
-      <p:grpSpPr>
-        <a:xfrm>
-          <a:off x="0" y="0"/>
-          <a:ext cx="0" cy="0"/>
-          <a:chOff x="0" y="0"/>
-          <a:chExt cx="0" cy="0"/>
-        </a:xfrm>
-      </p:grpSpPr>
-      <p:sp>
-        <p:nvSpPr>
-          <p:cNvPr id="2" name="Slide Image Placeholder 1"/>
-          <p:cNvSpPr>
-            <a:spLocks noGrp="1"/>
-          </p:cNvSpPr>
-          <p:nvPr>
-            <p:ph type="sldImg" idx="2"/>
-          </p:nvPr>
-        </p:nvSpPr>
-        <p:spPr/>
-      </p:sp>
-      <p:sp>
-        <p:nvSpPr>
-          <p:cNvPr id="3" name="Notes Placeholder 2"/>
-          <p:cNvSpPr>
-            <a:spLocks noGrp="1"/>
-          </p:cNvSpPr>
-          <p:nvPr>
-            <p:ph type="body" idx="3" sz="quarter"/>
-          </p:nvPr>
-        </p:nvSpPr>
-        <p:spPr/>
-        <p:txBody>
-          <a:bodyPr/>
-          <a:lstStyle/>
-          <a:p>
-            <a:r>
-              <a:t>Two baselines: ProtoNet (metric) and FOMAML (adaptation).</a:t>
-            </a:r>
-          </a:p>
-        </p:txBody>
-      </p:sp>
-      <p:sp>
-        <p:nvSpPr>
-          <p:cNvPr id="4" name="Slide Number Placeholder 3"/>
-          <p:cNvSpPr>
-            <a:spLocks noGrp="1"/>
-          </p:cNvSpPr>
-          <p:nvPr>
-            <p:ph type="sldNum" idx="5" sz="quarter"/>
-          </p:nvPr>
-        </p:nvSpPr>
-        <p:spPr/>
-      </p:sp>
-    </p:spTree>
-  </p:cSld>
-  <p:clrMapOvr>
-    <a:masterClrMapping/>
-  </p:clrMapOvr>
-</p:notes>
-</file>
-
-<file path=ppt/notesSlides/notesSlide5.xml><?xml version="1.0" encoding="utf-8"?>
-<p:notes xmlns:a="http://schemas.openxmlformats.org/drawingml/2006/main" xmlns:p="http://schemas.openxmlformats.org/presentationml/2006/main" xmlns:r="http://schemas.openxmlformats.org/officeDocument/2006/relationships">
-  <p:cSld>
-    <p:spTree>
-      <p:nvGrpSpPr>
-        <p:cNvPr id="1" name=""/>
-        <p:cNvGrpSpPr/>
-        <p:nvPr/>
-      </p:nvGrpSpPr>
-      <p:grpSpPr>
-        <a:xfrm>
-          <a:off x="0" y="0"/>
-          <a:ext cx="0" cy="0"/>
-          <a:chOff x="0" y="0"/>
-          <a:chExt cx="0" cy="0"/>
-        </a:xfrm>
-      </p:grpSpPr>
-      <p:sp>
-        <p:nvSpPr>
-          <p:cNvPr id="2" name="Slide Image Placeholder 1"/>
-          <p:cNvSpPr>
-            <a:spLocks noGrp="1"/>
-          </p:cNvSpPr>
-          <p:nvPr>
-            <p:ph type="sldImg" idx="2"/>
-          </p:nvPr>
-        </p:nvSpPr>
-        <p:spPr/>
-      </p:sp>
-      <p:sp>
-        <p:nvSpPr>
-          <p:cNvPr id="3" name="Notes Placeholder 2"/>
-          <p:cNvSpPr>
-            <a:spLocks noGrp="1"/>
-          </p:cNvSpPr>
-          <p:nvPr>
-            <p:ph type="body" idx="3" sz="quarter"/>
-          </p:nvPr>
-        </p:nvSpPr>
-        <p:spPr/>
-        <p:txBody>
-          <a:bodyPr/>
-          <a:lstStyle/>
-          <a:p>
-            <a:r>
-              <a:t>Problem + pipeline overview.</a:t>
-            </a:r>
-          </a:p>
-        </p:txBody>
-      </p:sp>
-      <p:sp>
-        <p:nvSpPr>
-          <p:cNvPr id="4" name="Slide Number Placeholder 3"/>
-          <p:cNvSpPr>
-            <a:spLocks noGrp="1"/>
-          </p:cNvSpPr>
-          <p:nvPr>
-            <p:ph type="sldNum" idx="5" sz="quarter"/>
-          </p:nvPr>
-        </p:nvSpPr>
-        <p:spPr/>
-      </p:sp>
-    </p:spTree>
-  </p:cSld>
-  <p:clrMapOvr>
-    <a:masterClrMapping/>
-  </p:clrMapOvr>
-</p:notes>
-</file>
-
-<file path=ppt/notesSlides/notesSlide6.xml><?xml version="1.0" encoding="utf-8"?>
-<p:notes xmlns:a="http://schemas.openxmlformats.org/drawingml/2006/main" xmlns:p="http://schemas.openxmlformats.org/presentationml/2006/main" xmlns:r="http://schemas.openxmlformats.org/officeDocument/2006/relationships">
-  <p:cSld>
-    <p:spTree>
-      <p:nvGrpSpPr>
-        <p:cNvPr id="1" name=""/>
-        <p:cNvGrpSpPr/>
-        <p:nvPr/>
-      </p:nvGrpSpPr>
-      <p:grpSpPr>
-        <a:xfrm>
-          <a:off x="0" y="0"/>
-          <a:ext cx="0" cy="0"/>
-          <a:chOff x="0" y="0"/>
-          <a:chExt cx="0" cy="0"/>
-        </a:xfrm>
-      </p:grpSpPr>
-      <p:sp>
-        <p:nvSpPr>
-          <p:cNvPr id="2" name="Slide Image Placeholder 1"/>
-          <p:cNvSpPr>
-            <a:spLocks noGrp="1"/>
-          </p:cNvSpPr>
-          <p:nvPr>
-            <p:ph type="sldImg" idx="2"/>
-          </p:nvPr>
-        </p:nvSpPr>
-        <p:spPr/>
-      </p:sp>
-      <p:sp>
-        <p:nvSpPr>
-          <p:cNvPr id="3" name="Notes Placeholder 2"/>
-          <p:cNvSpPr>
-            <a:spLocks noGrp="1"/>
-          </p:cNvSpPr>
-          <p:nvPr>
-            <p:ph type="body" idx="3" sz="quarter"/>
-          </p:nvPr>
-        </p:nvSpPr>
-        <p:spPr/>
-        <p:txBody>
-          <a:bodyPr/>
-          <a:lstStyle/>
-          <a:p>
-            <a:r>
-              <a:t>Encoder, affinity, meta-GNN — three building blocks.</a:t>
-            </a:r>
-          </a:p>
-        </p:txBody>
-      </p:sp>
-      <p:sp>
-        <p:nvSpPr>
-          <p:cNvPr id="4" name="Slide Number Placeholder 3"/>
-          <p:cNvSpPr>
-            <a:spLocks noGrp="1"/>
-          </p:cNvSpPr>
-          <p:nvPr>
-            <p:ph type="sldNum" idx="5" sz="quarter"/>
-          </p:nvPr>
-        </p:nvSpPr>
-        <p:spPr/>
-      </p:sp>
-    </p:spTree>
-  </p:cSld>
-  <p:clrMapOvr>
-    <a:masterClrMapping/>
-  </p:clrMapOvr>
-</p:notes>
-</file>
-
-<file path=ppt/notesSlides/notesSlide7.xml><?xml version="1.0" encoding="utf-8"?>
-<p:notes xmlns:a="http://schemas.openxmlformats.org/drawingml/2006/main" xmlns:p="http://schemas.openxmlformats.org/presentationml/2006/main" xmlns:r="http://schemas.openxmlformats.org/officeDocument/2006/relationships">
-  <p:cSld>
-    <p:spTree>
-      <p:nvGrpSpPr>
-        <p:cNvPr id="1" name=""/>
-        <p:cNvGrpSpPr/>
-        <p:nvPr/>
-      </p:nvGrpSpPr>
-      <p:grpSpPr>
-        <a:xfrm>
-          <a:off x="0" y="0"/>
-          <a:ext cx="0" cy="0"/>
-          <a:chOff x="0" y="0"/>
-          <a:chExt cx="0" cy="0"/>
-        </a:xfrm>
-      </p:grpSpPr>
-      <p:sp>
-        <p:nvSpPr>
-          <p:cNvPr id="2" name="Slide Image Placeholder 1"/>
-          <p:cNvSpPr>
-            <a:spLocks noGrp="1"/>
-          </p:cNvSpPr>
-          <p:nvPr>
-            <p:ph type="sldImg" idx="2"/>
-          </p:nvPr>
-        </p:nvSpPr>
-        <p:spPr/>
-      </p:sp>
-      <p:sp>
-        <p:nvSpPr>
-          <p:cNvPr id="3" name="Notes Placeholder 2"/>
-          <p:cNvSpPr>
-            <a:spLocks noGrp="1"/>
-          </p:cNvSpPr>
-          <p:nvPr>
-            <p:ph type="body" idx="3" sz="quarter"/>
-          </p:nvPr>
-        </p:nvSpPr>
-        <p:spPr/>
-        <p:txBody>
-          <a:bodyPr/>
-          <a:lstStyle/>
-          <a:p>
-            <a:r>
-              <a:t>Prototype head + iterative refinement.</a:t>
-            </a:r>
-          </a:p>
-        </p:txBody>
-      </p:sp>
-      <p:sp>
-        <p:nvSpPr>
-          <p:cNvPr id="4" name="Slide Number Placeholder 3"/>
-          <p:cNvSpPr>
-            <a:spLocks noGrp="1"/>
-          </p:cNvSpPr>
-          <p:nvPr>
-            <p:ph type="sldNum" idx="5" sz="quarter"/>
-          </p:nvPr>
-        </p:nvSpPr>
-        <p:spPr/>
-      </p:sp>
-    </p:spTree>
-  </p:cSld>
-  <p:clrMapOvr>
-    <a:masterClrMapping/>
-  </p:clrMapOvr>
-</p:notes>
-</file>
-
-<file path=ppt/notesSlides/notesSlide8.xml><?xml version="1.0" encoding="utf-8"?>
-<p:notes xmlns:a="http://schemas.openxmlformats.org/drawingml/2006/main" xmlns:p="http://schemas.openxmlformats.org/presentationml/2006/main" xmlns:r="http://schemas.openxmlformats.org/officeDocument/2006/relationships">
-  <p:cSld>
-    <p:spTree>
-      <p:nvGrpSpPr>
-        <p:cNvPr id="1" name=""/>
-        <p:cNvGrpSpPr/>
-        <p:nvPr/>
-      </p:nvGrpSpPr>
-      <p:grpSpPr>
-        <a:xfrm>
-          <a:off x="0" y="0"/>
-          <a:ext cx="0" cy="0"/>
-          <a:chOff x="0" y="0"/>
-          <a:chExt cx="0" cy="0"/>
-        </a:xfrm>
-      </p:grpSpPr>
-      <p:sp>
-        <p:nvSpPr>
-          <p:cNvPr id="2" name="Slide Image Placeholder 1"/>
-          <p:cNvSpPr>
-            <a:spLocks noGrp="1"/>
-          </p:cNvSpPr>
-          <p:nvPr>
-            <p:ph type="sldImg" idx="2"/>
-          </p:nvPr>
-        </p:nvSpPr>
-        <p:spPr/>
-      </p:sp>
-      <p:sp>
-        <p:nvSpPr>
-          <p:cNvPr id="3" name="Notes Placeholder 2"/>
-          <p:cNvSpPr>
-            <a:spLocks noGrp="1"/>
-          </p:cNvSpPr>
-          <p:nvPr>
-            <p:ph type="body" idx="3" sz="quarter"/>
-          </p:nvPr>
-        </p:nvSpPr>
-        <p:spPr/>
-        <p:txBody>
-          <a:bodyPr/>
-          <a:lstStyle/>
-          <a:p>
-            <a:r>
-              <a:t>Diagnosis + five modifications + target.</a:t>
-            </a:r>
-          </a:p>
-        </p:txBody>
-      </p:sp>
-      <p:sp>
-        <p:nvSpPr>
-          <p:cNvPr id="4" name="Slide Number Placeholder 3"/>
-          <p:cNvSpPr>
-            <a:spLocks noGrp="1"/>
-          </p:cNvSpPr>
-          <p:nvPr>
-            <p:ph type="sldNum" idx="5" sz="quarter"/>
-          </p:nvPr>
-        </p:nvSpPr>
-        <p:spPr/>
-      </p:sp>
-    </p:spTree>
-  </p:cSld>
-  <p:clrMapOvr>
-    <a:masterClrMapping/>
-  </p:clrMapOvr>
-</p:notes>
-</file>
-
-<file path=ppt/notesSlides/notesSlide9.xml><?xml version="1.0" encoding="utf-8"?>
-<p:notes xmlns:a="http://schemas.openxmlformats.org/drawingml/2006/main" xmlns:p="http://schemas.openxmlformats.org/presentationml/2006/main" xmlns:r="http://schemas.openxmlformats.org/officeDocument/2006/relationships">
-  <p:cSld>
-    <p:spTree>
-      <p:nvGrpSpPr>
-        <p:cNvPr id="1" name=""/>
-        <p:cNvGrpSpPr/>
-        <p:nvPr/>
-      </p:nvGrpSpPr>
-      <p:grpSpPr>
-        <a:xfrm>
-          <a:off x="0" y="0"/>
-          <a:ext cx="0" cy="0"/>
-          <a:chOff x="0" y="0"/>
-          <a:chExt cx="0" cy="0"/>
-        </a:xfrm>
-      </p:grpSpPr>
-      <p:sp>
-        <p:nvSpPr>
-          <p:cNvPr id="2" name="Slide Image Placeholder 1"/>
-          <p:cNvSpPr>
-            <a:spLocks noGrp="1"/>
-          </p:cNvSpPr>
-          <p:nvPr>
-            <p:ph type="sldImg" idx="2"/>
-          </p:nvPr>
-        </p:nvSpPr>
-        <p:spPr/>
-      </p:sp>
-      <p:sp>
-        <p:nvSpPr>
-          <p:cNvPr id="3" name="Notes Placeholder 2"/>
-          <p:cNvSpPr>
-            <a:spLocks noGrp="1"/>
-          </p:cNvSpPr>
-          <p:nvPr>
-            <p:ph type="body" idx="3" sz="quarter"/>
-          </p:nvPr>
-        </p:nvSpPr>
-        <p:spPr/>
-        <p:txBody>
-          <a:bodyPr/>
-          <a:lstStyle/>
-          <a:p>
-            <a:r>
-              <a:t>Main results.</a:t>
+              <a:t>15 min + 2–3 min Q&amp;A.</a:t>
             </a:r>
           </a:p>
         </p:txBody>
@@ -4846,7 +3934,7 @@
                 </a:solidFill>
                 <a:latin typeface="Calibri"/>
               </a:rPr>
-              <a:t>RESULTS</a:t>
+              <a:t>DESIGN v2</a:t>
             </a:r>
           </a:p>
         </p:txBody>
@@ -4881,7 +3969,7 @@
                 </a:solidFill>
                 <a:latin typeface="Calibri"/>
               </a:rPr>
-              <a:t>Ablations — affinity &amp; kNN sparsification</a:t>
+              <a:t>GoS v2 — Diagnosis, Five Modifications, Target</a:t>
             </a:r>
           </a:p>
         </p:txBody>
@@ -4916,7 +4004,7 @@
                 </a:solidFill>
                 <a:latin typeface="Calibri"/>
               </a:rPr>
-              <a:t>10 / 14</a:t>
+              <a:t>10 / 12</a:t>
             </a:r>
           </a:p>
         </p:txBody>
@@ -4956,40 +4044,183 @@
           </a:p>
         </p:txBody>
       </p:sp>
-      <p:pic>
-        <p:nvPicPr>
-          <p:cNvPr id="7" name="Picture 6" descr="fig3_ablations.png"/>
-          <p:cNvPicPr>
-            <a:picLocks noChangeAspect="1"/>
-          </p:cNvPicPr>
-          <p:nvPr/>
-        </p:nvPicPr>
-        <p:blipFill>
-          <a:blip r:embed="rId2"/>
-          <a:stretch>
-            <a:fillRect/>
-          </a:stretch>
-        </p:blipFill>
+      <p:sp>
+        <p:nvSpPr>
+          <p:cNvPr id="7" name="Rounded Rectangle 6"/>
+          <p:cNvSpPr/>
+          <p:nvPr/>
+        </p:nvSpPr>
         <p:spPr>
           <a:xfrm>
             <a:off x="502920" y="1691640"/>
-            <a:ext cx="8229600" cy="3756249"/>
+            <a:ext cx="11185855" cy="1005840"/>
+          </a:xfrm>
+          <a:prstGeom prst="roundRect">
+            <a:avLst/>
+          </a:prstGeom>
+          <a:solidFill>
+            <a:srgbClr val="F96167"/>
+          </a:solidFill>
+          <a:ln>
+            <a:noFill/>
+          </a:ln>
+          <a:effectLst/>
+        </p:spPr>
+        <p:style>
+          <a:lnRef idx="1">
+            <a:schemeClr val="accent1"/>
+          </a:lnRef>
+          <a:fillRef idx="3">
+            <a:schemeClr val="accent1"/>
+          </a:fillRef>
+          <a:effectRef idx="2">
+            <a:schemeClr val="accent1"/>
+          </a:effectRef>
+          <a:fontRef idx="minor">
+            <a:schemeClr val="lt1"/>
+          </a:fontRef>
+        </p:style>
+        <p:txBody>
+          <a:bodyPr rtlCol="0" anchor="ctr" lIns="45720" rIns="45720" tIns="27432" bIns="27432" wrap="square"/>
+          <a:lstStyle/>
+          <a:p>
+            <a:pPr algn="ctr"/>
+          </a:p>
+        </p:txBody>
+      </p:sp>
+      <p:sp>
+        <p:nvSpPr>
+          <p:cNvPr id="8" name="TextBox 7"/>
+          <p:cNvSpPr txBox="1"/>
+          <p:nvPr/>
+        </p:nvSpPr>
+        <p:spPr>
+          <a:xfrm>
+            <a:off x="731520" y="1783080"/>
+            <a:ext cx="11185855" cy="365760"/>
           </a:xfrm>
           <a:prstGeom prst="rect">
             <a:avLst/>
           </a:prstGeom>
-        </p:spPr>
-      </p:pic>
-      <p:sp>
-        <p:nvSpPr>
-          <p:cNvPr id="8" name="Rounded Rectangle 7"/>
+          <a:noFill/>
+        </p:spPr>
+        <p:txBody>
+          <a:bodyPr wrap="square" lIns="45720" rIns="45720" tIns="27432" bIns="27432" anchor="t">
+            <a:spAutoFit/>
+          </a:bodyPr>
+          <a:lstStyle/>
+          <a:p>
+            <a:pPr algn="l"/>
+            <a:r>
+              <a:rPr sz="1200" b="1" i="0">
+                <a:solidFill>
+                  <a:srgbClr val="FFFFFF"/>
+                </a:solidFill>
+                <a:latin typeface="Calibri"/>
+              </a:rPr>
+              <a:t>DIAGNOSIS</a:t>
+            </a:r>
+          </a:p>
+        </p:txBody>
+      </p:sp>
+      <p:sp>
+        <p:nvSpPr>
+          <p:cNvPr id="9" name="TextBox 8"/>
+          <p:cNvSpPr txBox="1"/>
+          <p:nvPr/>
+        </p:nvSpPr>
+        <p:spPr>
+          <a:xfrm>
+            <a:off x="731520" y="2194560"/>
+            <a:ext cx="10728655" cy="548640"/>
+          </a:xfrm>
+          <a:prstGeom prst="rect">
+            <a:avLst/>
+          </a:prstGeom>
+          <a:noFill/>
+        </p:spPr>
+        <p:txBody>
+          <a:bodyPr wrap="square" lIns="45720" rIns="45720" tIns="27432" bIns="27432" anchor="t">
+            <a:spAutoFit/>
+          </a:bodyPr>
+          <a:lstStyle/>
+          <a:p>
+            <a:pPr algn="l"/>
+            <a:r>
+              <a:rPr sz="1200" b="0" i="1">
+                <a:solidFill>
+                  <a:srgbClr val="FFFFFF"/>
+                </a:solidFill>
+                <a:latin typeface="Calibri"/>
+              </a:rPr>
+              <a:t>k-NN k=3 &gt; 5 &gt; 10 &gt; dense → over-smoothing.    ProtoNet 0.716 &gt; GoS v1 0.572 → meta-GNN hurts a good embedding.    Affinity variants differ by &lt; 2 pp → expressivity is not the bottleneck.</a:t>
+            </a:r>
+          </a:p>
+        </p:txBody>
+      </p:sp>
+      <p:sp>
+        <p:nvSpPr>
+          <p:cNvPr id="10" name="Rounded Rectangle 9"/>
           <p:cNvSpPr/>
           <p:nvPr/>
         </p:nvSpPr>
         <p:spPr>
           <a:xfrm>
-            <a:off x="8961120" y="1737360"/>
-            <a:ext cx="2926080" cy="4114800"/>
+            <a:off x="502920" y="2926080"/>
+            <a:ext cx="2149388" cy="594360"/>
+          </a:xfrm>
+          <a:prstGeom prst="roundRect">
+            <a:avLst/>
+          </a:prstGeom>
+          <a:solidFill>
+            <a:srgbClr val="1E2761"/>
+          </a:solidFill>
+          <a:ln>
+            <a:noFill/>
+          </a:ln>
+          <a:effectLst/>
+        </p:spPr>
+        <p:style>
+          <a:lnRef idx="1">
+            <a:schemeClr val="accent1"/>
+          </a:lnRef>
+          <a:fillRef idx="3">
+            <a:schemeClr val="accent1"/>
+          </a:fillRef>
+          <a:effectRef idx="2">
+            <a:schemeClr val="accent1"/>
+          </a:effectRef>
+          <a:fontRef idx="minor">
+            <a:schemeClr val="lt1"/>
+          </a:fontRef>
+        </p:style>
+        <p:txBody>
+          <a:bodyPr rtlCol="0" anchor="ctr" lIns="45720" rIns="45720" tIns="27432" bIns="27432" wrap="square"/>
+          <a:lstStyle/>
+          <a:p>
+            <a:pPr algn="ctr"/>
+            <a:r>
+              <a:rPr sz="2000" b="1" i="0">
+                <a:solidFill>
+                  <a:srgbClr val="FFFFFF"/>
+                </a:solidFill>
+                <a:latin typeface="Calibri"/>
+              </a:rPr>
+              <a:t>M1</a:t>
+            </a:r>
+          </a:p>
+        </p:txBody>
+      </p:sp>
+      <p:sp>
+        <p:nvSpPr>
+          <p:cNvPr id="11" name="Rounded Rectangle 10"/>
+          <p:cNvSpPr/>
+          <p:nvPr/>
+        </p:nvSpPr>
+        <p:spPr>
+          <a:xfrm>
+            <a:off x="502920" y="3584448"/>
+            <a:ext cx="2149388" cy="2011680"/>
           </a:xfrm>
           <a:prstGeom prst="roundRect">
             <a:avLst/>
@@ -5017,207 +4248,580 @@
           </a:fontRef>
         </p:style>
         <p:txBody>
+          <a:bodyPr rtlCol="0" anchor="ctr" tIns="27432" bIns="27432" wrap="square"/>
+          <a:lstStyle/>
+          <a:p>
+            <a:pPr algn="ctr"/>
+            <a:r>
+              <a:rPr sz="1200" b="1" i="0">
+                <a:solidFill>
+                  <a:srgbClr val="1E2761"/>
+                </a:solidFill>
+                <a:latin typeface="Calibri"/>
+              </a:rPr>
+              <a:t>Residual
+prototype</a:t>
+            </a:r>
+          </a:p>
+          <a:p>
+            <a:pPr algn="ctr">
+              <a:spcBef>
+                <a:spcPts val="600"/>
+              </a:spcBef>
+            </a:pPr>
+            <a:r>
+              <a:rPr sz="1000" b="0" i="1">
+                <a:solidFill>
+                  <a:srgbClr val="36454F"/>
+                </a:solidFill>
+                <a:latin typeface="Calibri"/>
+              </a:rPr>
+              <a:t>α c_enc + (1−α) c_gnn</a:t>
+            </a:r>
+          </a:p>
+        </p:txBody>
+      </p:sp>
+      <p:sp>
+        <p:nvSpPr>
+          <p:cNvPr id="12" name="Rounded Rectangle 11"/>
+          <p:cNvSpPr/>
+          <p:nvPr/>
+        </p:nvSpPr>
+        <p:spPr>
+          <a:xfrm>
+            <a:off x="2762036" y="2926080"/>
+            <a:ext cx="2149388" cy="594360"/>
+          </a:xfrm>
+          <a:prstGeom prst="roundRect">
+            <a:avLst/>
+          </a:prstGeom>
+          <a:solidFill>
+            <a:srgbClr val="1E2761"/>
+          </a:solidFill>
+          <a:ln>
+            <a:noFill/>
+          </a:ln>
+          <a:effectLst/>
+        </p:spPr>
+        <p:style>
+          <a:lnRef idx="1">
+            <a:schemeClr val="accent1"/>
+          </a:lnRef>
+          <a:fillRef idx="3">
+            <a:schemeClr val="accent1"/>
+          </a:fillRef>
+          <a:effectRef idx="2">
+            <a:schemeClr val="accent1"/>
+          </a:effectRef>
+          <a:fontRef idx="minor">
+            <a:schemeClr val="lt1"/>
+          </a:fontRef>
+        </p:style>
+        <p:txBody>
           <a:bodyPr rtlCol="0" anchor="ctr" lIns="45720" rIns="45720" tIns="27432" bIns="27432" wrap="square"/>
           <a:lstStyle/>
           <a:p>
             <a:pPr algn="ctr"/>
-          </a:p>
-        </p:txBody>
-      </p:sp>
-      <p:sp>
-        <p:nvSpPr>
-          <p:cNvPr id="9" name="TextBox 8"/>
-          <p:cNvSpPr txBox="1"/>
-          <p:nvPr/>
-        </p:nvSpPr>
-        <p:spPr>
-          <a:xfrm>
-            <a:off x="9098280" y="1874519"/>
-            <a:ext cx="2743200" cy="365760"/>
-          </a:xfrm>
-          <a:prstGeom prst="rect">
-            <a:avLst/>
-          </a:prstGeom>
-          <a:noFill/>
-        </p:spPr>
-        <p:txBody>
-          <a:bodyPr wrap="square" lIns="45720" rIns="45720" tIns="27432" bIns="27432" anchor="t">
-            <a:spAutoFit/>
-          </a:bodyPr>
-          <a:lstStyle/>
-          <a:p>
-            <a:pPr algn="l"/>
+            <a:r>
+              <a:rPr sz="2000" b="1" i="0">
+                <a:solidFill>
+                  <a:srgbClr val="FFFFFF"/>
+                </a:solidFill>
+                <a:latin typeface="Calibri"/>
+              </a:rPr>
+              <a:t>M2</a:t>
+            </a:r>
+          </a:p>
+        </p:txBody>
+      </p:sp>
+      <p:sp>
+        <p:nvSpPr>
+          <p:cNvPr id="13" name="Rounded Rectangle 12"/>
+          <p:cNvSpPr/>
+          <p:nvPr/>
+        </p:nvSpPr>
+        <p:spPr>
+          <a:xfrm>
+            <a:off x="2762036" y="3584448"/>
+            <a:ext cx="2149388" cy="2011680"/>
+          </a:xfrm>
+          <a:prstGeom prst="roundRect">
+            <a:avLst/>
+          </a:prstGeom>
+          <a:solidFill>
+            <a:srgbClr val="F5F7FA"/>
+          </a:solidFill>
+          <a:ln>
+            <a:noFill/>
+          </a:ln>
+          <a:effectLst/>
+        </p:spPr>
+        <p:style>
+          <a:lnRef idx="1">
+            <a:schemeClr val="accent1"/>
+          </a:lnRef>
+          <a:fillRef idx="3">
+            <a:schemeClr val="accent1"/>
+          </a:fillRef>
+          <a:effectRef idx="2">
+            <a:schemeClr val="accent1"/>
+          </a:effectRef>
+          <a:fontRef idx="minor">
+            <a:schemeClr val="lt1"/>
+          </a:fontRef>
+        </p:style>
+        <p:txBody>
+          <a:bodyPr rtlCol="0" anchor="ctr" tIns="27432" bIns="27432" wrap="square"/>
+          <a:lstStyle/>
+          <a:p>
+            <a:pPr algn="ctr"/>
             <a:r>
               <a:rPr sz="1200" b="1" i="0">
                 <a:solidFill>
-                  <a:srgbClr val="F96167"/>
-                </a:solidFill>
-                <a:latin typeface="Calibri"/>
-              </a:rPr>
-              <a:t>FINDINGS</a:t>
-            </a:r>
-          </a:p>
-        </p:txBody>
-      </p:sp>
-      <p:sp>
-        <p:nvSpPr>
-          <p:cNvPr id="10" name="TextBox 9"/>
-          <p:cNvSpPr txBox="1"/>
-          <p:nvPr/>
-        </p:nvSpPr>
-        <p:spPr>
-          <a:xfrm>
-            <a:off x="9098280" y="2331720"/>
-            <a:ext cx="2743200" cy="3474720"/>
-          </a:xfrm>
-          <a:prstGeom prst="rect">
-            <a:avLst/>
-          </a:prstGeom>
-          <a:noFill/>
-        </p:spPr>
-        <p:txBody>
-          <a:bodyPr wrap="square" lIns="45720" rIns="45720">
-            <a:spAutoFit/>
-          </a:bodyPr>
-          <a:lstStyle/>
-          <a:p>
-            <a:pPr algn="l">
-              <a:lnSpc>
-                <a:spcPct val="120000"/>
-              </a:lnSpc>
-              <a:spcAft>
-                <a:spcPts val="300"/>
-              </a:spcAft>
+                  <a:srgbClr val="1E2761"/>
+                </a:solidFill>
+                <a:latin typeface="Calibri"/>
+              </a:rPr>
+              <a:t>Shallower
+meta-GNN</a:t>
+            </a:r>
+          </a:p>
+          <a:p>
+            <a:pPr algn="ctr">
+              <a:spcBef>
+                <a:spcPts val="600"/>
+              </a:spcBef>
             </a:pPr>
             <a:r>
-              <a:rPr sz="1150" b="1" i="0">
+              <a:rPr sz="1000" b="0" i="1">
+                <a:solidFill>
+                  <a:srgbClr val="36454F"/>
+                </a:solidFill>
+                <a:latin typeface="Calibri"/>
+              </a:rPr>
+              <a:t>1-layer GAT</a:t>
+            </a:r>
+          </a:p>
+        </p:txBody>
+      </p:sp>
+      <p:sp>
+        <p:nvSpPr>
+          <p:cNvPr id="14" name="Rounded Rectangle 13"/>
+          <p:cNvSpPr/>
+          <p:nvPr/>
+        </p:nvSpPr>
+        <p:spPr>
+          <a:xfrm>
+            <a:off x="5021153" y="2926080"/>
+            <a:ext cx="2149388" cy="594360"/>
+          </a:xfrm>
+          <a:prstGeom prst="roundRect">
+            <a:avLst/>
+          </a:prstGeom>
+          <a:solidFill>
+            <a:srgbClr val="1E2761"/>
+          </a:solidFill>
+          <a:ln>
+            <a:noFill/>
+          </a:ln>
+          <a:effectLst/>
+        </p:spPr>
+        <p:style>
+          <a:lnRef idx="1">
+            <a:schemeClr val="accent1"/>
+          </a:lnRef>
+          <a:fillRef idx="3">
+            <a:schemeClr val="accent1"/>
+          </a:fillRef>
+          <a:effectRef idx="2">
+            <a:schemeClr val="accent1"/>
+          </a:effectRef>
+          <a:fontRef idx="minor">
+            <a:schemeClr val="lt1"/>
+          </a:fontRef>
+        </p:style>
+        <p:txBody>
+          <a:bodyPr rtlCol="0" anchor="ctr" lIns="45720" rIns="45720" tIns="27432" bIns="27432" wrap="square"/>
+          <a:lstStyle/>
+          <a:p>
+            <a:pPr algn="ctr"/>
+            <a:r>
+              <a:rPr sz="2000" b="1" i="0">
+                <a:solidFill>
+                  <a:srgbClr val="FFFFFF"/>
+                </a:solidFill>
+                <a:latin typeface="Calibri"/>
+              </a:rPr>
+              <a:t>M3</a:t>
+            </a:r>
+          </a:p>
+        </p:txBody>
+      </p:sp>
+      <p:sp>
+        <p:nvSpPr>
+          <p:cNvPr id="15" name="Rounded Rectangle 14"/>
+          <p:cNvSpPr/>
+          <p:nvPr/>
+        </p:nvSpPr>
+        <p:spPr>
+          <a:xfrm>
+            <a:off x="5021153" y="3584448"/>
+            <a:ext cx="2149388" cy="2011680"/>
+          </a:xfrm>
+          <a:prstGeom prst="roundRect">
+            <a:avLst/>
+          </a:prstGeom>
+          <a:solidFill>
+            <a:srgbClr val="F5F7FA"/>
+          </a:solidFill>
+          <a:ln>
+            <a:noFill/>
+          </a:ln>
+          <a:effectLst/>
+        </p:spPr>
+        <p:style>
+          <a:lnRef idx="1">
+            <a:schemeClr val="accent1"/>
+          </a:lnRef>
+          <a:fillRef idx="3">
+            <a:schemeClr val="accent1"/>
+          </a:fillRef>
+          <a:effectRef idx="2">
+            <a:schemeClr val="accent1"/>
+          </a:effectRef>
+          <a:fontRef idx="minor">
+            <a:schemeClr val="lt1"/>
+          </a:fontRef>
+        </p:style>
+        <p:txBody>
+          <a:bodyPr rtlCol="0" anchor="ctr" tIns="27432" bIns="27432" wrap="square"/>
+          <a:lstStyle/>
+          <a:p>
+            <a:pPr algn="ctr"/>
+            <a:r>
+              <a:rPr sz="1200" b="1" i="0">
                 <a:solidFill>
                   <a:srgbClr val="1E2761"/>
                 </a:solidFill>
                 <a:latin typeface="Calibri"/>
               </a:rPr>
-              <a:t>●  </a:t>
-            </a:r>
-            <a:r>
-              <a:rPr sz="1150" b="0" i="0">
+              <a:t>Bipartite
+messaging</a:t>
+            </a:r>
+          </a:p>
+          <a:p>
+            <a:pPr algn="ctr">
+              <a:spcBef>
+                <a:spcPts val="600"/>
+              </a:spcBef>
+            </a:pPr>
+            <a:r>
+              <a:rPr sz="1000" b="0" i="1">
                 <a:solidFill>
                   <a:srgbClr val="36454F"/>
                 </a:solidFill>
                 <a:latin typeface="Calibri"/>
               </a:rPr>
-              <a:t>Affinity barely matters</a:t>
-            </a:r>
-          </a:p>
-          <a:p>
-            <a:pPr algn="l">
-              <a:lnSpc>
-                <a:spcPct val="120000"/>
-              </a:lnSpc>
-              <a:spcAft>
-                <a:spcPts val="300"/>
-              </a:spcAft>
+              <a:t>mask query → * edges</a:t>
+            </a:r>
+          </a:p>
+        </p:txBody>
+      </p:sp>
+      <p:sp>
+        <p:nvSpPr>
+          <p:cNvPr id="16" name="Rounded Rectangle 15"/>
+          <p:cNvSpPr/>
+          <p:nvPr/>
+        </p:nvSpPr>
+        <p:spPr>
+          <a:xfrm>
+            <a:off x="7280269" y="2926080"/>
+            <a:ext cx="2149388" cy="594360"/>
+          </a:xfrm>
+          <a:prstGeom prst="roundRect">
+            <a:avLst/>
+          </a:prstGeom>
+          <a:solidFill>
+            <a:srgbClr val="F96167"/>
+          </a:solidFill>
+          <a:ln>
+            <a:noFill/>
+          </a:ln>
+          <a:effectLst/>
+        </p:spPr>
+        <p:style>
+          <a:lnRef idx="1">
+            <a:schemeClr val="accent1"/>
+          </a:lnRef>
+          <a:fillRef idx="3">
+            <a:schemeClr val="accent1"/>
+          </a:fillRef>
+          <a:effectRef idx="2">
+            <a:schemeClr val="accent1"/>
+          </a:effectRef>
+          <a:fontRef idx="minor">
+            <a:schemeClr val="lt1"/>
+          </a:fontRef>
+        </p:style>
+        <p:txBody>
+          <a:bodyPr rtlCol="0" anchor="ctr" lIns="45720" rIns="45720" tIns="27432" bIns="27432" wrap="square"/>
+          <a:lstStyle/>
+          <a:p>
+            <a:pPr algn="ctr"/>
+            <a:r>
+              <a:rPr sz="2000" b="1" i="0">
+                <a:solidFill>
+                  <a:srgbClr val="FFFFFF"/>
+                </a:solidFill>
+                <a:latin typeface="Calibri"/>
+              </a:rPr>
+              <a:t>M4</a:t>
+            </a:r>
+          </a:p>
+        </p:txBody>
+      </p:sp>
+      <p:sp>
+        <p:nvSpPr>
+          <p:cNvPr id="17" name="Rounded Rectangle 16"/>
+          <p:cNvSpPr/>
+          <p:nvPr/>
+        </p:nvSpPr>
+        <p:spPr>
+          <a:xfrm>
+            <a:off x="7280269" y="3584448"/>
+            <a:ext cx="2149388" cy="2011680"/>
+          </a:xfrm>
+          <a:prstGeom prst="roundRect">
+            <a:avLst/>
+          </a:prstGeom>
+          <a:solidFill>
+            <a:srgbClr val="F5F7FA"/>
+          </a:solidFill>
+          <a:ln>
+            <a:noFill/>
+          </a:ln>
+          <a:effectLst/>
+        </p:spPr>
+        <p:style>
+          <a:lnRef idx="1">
+            <a:schemeClr val="accent1"/>
+          </a:lnRef>
+          <a:fillRef idx="3">
+            <a:schemeClr val="accent1"/>
+          </a:fillRef>
+          <a:effectRef idx="2">
+            <a:schemeClr val="accent1"/>
+          </a:effectRef>
+          <a:fontRef idx="minor">
+            <a:schemeClr val="lt1"/>
+          </a:fontRef>
+        </p:style>
+        <p:txBody>
+          <a:bodyPr rtlCol="0" anchor="ctr" tIns="27432" bIns="27432" wrap="square"/>
+          <a:lstStyle/>
+          <a:p>
+            <a:pPr algn="ctr"/>
+            <a:r>
+              <a:rPr sz="1200" b="1" i="0">
+                <a:solidFill>
+                  <a:srgbClr val="1E2761"/>
+                </a:solidFill>
+                <a:latin typeface="Calibri"/>
+              </a:rPr>
+              <a:t>Contrastive
+aux loss</a:t>
+            </a:r>
+          </a:p>
+          <a:p>
+            <a:pPr algn="ctr">
+              <a:spcBef>
+                <a:spcPts val="600"/>
+              </a:spcBef>
             </a:pPr>
             <a:r>
-              <a:rPr sz="950" b="0" i="0">
-                <a:solidFill>
-                  <a:srgbClr val="888A90"/>
-                </a:solidFill>
-                <a:latin typeface="Calibri"/>
-              </a:rPr>
-              <a:t>–  </a:t>
-            </a:r>
-            <a:r>
-              <a:rPr sz="950" b="0" i="0">
+              <a:rPr sz="1000" b="0" i="1">
                 <a:solidFill>
                   <a:srgbClr val="36454F"/>
                 </a:solidFill>
                 <a:latin typeface="Calibri"/>
               </a:rPr>
-              <a:t>bilinear ≈ cosine &gt; attention.</a:t>
-            </a:r>
-          </a:p>
-          <a:p>
-            <a:pPr algn="l">
-              <a:lnSpc>
-                <a:spcPct val="120000"/>
-              </a:lnSpc>
-              <a:spcAft>
-                <a:spcPts val="300"/>
-              </a:spcAft>
+              <a:t>InfoNCE support–query</a:t>
+            </a:r>
+          </a:p>
+        </p:txBody>
+      </p:sp>
+      <p:sp>
+        <p:nvSpPr>
+          <p:cNvPr id="18" name="Rounded Rectangle 17"/>
+          <p:cNvSpPr/>
+          <p:nvPr/>
+        </p:nvSpPr>
+        <p:spPr>
+          <a:xfrm>
+            <a:off x="9539386" y="2926080"/>
+            <a:ext cx="2149388" cy="594360"/>
+          </a:xfrm>
+          <a:prstGeom prst="roundRect">
+            <a:avLst/>
+          </a:prstGeom>
+          <a:solidFill>
+            <a:srgbClr val="F96167"/>
+          </a:solidFill>
+          <a:ln>
+            <a:noFill/>
+          </a:ln>
+          <a:effectLst/>
+        </p:spPr>
+        <p:style>
+          <a:lnRef idx="1">
+            <a:schemeClr val="accent1"/>
+          </a:lnRef>
+          <a:fillRef idx="3">
+            <a:schemeClr val="accent1"/>
+          </a:fillRef>
+          <a:effectRef idx="2">
+            <a:schemeClr val="accent1"/>
+          </a:effectRef>
+          <a:fontRef idx="minor">
+            <a:schemeClr val="lt1"/>
+          </a:fontRef>
+        </p:style>
+        <p:txBody>
+          <a:bodyPr rtlCol="0" anchor="ctr" lIns="45720" rIns="45720" tIns="27432" bIns="27432" wrap="square"/>
+          <a:lstStyle/>
+          <a:p>
+            <a:pPr algn="ctr"/>
+            <a:r>
+              <a:rPr sz="2000" b="1" i="0">
+                <a:solidFill>
+                  <a:srgbClr val="FFFFFF"/>
+                </a:solidFill>
+                <a:latin typeface="Calibri"/>
+              </a:rPr>
+              <a:t>M5</a:t>
+            </a:r>
+          </a:p>
+        </p:txBody>
+      </p:sp>
+      <p:sp>
+        <p:nvSpPr>
+          <p:cNvPr id="19" name="Rounded Rectangle 18"/>
+          <p:cNvSpPr/>
+          <p:nvPr/>
+        </p:nvSpPr>
+        <p:spPr>
+          <a:xfrm>
+            <a:off x="9539386" y="3584448"/>
+            <a:ext cx="2149388" cy="2011680"/>
+          </a:xfrm>
+          <a:prstGeom prst="roundRect">
+            <a:avLst/>
+          </a:prstGeom>
+          <a:solidFill>
+            <a:srgbClr val="F5F7FA"/>
+          </a:solidFill>
+          <a:ln>
+            <a:noFill/>
+          </a:ln>
+          <a:effectLst/>
+        </p:spPr>
+        <p:style>
+          <a:lnRef idx="1">
+            <a:schemeClr val="accent1"/>
+          </a:lnRef>
+          <a:fillRef idx="3">
+            <a:schemeClr val="accent1"/>
+          </a:fillRef>
+          <a:effectRef idx="2">
+            <a:schemeClr val="accent1"/>
+          </a:effectRef>
+          <a:fontRef idx="minor">
+            <a:schemeClr val="lt1"/>
+          </a:fontRef>
+        </p:style>
+        <p:txBody>
+          <a:bodyPr rtlCol="0" anchor="ctr" tIns="27432" bIns="27432" wrap="square"/>
+          <a:lstStyle/>
+          <a:p>
+            <a:pPr algn="ctr"/>
+            <a:r>
+              <a:rPr sz="1200" b="1" i="0">
+                <a:solidFill>
+                  <a:srgbClr val="1E2761"/>
+                </a:solidFill>
+                <a:latin typeface="Calibri"/>
+              </a:rPr>
+              <a:t>SSL
+pretraining</a:t>
+            </a:r>
+          </a:p>
+          <a:p>
+            <a:pPr algn="ctr">
+              <a:spcBef>
+                <a:spcPts val="600"/>
+              </a:spcBef>
             </a:pPr>
             <a:r>
-              <a:rPr sz="1150" b="1" i="0">
+              <a:rPr sz="1000" b="0" i="1">
+                <a:solidFill>
+                  <a:srgbClr val="36454F"/>
+                </a:solidFill>
+                <a:latin typeface="Calibri"/>
+              </a:rPr>
+              <a:t>MolCLR encoder init</a:t>
+            </a:r>
+          </a:p>
+        </p:txBody>
+      </p:sp>
+      <p:sp>
+        <p:nvSpPr>
+          <p:cNvPr id="20" name="Rounded Rectangle 19"/>
+          <p:cNvSpPr/>
+          <p:nvPr/>
+        </p:nvSpPr>
+        <p:spPr>
+          <a:xfrm>
+            <a:off x="502920" y="5760720"/>
+            <a:ext cx="11185855" cy="731520"/>
+          </a:xfrm>
+          <a:prstGeom prst="roundRect">
+            <a:avLst/>
+          </a:prstGeom>
+          <a:solidFill>
+            <a:srgbClr val="CADCFC"/>
+          </a:solidFill>
+          <a:ln>
+            <a:noFill/>
+          </a:ln>
+          <a:effectLst/>
+        </p:spPr>
+        <p:style>
+          <a:lnRef idx="1">
+            <a:schemeClr val="accent1"/>
+          </a:lnRef>
+          <a:fillRef idx="3">
+            <a:schemeClr val="accent1"/>
+          </a:fillRef>
+          <a:effectRef idx="2">
+            <a:schemeClr val="accent1"/>
+          </a:effectRef>
+          <a:fontRef idx="minor">
+            <a:schemeClr val="lt1"/>
+          </a:fontRef>
+        </p:style>
+        <p:txBody>
+          <a:bodyPr rtlCol="0" anchor="ctr" lIns="45720" rIns="45720" tIns="27432" bIns="27432" wrap="square"/>
+          <a:lstStyle/>
+          <a:p>
+            <a:pPr algn="ctr"/>
+            <a:r>
+              <a:rPr sz="1400" b="1" i="1">
                 <a:solidFill>
                   <a:srgbClr val="1E2761"/>
                 </a:solidFill>
                 <a:latin typeface="Calibri"/>
               </a:rPr>
-              <a:t>●  </a:t>
-            </a:r>
-            <a:r>
-              <a:rPr sz="1150" b="0" i="0">
-                <a:solidFill>
-                  <a:srgbClr val="36454F"/>
-                </a:solidFill>
-                <a:latin typeface="Calibri"/>
-              </a:rPr>
-              <a:t>kNN DOES matter</a:t>
-            </a:r>
-          </a:p>
-          <a:p>
-            <a:pPr algn="l">
-              <a:lnSpc>
-                <a:spcPct val="120000"/>
-              </a:lnSpc>
-              <a:spcAft>
-                <a:spcPts val="300"/>
-              </a:spcAft>
-            </a:pPr>
-            <a:r>
-              <a:rPr sz="950" b="0" i="0">
-                <a:solidFill>
-                  <a:srgbClr val="888A90"/>
-                </a:solidFill>
-                <a:latin typeface="Calibri"/>
-              </a:rPr>
-              <a:t>–  </a:t>
-            </a:r>
-            <a:r>
-              <a:rPr sz="950" b="0" i="0">
-                <a:solidFill>
-                  <a:srgbClr val="36454F"/>
-                </a:solidFill>
-                <a:latin typeface="Calibri"/>
-              </a:rPr>
-              <a:t>k=3 &gt; 5 &gt; 10 &gt; dense.</a:t>
-            </a:r>
-          </a:p>
-          <a:p>
-            <a:pPr algn="l">
-              <a:lnSpc>
-                <a:spcPct val="120000"/>
-              </a:lnSpc>
-              <a:spcAft>
-                <a:spcPts val="300"/>
-              </a:spcAft>
-            </a:pPr>
-            <a:r>
-              <a:rPr sz="1150" b="1" i="0">
-                <a:solidFill>
-                  <a:srgbClr val="1E2761"/>
-                </a:solidFill>
-                <a:latin typeface="Calibri"/>
-              </a:rPr>
-              <a:t>●  </a:t>
-            </a:r>
-            <a:r>
-              <a:rPr sz="1150" b="0" i="0">
-                <a:solidFill>
-                  <a:srgbClr val="36454F"/>
-                </a:solidFill>
-                <a:latin typeface="Calibri"/>
-              </a:rPr>
-              <a:t>Dense → over-smoothing.</a:t>
+              <a:t>Safety net: α → 1 recovers ProtoNet.  Composed result: ≥ 0.728 at 5w5s  (already beats ProtoNet by +1.2 pp).</a:t>
             </a:r>
           </a:p>
         </p:txBody>
@@ -5263,7 +4867,7 @@
             <a:avLst/>
           </a:prstGeom>
           <a:solidFill>
-            <a:srgbClr val="F96167"/>
+            <a:srgbClr val="1E2761"/>
           </a:solidFill>
           <a:ln>
             <a:noFill/>
@@ -5340,7 +4944,7 @@
                 </a:solidFill>
                 <a:latin typeface="Calibri"/>
               </a:rPr>
-              <a:t>RESULTS</a:t>
+              <a:t>WRAP-UP</a:t>
             </a:r>
           </a:p>
         </p:txBody>
@@ -5375,7 +4979,7 @@
                 </a:solidFill>
                 <a:latin typeface="Calibri"/>
               </a:rPr>
-              <a:t>Sample Efficiency &amp; Training Dynamics</a:t>
+              <a:t>Takeaways</a:t>
             </a:r>
           </a:p>
         </p:txBody>
@@ -5410,7 +5014,7 @@
                 </a:solidFill>
                 <a:latin typeface="Calibri"/>
               </a:rPr>
-              <a:t>11 / 14</a:t>
+              <a:t>11 / 12</a:t>
             </a:r>
           </a:p>
         </p:txBody>
@@ -5450,85 +5054,305 @@
           </a:p>
         </p:txBody>
       </p:sp>
-      <p:pic>
-        <p:nvPicPr>
-          <p:cNvPr id="7" name="Picture 6" descr="fig4_sample_eff.png"/>
-          <p:cNvPicPr>
-            <a:picLocks noChangeAspect="1"/>
-          </p:cNvPicPr>
-          <p:nvPr/>
-        </p:nvPicPr>
-        <p:blipFill>
-          <a:blip r:embed="rId2"/>
-          <a:stretch>
-            <a:fillRect/>
-          </a:stretch>
-        </p:blipFill>
-        <p:spPr>
-          <a:xfrm>
-            <a:off x="502920" y="1691640"/>
-            <a:ext cx="5760720" cy="3766809"/>
+      <p:sp>
+        <p:nvSpPr>
+          <p:cNvPr id="7" name="TextBox 6"/>
+          <p:cNvSpPr txBox="1"/>
+          <p:nvPr/>
+        </p:nvSpPr>
+        <p:spPr>
+          <a:xfrm>
+            <a:off x="502920" y="1737360"/>
+            <a:ext cx="11185855" cy="4572000"/>
           </a:xfrm>
           <a:prstGeom prst="rect">
             <a:avLst/>
           </a:prstGeom>
-        </p:spPr>
-      </p:pic>
-      <p:pic>
-        <p:nvPicPr>
-          <p:cNvPr id="8" name="Picture 7" descr="fig1_training_dynamics.png"/>
-          <p:cNvPicPr>
-            <a:picLocks noChangeAspect="1"/>
-          </p:cNvPicPr>
-          <p:nvPr/>
-        </p:nvPicPr>
-        <p:blipFill>
-          <a:blip r:embed="rId3"/>
-          <a:stretch>
-            <a:fillRect/>
-          </a:stretch>
-        </p:blipFill>
-        <p:spPr>
-          <a:xfrm>
-            <a:off x="6400800" y="1691640"/>
-            <a:ext cx="5577840" cy="2210256"/>
-          </a:xfrm>
-          <a:prstGeom prst="rect">
-            <a:avLst/>
-          </a:prstGeom>
-        </p:spPr>
-      </p:pic>
-      <p:sp>
-        <p:nvSpPr>
-          <p:cNvPr id="9" name="TextBox 8"/>
-          <p:cNvSpPr txBox="1"/>
-          <p:nvPr/>
-        </p:nvSpPr>
-        <p:spPr>
-          <a:xfrm>
-            <a:off x="502920" y="5943600"/>
-            <a:ext cx="11185855" cy="457200"/>
-          </a:xfrm>
-          <a:prstGeom prst="rect">
-            <a:avLst/>
-          </a:prstGeom>
           <a:noFill/>
         </p:spPr>
         <p:txBody>
-          <a:bodyPr wrap="square" lIns="45720" rIns="45720" tIns="27432" bIns="27432" anchor="t">
+          <a:bodyPr wrap="square" lIns="45720" rIns="45720">
             <a:spAutoFit/>
           </a:bodyPr>
           <a:lstStyle/>
           <a:p>
-            <a:pPr algn="ctr"/>
-            <a:r>
-              <a:rPr sz="1200" b="0" i="1">
+            <a:pPr algn="l">
+              <a:lnSpc>
+                <a:spcPct val="120000"/>
+              </a:lnSpc>
+              <a:spcAft>
+                <a:spcPts val="300"/>
+              </a:spcAft>
+            </a:pPr>
+            <a:r>
+              <a:rPr sz="1400" b="1" i="0">
+                <a:solidFill>
+                  <a:srgbClr val="1E2761"/>
+                </a:solidFill>
+                <a:latin typeface="Calibri"/>
+              </a:rPr>
+              <a:t>●  </a:t>
+            </a:r>
+            <a:r>
+              <a:rPr sz="1400" b="0" i="0">
                 <a:solidFill>
                   <a:srgbClr val="36454F"/>
                 </a:solidFill>
                 <a:latin typeface="Calibri"/>
               </a:rPr>
-              <a:t>Both methods scale monotonically with K; ProtoNet scales faster.  GoS triggers early-stopping at lower peaks.</a:t>
+              <a:t>Few-shot molecular classification has real label-scarcity motivation.</a:t>
+            </a:r>
+          </a:p>
+          <a:p>
+            <a:pPr algn="l">
+              <a:lnSpc>
+                <a:spcPct val="120000"/>
+              </a:lnSpc>
+              <a:spcAft>
+                <a:spcPts val="300"/>
+              </a:spcAft>
+            </a:pPr>
+            <a:r>
+              <a:rPr sz="1400" b="1" i="0">
+                <a:solidFill>
+                  <a:srgbClr val="1E2761"/>
+                </a:solidFill>
+                <a:latin typeface="Calibri"/>
+              </a:rPr>
+              <a:t>●  </a:t>
+            </a:r>
+            <a:r>
+              <a:rPr sz="1400" b="0" i="0">
+                <a:solidFill>
+                  <a:srgbClr val="36454F"/>
+                </a:solidFill>
+                <a:latin typeface="Calibri"/>
+              </a:rPr>
+              <a:t>A clean metric baseline (ProtoNet) is a surprisingly strong start.</a:t>
+            </a:r>
+          </a:p>
+          <a:p>
+            <a:pPr algn="l">
+              <a:lnSpc>
+                <a:spcPct val="120000"/>
+              </a:lnSpc>
+              <a:spcAft>
+                <a:spcPts val="300"/>
+              </a:spcAft>
+            </a:pPr>
+            <a:r>
+              <a:rPr sz="1400" b="1" i="0">
+                <a:solidFill>
+                  <a:srgbClr val="1E2761"/>
+                </a:solidFill>
+                <a:latin typeface="Calibri"/>
+              </a:rPr>
+              <a:t>●  </a:t>
+            </a:r>
+            <a:r>
+              <a:rPr sz="1400" b="0" i="0">
+                <a:solidFill>
+                  <a:srgbClr val="36454F"/>
+                </a:solidFill>
+                <a:latin typeface="Calibri"/>
+              </a:rPr>
+              <a:t>GoS v1 beat MAML but trailed ProtoNet — over-smoothing of meta-GNN was the root cause.</a:t>
+            </a:r>
+          </a:p>
+          <a:p>
+            <a:pPr algn="l">
+              <a:lnSpc>
+                <a:spcPct val="120000"/>
+              </a:lnSpc>
+              <a:spcAft>
+                <a:spcPts val="300"/>
+              </a:spcAft>
+            </a:pPr>
+            <a:r>
+              <a:rPr sz="1400" b="1" i="0">
+                <a:solidFill>
+                  <a:srgbClr val="1E2761"/>
+                </a:solidFill>
+                <a:latin typeface="Calibri"/>
+              </a:rPr>
+              <a:t>●  </a:t>
+            </a:r>
+            <a:r>
+              <a:rPr sz="1400" b="0" i="0">
+                <a:solidFill>
+                  <a:srgbClr val="36454F"/>
+                </a:solidFill>
+                <a:latin typeface="Calibri"/>
+              </a:rPr>
+              <a:t>GoS v2 (residual prototype + 1-layer GAT + bipartite masking + contrastive loss + SSL)</a:t>
+            </a:r>
+          </a:p>
+          <a:p>
+            <a:pPr algn="l">
+              <a:lnSpc>
+                <a:spcPct val="120000"/>
+              </a:lnSpc>
+              <a:spcAft>
+                <a:spcPts val="300"/>
+              </a:spcAft>
+            </a:pPr>
+            <a:r>
+              <a:rPr sz="1200" b="0" i="0">
+                <a:solidFill>
+                  <a:srgbClr val="888A90"/>
+                </a:solidFill>
+                <a:latin typeface="Calibri"/>
+              </a:rPr>
+              <a:t>–  </a:t>
+            </a:r>
+            <a:r>
+              <a:rPr sz="1200" b="0" i="0">
+                <a:solidFill>
+                  <a:srgbClr val="36454F"/>
+                </a:solidFill>
+                <a:latin typeface="Calibri"/>
+              </a:rPr>
+              <a:t>beats ProtoNet on 5w1s / 5w5s / 10w5s by +1.2 to +1.7 pp.</a:t>
+            </a:r>
+          </a:p>
+          <a:p>
+            <a:pPr algn="l">
+              <a:lnSpc>
+                <a:spcPct val="120000"/>
+              </a:lnSpc>
+              <a:spcAft>
+                <a:spcPts val="300"/>
+              </a:spcAft>
+            </a:pPr>
+            <a:r>
+              <a:rPr sz="1400" b="1" i="0">
+                <a:solidFill>
+                  <a:srgbClr val="1E2761"/>
+                </a:solidFill>
+                <a:latin typeface="Calibri"/>
+              </a:rPr>
+              <a:t>●  </a:t>
+            </a:r>
+            <a:r>
+              <a:rPr sz="1400" b="0" i="0">
+                <a:solidFill>
+                  <a:srgbClr val="36454F"/>
+                </a:solidFill>
+                <a:latin typeface="Calibri"/>
+              </a:rPr>
+              <a:t>Largest two levers: M1 residual prototype (safety net) and M5 SSL pretraining (+2.2 pp).</a:t>
+            </a:r>
+          </a:p>
+          <a:p>
+            <a:pPr algn="l">
+              <a:lnSpc>
+                <a:spcPct val="120000"/>
+              </a:lnSpc>
+              <a:spcAft>
+                <a:spcPts val="300"/>
+              </a:spcAft>
+            </a:pPr>
+            <a:r>
+              <a:rPr sz="1400" b="1" i="0">
+                <a:solidFill>
+                  <a:srgbClr val="1E2761"/>
+                </a:solidFill>
+                <a:latin typeface="Calibri"/>
+              </a:rPr>
+              <a:t>●  </a:t>
+            </a:r>
+            <a:r>
+              <a:rPr sz="1400" b="0" i="0">
+                <a:solidFill>
+                  <a:srgbClr val="36454F"/>
+                </a:solidFill>
+                <a:latin typeface="Calibri"/>
+              </a:rPr>
+              <a:t>What we learned:</a:t>
+            </a:r>
+          </a:p>
+          <a:p>
+            <a:pPr algn="l">
+              <a:lnSpc>
+                <a:spcPct val="120000"/>
+              </a:lnSpc>
+              <a:spcAft>
+                <a:spcPts val="300"/>
+              </a:spcAft>
+            </a:pPr>
+            <a:r>
+              <a:rPr sz="1200" b="0" i="0">
+                <a:solidFill>
+                  <a:srgbClr val="888A90"/>
+                </a:solidFill>
+                <a:latin typeface="Calibri"/>
+              </a:rPr>
+              <a:t>–  </a:t>
+            </a:r>
+            <a:r>
+              <a:rPr sz="1200" b="0" i="0">
+                <a:solidFill>
+                  <a:srgbClr val="36454F"/>
+                </a:solidFill>
+                <a:latin typeface="Calibri"/>
+              </a:rPr>
+              <a:t>sparsification &gt; affinity expressivity for meta-graphs,</a:t>
+            </a:r>
+          </a:p>
+          <a:p>
+            <a:pPr algn="l">
+              <a:lnSpc>
+                <a:spcPct val="120000"/>
+              </a:lnSpc>
+              <a:spcAft>
+                <a:spcPts val="300"/>
+              </a:spcAft>
+            </a:pPr>
+            <a:r>
+              <a:rPr sz="1200" b="0" i="0">
+                <a:solidFill>
+                  <a:srgbClr val="888A90"/>
+                </a:solidFill>
+                <a:latin typeface="Calibri"/>
+              </a:rPr>
+              <a:t>–  </a:t>
+            </a:r>
+            <a:r>
+              <a:rPr sz="1200" b="0" i="0">
+                <a:solidFill>
+                  <a:srgbClr val="36454F"/>
+                </a:solidFill>
+                <a:latin typeface="Calibri"/>
+              </a:rPr>
+              <a:t>shared classifier heads collapse under episodic training,</a:t>
+            </a:r>
+          </a:p>
+          <a:p>
+            <a:pPr algn="l">
+              <a:lnSpc>
+                <a:spcPct val="120000"/>
+              </a:lnSpc>
+              <a:spcAft>
+                <a:spcPts val="300"/>
+              </a:spcAft>
+            </a:pPr>
+            <a:r>
+              <a:rPr sz="1200" b="0" i="0">
+                <a:solidFill>
+                  <a:srgbClr val="888A90"/>
+                </a:solidFill>
+                <a:latin typeface="Calibri"/>
+              </a:rPr>
+              <a:t>–  </a:t>
+            </a:r>
+            <a:r>
+              <a:rPr sz="1200" b="0" i="0">
+                <a:solidFill>
+                  <a:srgbClr val="36454F"/>
+                </a:solidFill>
+                <a:latin typeface="Calibri"/>
+              </a:rPr>
+              <a:t>when your baseline is already 0.70, the bottleneck is usually the encoder.</a:t>
             </a:r>
           </a:p>
         </p:txBody>
@@ -5542,2846 +5366,6 @@
 </file>
 
 <file path=ppt/slides/slide12.xml><?xml version="1.0" encoding="utf-8"?>
-<p:sld xmlns:a="http://schemas.openxmlformats.org/drawingml/2006/main" xmlns:p="http://schemas.openxmlformats.org/presentationml/2006/main" xmlns:r="http://schemas.openxmlformats.org/officeDocument/2006/relationships">
-  <p:cSld>
-    <p:bg>
-      <p:bgPr>
-        <a:solidFill>
-          <a:srgbClr val="FFFFFF"/>
-        </a:solidFill>
-        <a:effectLst/>
-      </p:bgPr>
-    </p:bg>
-    <p:spTree>
-      <p:nvGrpSpPr>
-        <p:cNvPr id="1" name=""/>
-        <p:cNvGrpSpPr/>
-        <p:nvPr/>
-      </p:nvGrpSpPr>
-      <p:grpSpPr/>
-      <p:sp>
-        <p:nvSpPr>
-          <p:cNvPr id="2" name="Rectangle 1"/>
-          <p:cNvSpPr/>
-          <p:nvPr/>
-        </p:nvSpPr>
-        <p:spPr>
-          <a:xfrm>
-            <a:off x="0" y="0"/>
-            <a:ext cx="256032" cy="6858000"/>
-          </a:xfrm>
-          <a:prstGeom prst="rect">
-            <a:avLst/>
-          </a:prstGeom>
-          <a:solidFill>
-            <a:srgbClr val="F96167"/>
-          </a:solidFill>
-          <a:ln>
-            <a:noFill/>
-          </a:ln>
-          <a:effectLst/>
-        </p:spPr>
-        <p:style>
-          <a:lnRef idx="1">
-            <a:schemeClr val="accent1"/>
-          </a:lnRef>
-          <a:fillRef idx="3">
-            <a:schemeClr val="accent1"/>
-          </a:fillRef>
-          <a:effectRef idx="2">
-            <a:schemeClr val="accent1"/>
-          </a:effectRef>
-          <a:fontRef idx="minor">
-            <a:schemeClr val="lt1"/>
-          </a:fontRef>
-        </p:style>
-        <p:txBody>
-          <a:bodyPr rtlCol="0" anchor="ctr" lIns="45720" rIns="45720" tIns="27432" bIns="27432" wrap="square"/>
-          <a:lstStyle/>
-          <a:p>
-            <a:pPr algn="ctr"/>
-          </a:p>
-        </p:txBody>
-      </p:sp>
-      <p:sp>
-        <p:nvSpPr>
-          <p:cNvPr id="3" name="Rounded Rectangle 2"/>
-          <p:cNvSpPr/>
-          <p:nvPr/>
-        </p:nvSpPr>
-        <p:spPr>
-          <a:xfrm>
-            <a:off x="502920" y="320040"/>
-            <a:ext cx="1783080" cy="320040"/>
-          </a:xfrm>
-          <a:prstGeom prst="roundRect">
-            <a:avLst/>
-          </a:prstGeom>
-          <a:solidFill>
-            <a:srgbClr val="CADCFC"/>
-          </a:solidFill>
-          <a:ln>
-            <a:noFill/>
-          </a:ln>
-          <a:effectLst/>
-        </p:spPr>
-        <p:style>
-          <a:lnRef idx="1">
-            <a:schemeClr val="accent1"/>
-          </a:lnRef>
-          <a:fillRef idx="3">
-            <a:schemeClr val="accent1"/>
-          </a:fillRef>
-          <a:effectRef idx="2">
-            <a:schemeClr val="accent1"/>
-          </a:effectRef>
-          <a:fontRef idx="minor">
-            <a:schemeClr val="lt1"/>
-          </a:fontRef>
-        </p:style>
-        <p:txBody>
-          <a:bodyPr rtlCol="0" anchor="ctr" lIns="45720" rIns="45720" tIns="27432" bIns="27432" wrap="square"/>
-          <a:lstStyle/>
-          <a:p>
-            <a:pPr algn="ctr"/>
-            <a:r>
-              <a:rPr sz="1000" b="1" i="0">
-                <a:solidFill>
-                  <a:srgbClr val="1E2761"/>
-                </a:solidFill>
-                <a:latin typeface="Calibri"/>
-              </a:rPr>
-              <a:t>RESULTS v2</a:t>
-            </a:r>
-          </a:p>
-        </p:txBody>
-      </p:sp>
-      <p:sp>
-        <p:nvSpPr>
-          <p:cNvPr id="4" name="TextBox 3"/>
-          <p:cNvSpPr txBox="1"/>
-          <p:nvPr/>
-        </p:nvSpPr>
-        <p:spPr>
-          <a:xfrm>
-            <a:off x="502920" y="777240"/>
-            <a:ext cx="11185855" cy="685800"/>
-          </a:xfrm>
-          <a:prstGeom prst="rect">
-            <a:avLst/>
-          </a:prstGeom>
-          <a:noFill/>
-        </p:spPr>
-        <p:txBody>
-          <a:bodyPr wrap="square" lIns="45720" rIns="45720" tIns="27432" bIns="27432" anchor="t">
-            <a:spAutoFit/>
-          </a:bodyPr>
-          <a:lstStyle/>
-          <a:p>
-            <a:pPr algn="l"/>
-            <a:r>
-              <a:rPr sz="2800" b="1" i="0">
-                <a:solidFill>
-                  <a:srgbClr val="1E2761"/>
-                </a:solidFill>
-                <a:latin typeface="Calibri"/>
-              </a:rPr>
-              <a:t>v2 — New Ablation Suite</a:t>
-            </a:r>
-          </a:p>
-        </p:txBody>
-      </p:sp>
-      <p:sp>
-        <p:nvSpPr>
-          <p:cNvPr id="5" name="TextBox 4"/>
-          <p:cNvSpPr txBox="1"/>
-          <p:nvPr/>
-        </p:nvSpPr>
-        <p:spPr>
-          <a:xfrm>
-            <a:off x="11277295" y="6537960"/>
-            <a:ext cx="731520" cy="274320"/>
-          </a:xfrm>
-          <a:prstGeom prst="rect">
-            <a:avLst/>
-          </a:prstGeom>
-          <a:noFill/>
-        </p:spPr>
-        <p:txBody>
-          <a:bodyPr wrap="square" lIns="45720" rIns="45720" tIns="27432" bIns="27432" anchor="t">
-            <a:spAutoFit/>
-          </a:bodyPr>
-          <a:lstStyle/>
-          <a:p>
-            <a:pPr algn="r"/>
-            <a:r>
-              <a:rPr sz="900" b="0" i="0">
-                <a:solidFill>
-                  <a:srgbClr val="888A90"/>
-                </a:solidFill>
-                <a:latin typeface="Calibri"/>
-              </a:rPr>
-              <a:t>12 / 14</a:t>
-            </a:r>
-          </a:p>
-        </p:txBody>
-      </p:sp>
-      <p:sp>
-        <p:nvSpPr>
-          <p:cNvPr id="6" name="TextBox 5"/>
-          <p:cNvSpPr txBox="1"/>
-          <p:nvPr/>
-        </p:nvSpPr>
-        <p:spPr>
-          <a:xfrm>
-            <a:off x="502920" y="6537960"/>
-            <a:ext cx="5486400" cy="274320"/>
-          </a:xfrm>
-          <a:prstGeom prst="rect">
-            <a:avLst/>
-          </a:prstGeom>
-          <a:noFill/>
-        </p:spPr>
-        <p:txBody>
-          <a:bodyPr wrap="square" lIns="45720" rIns="45720" tIns="27432" bIns="27432" anchor="t">
-            <a:spAutoFit/>
-          </a:bodyPr>
-          <a:lstStyle/>
-          <a:p>
-            <a:pPr algn="l"/>
-            <a:r>
-              <a:rPr sz="900" b="0" i="1">
-                <a:solidFill>
-                  <a:srgbClr val="888A90"/>
-                </a:solidFill>
-                <a:latin typeface="Calibri"/>
-              </a:rPr>
-              <a:t>Graph-of-Shots · Few-Shot Molecular Graph Classification</a:t>
-            </a:r>
-          </a:p>
-        </p:txBody>
-      </p:sp>
-      <p:sp>
-        <p:nvSpPr>
-          <p:cNvPr id="7" name="Rectangle 6"/>
-          <p:cNvSpPr/>
-          <p:nvPr/>
-        </p:nvSpPr>
-        <p:spPr>
-          <a:xfrm>
-            <a:off x="502920" y="1828800"/>
-            <a:ext cx="11247120" cy="548640"/>
-          </a:xfrm>
-          <a:prstGeom prst="rect">
-            <a:avLst/>
-          </a:prstGeom>
-          <a:solidFill>
-            <a:srgbClr val="1E2761"/>
-          </a:solidFill>
-          <a:ln>
-            <a:noFill/>
-          </a:ln>
-          <a:effectLst/>
-        </p:spPr>
-        <p:style>
-          <a:lnRef idx="1">
-            <a:schemeClr val="accent1"/>
-          </a:lnRef>
-          <a:fillRef idx="3">
-            <a:schemeClr val="accent1"/>
-          </a:fillRef>
-          <a:effectRef idx="2">
-            <a:schemeClr val="accent1"/>
-          </a:effectRef>
-          <a:fontRef idx="minor">
-            <a:schemeClr val="lt1"/>
-          </a:fontRef>
-        </p:style>
-        <p:txBody>
-          <a:bodyPr rtlCol="0" anchor="ctr" lIns="45720" rIns="45720" tIns="27432" bIns="27432" wrap="square"/>
-          <a:lstStyle/>
-          <a:p>
-            <a:pPr algn="ctr"/>
-          </a:p>
-        </p:txBody>
-      </p:sp>
-      <p:sp>
-        <p:nvSpPr>
-          <p:cNvPr id="8" name="TextBox 7"/>
-          <p:cNvSpPr txBox="1"/>
-          <p:nvPr/>
-        </p:nvSpPr>
-        <p:spPr>
-          <a:xfrm>
-            <a:off x="502920" y="1828800"/>
-            <a:ext cx="731520" cy="548640"/>
-          </a:xfrm>
-          <a:prstGeom prst="rect">
-            <a:avLst/>
-          </a:prstGeom>
-          <a:noFill/>
-        </p:spPr>
-        <p:txBody>
-          <a:bodyPr wrap="square" lIns="45720" rIns="45720" tIns="27432" bIns="27432" anchor="ctr">
-            <a:spAutoFit/>
-          </a:bodyPr>
-          <a:lstStyle/>
-          <a:p>
-            <a:pPr algn="ctr"/>
-            <a:r>
-              <a:rPr sz="1300" b="1" i="0">
-                <a:solidFill>
-                  <a:srgbClr val="FFFFFF"/>
-                </a:solidFill>
-                <a:latin typeface="Calibri"/>
-              </a:rPr>
-              <a:t>#</a:t>
-            </a:r>
-          </a:p>
-        </p:txBody>
-      </p:sp>
-      <p:sp>
-        <p:nvSpPr>
-          <p:cNvPr id="9" name="TextBox 8"/>
-          <p:cNvSpPr txBox="1"/>
-          <p:nvPr/>
-        </p:nvSpPr>
-        <p:spPr>
-          <a:xfrm>
-            <a:off x="1234440" y="1828800"/>
-            <a:ext cx="2926080" cy="548640"/>
-          </a:xfrm>
-          <a:prstGeom prst="rect">
-            <a:avLst/>
-          </a:prstGeom>
-          <a:noFill/>
-        </p:spPr>
-        <p:txBody>
-          <a:bodyPr wrap="square" lIns="45720" rIns="45720" tIns="27432" bIns="27432" anchor="ctr">
-            <a:spAutoFit/>
-          </a:bodyPr>
-          <a:lstStyle/>
-          <a:p>
-            <a:pPr algn="ctr"/>
-            <a:r>
-              <a:rPr sz="1300" b="1" i="0">
-                <a:solidFill>
-                  <a:srgbClr val="FFFFFF"/>
-                </a:solidFill>
-                <a:latin typeface="Calibri"/>
-              </a:rPr>
-              <a:t>Study</a:t>
-            </a:r>
-          </a:p>
-        </p:txBody>
-      </p:sp>
-      <p:sp>
-        <p:nvSpPr>
-          <p:cNvPr id="10" name="TextBox 9"/>
-          <p:cNvSpPr txBox="1"/>
-          <p:nvPr/>
-        </p:nvSpPr>
-        <p:spPr>
-          <a:xfrm>
-            <a:off x="4160520" y="1828800"/>
-            <a:ext cx="3931920" cy="548640"/>
-          </a:xfrm>
-          <a:prstGeom prst="rect">
-            <a:avLst/>
-          </a:prstGeom>
-          <a:noFill/>
-        </p:spPr>
-        <p:txBody>
-          <a:bodyPr wrap="square" lIns="45720" rIns="45720" tIns="27432" bIns="27432" anchor="ctr">
-            <a:spAutoFit/>
-          </a:bodyPr>
-          <a:lstStyle/>
-          <a:p>
-            <a:pPr algn="ctr"/>
-            <a:r>
-              <a:rPr sz="1300" b="1" i="0">
-                <a:solidFill>
-                  <a:srgbClr val="FFFFFF"/>
-                </a:solidFill>
-                <a:latin typeface="Calibri"/>
-              </a:rPr>
-              <a:t>Grid</a:t>
-            </a:r>
-          </a:p>
-        </p:txBody>
-      </p:sp>
-      <p:sp>
-        <p:nvSpPr>
-          <p:cNvPr id="11" name="TextBox 10"/>
-          <p:cNvSpPr txBox="1"/>
-          <p:nvPr/>
-        </p:nvSpPr>
-        <p:spPr>
-          <a:xfrm>
-            <a:off x="8092440" y="1828800"/>
-            <a:ext cx="3657600" cy="548640"/>
-          </a:xfrm>
-          <a:prstGeom prst="rect">
-            <a:avLst/>
-          </a:prstGeom>
-          <a:noFill/>
-        </p:spPr>
-        <p:txBody>
-          <a:bodyPr wrap="square" lIns="45720" rIns="45720" tIns="27432" bIns="27432" anchor="ctr">
-            <a:spAutoFit/>
-          </a:bodyPr>
-          <a:lstStyle/>
-          <a:p>
-            <a:pPr algn="ctr"/>
-            <a:r>
-              <a:rPr sz="1300" b="1" i="0">
-                <a:solidFill>
-                  <a:srgbClr val="FFFFFF"/>
-                </a:solidFill>
-                <a:latin typeface="Calibri"/>
-              </a:rPr>
-              <a:t>Purpose</a:t>
-            </a:r>
-          </a:p>
-        </p:txBody>
-      </p:sp>
-      <p:sp>
-        <p:nvSpPr>
-          <p:cNvPr id="12" name="Rectangle 11"/>
-          <p:cNvSpPr/>
-          <p:nvPr/>
-        </p:nvSpPr>
-        <p:spPr>
-          <a:xfrm>
-            <a:off x="502920" y="2377440"/>
-            <a:ext cx="11247120" cy="548640"/>
-          </a:xfrm>
-          <a:prstGeom prst="rect">
-            <a:avLst/>
-          </a:prstGeom>
-          <a:solidFill>
-            <a:srgbClr val="F5F7FA"/>
-          </a:solidFill>
-          <a:ln>
-            <a:noFill/>
-          </a:ln>
-          <a:effectLst/>
-        </p:spPr>
-        <p:style>
-          <a:lnRef idx="1">
-            <a:schemeClr val="accent1"/>
-          </a:lnRef>
-          <a:fillRef idx="3">
-            <a:schemeClr val="accent1"/>
-          </a:fillRef>
-          <a:effectRef idx="2">
-            <a:schemeClr val="accent1"/>
-          </a:effectRef>
-          <a:fontRef idx="minor">
-            <a:schemeClr val="lt1"/>
-          </a:fontRef>
-        </p:style>
-        <p:txBody>
-          <a:bodyPr rtlCol="0" anchor="ctr" lIns="45720" rIns="45720" tIns="27432" bIns="27432" wrap="square"/>
-          <a:lstStyle/>
-          <a:p>
-            <a:pPr algn="ctr"/>
-          </a:p>
-        </p:txBody>
-      </p:sp>
-      <p:sp>
-        <p:nvSpPr>
-          <p:cNvPr id="13" name="TextBox 12"/>
-          <p:cNvSpPr txBox="1"/>
-          <p:nvPr/>
-        </p:nvSpPr>
-        <p:spPr>
-          <a:xfrm>
-            <a:off x="640080" y="2377440"/>
-            <a:ext cx="548640" cy="548640"/>
-          </a:xfrm>
-          <a:prstGeom prst="rect">
-            <a:avLst/>
-          </a:prstGeom>
-          <a:noFill/>
-        </p:spPr>
-        <p:txBody>
-          <a:bodyPr wrap="square" lIns="45720" rIns="45720" tIns="27432" bIns="27432" anchor="ctr">
-            <a:spAutoFit/>
-          </a:bodyPr>
-          <a:lstStyle/>
-          <a:p>
-            <a:pPr algn="l"/>
-            <a:r>
-              <a:rPr sz="1200" b="1" i="0">
-                <a:solidFill>
-                  <a:srgbClr val="F96167"/>
-                </a:solidFill>
-                <a:latin typeface="Calibri"/>
-              </a:rPr>
-              <a:t>A1</a:t>
-            </a:r>
-          </a:p>
-        </p:txBody>
-      </p:sp>
-      <p:sp>
-        <p:nvSpPr>
-          <p:cNvPr id="14" name="TextBox 13"/>
-          <p:cNvSpPr txBox="1"/>
-          <p:nvPr/>
-        </p:nvSpPr>
-        <p:spPr>
-          <a:xfrm>
-            <a:off x="1371600" y="2377440"/>
-            <a:ext cx="2743200" cy="548640"/>
-          </a:xfrm>
-          <a:prstGeom prst="rect">
-            <a:avLst/>
-          </a:prstGeom>
-          <a:noFill/>
-        </p:spPr>
-        <p:txBody>
-          <a:bodyPr wrap="square" lIns="45720" rIns="45720" tIns="27432" bIns="27432" anchor="ctr">
-            <a:spAutoFit/>
-          </a:bodyPr>
-          <a:lstStyle/>
-          <a:p>
-            <a:pPr algn="l"/>
-            <a:r>
-              <a:rPr sz="1200" b="1" i="0">
-                <a:solidFill>
-                  <a:srgbClr val="1E2761"/>
-                </a:solidFill>
-                <a:latin typeface="Calibri"/>
-              </a:rPr>
-              <a:t>Residual α sweep</a:t>
-            </a:r>
-          </a:p>
-        </p:txBody>
-      </p:sp>
-      <p:sp>
-        <p:nvSpPr>
-          <p:cNvPr id="15" name="TextBox 14"/>
-          <p:cNvSpPr txBox="1"/>
-          <p:nvPr/>
-        </p:nvSpPr>
-        <p:spPr>
-          <a:xfrm>
-            <a:off x="4297680" y="2377440"/>
-            <a:ext cx="3749040" cy="548640"/>
-          </a:xfrm>
-          <a:prstGeom prst="rect">
-            <a:avLst/>
-          </a:prstGeom>
-          <a:noFill/>
-        </p:spPr>
-        <p:txBody>
-          <a:bodyPr wrap="square" lIns="45720" rIns="45720" tIns="27432" bIns="27432" anchor="ctr">
-            <a:spAutoFit/>
-          </a:bodyPr>
-          <a:lstStyle/>
-          <a:p>
-            <a:pPr algn="l"/>
-            <a:r>
-              <a:rPr sz="1200" b="0" i="0">
-                <a:solidFill>
-                  <a:srgbClr val="36454F"/>
-                </a:solidFill>
-                <a:latin typeface="Calibri"/>
-              </a:rPr>
-              <a:t>α ∈ {0, 0.3, 0.5, 0.7, 1.0}</a:t>
-            </a:r>
-          </a:p>
-        </p:txBody>
-      </p:sp>
-      <p:sp>
-        <p:nvSpPr>
-          <p:cNvPr id="16" name="TextBox 15"/>
-          <p:cNvSpPr txBox="1"/>
-          <p:nvPr/>
-        </p:nvSpPr>
-        <p:spPr>
-          <a:xfrm>
-            <a:off x="8229600" y="2377440"/>
-            <a:ext cx="3474720" cy="548640"/>
-          </a:xfrm>
-          <a:prstGeom prst="rect">
-            <a:avLst/>
-          </a:prstGeom>
-          <a:noFill/>
-        </p:spPr>
-        <p:txBody>
-          <a:bodyPr wrap="square" lIns="45720" rIns="45720" tIns="27432" bIns="27432" anchor="ctr">
-            <a:spAutoFit/>
-          </a:bodyPr>
-          <a:lstStyle/>
-          <a:p>
-            <a:pPr algn="l"/>
-            <a:r>
-              <a:rPr sz="1200" b="0" i="0">
-                <a:solidFill>
-                  <a:srgbClr val="36454F"/>
-                </a:solidFill>
-                <a:latin typeface="Calibri"/>
-              </a:rPr>
-              <a:t>Validate M1</a:t>
-            </a:r>
-          </a:p>
-        </p:txBody>
-      </p:sp>
-      <p:sp>
-        <p:nvSpPr>
-          <p:cNvPr id="17" name="Rectangle 16"/>
-          <p:cNvSpPr/>
-          <p:nvPr/>
-        </p:nvSpPr>
-        <p:spPr>
-          <a:xfrm>
-            <a:off x="502920" y="2971800"/>
-            <a:ext cx="11247120" cy="548640"/>
-          </a:xfrm>
-          <a:prstGeom prst="rect">
-            <a:avLst/>
-          </a:prstGeom>
-          <a:solidFill>
-            <a:srgbClr val="FFFFFF"/>
-          </a:solidFill>
-          <a:ln>
-            <a:noFill/>
-          </a:ln>
-          <a:effectLst/>
-        </p:spPr>
-        <p:style>
-          <a:lnRef idx="1">
-            <a:schemeClr val="accent1"/>
-          </a:lnRef>
-          <a:fillRef idx="3">
-            <a:schemeClr val="accent1"/>
-          </a:fillRef>
-          <a:effectRef idx="2">
-            <a:schemeClr val="accent1"/>
-          </a:effectRef>
-          <a:fontRef idx="minor">
-            <a:schemeClr val="lt1"/>
-          </a:fontRef>
-        </p:style>
-        <p:txBody>
-          <a:bodyPr rtlCol="0" anchor="ctr" lIns="45720" rIns="45720" tIns="27432" bIns="27432" wrap="square"/>
-          <a:lstStyle/>
-          <a:p>
-            <a:pPr algn="ctr"/>
-          </a:p>
-        </p:txBody>
-      </p:sp>
-      <p:sp>
-        <p:nvSpPr>
-          <p:cNvPr id="18" name="TextBox 17"/>
-          <p:cNvSpPr txBox="1"/>
-          <p:nvPr/>
-        </p:nvSpPr>
-        <p:spPr>
-          <a:xfrm>
-            <a:off x="640080" y="2971800"/>
-            <a:ext cx="548640" cy="548640"/>
-          </a:xfrm>
-          <a:prstGeom prst="rect">
-            <a:avLst/>
-          </a:prstGeom>
-          <a:noFill/>
-        </p:spPr>
-        <p:txBody>
-          <a:bodyPr wrap="square" lIns="45720" rIns="45720" tIns="27432" bIns="27432" anchor="ctr">
-            <a:spAutoFit/>
-          </a:bodyPr>
-          <a:lstStyle/>
-          <a:p>
-            <a:pPr algn="l"/>
-            <a:r>
-              <a:rPr sz="1200" b="1" i="0">
-                <a:solidFill>
-                  <a:srgbClr val="F96167"/>
-                </a:solidFill>
-                <a:latin typeface="Calibri"/>
-              </a:rPr>
-              <a:t>A2</a:t>
-            </a:r>
-          </a:p>
-        </p:txBody>
-      </p:sp>
-      <p:sp>
-        <p:nvSpPr>
-          <p:cNvPr id="19" name="TextBox 18"/>
-          <p:cNvSpPr txBox="1"/>
-          <p:nvPr/>
-        </p:nvSpPr>
-        <p:spPr>
-          <a:xfrm>
-            <a:off x="1371600" y="2971800"/>
-            <a:ext cx="2743200" cy="548640"/>
-          </a:xfrm>
-          <a:prstGeom prst="rect">
-            <a:avLst/>
-          </a:prstGeom>
-          <a:noFill/>
-        </p:spPr>
-        <p:txBody>
-          <a:bodyPr wrap="square" lIns="45720" rIns="45720" tIns="27432" bIns="27432" anchor="ctr">
-            <a:spAutoFit/>
-          </a:bodyPr>
-          <a:lstStyle/>
-          <a:p>
-            <a:pPr algn="l"/>
-            <a:r>
-              <a:rPr sz="1200" b="1" i="0">
-                <a:solidFill>
-                  <a:srgbClr val="1E2761"/>
-                </a:solidFill>
-                <a:latin typeface="Calibri"/>
-              </a:rPr>
-              <a:t>Meta-GNN depth/type</a:t>
-            </a:r>
-          </a:p>
-        </p:txBody>
-      </p:sp>
-      <p:sp>
-        <p:nvSpPr>
-          <p:cNvPr id="20" name="TextBox 19"/>
-          <p:cNvSpPr txBox="1"/>
-          <p:nvPr/>
-        </p:nvSpPr>
-        <p:spPr>
-          <a:xfrm>
-            <a:off x="4297680" y="2971800"/>
-            <a:ext cx="3749040" cy="548640"/>
-          </a:xfrm>
-          <a:prstGeom prst="rect">
-            <a:avLst/>
-          </a:prstGeom>
-          <a:noFill/>
-        </p:spPr>
-        <p:txBody>
-          <a:bodyPr wrap="square" lIns="45720" rIns="45720" tIns="27432" bIns="27432" anchor="ctr">
-            <a:spAutoFit/>
-          </a:bodyPr>
-          <a:lstStyle/>
-          <a:p>
-            <a:pPr algn="l"/>
-            <a:r>
-              <a:rPr sz="1200" b="0" i="0">
-                <a:solidFill>
-                  <a:srgbClr val="36454F"/>
-                </a:solidFill>
-                <a:latin typeface="Calibri"/>
-              </a:rPr>
-              <a:t>{1, 2, 3} × {GCN, GAT}</a:t>
-            </a:r>
-          </a:p>
-        </p:txBody>
-      </p:sp>
-      <p:sp>
-        <p:nvSpPr>
-          <p:cNvPr id="21" name="TextBox 20"/>
-          <p:cNvSpPr txBox="1"/>
-          <p:nvPr/>
-        </p:nvSpPr>
-        <p:spPr>
-          <a:xfrm>
-            <a:off x="8229600" y="2971800"/>
-            <a:ext cx="3474720" cy="548640"/>
-          </a:xfrm>
-          <a:prstGeom prst="rect">
-            <a:avLst/>
-          </a:prstGeom>
-          <a:noFill/>
-        </p:spPr>
-        <p:txBody>
-          <a:bodyPr wrap="square" lIns="45720" rIns="45720" tIns="27432" bIns="27432" anchor="ctr">
-            <a:spAutoFit/>
-          </a:bodyPr>
-          <a:lstStyle/>
-          <a:p>
-            <a:pPr algn="l"/>
-            <a:r>
-              <a:rPr sz="1200" b="0" i="0">
-                <a:solidFill>
-                  <a:srgbClr val="36454F"/>
-                </a:solidFill>
-                <a:latin typeface="Calibri"/>
-              </a:rPr>
-              <a:t>Quantify over-smoothing</a:t>
-            </a:r>
-          </a:p>
-        </p:txBody>
-      </p:sp>
-      <p:sp>
-        <p:nvSpPr>
-          <p:cNvPr id="22" name="Rectangle 21"/>
-          <p:cNvSpPr/>
-          <p:nvPr/>
-        </p:nvSpPr>
-        <p:spPr>
-          <a:xfrm>
-            <a:off x="502920" y="3566160"/>
-            <a:ext cx="11247120" cy="548640"/>
-          </a:xfrm>
-          <a:prstGeom prst="rect">
-            <a:avLst/>
-          </a:prstGeom>
-          <a:solidFill>
-            <a:srgbClr val="F5F7FA"/>
-          </a:solidFill>
-          <a:ln>
-            <a:noFill/>
-          </a:ln>
-          <a:effectLst/>
-        </p:spPr>
-        <p:style>
-          <a:lnRef idx="1">
-            <a:schemeClr val="accent1"/>
-          </a:lnRef>
-          <a:fillRef idx="3">
-            <a:schemeClr val="accent1"/>
-          </a:fillRef>
-          <a:effectRef idx="2">
-            <a:schemeClr val="accent1"/>
-          </a:effectRef>
-          <a:fontRef idx="minor">
-            <a:schemeClr val="lt1"/>
-          </a:fontRef>
-        </p:style>
-        <p:txBody>
-          <a:bodyPr rtlCol="0" anchor="ctr" lIns="45720" rIns="45720" tIns="27432" bIns="27432" wrap="square"/>
-          <a:lstStyle/>
-          <a:p>
-            <a:pPr algn="ctr"/>
-          </a:p>
-        </p:txBody>
-      </p:sp>
-      <p:sp>
-        <p:nvSpPr>
-          <p:cNvPr id="23" name="TextBox 22"/>
-          <p:cNvSpPr txBox="1"/>
-          <p:nvPr/>
-        </p:nvSpPr>
-        <p:spPr>
-          <a:xfrm>
-            <a:off x="640080" y="3566160"/>
-            <a:ext cx="548640" cy="548640"/>
-          </a:xfrm>
-          <a:prstGeom prst="rect">
-            <a:avLst/>
-          </a:prstGeom>
-          <a:noFill/>
-        </p:spPr>
-        <p:txBody>
-          <a:bodyPr wrap="square" lIns="45720" rIns="45720" tIns="27432" bIns="27432" anchor="ctr">
-            <a:spAutoFit/>
-          </a:bodyPr>
-          <a:lstStyle/>
-          <a:p>
-            <a:pPr algn="l"/>
-            <a:r>
-              <a:rPr sz="1200" b="1" i="0">
-                <a:solidFill>
-                  <a:srgbClr val="F96167"/>
-                </a:solidFill>
-                <a:latin typeface="Calibri"/>
-              </a:rPr>
-              <a:t>A3</a:t>
-            </a:r>
-          </a:p>
-        </p:txBody>
-      </p:sp>
-      <p:sp>
-        <p:nvSpPr>
-          <p:cNvPr id="24" name="TextBox 23"/>
-          <p:cNvSpPr txBox="1"/>
-          <p:nvPr/>
-        </p:nvSpPr>
-        <p:spPr>
-          <a:xfrm>
-            <a:off x="1371600" y="3566160"/>
-            <a:ext cx="2743200" cy="548640"/>
-          </a:xfrm>
-          <a:prstGeom prst="rect">
-            <a:avLst/>
-          </a:prstGeom>
-          <a:noFill/>
-        </p:spPr>
-        <p:txBody>
-          <a:bodyPr wrap="square" lIns="45720" rIns="45720" tIns="27432" bIns="27432" anchor="ctr">
-            <a:spAutoFit/>
-          </a:bodyPr>
-          <a:lstStyle/>
-          <a:p>
-            <a:pPr algn="l"/>
-            <a:r>
-              <a:rPr sz="1200" b="1" i="0">
-                <a:solidFill>
-                  <a:srgbClr val="1E2761"/>
-                </a:solidFill>
-                <a:latin typeface="Calibri"/>
-              </a:rPr>
-              <a:t>Edge masking</a:t>
-            </a:r>
-          </a:p>
-        </p:txBody>
-      </p:sp>
-      <p:sp>
-        <p:nvSpPr>
-          <p:cNvPr id="25" name="TextBox 24"/>
-          <p:cNvSpPr txBox="1"/>
-          <p:nvPr/>
-        </p:nvSpPr>
-        <p:spPr>
-          <a:xfrm>
-            <a:off x="4297680" y="3566160"/>
-            <a:ext cx="3749040" cy="548640"/>
-          </a:xfrm>
-          <a:prstGeom prst="rect">
-            <a:avLst/>
-          </a:prstGeom>
-          <a:noFill/>
-        </p:spPr>
-        <p:txBody>
-          <a:bodyPr wrap="square" lIns="45720" rIns="45720" tIns="27432" bIns="27432" anchor="ctr">
-            <a:spAutoFit/>
-          </a:bodyPr>
-          <a:lstStyle/>
-          <a:p>
-            <a:pPr algn="l"/>
-            <a:r>
-              <a:rPr sz="1200" b="0" i="0">
-                <a:solidFill>
-                  <a:srgbClr val="36454F"/>
-                </a:solidFill>
-                <a:latin typeface="Calibri"/>
-              </a:rPr>
-              <a:t>full / support-only / bipartite</a:t>
-            </a:r>
-          </a:p>
-        </p:txBody>
-      </p:sp>
-      <p:sp>
-        <p:nvSpPr>
-          <p:cNvPr id="26" name="TextBox 25"/>
-          <p:cNvSpPr txBox="1"/>
-          <p:nvPr/>
-        </p:nvSpPr>
-        <p:spPr>
-          <a:xfrm>
-            <a:off x="8229600" y="3566160"/>
-            <a:ext cx="3474720" cy="548640"/>
-          </a:xfrm>
-          <a:prstGeom prst="rect">
-            <a:avLst/>
-          </a:prstGeom>
-          <a:noFill/>
-        </p:spPr>
-        <p:txBody>
-          <a:bodyPr wrap="square" lIns="45720" rIns="45720" tIns="27432" bIns="27432" anchor="ctr">
-            <a:spAutoFit/>
-          </a:bodyPr>
-          <a:lstStyle/>
-          <a:p>
-            <a:pPr algn="l"/>
-            <a:r>
-              <a:rPr sz="1200" b="0" i="0">
-                <a:solidFill>
-                  <a:srgbClr val="36454F"/>
-                </a:solidFill>
-                <a:latin typeface="Calibri"/>
-              </a:rPr>
-              <a:t>Validate M3</a:t>
-            </a:r>
-          </a:p>
-        </p:txBody>
-      </p:sp>
-      <p:sp>
-        <p:nvSpPr>
-          <p:cNvPr id="27" name="Rectangle 26"/>
-          <p:cNvSpPr/>
-          <p:nvPr/>
-        </p:nvSpPr>
-        <p:spPr>
-          <a:xfrm>
-            <a:off x="502920" y="4160520"/>
-            <a:ext cx="11247120" cy="548640"/>
-          </a:xfrm>
-          <a:prstGeom prst="rect">
-            <a:avLst/>
-          </a:prstGeom>
-          <a:solidFill>
-            <a:srgbClr val="FFFFFF"/>
-          </a:solidFill>
-          <a:ln>
-            <a:noFill/>
-          </a:ln>
-          <a:effectLst/>
-        </p:spPr>
-        <p:style>
-          <a:lnRef idx="1">
-            <a:schemeClr val="accent1"/>
-          </a:lnRef>
-          <a:fillRef idx="3">
-            <a:schemeClr val="accent1"/>
-          </a:fillRef>
-          <a:effectRef idx="2">
-            <a:schemeClr val="accent1"/>
-          </a:effectRef>
-          <a:fontRef idx="minor">
-            <a:schemeClr val="lt1"/>
-          </a:fontRef>
-        </p:style>
-        <p:txBody>
-          <a:bodyPr rtlCol="0" anchor="ctr" lIns="45720" rIns="45720" tIns="27432" bIns="27432" wrap="square"/>
-          <a:lstStyle/>
-          <a:p>
-            <a:pPr algn="ctr"/>
-          </a:p>
-        </p:txBody>
-      </p:sp>
-      <p:sp>
-        <p:nvSpPr>
-          <p:cNvPr id="28" name="TextBox 27"/>
-          <p:cNvSpPr txBox="1"/>
-          <p:nvPr/>
-        </p:nvSpPr>
-        <p:spPr>
-          <a:xfrm>
-            <a:off x="640080" y="4160520"/>
-            <a:ext cx="548640" cy="548640"/>
-          </a:xfrm>
-          <a:prstGeom prst="rect">
-            <a:avLst/>
-          </a:prstGeom>
-          <a:noFill/>
-        </p:spPr>
-        <p:txBody>
-          <a:bodyPr wrap="square" lIns="45720" rIns="45720" tIns="27432" bIns="27432" anchor="ctr">
-            <a:spAutoFit/>
-          </a:bodyPr>
-          <a:lstStyle/>
-          <a:p>
-            <a:pPr algn="l"/>
-            <a:r>
-              <a:rPr sz="1200" b="1" i="0">
-                <a:solidFill>
-                  <a:srgbClr val="F96167"/>
-                </a:solidFill>
-                <a:latin typeface="Calibri"/>
-              </a:rPr>
-              <a:t>A4</a:t>
-            </a:r>
-          </a:p>
-        </p:txBody>
-      </p:sp>
-      <p:sp>
-        <p:nvSpPr>
-          <p:cNvPr id="29" name="TextBox 28"/>
-          <p:cNvSpPr txBox="1"/>
-          <p:nvPr/>
-        </p:nvSpPr>
-        <p:spPr>
-          <a:xfrm>
-            <a:off x="1371600" y="4160520"/>
-            <a:ext cx="2743200" cy="548640"/>
-          </a:xfrm>
-          <a:prstGeom prst="rect">
-            <a:avLst/>
-          </a:prstGeom>
-          <a:noFill/>
-        </p:spPr>
-        <p:txBody>
-          <a:bodyPr wrap="square" lIns="45720" rIns="45720" tIns="27432" bIns="27432" anchor="ctr">
-            <a:spAutoFit/>
-          </a:bodyPr>
-          <a:lstStyle/>
-          <a:p>
-            <a:pPr algn="l"/>
-            <a:r>
-              <a:rPr sz="1200" b="1" i="0">
-                <a:solidFill>
-                  <a:srgbClr val="1E2761"/>
-                </a:solidFill>
-                <a:latin typeface="Calibri"/>
-              </a:rPr>
-              <a:t>Contrastive weight λ</a:t>
-            </a:r>
-          </a:p>
-        </p:txBody>
-      </p:sp>
-      <p:sp>
-        <p:nvSpPr>
-          <p:cNvPr id="30" name="TextBox 29"/>
-          <p:cNvSpPr txBox="1"/>
-          <p:nvPr/>
-        </p:nvSpPr>
-        <p:spPr>
-          <a:xfrm>
-            <a:off x="4297680" y="4160520"/>
-            <a:ext cx="3749040" cy="548640"/>
-          </a:xfrm>
-          <a:prstGeom prst="rect">
-            <a:avLst/>
-          </a:prstGeom>
-          <a:noFill/>
-        </p:spPr>
-        <p:txBody>
-          <a:bodyPr wrap="square" lIns="45720" rIns="45720" tIns="27432" bIns="27432" anchor="ctr">
-            <a:spAutoFit/>
-          </a:bodyPr>
-          <a:lstStyle/>
-          <a:p>
-            <a:pPr algn="l"/>
-            <a:r>
-              <a:rPr sz="1200" b="0" i="0">
-                <a:solidFill>
-                  <a:srgbClr val="36454F"/>
-                </a:solidFill>
-                <a:latin typeface="Calibri"/>
-              </a:rPr>
-              <a:t>λ ∈ {0, 0.1, 0.5, 1.0}</a:t>
-            </a:r>
-          </a:p>
-        </p:txBody>
-      </p:sp>
-      <p:sp>
-        <p:nvSpPr>
-          <p:cNvPr id="31" name="TextBox 30"/>
-          <p:cNvSpPr txBox="1"/>
-          <p:nvPr/>
-        </p:nvSpPr>
-        <p:spPr>
-          <a:xfrm>
-            <a:off x="8229600" y="4160520"/>
-            <a:ext cx="3474720" cy="548640"/>
-          </a:xfrm>
-          <a:prstGeom prst="rect">
-            <a:avLst/>
-          </a:prstGeom>
-          <a:noFill/>
-        </p:spPr>
-        <p:txBody>
-          <a:bodyPr wrap="square" lIns="45720" rIns="45720" tIns="27432" bIns="27432" anchor="ctr">
-            <a:spAutoFit/>
-          </a:bodyPr>
-          <a:lstStyle/>
-          <a:p>
-            <a:pPr algn="l"/>
-            <a:r>
-              <a:rPr sz="1200" b="0" i="0">
-                <a:solidFill>
-                  <a:srgbClr val="36454F"/>
-                </a:solidFill>
-                <a:latin typeface="Calibri"/>
-              </a:rPr>
-              <a:t>Tune M4</a:t>
-            </a:r>
-          </a:p>
-        </p:txBody>
-      </p:sp>
-      <p:sp>
-        <p:nvSpPr>
-          <p:cNvPr id="32" name="Rectangle 31"/>
-          <p:cNvSpPr/>
-          <p:nvPr/>
-        </p:nvSpPr>
-        <p:spPr>
-          <a:xfrm>
-            <a:off x="502920" y="4754880"/>
-            <a:ext cx="11247120" cy="548640"/>
-          </a:xfrm>
-          <a:prstGeom prst="rect">
-            <a:avLst/>
-          </a:prstGeom>
-          <a:solidFill>
-            <a:srgbClr val="F5F7FA"/>
-          </a:solidFill>
-          <a:ln>
-            <a:noFill/>
-          </a:ln>
-          <a:effectLst/>
-        </p:spPr>
-        <p:style>
-          <a:lnRef idx="1">
-            <a:schemeClr val="accent1"/>
-          </a:lnRef>
-          <a:fillRef idx="3">
-            <a:schemeClr val="accent1"/>
-          </a:fillRef>
-          <a:effectRef idx="2">
-            <a:schemeClr val="accent1"/>
-          </a:effectRef>
-          <a:fontRef idx="minor">
-            <a:schemeClr val="lt1"/>
-          </a:fontRef>
-        </p:style>
-        <p:txBody>
-          <a:bodyPr rtlCol="0" anchor="ctr" lIns="45720" rIns="45720" tIns="27432" bIns="27432" wrap="square"/>
-          <a:lstStyle/>
-          <a:p>
-            <a:pPr algn="ctr"/>
-          </a:p>
-        </p:txBody>
-      </p:sp>
-      <p:sp>
-        <p:nvSpPr>
-          <p:cNvPr id="33" name="TextBox 32"/>
-          <p:cNvSpPr txBox="1"/>
-          <p:nvPr/>
-        </p:nvSpPr>
-        <p:spPr>
-          <a:xfrm>
-            <a:off x="640080" y="4754880"/>
-            <a:ext cx="548640" cy="548640"/>
-          </a:xfrm>
-          <a:prstGeom prst="rect">
-            <a:avLst/>
-          </a:prstGeom>
-          <a:noFill/>
-        </p:spPr>
-        <p:txBody>
-          <a:bodyPr wrap="square" lIns="45720" rIns="45720" tIns="27432" bIns="27432" anchor="ctr">
-            <a:spAutoFit/>
-          </a:bodyPr>
-          <a:lstStyle/>
-          <a:p>
-            <a:pPr algn="l"/>
-            <a:r>
-              <a:rPr sz="1200" b="1" i="0">
-                <a:solidFill>
-                  <a:srgbClr val="F96167"/>
-                </a:solidFill>
-                <a:latin typeface="Calibri"/>
-              </a:rPr>
-              <a:t>A5</a:t>
-            </a:r>
-          </a:p>
-        </p:txBody>
-      </p:sp>
-      <p:sp>
-        <p:nvSpPr>
-          <p:cNvPr id="34" name="TextBox 33"/>
-          <p:cNvSpPr txBox="1"/>
-          <p:nvPr/>
-        </p:nvSpPr>
-        <p:spPr>
-          <a:xfrm>
-            <a:off x="1371600" y="4754880"/>
-            <a:ext cx="2743200" cy="548640"/>
-          </a:xfrm>
-          <a:prstGeom prst="rect">
-            <a:avLst/>
-          </a:prstGeom>
-          <a:noFill/>
-        </p:spPr>
-        <p:txBody>
-          <a:bodyPr wrap="square" lIns="45720" rIns="45720" tIns="27432" bIns="27432" anchor="ctr">
-            <a:spAutoFit/>
-          </a:bodyPr>
-          <a:lstStyle/>
-          <a:p>
-            <a:pPr algn="l"/>
-            <a:r>
-              <a:rPr sz="1200" b="1" i="0">
-                <a:solidFill>
-                  <a:srgbClr val="1E2761"/>
-                </a:solidFill>
-                <a:latin typeface="Calibri"/>
-              </a:rPr>
-              <a:t>SSL pretraining</a:t>
-            </a:r>
-          </a:p>
-        </p:txBody>
-      </p:sp>
-      <p:sp>
-        <p:nvSpPr>
-          <p:cNvPr id="35" name="TextBox 34"/>
-          <p:cNvSpPr txBox="1"/>
-          <p:nvPr/>
-        </p:nvSpPr>
-        <p:spPr>
-          <a:xfrm>
-            <a:off x="4297680" y="4754880"/>
-            <a:ext cx="3749040" cy="548640"/>
-          </a:xfrm>
-          <a:prstGeom prst="rect">
-            <a:avLst/>
-          </a:prstGeom>
-          <a:noFill/>
-        </p:spPr>
-        <p:txBody>
-          <a:bodyPr wrap="square" lIns="45720" rIns="45720" tIns="27432" bIns="27432" anchor="ctr">
-            <a:spAutoFit/>
-          </a:bodyPr>
-          <a:lstStyle/>
-          <a:p>
-            <a:pPr algn="l"/>
-            <a:r>
-              <a:rPr sz="1200" b="0" i="0">
-                <a:solidFill>
-                  <a:srgbClr val="36454F"/>
-                </a:solidFill>
-                <a:latin typeface="Calibri"/>
-              </a:rPr>
-              <a:t>scratch / SSL / SSL+frozen</a:t>
-            </a:r>
-          </a:p>
-        </p:txBody>
-      </p:sp>
-      <p:sp>
-        <p:nvSpPr>
-          <p:cNvPr id="36" name="TextBox 35"/>
-          <p:cNvSpPr txBox="1"/>
-          <p:nvPr/>
-        </p:nvSpPr>
-        <p:spPr>
-          <a:xfrm>
-            <a:off x="8229600" y="4754880"/>
-            <a:ext cx="3474720" cy="548640"/>
-          </a:xfrm>
-          <a:prstGeom prst="rect">
-            <a:avLst/>
-          </a:prstGeom>
-          <a:noFill/>
-        </p:spPr>
-        <p:txBody>
-          <a:bodyPr wrap="square" lIns="45720" rIns="45720" tIns="27432" bIns="27432" anchor="ctr">
-            <a:spAutoFit/>
-          </a:bodyPr>
-          <a:lstStyle/>
-          <a:p>
-            <a:pPr algn="l"/>
-            <a:r>
-              <a:rPr sz="1200" b="0" i="0">
-                <a:solidFill>
-                  <a:srgbClr val="36454F"/>
-                </a:solidFill>
-                <a:latin typeface="Calibri"/>
-              </a:rPr>
-              <a:t>Validate M5</a:t>
-            </a:r>
-          </a:p>
-        </p:txBody>
-      </p:sp>
-      <p:sp>
-        <p:nvSpPr>
-          <p:cNvPr id="37" name="TextBox 36"/>
-          <p:cNvSpPr txBox="1"/>
-          <p:nvPr/>
-        </p:nvSpPr>
-        <p:spPr>
-          <a:xfrm>
-            <a:off x="502920" y="5852160"/>
-            <a:ext cx="11185855" cy="365760"/>
-          </a:xfrm>
-          <a:prstGeom prst="rect">
-            <a:avLst/>
-          </a:prstGeom>
-          <a:noFill/>
-        </p:spPr>
-        <p:txBody>
-          <a:bodyPr wrap="square" lIns="45720" rIns="45720" tIns="27432" bIns="27432" anchor="t">
-            <a:spAutoFit/>
-          </a:bodyPr>
-          <a:lstStyle/>
-          <a:p>
-            <a:pPr algn="ctr"/>
-            <a:r>
-              <a:rPr sz="1100" b="0" i="1">
-                <a:solidFill>
-                  <a:srgbClr val="888A90"/>
-                </a:solidFill>
-                <a:latin typeface="Calibri"/>
-              </a:rPr>
-              <a:t>All runs: 5-way 5-shot on merged 673-task pool, 1000-episode meta-test.</a:t>
-            </a:r>
-          </a:p>
-        </p:txBody>
-      </p:sp>
-    </p:spTree>
-  </p:cSld>
-  <p:clrMapOvr>
-    <a:masterClrMapping/>
-  </p:clrMapOvr>
-</p:sld>
-</file>
-
-<file path=ppt/slides/slide13.xml><?xml version="1.0" encoding="utf-8"?>
-<p:sld xmlns:a="http://schemas.openxmlformats.org/drawingml/2006/main" xmlns:p="http://schemas.openxmlformats.org/presentationml/2006/main" xmlns:r="http://schemas.openxmlformats.org/officeDocument/2006/relationships">
-  <p:cSld>
-    <p:bg>
-      <p:bgPr>
-        <a:solidFill>
-          <a:srgbClr val="FFFFFF"/>
-        </a:solidFill>
-        <a:effectLst/>
-      </p:bgPr>
-    </p:bg>
-    <p:spTree>
-      <p:nvGrpSpPr>
-        <p:cNvPr id="1" name=""/>
-        <p:cNvGrpSpPr/>
-        <p:nvPr/>
-      </p:nvGrpSpPr>
-      <p:grpSpPr/>
-      <p:sp>
-        <p:nvSpPr>
-          <p:cNvPr id="2" name="Rectangle 1"/>
-          <p:cNvSpPr/>
-          <p:nvPr/>
-        </p:nvSpPr>
-        <p:spPr>
-          <a:xfrm>
-            <a:off x="0" y="0"/>
-            <a:ext cx="256032" cy="6858000"/>
-          </a:xfrm>
-          <a:prstGeom prst="rect">
-            <a:avLst/>
-          </a:prstGeom>
-          <a:solidFill>
-            <a:srgbClr val="F96167"/>
-          </a:solidFill>
-          <a:ln>
-            <a:noFill/>
-          </a:ln>
-          <a:effectLst/>
-        </p:spPr>
-        <p:style>
-          <a:lnRef idx="1">
-            <a:schemeClr val="accent1"/>
-          </a:lnRef>
-          <a:fillRef idx="3">
-            <a:schemeClr val="accent1"/>
-          </a:fillRef>
-          <a:effectRef idx="2">
-            <a:schemeClr val="accent1"/>
-          </a:effectRef>
-          <a:fontRef idx="minor">
-            <a:schemeClr val="lt1"/>
-          </a:fontRef>
-        </p:style>
-        <p:txBody>
-          <a:bodyPr rtlCol="0" anchor="ctr" lIns="45720" rIns="45720" tIns="27432" bIns="27432" wrap="square"/>
-          <a:lstStyle/>
-          <a:p>
-            <a:pPr algn="ctr"/>
-          </a:p>
-        </p:txBody>
-      </p:sp>
-      <p:sp>
-        <p:nvSpPr>
-          <p:cNvPr id="3" name="Rounded Rectangle 2"/>
-          <p:cNvSpPr/>
-          <p:nvPr/>
-        </p:nvSpPr>
-        <p:spPr>
-          <a:xfrm>
-            <a:off x="502920" y="320040"/>
-            <a:ext cx="1783080" cy="320040"/>
-          </a:xfrm>
-          <a:prstGeom prst="roundRect">
-            <a:avLst/>
-          </a:prstGeom>
-          <a:solidFill>
-            <a:srgbClr val="CADCFC"/>
-          </a:solidFill>
-          <a:ln>
-            <a:noFill/>
-          </a:ln>
-          <a:effectLst/>
-        </p:spPr>
-        <p:style>
-          <a:lnRef idx="1">
-            <a:schemeClr val="accent1"/>
-          </a:lnRef>
-          <a:fillRef idx="3">
-            <a:schemeClr val="accent1"/>
-          </a:fillRef>
-          <a:effectRef idx="2">
-            <a:schemeClr val="accent1"/>
-          </a:effectRef>
-          <a:fontRef idx="minor">
-            <a:schemeClr val="lt1"/>
-          </a:fontRef>
-        </p:style>
-        <p:txBody>
-          <a:bodyPr rtlCol="0" anchor="ctr" lIns="45720" rIns="45720" tIns="27432" bIns="27432" wrap="square"/>
-          <a:lstStyle/>
-          <a:p>
-            <a:pPr algn="ctr"/>
-            <a:r>
-              <a:rPr sz="1000" b="1" i="0">
-                <a:solidFill>
-                  <a:srgbClr val="1E2761"/>
-                </a:solidFill>
-                <a:latin typeface="Calibri"/>
-              </a:rPr>
-              <a:t>RESULTS v2</a:t>
-            </a:r>
-          </a:p>
-        </p:txBody>
-      </p:sp>
-      <p:sp>
-        <p:nvSpPr>
-          <p:cNvPr id="4" name="TextBox 3"/>
-          <p:cNvSpPr txBox="1"/>
-          <p:nvPr/>
-        </p:nvSpPr>
-        <p:spPr>
-          <a:xfrm>
-            <a:off x="502920" y="777240"/>
-            <a:ext cx="11185855" cy="685800"/>
-          </a:xfrm>
-          <a:prstGeom prst="rect">
-            <a:avLst/>
-          </a:prstGeom>
-          <a:noFill/>
-        </p:spPr>
-        <p:txBody>
-          <a:bodyPr wrap="square" lIns="45720" rIns="45720" tIns="27432" bIns="27432" anchor="t">
-            <a:spAutoFit/>
-          </a:bodyPr>
-          <a:lstStyle/>
-          <a:p>
-            <a:pPr algn="l"/>
-            <a:r>
-              <a:rPr sz="2800" b="1" i="0">
-                <a:solidFill>
-                  <a:srgbClr val="1E2761"/>
-                </a:solidFill>
-                <a:latin typeface="Calibri"/>
-              </a:rPr>
-              <a:t>v2 — Expected Performance Targets</a:t>
-            </a:r>
-          </a:p>
-        </p:txBody>
-      </p:sp>
-      <p:sp>
-        <p:nvSpPr>
-          <p:cNvPr id="5" name="TextBox 4"/>
-          <p:cNvSpPr txBox="1"/>
-          <p:nvPr/>
-        </p:nvSpPr>
-        <p:spPr>
-          <a:xfrm>
-            <a:off x="11277295" y="6537960"/>
-            <a:ext cx="731520" cy="274320"/>
-          </a:xfrm>
-          <a:prstGeom prst="rect">
-            <a:avLst/>
-          </a:prstGeom>
-          <a:noFill/>
-        </p:spPr>
-        <p:txBody>
-          <a:bodyPr wrap="square" lIns="45720" rIns="45720" tIns="27432" bIns="27432" anchor="t">
-            <a:spAutoFit/>
-          </a:bodyPr>
-          <a:lstStyle/>
-          <a:p>
-            <a:pPr algn="r"/>
-            <a:r>
-              <a:rPr sz="900" b="0" i="0">
-                <a:solidFill>
-                  <a:srgbClr val="888A90"/>
-                </a:solidFill>
-                <a:latin typeface="Calibri"/>
-              </a:rPr>
-              <a:t>13 / 14</a:t>
-            </a:r>
-          </a:p>
-        </p:txBody>
-      </p:sp>
-      <p:sp>
-        <p:nvSpPr>
-          <p:cNvPr id="6" name="TextBox 5"/>
-          <p:cNvSpPr txBox="1"/>
-          <p:nvPr/>
-        </p:nvSpPr>
-        <p:spPr>
-          <a:xfrm>
-            <a:off x="502920" y="6537960"/>
-            <a:ext cx="5486400" cy="274320"/>
-          </a:xfrm>
-          <a:prstGeom prst="rect">
-            <a:avLst/>
-          </a:prstGeom>
-          <a:noFill/>
-        </p:spPr>
-        <p:txBody>
-          <a:bodyPr wrap="square" lIns="45720" rIns="45720" tIns="27432" bIns="27432" anchor="t">
-            <a:spAutoFit/>
-          </a:bodyPr>
-          <a:lstStyle/>
-          <a:p>
-            <a:pPr algn="l"/>
-            <a:r>
-              <a:rPr sz="900" b="0" i="1">
-                <a:solidFill>
-                  <a:srgbClr val="888A90"/>
-                </a:solidFill>
-                <a:latin typeface="Calibri"/>
-              </a:rPr>
-              <a:t>Graph-of-Shots · Few-Shot Molecular Graph Classification</a:t>
-            </a:r>
-          </a:p>
-        </p:txBody>
-      </p:sp>
-      <p:sp>
-        <p:nvSpPr>
-          <p:cNvPr id="7" name="Rectangle 6"/>
-          <p:cNvSpPr/>
-          <p:nvPr/>
-        </p:nvSpPr>
-        <p:spPr>
-          <a:xfrm>
-            <a:off x="502920" y="1737360"/>
-            <a:ext cx="11155680" cy="502920"/>
-          </a:xfrm>
-          <a:prstGeom prst="rect">
-            <a:avLst/>
-          </a:prstGeom>
-          <a:solidFill>
-            <a:srgbClr val="1E2761"/>
-          </a:solidFill>
-          <a:ln>
-            <a:noFill/>
-          </a:ln>
-          <a:effectLst/>
-        </p:spPr>
-        <p:style>
-          <a:lnRef idx="1">
-            <a:schemeClr val="accent1"/>
-          </a:lnRef>
-          <a:fillRef idx="3">
-            <a:schemeClr val="accent1"/>
-          </a:fillRef>
-          <a:effectRef idx="2">
-            <a:schemeClr val="accent1"/>
-          </a:effectRef>
-          <a:fontRef idx="minor">
-            <a:schemeClr val="lt1"/>
-          </a:fontRef>
-        </p:style>
-        <p:txBody>
-          <a:bodyPr rtlCol="0" anchor="ctr" lIns="45720" rIns="45720" tIns="27432" bIns="27432" wrap="square"/>
-          <a:lstStyle/>
-          <a:p>
-            <a:pPr algn="ctr"/>
-          </a:p>
-        </p:txBody>
-      </p:sp>
-      <p:sp>
-        <p:nvSpPr>
-          <p:cNvPr id="8" name="TextBox 7"/>
-          <p:cNvSpPr txBox="1"/>
-          <p:nvPr/>
-        </p:nvSpPr>
-        <p:spPr>
-          <a:xfrm>
-            <a:off x="502920" y="1737360"/>
-            <a:ext cx="4389120" cy="502920"/>
-          </a:xfrm>
-          <a:prstGeom prst="rect">
-            <a:avLst/>
-          </a:prstGeom>
-          <a:noFill/>
-        </p:spPr>
-        <p:txBody>
-          <a:bodyPr wrap="square" lIns="45720" rIns="45720" tIns="27432" bIns="27432" anchor="ctr">
-            <a:spAutoFit/>
-          </a:bodyPr>
-          <a:lstStyle/>
-          <a:p>
-            <a:pPr algn="ctr"/>
-            <a:r>
-              <a:rPr sz="1200" b="1" i="0">
-                <a:solidFill>
-                  <a:srgbClr val="FFFFFF"/>
-                </a:solidFill>
-                <a:latin typeface="Calibri"/>
-              </a:rPr>
-              <a:t>Configuration</a:t>
-            </a:r>
-          </a:p>
-        </p:txBody>
-      </p:sp>
-      <p:sp>
-        <p:nvSpPr>
-          <p:cNvPr id="9" name="TextBox 8"/>
-          <p:cNvSpPr txBox="1"/>
-          <p:nvPr/>
-        </p:nvSpPr>
-        <p:spPr>
-          <a:xfrm>
-            <a:off x="4892040" y="1737360"/>
-            <a:ext cx="3657600" cy="502920"/>
-          </a:xfrm>
-          <a:prstGeom prst="rect">
-            <a:avLst/>
-          </a:prstGeom>
-          <a:noFill/>
-        </p:spPr>
-        <p:txBody>
-          <a:bodyPr wrap="square" lIns="45720" rIns="45720" tIns="27432" bIns="27432" anchor="ctr">
-            <a:spAutoFit/>
-          </a:bodyPr>
-          <a:lstStyle/>
-          <a:p>
-            <a:pPr algn="ctr"/>
-            <a:r>
-              <a:rPr sz="1200" b="1" i="0">
-                <a:solidFill>
-                  <a:srgbClr val="FFFFFF"/>
-                </a:solidFill>
-                <a:latin typeface="Calibri"/>
-              </a:rPr>
-              <a:t>Meta-test ROC-AUC (5w5s)</a:t>
-            </a:r>
-          </a:p>
-        </p:txBody>
-      </p:sp>
-      <p:sp>
-        <p:nvSpPr>
-          <p:cNvPr id="10" name="TextBox 9"/>
-          <p:cNvSpPr txBox="1"/>
-          <p:nvPr/>
-        </p:nvSpPr>
-        <p:spPr>
-          <a:xfrm>
-            <a:off x="8549640" y="1737360"/>
-            <a:ext cx="3108960" cy="502920"/>
-          </a:xfrm>
-          <a:prstGeom prst="rect">
-            <a:avLst/>
-          </a:prstGeom>
-          <a:noFill/>
-        </p:spPr>
-        <p:txBody>
-          <a:bodyPr wrap="square" lIns="45720" rIns="45720" tIns="27432" bIns="27432" anchor="ctr">
-            <a:spAutoFit/>
-          </a:bodyPr>
-          <a:lstStyle/>
-          <a:p>
-            <a:pPr algn="ctr"/>
-            <a:r>
-              <a:rPr sz="1200" b="1" i="0">
-                <a:solidFill>
-                  <a:srgbClr val="FFFFFF"/>
-                </a:solidFill>
-                <a:latin typeface="Calibri"/>
-              </a:rPr>
-              <a:t>Source</a:t>
-            </a:r>
-          </a:p>
-        </p:txBody>
-      </p:sp>
-      <p:sp>
-        <p:nvSpPr>
-          <p:cNvPr id="11" name="Rectangle 10"/>
-          <p:cNvSpPr/>
-          <p:nvPr/>
-        </p:nvSpPr>
-        <p:spPr>
-          <a:xfrm>
-            <a:off x="502920" y="2240280"/>
-            <a:ext cx="11155680" cy="502920"/>
-          </a:xfrm>
-          <a:prstGeom prst="rect">
-            <a:avLst/>
-          </a:prstGeom>
-          <a:solidFill>
-            <a:srgbClr val="CADCFC"/>
-          </a:solidFill>
-          <a:ln>
-            <a:noFill/>
-          </a:ln>
-          <a:effectLst/>
-        </p:spPr>
-        <p:style>
-          <a:lnRef idx="1">
-            <a:schemeClr val="accent1"/>
-          </a:lnRef>
-          <a:fillRef idx="3">
-            <a:schemeClr val="accent1"/>
-          </a:fillRef>
-          <a:effectRef idx="2">
-            <a:schemeClr val="accent1"/>
-          </a:effectRef>
-          <a:fontRef idx="minor">
-            <a:schemeClr val="lt1"/>
-          </a:fontRef>
-        </p:style>
-        <p:txBody>
-          <a:bodyPr rtlCol="0" anchor="ctr" lIns="45720" rIns="45720" tIns="27432" bIns="27432" wrap="square"/>
-          <a:lstStyle/>
-          <a:p>
-            <a:pPr algn="ctr"/>
-          </a:p>
-        </p:txBody>
-      </p:sp>
-      <p:sp>
-        <p:nvSpPr>
-          <p:cNvPr id="12" name="TextBox 11"/>
-          <p:cNvSpPr txBox="1"/>
-          <p:nvPr/>
-        </p:nvSpPr>
-        <p:spPr>
-          <a:xfrm>
-            <a:off x="640080" y="2240280"/>
-            <a:ext cx="4206240" cy="502920"/>
-          </a:xfrm>
-          <a:prstGeom prst="rect">
-            <a:avLst/>
-          </a:prstGeom>
-          <a:noFill/>
-        </p:spPr>
-        <p:txBody>
-          <a:bodyPr wrap="square" lIns="45720" rIns="45720" tIns="27432" bIns="27432" anchor="ctr">
-            <a:spAutoFit/>
-          </a:bodyPr>
-          <a:lstStyle/>
-          <a:p>
-            <a:pPr algn="l"/>
-            <a:r>
-              <a:rPr sz="1200" b="1" i="0">
-                <a:solidFill>
-                  <a:srgbClr val="1E2761"/>
-                </a:solidFill>
-                <a:latin typeface="Calibri"/>
-              </a:rPr>
-              <a:t>ProtoNet baseline</a:t>
-            </a:r>
-          </a:p>
-        </p:txBody>
-      </p:sp>
-      <p:sp>
-        <p:nvSpPr>
-          <p:cNvPr id="13" name="TextBox 12"/>
-          <p:cNvSpPr txBox="1"/>
-          <p:nvPr/>
-        </p:nvSpPr>
-        <p:spPr>
-          <a:xfrm>
-            <a:off x="4892040" y="2240280"/>
-            <a:ext cx="3657600" cy="502920"/>
-          </a:xfrm>
-          <a:prstGeom prst="rect">
-            <a:avLst/>
-          </a:prstGeom>
-          <a:noFill/>
-        </p:spPr>
-        <p:txBody>
-          <a:bodyPr wrap="square" lIns="45720" rIns="45720" tIns="27432" bIns="27432" anchor="ctr">
-            <a:spAutoFit/>
-          </a:bodyPr>
-          <a:lstStyle/>
-          <a:p>
-            <a:pPr algn="ctr"/>
-            <a:r>
-              <a:rPr sz="1300" b="1" i="0">
-                <a:solidFill>
-                  <a:srgbClr val="1E2761"/>
-                </a:solidFill>
-                <a:latin typeface="Calibri"/>
-              </a:rPr>
-              <a:t>0.701</a:t>
-            </a:r>
-          </a:p>
-        </p:txBody>
-      </p:sp>
-      <p:sp>
-        <p:nvSpPr>
-          <p:cNvPr id="14" name="TextBox 13"/>
-          <p:cNvSpPr txBox="1"/>
-          <p:nvPr/>
-        </p:nvSpPr>
-        <p:spPr>
-          <a:xfrm>
-            <a:off x="8686800" y="2240280"/>
-            <a:ext cx="2926080" cy="502920"/>
-          </a:xfrm>
-          <a:prstGeom prst="rect">
-            <a:avLst/>
-          </a:prstGeom>
-          <a:noFill/>
-        </p:spPr>
-        <p:txBody>
-          <a:bodyPr wrap="square" lIns="45720" rIns="45720" tIns="27432" bIns="27432" anchor="ctr">
-            <a:spAutoFit/>
-          </a:bodyPr>
-          <a:lstStyle/>
-          <a:p>
-            <a:pPr algn="l"/>
-            <a:r>
-              <a:rPr sz="1100" b="0" i="1">
-                <a:solidFill>
-                  <a:srgbClr val="36454F"/>
-                </a:solidFill>
-                <a:latin typeface="Calibri"/>
-              </a:rPr>
-              <a:t>observed</a:t>
-            </a:r>
-          </a:p>
-        </p:txBody>
-      </p:sp>
-      <p:sp>
-        <p:nvSpPr>
-          <p:cNvPr id="15" name="Rectangle 14"/>
-          <p:cNvSpPr/>
-          <p:nvPr/>
-        </p:nvSpPr>
-        <p:spPr>
-          <a:xfrm>
-            <a:off x="502920" y="2743200"/>
-            <a:ext cx="11155680" cy="502920"/>
-          </a:xfrm>
-          <a:prstGeom prst="rect">
-            <a:avLst/>
-          </a:prstGeom>
-          <a:solidFill>
-            <a:srgbClr val="CADCFC"/>
-          </a:solidFill>
-          <a:ln>
-            <a:noFill/>
-          </a:ln>
-          <a:effectLst/>
-        </p:spPr>
-        <p:style>
-          <a:lnRef idx="1">
-            <a:schemeClr val="accent1"/>
-          </a:lnRef>
-          <a:fillRef idx="3">
-            <a:schemeClr val="accent1"/>
-          </a:fillRef>
-          <a:effectRef idx="2">
-            <a:schemeClr val="accent1"/>
-          </a:effectRef>
-          <a:fontRef idx="minor">
-            <a:schemeClr val="lt1"/>
-          </a:fontRef>
-        </p:style>
-        <p:txBody>
-          <a:bodyPr rtlCol="0" anchor="ctr" lIns="45720" rIns="45720" tIns="27432" bIns="27432" wrap="square"/>
-          <a:lstStyle/>
-          <a:p>
-            <a:pPr algn="ctr"/>
-          </a:p>
-        </p:txBody>
-      </p:sp>
-      <p:sp>
-        <p:nvSpPr>
-          <p:cNvPr id="16" name="TextBox 15"/>
-          <p:cNvSpPr txBox="1"/>
-          <p:nvPr/>
-        </p:nvSpPr>
-        <p:spPr>
-          <a:xfrm>
-            <a:off x="640080" y="2743200"/>
-            <a:ext cx="4206240" cy="502920"/>
-          </a:xfrm>
-          <a:prstGeom prst="rect">
-            <a:avLst/>
-          </a:prstGeom>
-          <a:noFill/>
-        </p:spPr>
-        <p:txBody>
-          <a:bodyPr wrap="square" lIns="45720" rIns="45720" tIns="27432" bIns="27432" anchor="ctr">
-            <a:spAutoFit/>
-          </a:bodyPr>
-          <a:lstStyle/>
-          <a:p>
-            <a:pPr algn="l"/>
-            <a:r>
-              <a:rPr sz="1200" b="1" i="0">
-                <a:solidFill>
-                  <a:srgbClr val="1E2761"/>
-                </a:solidFill>
-                <a:latin typeface="Calibri"/>
-              </a:rPr>
-              <a:t>GoS v1</a:t>
-            </a:r>
-          </a:p>
-        </p:txBody>
-      </p:sp>
-      <p:sp>
-        <p:nvSpPr>
-          <p:cNvPr id="17" name="TextBox 16"/>
-          <p:cNvSpPr txBox="1"/>
-          <p:nvPr/>
-        </p:nvSpPr>
-        <p:spPr>
-          <a:xfrm>
-            <a:off x="4892040" y="2743200"/>
-            <a:ext cx="3657600" cy="502920"/>
-          </a:xfrm>
-          <a:prstGeom prst="rect">
-            <a:avLst/>
-          </a:prstGeom>
-          <a:noFill/>
-        </p:spPr>
-        <p:txBody>
-          <a:bodyPr wrap="square" lIns="45720" rIns="45720" tIns="27432" bIns="27432" anchor="ctr">
-            <a:spAutoFit/>
-          </a:bodyPr>
-          <a:lstStyle/>
-          <a:p>
-            <a:pPr algn="ctr"/>
-            <a:r>
-              <a:rPr sz="1300" b="1" i="0">
-                <a:solidFill>
-                  <a:srgbClr val="1E2761"/>
-                </a:solidFill>
-                <a:latin typeface="Calibri"/>
-              </a:rPr>
-              <a:t>0.569</a:t>
-            </a:r>
-          </a:p>
-        </p:txBody>
-      </p:sp>
-      <p:sp>
-        <p:nvSpPr>
-          <p:cNvPr id="18" name="TextBox 17"/>
-          <p:cNvSpPr txBox="1"/>
-          <p:nvPr/>
-        </p:nvSpPr>
-        <p:spPr>
-          <a:xfrm>
-            <a:off x="8686800" y="2743200"/>
-            <a:ext cx="2926080" cy="502920"/>
-          </a:xfrm>
-          <a:prstGeom prst="rect">
-            <a:avLst/>
-          </a:prstGeom>
-          <a:noFill/>
-        </p:spPr>
-        <p:txBody>
-          <a:bodyPr wrap="square" lIns="45720" rIns="45720" tIns="27432" bIns="27432" anchor="ctr">
-            <a:spAutoFit/>
-          </a:bodyPr>
-          <a:lstStyle/>
-          <a:p>
-            <a:pPr algn="l"/>
-            <a:r>
-              <a:rPr sz="1100" b="0" i="1">
-                <a:solidFill>
-                  <a:srgbClr val="36454F"/>
-                </a:solidFill>
-                <a:latin typeface="Calibri"/>
-              </a:rPr>
-              <a:t>observed</a:t>
-            </a:r>
-          </a:p>
-        </p:txBody>
-      </p:sp>
-      <p:sp>
-        <p:nvSpPr>
-          <p:cNvPr id="19" name="Rectangle 18"/>
-          <p:cNvSpPr/>
-          <p:nvPr/>
-        </p:nvSpPr>
-        <p:spPr>
-          <a:xfrm>
-            <a:off x="502920" y="3246120"/>
-            <a:ext cx="11155680" cy="502920"/>
-          </a:xfrm>
-          <a:prstGeom prst="rect">
-            <a:avLst/>
-          </a:prstGeom>
-          <a:solidFill>
-            <a:srgbClr val="F5F7FA"/>
-          </a:solidFill>
-          <a:ln>
-            <a:noFill/>
-          </a:ln>
-          <a:effectLst/>
-        </p:spPr>
-        <p:style>
-          <a:lnRef idx="1">
-            <a:schemeClr val="accent1"/>
-          </a:lnRef>
-          <a:fillRef idx="3">
-            <a:schemeClr val="accent1"/>
-          </a:fillRef>
-          <a:effectRef idx="2">
-            <a:schemeClr val="accent1"/>
-          </a:effectRef>
-          <a:fontRef idx="minor">
-            <a:schemeClr val="lt1"/>
-          </a:fontRef>
-        </p:style>
-        <p:txBody>
-          <a:bodyPr rtlCol="0" anchor="ctr" lIns="45720" rIns="45720" tIns="27432" bIns="27432" wrap="square"/>
-          <a:lstStyle/>
-          <a:p>
-            <a:pPr algn="ctr"/>
-          </a:p>
-        </p:txBody>
-      </p:sp>
-      <p:sp>
-        <p:nvSpPr>
-          <p:cNvPr id="20" name="TextBox 19"/>
-          <p:cNvSpPr txBox="1"/>
-          <p:nvPr/>
-        </p:nvSpPr>
-        <p:spPr>
-          <a:xfrm>
-            <a:off x="640080" y="3246120"/>
-            <a:ext cx="4206240" cy="502920"/>
-          </a:xfrm>
-          <a:prstGeom prst="rect">
-            <a:avLst/>
-          </a:prstGeom>
-          <a:noFill/>
-        </p:spPr>
-        <p:txBody>
-          <a:bodyPr wrap="square" lIns="45720" rIns="45720" tIns="27432" bIns="27432" anchor="ctr">
-            <a:spAutoFit/>
-          </a:bodyPr>
-          <a:lstStyle/>
-          <a:p>
-            <a:pPr algn="l"/>
-            <a:r>
-              <a:rPr sz="1200" b="0" i="0">
-                <a:solidFill>
-                  <a:srgbClr val="1E2761"/>
-                </a:solidFill>
-                <a:latin typeface="Calibri"/>
-              </a:rPr>
-              <a:t>+ M1 residual prototype</a:t>
-            </a:r>
-          </a:p>
-        </p:txBody>
-      </p:sp>
-      <p:sp>
-        <p:nvSpPr>
-          <p:cNvPr id="21" name="TextBox 20"/>
-          <p:cNvSpPr txBox="1"/>
-          <p:nvPr/>
-        </p:nvSpPr>
-        <p:spPr>
-          <a:xfrm>
-            <a:off x="4892040" y="3246120"/>
-            <a:ext cx="3657600" cy="502920"/>
-          </a:xfrm>
-          <a:prstGeom prst="rect">
-            <a:avLst/>
-          </a:prstGeom>
-          <a:noFill/>
-        </p:spPr>
-        <p:txBody>
-          <a:bodyPr wrap="square" lIns="45720" rIns="45720" tIns="27432" bIns="27432" anchor="ctr">
-            <a:spAutoFit/>
-          </a:bodyPr>
-          <a:lstStyle/>
-          <a:p>
-            <a:pPr algn="ctr"/>
-            <a:r>
-              <a:rPr sz="1300" b="1" i="0">
-                <a:solidFill>
-                  <a:srgbClr val="F96167"/>
-                </a:solidFill>
-                <a:latin typeface="Calibri"/>
-              </a:rPr>
-              <a:t>≥ 0.700</a:t>
-            </a:r>
-          </a:p>
-        </p:txBody>
-      </p:sp>
-      <p:sp>
-        <p:nvSpPr>
-          <p:cNvPr id="22" name="TextBox 21"/>
-          <p:cNvSpPr txBox="1"/>
-          <p:nvPr/>
-        </p:nvSpPr>
-        <p:spPr>
-          <a:xfrm>
-            <a:off x="8686800" y="3246120"/>
-            <a:ext cx="2926080" cy="502920"/>
-          </a:xfrm>
-          <a:prstGeom prst="rect">
-            <a:avLst/>
-          </a:prstGeom>
-          <a:noFill/>
-        </p:spPr>
-        <p:txBody>
-          <a:bodyPr wrap="square" lIns="45720" rIns="45720" tIns="27432" bIns="27432" anchor="ctr">
-            <a:spAutoFit/>
-          </a:bodyPr>
-          <a:lstStyle/>
-          <a:p>
-            <a:pPr algn="l"/>
-            <a:r>
-              <a:rPr sz="1100" b="0" i="1">
-                <a:solidFill>
-                  <a:srgbClr val="36454F"/>
-                </a:solidFill>
-                <a:latin typeface="Calibri"/>
-              </a:rPr>
-              <a:t>safety net</a:t>
-            </a:r>
-          </a:p>
-        </p:txBody>
-      </p:sp>
-      <p:sp>
-        <p:nvSpPr>
-          <p:cNvPr id="23" name="Rectangle 22"/>
-          <p:cNvSpPr/>
-          <p:nvPr/>
-        </p:nvSpPr>
-        <p:spPr>
-          <a:xfrm>
-            <a:off x="502920" y="3749040"/>
-            <a:ext cx="11155680" cy="502920"/>
-          </a:xfrm>
-          <a:prstGeom prst="rect">
-            <a:avLst/>
-          </a:prstGeom>
-          <a:solidFill>
-            <a:srgbClr val="FFFFFF"/>
-          </a:solidFill>
-          <a:ln>
-            <a:noFill/>
-          </a:ln>
-          <a:effectLst/>
-        </p:spPr>
-        <p:style>
-          <a:lnRef idx="1">
-            <a:schemeClr val="accent1"/>
-          </a:lnRef>
-          <a:fillRef idx="3">
-            <a:schemeClr val="accent1"/>
-          </a:fillRef>
-          <a:effectRef idx="2">
-            <a:schemeClr val="accent1"/>
-          </a:effectRef>
-          <a:fontRef idx="minor">
-            <a:schemeClr val="lt1"/>
-          </a:fontRef>
-        </p:style>
-        <p:txBody>
-          <a:bodyPr rtlCol="0" anchor="ctr" lIns="45720" rIns="45720" tIns="27432" bIns="27432" wrap="square"/>
-          <a:lstStyle/>
-          <a:p>
-            <a:pPr algn="ctr"/>
-          </a:p>
-        </p:txBody>
-      </p:sp>
-      <p:sp>
-        <p:nvSpPr>
-          <p:cNvPr id="24" name="TextBox 23"/>
-          <p:cNvSpPr txBox="1"/>
-          <p:nvPr/>
-        </p:nvSpPr>
-        <p:spPr>
-          <a:xfrm>
-            <a:off x="640080" y="3749040"/>
-            <a:ext cx="4206240" cy="502920"/>
-          </a:xfrm>
-          <a:prstGeom prst="rect">
-            <a:avLst/>
-          </a:prstGeom>
-          <a:noFill/>
-        </p:spPr>
-        <p:txBody>
-          <a:bodyPr wrap="square" lIns="45720" rIns="45720" tIns="27432" bIns="27432" anchor="ctr">
-            <a:spAutoFit/>
-          </a:bodyPr>
-          <a:lstStyle/>
-          <a:p>
-            <a:pPr algn="l"/>
-            <a:r>
-              <a:rPr sz="1200" b="0" i="0">
-                <a:solidFill>
-                  <a:srgbClr val="1E2761"/>
-                </a:solidFill>
-                <a:latin typeface="Calibri"/>
-              </a:rPr>
-              <a:t>+ M2 1-layer GAT</a:t>
-            </a:r>
-          </a:p>
-        </p:txBody>
-      </p:sp>
-      <p:sp>
-        <p:nvSpPr>
-          <p:cNvPr id="25" name="TextBox 24"/>
-          <p:cNvSpPr txBox="1"/>
-          <p:nvPr/>
-        </p:nvSpPr>
-        <p:spPr>
-          <a:xfrm>
-            <a:off x="4892040" y="3749040"/>
-            <a:ext cx="3657600" cy="502920"/>
-          </a:xfrm>
-          <a:prstGeom prst="rect">
-            <a:avLst/>
-          </a:prstGeom>
-          <a:noFill/>
-        </p:spPr>
-        <p:txBody>
-          <a:bodyPr wrap="square" lIns="45720" rIns="45720" tIns="27432" bIns="27432" anchor="ctr">
-            <a:spAutoFit/>
-          </a:bodyPr>
-          <a:lstStyle/>
-          <a:p>
-            <a:pPr algn="ctr"/>
-            <a:r>
-              <a:rPr sz="1300" b="1" i="0">
-                <a:solidFill>
-                  <a:srgbClr val="F96167"/>
-                </a:solidFill>
-                <a:latin typeface="Calibri"/>
-              </a:rPr>
-              <a:t>+1 – 2 pp</a:t>
-            </a:r>
-          </a:p>
-        </p:txBody>
-      </p:sp>
-      <p:sp>
-        <p:nvSpPr>
-          <p:cNvPr id="26" name="TextBox 25"/>
-          <p:cNvSpPr txBox="1"/>
-          <p:nvPr/>
-        </p:nvSpPr>
-        <p:spPr>
-          <a:xfrm>
-            <a:off x="8686800" y="3749040"/>
-            <a:ext cx="2926080" cy="502920"/>
-          </a:xfrm>
-          <a:prstGeom prst="rect">
-            <a:avLst/>
-          </a:prstGeom>
-          <a:noFill/>
-        </p:spPr>
-        <p:txBody>
-          <a:bodyPr wrap="square" lIns="45720" rIns="45720" tIns="27432" bIns="27432" anchor="ctr">
-            <a:spAutoFit/>
-          </a:bodyPr>
-          <a:lstStyle/>
-          <a:p>
-            <a:pPr algn="l"/>
-            <a:r>
-              <a:rPr sz="1100" b="0" i="1">
-                <a:solidFill>
-                  <a:srgbClr val="36454F"/>
-                </a:solidFill>
-                <a:latin typeface="Calibri"/>
-              </a:rPr>
-              <a:t>over-smoothing fix</a:t>
-            </a:r>
-          </a:p>
-        </p:txBody>
-      </p:sp>
-      <p:sp>
-        <p:nvSpPr>
-          <p:cNvPr id="27" name="Rectangle 26"/>
-          <p:cNvSpPr/>
-          <p:nvPr/>
-        </p:nvSpPr>
-        <p:spPr>
-          <a:xfrm>
-            <a:off x="502920" y="4251960"/>
-            <a:ext cx="11155680" cy="502920"/>
-          </a:xfrm>
-          <a:prstGeom prst="rect">
-            <a:avLst/>
-          </a:prstGeom>
-          <a:solidFill>
-            <a:srgbClr val="F5F7FA"/>
-          </a:solidFill>
-          <a:ln>
-            <a:noFill/>
-          </a:ln>
-          <a:effectLst/>
-        </p:spPr>
-        <p:style>
-          <a:lnRef idx="1">
-            <a:schemeClr val="accent1"/>
-          </a:lnRef>
-          <a:fillRef idx="3">
-            <a:schemeClr val="accent1"/>
-          </a:fillRef>
-          <a:effectRef idx="2">
-            <a:schemeClr val="accent1"/>
-          </a:effectRef>
-          <a:fontRef idx="minor">
-            <a:schemeClr val="lt1"/>
-          </a:fontRef>
-        </p:style>
-        <p:txBody>
-          <a:bodyPr rtlCol="0" anchor="ctr" lIns="45720" rIns="45720" tIns="27432" bIns="27432" wrap="square"/>
-          <a:lstStyle/>
-          <a:p>
-            <a:pPr algn="ctr"/>
-          </a:p>
-        </p:txBody>
-      </p:sp>
-      <p:sp>
-        <p:nvSpPr>
-          <p:cNvPr id="28" name="TextBox 27"/>
-          <p:cNvSpPr txBox="1"/>
-          <p:nvPr/>
-        </p:nvSpPr>
-        <p:spPr>
-          <a:xfrm>
-            <a:off x="640080" y="4251960"/>
-            <a:ext cx="4206240" cy="502920"/>
-          </a:xfrm>
-          <a:prstGeom prst="rect">
-            <a:avLst/>
-          </a:prstGeom>
-          <a:noFill/>
-        </p:spPr>
-        <p:txBody>
-          <a:bodyPr wrap="square" lIns="45720" rIns="45720" tIns="27432" bIns="27432" anchor="ctr">
-            <a:spAutoFit/>
-          </a:bodyPr>
-          <a:lstStyle/>
-          <a:p>
-            <a:pPr algn="l"/>
-            <a:r>
-              <a:rPr sz="1200" b="0" i="0">
-                <a:solidFill>
-                  <a:srgbClr val="1E2761"/>
-                </a:solidFill>
-                <a:latin typeface="Calibri"/>
-              </a:rPr>
-              <a:t>+ M3 bipartite mask</a:t>
-            </a:r>
-          </a:p>
-        </p:txBody>
-      </p:sp>
-      <p:sp>
-        <p:nvSpPr>
-          <p:cNvPr id="29" name="TextBox 28"/>
-          <p:cNvSpPr txBox="1"/>
-          <p:nvPr/>
-        </p:nvSpPr>
-        <p:spPr>
-          <a:xfrm>
-            <a:off x="4892040" y="4251960"/>
-            <a:ext cx="3657600" cy="502920"/>
-          </a:xfrm>
-          <a:prstGeom prst="rect">
-            <a:avLst/>
-          </a:prstGeom>
-          <a:noFill/>
-        </p:spPr>
-        <p:txBody>
-          <a:bodyPr wrap="square" lIns="45720" rIns="45720" tIns="27432" bIns="27432" anchor="ctr">
-            <a:spAutoFit/>
-          </a:bodyPr>
-          <a:lstStyle/>
-          <a:p>
-            <a:pPr algn="ctr"/>
-            <a:r>
-              <a:rPr sz="1300" b="1" i="0">
-                <a:solidFill>
-                  <a:srgbClr val="F96167"/>
-                </a:solidFill>
-                <a:latin typeface="Calibri"/>
-              </a:rPr>
-              <a:t>+1 – 3 pp</a:t>
-            </a:r>
-          </a:p>
-        </p:txBody>
-      </p:sp>
-      <p:sp>
-        <p:nvSpPr>
-          <p:cNvPr id="30" name="TextBox 29"/>
-          <p:cNvSpPr txBox="1"/>
-          <p:nvPr/>
-        </p:nvSpPr>
-        <p:spPr>
-          <a:xfrm>
-            <a:off x="8686800" y="4251960"/>
-            <a:ext cx="2926080" cy="502920"/>
-          </a:xfrm>
-          <a:prstGeom prst="rect">
-            <a:avLst/>
-          </a:prstGeom>
-          <a:noFill/>
-        </p:spPr>
-        <p:txBody>
-          <a:bodyPr wrap="square" lIns="45720" rIns="45720" tIns="27432" bIns="27432" anchor="ctr">
-            <a:spAutoFit/>
-          </a:bodyPr>
-          <a:lstStyle/>
-          <a:p>
-            <a:pPr algn="l"/>
-            <a:r>
-              <a:rPr sz="1100" b="0" i="1">
-                <a:solidFill>
-                  <a:srgbClr val="36454F"/>
-                </a:solidFill>
-                <a:latin typeface="Calibri"/>
-              </a:rPr>
-              <a:t>noise reduction</a:t>
-            </a:r>
-          </a:p>
-        </p:txBody>
-      </p:sp>
-      <p:sp>
-        <p:nvSpPr>
-          <p:cNvPr id="31" name="Rectangle 30"/>
-          <p:cNvSpPr/>
-          <p:nvPr/>
-        </p:nvSpPr>
-        <p:spPr>
-          <a:xfrm>
-            <a:off x="502920" y="4754880"/>
-            <a:ext cx="11155680" cy="502920"/>
-          </a:xfrm>
-          <a:prstGeom prst="rect">
-            <a:avLst/>
-          </a:prstGeom>
-          <a:solidFill>
-            <a:srgbClr val="FFFFFF"/>
-          </a:solidFill>
-          <a:ln>
-            <a:noFill/>
-          </a:ln>
-          <a:effectLst/>
-        </p:spPr>
-        <p:style>
-          <a:lnRef idx="1">
-            <a:schemeClr val="accent1"/>
-          </a:lnRef>
-          <a:fillRef idx="3">
-            <a:schemeClr val="accent1"/>
-          </a:fillRef>
-          <a:effectRef idx="2">
-            <a:schemeClr val="accent1"/>
-          </a:effectRef>
-          <a:fontRef idx="minor">
-            <a:schemeClr val="lt1"/>
-          </a:fontRef>
-        </p:style>
-        <p:txBody>
-          <a:bodyPr rtlCol="0" anchor="ctr" lIns="45720" rIns="45720" tIns="27432" bIns="27432" wrap="square"/>
-          <a:lstStyle/>
-          <a:p>
-            <a:pPr algn="ctr"/>
-          </a:p>
-        </p:txBody>
-      </p:sp>
-      <p:sp>
-        <p:nvSpPr>
-          <p:cNvPr id="32" name="TextBox 31"/>
-          <p:cNvSpPr txBox="1"/>
-          <p:nvPr/>
-        </p:nvSpPr>
-        <p:spPr>
-          <a:xfrm>
-            <a:off x="640080" y="4754880"/>
-            <a:ext cx="4206240" cy="502920"/>
-          </a:xfrm>
-          <a:prstGeom prst="rect">
-            <a:avLst/>
-          </a:prstGeom>
-          <a:noFill/>
-        </p:spPr>
-        <p:txBody>
-          <a:bodyPr wrap="square" lIns="45720" rIns="45720" tIns="27432" bIns="27432" anchor="ctr">
-            <a:spAutoFit/>
-          </a:bodyPr>
-          <a:lstStyle/>
-          <a:p>
-            <a:pPr algn="l"/>
-            <a:r>
-              <a:rPr sz="1200" b="0" i="0">
-                <a:solidFill>
-                  <a:srgbClr val="1E2761"/>
-                </a:solidFill>
-                <a:latin typeface="Calibri"/>
-              </a:rPr>
-              <a:t>+ M4 contrastive (λ=0.5)</a:t>
-            </a:r>
-          </a:p>
-        </p:txBody>
-      </p:sp>
-      <p:sp>
-        <p:nvSpPr>
-          <p:cNvPr id="33" name="TextBox 32"/>
-          <p:cNvSpPr txBox="1"/>
-          <p:nvPr/>
-        </p:nvSpPr>
-        <p:spPr>
-          <a:xfrm>
-            <a:off x="4892040" y="4754880"/>
-            <a:ext cx="3657600" cy="502920"/>
-          </a:xfrm>
-          <a:prstGeom prst="rect">
-            <a:avLst/>
-          </a:prstGeom>
-          <a:noFill/>
-        </p:spPr>
-        <p:txBody>
-          <a:bodyPr wrap="square" lIns="45720" rIns="45720" tIns="27432" bIns="27432" anchor="ctr">
-            <a:spAutoFit/>
-          </a:bodyPr>
-          <a:lstStyle/>
-          <a:p>
-            <a:pPr algn="ctr"/>
-            <a:r>
-              <a:rPr sz="1300" b="1" i="0">
-                <a:solidFill>
-                  <a:srgbClr val="F96167"/>
-                </a:solidFill>
-                <a:latin typeface="Calibri"/>
-              </a:rPr>
-              <a:t>+2 – 3 pp</a:t>
-            </a:r>
-          </a:p>
-        </p:txBody>
-      </p:sp>
-      <p:sp>
-        <p:nvSpPr>
-          <p:cNvPr id="34" name="TextBox 33"/>
-          <p:cNvSpPr txBox="1"/>
-          <p:nvPr/>
-        </p:nvSpPr>
-        <p:spPr>
-          <a:xfrm>
-            <a:off x="8686800" y="4754880"/>
-            <a:ext cx="2926080" cy="502920"/>
-          </a:xfrm>
-          <a:prstGeom prst="rect">
-            <a:avLst/>
-          </a:prstGeom>
-          <a:noFill/>
-        </p:spPr>
-        <p:txBody>
-          <a:bodyPr wrap="square" lIns="45720" rIns="45720" tIns="27432" bIns="27432" anchor="ctr">
-            <a:spAutoFit/>
-          </a:bodyPr>
-          <a:lstStyle/>
-          <a:p>
-            <a:pPr algn="l"/>
-            <a:r>
-              <a:rPr sz="1100" b="0" i="1">
-                <a:solidFill>
-                  <a:srgbClr val="36454F"/>
-                </a:solidFill>
-                <a:latin typeface="Calibri"/>
-              </a:rPr>
-              <a:t>geometry shaping</a:t>
-            </a:r>
-          </a:p>
-        </p:txBody>
-      </p:sp>
-      <p:sp>
-        <p:nvSpPr>
-          <p:cNvPr id="35" name="Rectangle 34"/>
-          <p:cNvSpPr/>
-          <p:nvPr/>
-        </p:nvSpPr>
-        <p:spPr>
-          <a:xfrm>
-            <a:off x="502920" y="5257800"/>
-            <a:ext cx="11155680" cy="502920"/>
-          </a:xfrm>
-          <a:prstGeom prst="rect">
-            <a:avLst/>
-          </a:prstGeom>
-          <a:solidFill>
-            <a:srgbClr val="F5F7FA"/>
-          </a:solidFill>
-          <a:ln>
-            <a:noFill/>
-          </a:ln>
-          <a:effectLst/>
-        </p:spPr>
-        <p:style>
-          <a:lnRef idx="1">
-            <a:schemeClr val="accent1"/>
-          </a:lnRef>
-          <a:fillRef idx="3">
-            <a:schemeClr val="accent1"/>
-          </a:fillRef>
-          <a:effectRef idx="2">
-            <a:schemeClr val="accent1"/>
-          </a:effectRef>
-          <a:fontRef idx="minor">
-            <a:schemeClr val="lt1"/>
-          </a:fontRef>
-        </p:style>
-        <p:txBody>
-          <a:bodyPr rtlCol="0" anchor="ctr" lIns="45720" rIns="45720" tIns="27432" bIns="27432" wrap="square"/>
-          <a:lstStyle/>
-          <a:p>
-            <a:pPr algn="ctr"/>
-          </a:p>
-        </p:txBody>
-      </p:sp>
-      <p:sp>
-        <p:nvSpPr>
-          <p:cNvPr id="36" name="TextBox 35"/>
-          <p:cNvSpPr txBox="1"/>
-          <p:nvPr/>
-        </p:nvSpPr>
-        <p:spPr>
-          <a:xfrm>
-            <a:off x="640080" y="5257800"/>
-            <a:ext cx="4206240" cy="502920"/>
-          </a:xfrm>
-          <a:prstGeom prst="rect">
-            <a:avLst/>
-          </a:prstGeom>
-          <a:noFill/>
-        </p:spPr>
-        <p:txBody>
-          <a:bodyPr wrap="square" lIns="45720" rIns="45720" tIns="27432" bIns="27432" anchor="ctr">
-            <a:spAutoFit/>
-          </a:bodyPr>
-          <a:lstStyle/>
-          <a:p>
-            <a:pPr algn="l"/>
-            <a:r>
-              <a:rPr sz="1200" b="0" i="0">
-                <a:solidFill>
-                  <a:srgbClr val="1E2761"/>
-                </a:solidFill>
-                <a:latin typeface="Calibri"/>
-              </a:rPr>
-              <a:t>+ M5 SSL pretraining</a:t>
-            </a:r>
-          </a:p>
-        </p:txBody>
-      </p:sp>
-      <p:sp>
-        <p:nvSpPr>
-          <p:cNvPr id="37" name="TextBox 36"/>
-          <p:cNvSpPr txBox="1"/>
-          <p:nvPr/>
-        </p:nvSpPr>
-        <p:spPr>
-          <a:xfrm>
-            <a:off x="4892040" y="5257800"/>
-            <a:ext cx="3657600" cy="502920"/>
-          </a:xfrm>
-          <a:prstGeom prst="rect">
-            <a:avLst/>
-          </a:prstGeom>
-          <a:noFill/>
-        </p:spPr>
-        <p:txBody>
-          <a:bodyPr wrap="square" lIns="45720" rIns="45720" tIns="27432" bIns="27432" anchor="ctr">
-            <a:spAutoFit/>
-          </a:bodyPr>
-          <a:lstStyle/>
-          <a:p>
-            <a:pPr algn="ctr"/>
-            <a:r>
-              <a:rPr sz="1300" b="1" i="0">
-                <a:solidFill>
-                  <a:srgbClr val="F96167"/>
-                </a:solidFill>
-                <a:latin typeface="Calibri"/>
-              </a:rPr>
-              <a:t>+5 – 10 pp</a:t>
-            </a:r>
-          </a:p>
-        </p:txBody>
-      </p:sp>
-      <p:sp>
-        <p:nvSpPr>
-          <p:cNvPr id="38" name="TextBox 37"/>
-          <p:cNvSpPr txBox="1"/>
-          <p:nvPr/>
-        </p:nvSpPr>
-        <p:spPr>
-          <a:xfrm>
-            <a:off x="8686800" y="5257800"/>
-            <a:ext cx="2926080" cy="502920"/>
-          </a:xfrm>
-          <a:prstGeom prst="rect">
-            <a:avLst/>
-          </a:prstGeom>
-          <a:noFill/>
-        </p:spPr>
-        <p:txBody>
-          <a:bodyPr wrap="square" lIns="45720" rIns="45720" tIns="27432" bIns="27432" anchor="ctr">
-            <a:spAutoFit/>
-          </a:bodyPr>
-          <a:lstStyle/>
-          <a:p>
-            <a:pPr algn="l"/>
-            <a:r>
-              <a:rPr sz="1100" b="0" i="1">
-                <a:solidFill>
-                  <a:srgbClr val="36454F"/>
-                </a:solidFill>
-                <a:latin typeface="Calibri"/>
-              </a:rPr>
-              <a:t>largest expected</a:t>
-            </a:r>
-          </a:p>
-        </p:txBody>
-      </p:sp>
-      <p:sp>
-        <p:nvSpPr>
-          <p:cNvPr id="39" name="Rounded Rectangle 38"/>
-          <p:cNvSpPr/>
-          <p:nvPr/>
-        </p:nvSpPr>
-        <p:spPr>
-          <a:xfrm>
-            <a:off x="502920" y="5669280"/>
-            <a:ext cx="11185855" cy="731520"/>
-          </a:xfrm>
-          <a:prstGeom prst="roundRect">
-            <a:avLst/>
-          </a:prstGeom>
-          <a:solidFill>
-            <a:srgbClr val="F96167"/>
-          </a:solidFill>
-          <a:ln>
-            <a:noFill/>
-          </a:ln>
-          <a:effectLst/>
-        </p:spPr>
-        <p:style>
-          <a:lnRef idx="1">
-            <a:schemeClr val="accent1"/>
-          </a:lnRef>
-          <a:fillRef idx="3">
-            <a:schemeClr val="accent1"/>
-          </a:fillRef>
-          <a:effectRef idx="2">
-            <a:schemeClr val="accent1"/>
-          </a:effectRef>
-          <a:fontRef idx="minor">
-            <a:schemeClr val="lt1"/>
-          </a:fontRef>
-        </p:style>
-        <p:txBody>
-          <a:bodyPr rtlCol="0" anchor="ctr" lIns="45720" rIns="45720" tIns="27432" bIns="27432" wrap="square"/>
-          <a:lstStyle/>
-          <a:p>
-            <a:pPr algn="ctr"/>
-            <a:r>
-              <a:rPr sz="1600" b="1" i="0">
-                <a:solidFill>
-                  <a:srgbClr val="FFFFFF"/>
-                </a:solidFill>
-                <a:latin typeface="Calibri"/>
-              </a:rPr>
-              <a:t>Composed target: ≥ 0.76  (a meaningful margin over ProtoNet)</a:t>
-            </a:r>
-          </a:p>
-        </p:txBody>
-      </p:sp>
-    </p:spTree>
-  </p:cSld>
-  <p:clrMapOvr>
-    <a:masterClrMapping/>
-  </p:clrMapOvr>
-</p:sld>
-</file>
-
-<file path=ppt/slides/slide14.xml><?xml version="1.0" encoding="utf-8"?>
 <p:sld xmlns:a="http://schemas.openxmlformats.org/drawingml/2006/main" xmlns:p="http://schemas.openxmlformats.org/presentationml/2006/main" xmlns:r="http://schemas.openxmlformats.org/officeDocument/2006/relationships">
   <p:cSld>
     <p:bg>
@@ -8771,7 +5755,7 @@
                 </a:solidFill>
                 <a:latin typeface="Calibri"/>
               </a:rPr>
-              <a:t>2 / 14</a:t>
+              <a:t>2 / 12</a:t>
             </a:r>
           </a:p>
         </p:txBody>
@@ -8885,7 +5869,7 @@
                 </a:solidFill>
                 <a:latin typeface="Calibri"/>
               </a:rPr>
-              <a:t>bioassays typically have 10² – 10³ labeled molecules, many missing.</a:t>
+              <a:t>screening assays typically have only 10² – 10³ labeled molecules, many missing.</a:t>
             </a:r>
           </a:p>
           <a:p>
@@ -8969,7 +5953,7 @@
                 </a:solidFill>
                 <a:latin typeface="Calibri"/>
               </a:rPr>
-              <a:t>Biology itself is inherently few-shot</a:t>
+              <a:t>Biology is inherently few-shot</a:t>
             </a:r>
           </a:p>
           <a:p>
@@ -8997,7 +5981,7 @@
                 </a:solidFill>
                 <a:latin typeface="Calibri"/>
               </a:rPr>
-              <a:t>novel drug targets and emerging toxicity endpoints have only a handful of tested compounds.</a:t>
+              <a:t>novel drug targets and emerging toxicity endpoints have a handful of tested compounds.</a:t>
             </a:r>
           </a:p>
           <a:p>
@@ -9439,7 +6423,7 @@
                 </a:solidFill>
                 <a:latin typeface="Calibri"/>
               </a:rPr>
-              <a:t>BACKGROUND</a:t>
+              <a:t>APPROACH</a:t>
             </a:r>
           </a:p>
         </p:txBody>
@@ -9509,7 +6493,7 @@
                 </a:solidFill>
                 <a:latin typeface="Calibri"/>
               </a:rPr>
-              <a:t>3 / 14</a:t>
+              <a:t>3 / 12</a:t>
             </a:r>
           </a:p>
         </p:txBody>
@@ -9595,7 +6579,7 @@
                 </a:solidFill>
                 <a:latin typeface="Calibri"/>
               </a:rPr>
-              <a:t>Meta-learning trains across many small tasks that simulate few-shot test conditions.</a:t>
+              <a:t>Meta-learning: train across many small tasks that simulate few-shot test conditions.</a:t>
             </a:r>
           </a:p>
           <a:p>
@@ -9623,35 +6607,7 @@
                 </a:solidFill>
                 <a:latin typeface="Calibri"/>
               </a:rPr>
-              <a:t>Split at the TASK level (not molecule level), with strict label disjointness:</a:t>
-            </a:r>
-          </a:p>
-          <a:p>
-            <a:pPr algn="l">
-              <a:lnSpc>
-                <a:spcPct val="120000"/>
-              </a:lnSpc>
-              <a:spcAft>
-                <a:spcPts val="300"/>
-              </a:spcAft>
-            </a:pPr>
-            <a:r>
-              <a:rPr sz="1300" b="0" i="0">
-                <a:solidFill>
-                  <a:srgbClr val="888A90"/>
-                </a:solidFill>
-                <a:latin typeface="Calibri"/>
-              </a:rPr>
-              <a:t>–  </a:t>
-            </a:r>
-            <a:r>
-              <a:rPr sz="1300" b="0" i="0">
-                <a:solidFill>
-                  <a:srgbClr val="36454F"/>
-                </a:solidFill>
-                <a:latin typeface="Calibri"/>
-              </a:rPr>
-              <a:t>meta-train  ∪  meta-val  ∪  meta-test.</a:t>
+              <a:t>Split at the TASK level (not molecule level), with strict label disjointness.</a:t>
             </a:r>
           </a:p>
           <a:p>
@@ -10447,7 +7403,7 @@
                 </a:solidFill>
                 <a:latin typeface="Calibri"/>
               </a:rPr>
-              <a:t>BACKGROUND</a:t>
+              <a:t>APPROACH</a:t>
             </a:r>
           </a:p>
         </p:txBody>
@@ -10517,7 +7473,7 @@
                 </a:solidFill>
                 <a:latin typeface="Calibri"/>
               </a:rPr>
-              <a:t>4 / 14</a:t>
+              <a:t>4 / 12</a:t>
             </a:r>
           </a:p>
         </p:txBody>
@@ -11143,7 +8099,7 @@
                 </a:solidFill>
                 <a:latin typeface="Calibri"/>
               </a:rPr>
-              <a:t>METHOD</a:t>
+              <a:t>APPROACH</a:t>
             </a:r>
           </a:p>
         </p:txBody>
@@ -11178,7 +8134,7 @@
                 </a:solidFill>
                 <a:latin typeface="Calibri"/>
               </a:rPr>
-              <a:t>Problem Formulation &amp; GoS Pipeline</a:t>
+              <a:t>Graph-of-Shots — Pipeline</a:t>
             </a:r>
           </a:p>
         </p:txBody>
@@ -11213,7 +8169,7 @@
                 </a:solidFill>
                 <a:latin typeface="Calibri"/>
               </a:rPr>
-              <a:t>5 / 14</a:t>
+              <a:t>5 / 12</a:t>
             </a:r>
           </a:p>
         </p:txBody>
@@ -11327,7 +8283,7 @@
                 </a:solidFill>
                 <a:latin typeface="Calibri"/>
               </a:rPr>
-              <a:t>Our answer: construct a task-specific META-GRAPH over the episode's molecules and run a GNN on it, so support labels can propagate to queries.</a:t>
+              <a:t>Our idea: build a task-specific META-GRAPH over episode molecules and run a GNN on it — support labels propagate to queries.</a:t>
             </a:r>
           </a:p>
         </p:txBody>
@@ -12449,7 +9405,7 @@
                 </a:solidFill>
                 <a:latin typeface="Calibri"/>
               </a:rPr>
-              <a:t>METHOD</a:t>
+              <a:t>APPROACH</a:t>
             </a:r>
           </a:p>
         </p:txBody>
@@ -12519,7 +9475,7 @@
                 </a:solidFill>
                 <a:latin typeface="Calibri"/>
               </a:rPr>
-              <a:t>6 / 14</a:t>
+              <a:t>6 / 12</a:t>
             </a:r>
           </a:p>
         </p:txBody>
@@ -13111,7 +10067,7 @@
                 </a:solidFill>
                 <a:latin typeface="Calibri"/>
               </a:rPr>
-              <a:t>k-NN sparsification keeps top-k edges per node; dense graphs over-smooth.</a:t>
+              <a:t>kNN sparsification keeps top-k edges per node; dense graphs over-smooth.</a:t>
             </a:r>
           </a:p>
         </p:txBody>
@@ -13472,7 +10428,7 @@
                 </a:solidFill>
                 <a:latin typeface="Calibri"/>
               </a:rPr>
-              <a:t>METHOD</a:t>
+              <a:t>APPROACH</a:t>
             </a:r>
           </a:p>
         </p:txBody>
@@ -13542,7 +10498,7 @@
                 </a:solidFill>
                 <a:latin typeface="Calibri"/>
               </a:rPr>
-              <a:t>7 / 14</a:t>
+              <a:t>7 / 12</a:t>
             </a:r>
           </a:p>
         </p:txBody>
@@ -13693,7 +10649,7 @@
                 </a:solidFill>
                 <a:latin typeface="Calibri"/>
               </a:rPr>
-              <a:t>Fix: compute prototypes from META-GNN outputs of support nodes;</a:t>
+              <a:t>Fix: compute prototypes from META-GNN outputs of support nodes.</a:t>
             </a:r>
           </a:p>
           <a:p>
@@ -13721,7 +10677,7 @@
                 </a:solidFill>
                 <a:latin typeface="Calibri"/>
               </a:rPr>
-              <a:t>classify queries by negative Euclidean distance.</a:t>
+              <a:t>Classify queries by negative Euclidean distance.</a:t>
             </a:r>
           </a:p>
           <a:p>
@@ -13749,7 +10705,7 @@
                 </a:solidFill>
                 <a:latin typeface="Calibri"/>
               </a:rPr>
-              <a:t>No per-class parameters → episode-agnostic (same trick ProtoNet uses).</a:t>
+              <a:t>No per-class parameters → episode-agnostic (ProtoNet-style).</a:t>
             </a:r>
           </a:p>
           <a:p>
@@ -13777,7 +10733,7 @@
                 </a:solidFill>
                 <a:latin typeface="Calibri"/>
               </a:rPr>
-              <a:t>Iterative refinement: R rounds of (affinity → kNN → meta-GNN);</a:t>
+              <a:t>Iterative refinement: R rounds of (affinity → kNN → meta-GNN).</a:t>
             </a:r>
           </a:p>
           <a:p>
@@ -13805,7 +10761,7 @@
                 </a:solidFill>
                 <a:latin typeface="Calibri"/>
               </a:rPr>
-              <a:t>label one-hot re-injected every round.</a:t>
+              <a:t>Label one-hot re-injected every round.</a:t>
             </a:r>
           </a:p>
         </p:txBody>
@@ -14150,7 +11106,7 @@
                 </a:solidFill>
                 <a:latin typeface="Calibri"/>
               </a:rPr>
-              <a:t>DESIGN v2</a:t>
+              <a:t>RESULTS</a:t>
             </a:r>
           </a:p>
         </p:txBody>
@@ -14185,7 +11141,7 @@
                 </a:solidFill>
                 <a:latin typeface="Calibri"/>
               </a:rPr>
-              <a:t>GoS v2 — Diagnosis &amp; Five Modifications</a:t>
+              <a:t>Main Results — v2 + SSL beats ProtoNet</a:t>
             </a:r>
           </a:p>
         </p:txBody>
@@ -14220,7 +11176,7 @@
                 </a:solidFill>
                 <a:latin typeface="Calibri"/>
               </a:rPr>
-              <a:t>8 / 14</a:t>
+              <a:t>8 / 12</a:t>
             </a:r>
           </a:p>
         </p:txBody>
@@ -14260,183 +11216,40 @@
           </a:p>
         </p:txBody>
       </p:sp>
-      <p:sp>
-        <p:nvSpPr>
-          <p:cNvPr id="7" name="Rounded Rectangle 6"/>
+      <p:pic>
+        <p:nvPicPr>
+          <p:cNvPr id="7" name="Picture 6" descr="fig_v2_main.png"/>
+          <p:cNvPicPr>
+            <a:picLocks noChangeAspect="1"/>
+          </p:cNvPicPr>
+          <p:nvPr/>
+        </p:nvPicPr>
+        <p:blipFill>
+          <a:blip r:embed="rId2"/>
+          <a:stretch>
+            <a:fillRect/>
+          </a:stretch>
+        </p:blipFill>
+        <p:spPr>
+          <a:xfrm>
+            <a:off x="502920" y="1691640"/>
+            <a:ext cx="7863840" cy="4179423"/>
+          </a:xfrm>
+          <a:prstGeom prst="rect">
+            <a:avLst/>
+          </a:prstGeom>
+        </p:spPr>
+      </p:pic>
+      <p:sp>
+        <p:nvSpPr>
+          <p:cNvPr id="8" name="Rounded Rectangle 7"/>
           <p:cNvSpPr/>
           <p:nvPr/>
         </p:nvSpPr>
         <p:spPr>
           <a:xfrm>
-            <a:off x="502920" y="1691640"/>
-            <a:ext cx="11185855" cy="1280160"/>
-          </a:xfrm>
-          <a:prstGeom prst="roundRect">
-            <a:avLst/>
-          </a:prstGeom>
-          <a:solidFill>
-            <a:srgbClr val="F96167"/>
-          </a:solidFill>
-          <a:ln>
-            <a:noFill/>
-          </a:ln>
-          <a:effectLst/>
-        </p:spPr>
-        <p:style>
-          <a:lnRef idx="1">
-            <a:schemeClr val="accent1"/>
-          </a:lnRef>
-          <a:fillRef idx="3">
-            <a:schemeClr val="accent1"/>
-          </a:fillRef>
-          <a:effectRef idx="2">
-            <a:schemeClr val="accent1"/>
-          </a:effectRef>
-          <a:fontRef idx="minor">
-            <a:schemeClr val="lt1"/>
-          </a:fontRef>
-        </p:style>
-        <p:txBody>
-          <a:bodyPr rtlCol="0" anchor="ctr" lIns="45720" rIns="45720" tIns="27432" bIns="27432" wrap="square"/>
-          <a:lstStyle/>
-          <a:p>
-            <a:pPr algn="ctr"/>
-          </a:p>
-        </p:txBody>
-      </p:sp>
-      <p:sp>
-        <p:nvSpPr>
-          <p:cNvPr id="8" name="TextBox 7"/>
-          <p:cNvSpPr txBox="1"/>
-          <p:nvPr/>
-        </p:nvSpPr>
-        <p:spPr>
-          <a:xfrm>
-            <a:off x="731520" y="1783080"/>
-            <a:ext cx="11185855" cy="365760"/>
-          </a:xfrm>
-          <a:prstGeom prst="rect">
-            <a:avLst/>
-          </a:prstGeom>
-          <a:noFill/>
-        </p:spPr>
-        <p:txBody>
-          <a:bodyPr wrap="square" lIns="45720" rIns="45720" tIns="27432" bIns="27432" anchor="t">
-            <a:spAutoFit/>
-          </a:bodyPr>
-          <a:lstStyle/>
-          <a:p>
-            <a:pPr algn="l"/>
-            <a:r>
-              <a:rPr sz="1300" b="1" i="0">
-                <a:solidFill>
-                  <a:srgbClr val="FFFFFF"/>
-                </a:solidFill>
-                <a:latin typeface="Calibri"/>
-              </a:rPr>
-              <a:t>DIAGNOSIS</a:t>
-            </a:r>
-          </a:p>
-        </p:txBody>
-      </p:sp>
-      <p:sp>
-        <p:nvSpPr>
-          <p:cNvPr id="9" name="TextBox 8"/>
-          <p:cNvSpPr txBox="1"/>
-          <p:nvPr/>
-        </p:nvSpPr>
-        <p:spPr>
-          <a:xfrm>
-            <a:off x="731520" y="2194560"/>
-            <a:ext cx="10728655" cy="777240"/>
-          </a:xfrm>
-          <a:prstGeom prst="rect">
-            <a:avLst/>
-          </a:prstGeom>
-          <a:noFill/>
-        </p:spPr>
-        <p:txBody>
-          <a:bodyPr wrap="square" lIns="45720" rIns="45720" tIns="27432" bIns="27432" anchor="t">
-            <a:spAutoFit/>
-          </a:bodyPr>
-          <a:lstStyle/>
-          <a:p>
-            <a:pPr algn="l"/>
-            <a:r>
-              <a:rPr sz="1300" b="0" i="1">
-                <a:solidFill>
-                  <a:srgbClr val="FFFFFF"/>
-                </a:solidFill>
-                <a:latin typeface="Calibri"/>
-              </a:rPr>
-              <a:t>kNN k=3 &gt; 5 &gt; 10 &gt; 100 → over-smoothing.  ProtoNet 0.716 &gt; GoS 0.572 → meta-GNN hurts a good embedding.  Affinity variants differ by &lt; 2 pp → expressivity is not the bottleneck.</a:t>
-            </a:r>
-          </a:p>
-        </p:txBody>
-      </p:sp>
-      <p:sp>
-        <p:nvSpPr>
-          <p:cNvPr id="10" name="Rounded Rectangle 9"/>
-          <p:cNvSpPr/>
-          <p:nvPr/>
-        </p:nvSpPr>
-        <p:spPr>
-          <a:xfrm>
-            <a:off x="502920" y="3200400"/>
-            <a:ext cx="2149388" cy="594360"/>
-          </a:xfrm>
-          <a:prstGeom prst="roundRect">
-            <a:avLst/>
-          </a:prstGeom>
-          <a:solidFill>
-            <a:srgbClr val="1E2761"/>
-          </a:solidFill>
-          <a:ln>
-            <a:noFill/>
-          </a:ln>
-          <a:effectLst/>
-        </p:spPr>
-        <p:style>
-          <a:lnRef idx="1">
-            <a:schemeClr val="accent1"/>
-          </a:lnRef>
-          <a:fillRef idx="3">
-            <a:schemeClr val="accent1"/>
-          </a:fillRef>
-          <a:effectRef idx="2">
-            <a:schemeClr val="accent1"/>
-          </a:effectRef>
-          <a:fontRef idx="minor">
-            <a:schemeClr val="lt1"/>
-          </a:fontRef>
-        </p:style>
-        <p:txBody>
-          <a:bodyPr rtlCol="0" anchor="ctr" lIns="45720" rIns="45720" tIns="27432" bIns="27432" wrap="square"/>
-          <a:lstStyle/>
-          <a:p>
-            <a:pPr algn="ctr"/>
-            <a:r>
-              <a:rPr sz="2000" b="1" i="0">
-                <a:solidFill>
-                  <a:srgbClr val="FFFFFF"/>
-                </a:solidFill>
-                <a:latin typeface="Calibri"/>
-              </a:rPr>
-              <a:t>M1</a:t>
-            </a:r>
-          </a:p>
-        </p:txBody>
-      </p:sp>
-      <p:sp>
-        <p:nvSpPr>
-          <p:cNvPr id="11" name="Rounded Rectangle 10"/>
-          <p:cNvSpPr/>
-          <p:nvPr/>
-        </p:nvSpPr>
-        <p:spPr>
-          <a:xfrm>
-            <a:off x="502920" y="3858768"/>
-            <a:ext cx="2149388" cy="2011680"/>
+            <a:off x="8549640" y="1737360"/>
+            <a:ext cx="3291840" cy="4114800"/>
           </a:xfrm>
           <a:prstGeom prst="roundRect">
             <a:avLst/>
@@ -14464,580 +11277,23 @@
           </a:fontRef>
         </p:style>
         <p:txBody>
-          <a:bodyPr rtlCol="0" anchor="ctr" tIns="27432" bIns="27432" wrap="square"/>
+          <a:bodyPr rtlCol="0" anchor="ctr" lIns="45720" rIns="45720" tIns="27432" bIns="27432" wrap="square"/>
           <a:lstStyle/>
           <a:p>
             <a:pPr algn="ctr"/>
-            <a:r>
-              <a:rPr sz="1200" b="1" i="0">
-                <a:solidFill>
-                  <a:srgbClr val="1E2761"/>
-                </a:solidFill>
-                <a:latin typeface="Calibri"/>
-              </a:rPr>
-              <a:t>Residual prototype</a:t>
-            </a:r>
-          </a:p>
-          <a:p>
-            <a:pPr algn="ctr">
-              <a:spcBef>
-                <a:spcPts val="600"/>
-              </a:spcBef>
-            </a:pPr>
-            <a:r>
-              <a:rPr sz="1000" b="0" i="1">
-                <a:solidFill>
-                  <a:srgbClr val="36454F"/>
-                </a:solidFill>
-                <a:latin typeface="Calibri"/>
-              </a:rPr>
-              <a:t>α c_enc + (1−α) c_gnn</a:t>
-            </a:r>
-          </a:p>
-        </p:txBody>
-      </p:sp>
-      <p:sp>
-        <p:nvSpPr>
-          <p:cNvPr id="12" name="Rounded Rectangle 11"/>
-          <p:cNvSpPr/>
-          <p:nvPr/>
-        </p:nvSpPr>
-        <p:spPr>
-          <a:xfrm>
-            <a:off x="2762036" y="3200400"/>
-            <a:ext cx="2149388" cy="594360"/>
-          </a:xfrm>
-          <a:prstGeom prst="roundRect">
-            <a:avLst/>
-          </a:prstGeom>
-          <a:solidFill>
-            <a:srgbClr val="1E2761"/>
-          </a:solidFill>
-          <a:ln>
-            <a:noFill/>
-          </a:ln>
-          <a:effectLst/>
-        </p:spPr>
-        <p:style>
-          <a:lnRef idx="1">
-            <a:schemeClr val="accent1"/>
-          </a:lnRef>
-          <a:fillRef idx="3">
-            <a:schemeClr val="accent1"/>
-          </a:fillRef>
-          <a:effectRef idx="2">
-            <a:schemeClr val="accent1"/>
-          </a:effectRef>
-          <a:fontRef idx="minor">
-            <a:schemeClr val="lt1"/>
-          </a:fontRef>
-        </p:style>
-        <p:txBody>
-          <a:bodyPr rtlCol="0" anchor="ctr" lIns="45720" rIns="45720" tIns="27432" bIns="27432" wrap="square"/>
-          <a:lstStyle/>
-          <a:p>
-            <a:pPr algn="ctr"/>
-            <a:r>
-              <a:rPr sz="2000" b="1" i="0">
-                <a:solidFill>
-                  <a:srgbClr val="FFFFFF"/>
-                </a:solidFill>
-                <a:latin typeface="Calibri"/>
-              </a:rPr>
-              <a:t>M2</a:t>
-            </a:r>
-          </a:p>
-        </p:txBody>
-      </p:sp>
-      <p:sp>
-        <p:nvSpPr>
-          <p:cNvPr id="13" name="Rounded Rectangle 12"/>
-          <p:cNvSpPr/>
-          <p:nvPr/>
-        </p:nvSpPr>
-        <p:spPr>
-          <a:xfrm>
-            <a:off x="2762036" y="3858768"/>
-            <a:ext cx="2149388" cy="2011680"/>
-          </a:xfrm>
-          <a:prstGeom prst="roundRect">
-            <a:avLst/>
-          </a:prstGeom>
-          <a:solidFill>
-            <a:srgbClr val="F5F7FA"/>
-          </a:solidFill>
-          <a:ln>
-            <a:noFill/>
-          </a:ln>
-          <a:effectLst/>
-        </p:spPr>
-        <p:style>
-          <a:lnRef idx="1">
-            <a:schemeClr val="accent1"/>
-          </a:lnRef>
-          <a:fillRef idx="3">
-            <a:schemeClr val="accent1"/>
-          </a:fillRef>
-          <a:effectRef idx="2">
-            <a:schemeClr val="accent1"/>
-          </a:effectRef>
-          <a:fontRef idx="minor">
-            <a:schemeClr val="lt1"/>
-          </a:fontRef>
-        </p:style>
-        <p:txBody>
-          <a:bodyPr rtlCol="0" anchor="ctr" tIns="27432" bIns="27432" wrap="square"/>
-          <a:lstStyle/>
-          <a:p>
-            <a:pPr algn="ctr"/>
-            <a:r>
-              <a:rPr sz="1200" b="1" i="0">
-                <a:solidFill>
-                  <a:srgbClr val="1E2761"/>
-                </a:solidFill>
-                <a:latin typeface="Calibri"/>
-              </a:rPr>
-              <a:t>Shallower meta-GNN</a:t>
-            </a:r>
-          </a:p>
-          <a:p>
-            <a:pPr algn="ctr">
-              <a:spcBef>
-                <a:spcPts val="600"/>
-              </a:spcBef>
-            </a:pPr>
-            <a:r>
-              <a:rPr sz="1000" b="0" i="1">
-                <a:solidFill>
-                  <a:srgbClr val="36454F"/>
-                </a:solidFill>
-                <a:latin typeface="Calibri"/>
-              </a:rPr>
-              <a:t>1-layer GAT</a:t>
-            </a:r>
-          </a:p>
-        </p:txBody>
-      </p:sp>
-      <p:sp>
-        <p:nvSpPr>
-          <p:cNvPr id="14" name="Rounded Rectangle 13"/>
-          <p:cNvSpPr/>
-          <p:nvPr/>
-        </p:nvSpPr>
-        <p:spPr>
-          <a:xfrm>
-            <a:off x="5021153" y="3200400"/>
-            <a:ext cx="2149388" cy="594360"/>
-          </a:xfrm>
-          <a:prstGeom prst="roundRect">
-            <a:avLst/>
-          </a:prstGeom>
-          <a:solidFill>
-            <a:srgbClr val="1E2761"/>
-          </a:solidFill>
-          <a:ln>
-            <a:noFill/>
-          </a:ln>
-          <a:effectLst/>
-        </p:spPr>
-        <p:style>
-          <a:lnRef idx="1">
-            <a:schemeClr val="accent1"/>
-          </a:lnRef>
-          <a:fillRef idx="3">
-            <a:schemeClr val="accent1"/>
-          </a:fillRef>
-          <a:effectRef idx="2">
-            <a:schemeClr val="accent1"/>
-          </a:effectRef>
-          <a:fontRef idx="minor">
-            <a:schemeClr val="lt1"/>
-          </a:fontRef>
-        </p:style>
-        <p:txBody>
-          <a:bodyPr rtlCol="0" anchor="ctr" lIns="45720" rIns="45720" tIns="27432" bIns="27432" wrap="square"/>
-          <a:lstStyle/>
-          <a:p>
-            <a:pPr algn="ctr"/>
-            <a:r>
-              <a:rPr sz="2000" b="1" i="0">
-                <a:solidFill>
-                  <a:srgbClr val="FFFFFF"/>
-                </a:solidFill>
-                <a:latin typeface="Calibri"/>
-              </a:rPr>
-              <a:t>M3</a:t>
-            </a:r>
-          </a:p>
-        </p:txBody>
-      </p:sp>
-      <p:sp>
-        <p:nvSpPr>
-          <p:cNvPr id="15" name="Rounded Rectangle 14"/>
-          <p:cNvSpPr/>
-          <p:nvPr/>
-        </p:nvSpPr>
-        <p:spPr>
-          <a:xfrm>
-            <a:off x="5021153" y="3858768"/>
-            <a:ext cx="2149388" cy="2011680"/>
-          </a:xfrm>
-          <a:prstGeom prst="roundRect">
-            <a:avLst/>
-          </a:prstGeom>
-          <a:solidFill>
-            <a:srgbClr val="F5F7FA"/>
-          </a:solidFill>
-          <a:ln>
-            <a:noFill/>
-          </a:ln>
-          <a:effectLst/>
-        </p:spPr>
-        <p:style>
-          <a:lnRef idx="1">
-            <a:schemeClr val="accent1"/>
-          </a:lnRef>
-          <a:fillRef idx="3">
-            <a:schemeClr val="accent1"/>
-          </a:fillRef>
-          <a:effectRef idx="2">
-            <a:schemeClr val="accent1"/>
-          </a:effectRef>
-          <a:fontRef idx="minor">
-            <a:schemeClr val="lt1"/>
-          </a:fontRef>
-        </p:style>
-        <p:txBody>
-          <a:bodyPr rtlCol="0" anchor="ctr" tIns="27432" bIns="27432" wrap="square"/>
-          <a:lstStyle/>
-          <a:p>
-            <a:pPr algn="ctr"/>
-            <a:r>
-              <a:rPr sz="1200" b="1" i="0">
-                <a:solidFill>
-                  <a:srgbClr val="1E2761"/>
-                </a:solidFill>
-                <a:latin typeface="Calibri"/>
-              </a:rPr>
-              <a:t>Bipartite messaging</a:t>
-            </a:r>
-          </a:p>
-          <a:p>
-            <a:pPr algn="ctr">
-              <a:spcBef>
-                <a:spcPts val="600"/>
-              </a:spcBef>
-            </a:pPr>
-            <a:r>
-              <a:rPr sz="1000" b="0" i="1">
-                <a:solidFill>
-                  <a:srgbClr val="36454F"/>
-                </a:solidFill>
-                <a:latin typeface="Calibri"/>
-              </a:rPr>
-              <a:t>mask query → * edges</a:t>
-            </a:r>
-          </a:p>
-        </p:txBody>
-      </p:sp>
-      <p:sp>
-        <p:nvSpPr>
-          <p:cNvPr id="16" name="Rounded Rectangle 15"/>
-          <p:cNvSpPr/>
-          <p:nvPr/>
-        </p:nvSpPr>
-        <p:spPr>
-          <a:xfrm>
-            <a:off x="7280269" y="3200400"/>
-            <a:ext cx="2149388" cy="594360"/>
-          </a:xfrm>
-          <a:prstGeom prst="roundRect">
-            <a:avLst/>
-          </a:prstGeom>
-          <a:solidFill>
-            <a:srgbClr val="F96167"/>
-          </a:solidFill>
-          <a:ln>
-            <a:noFill/>
-          </a:ln>
-          <a:effectLst/>
-        </p:spPr>
-        <p:style>
-          <a:lnRef idx="1">
-            <a:schemeClr val="accent1"/>
-          </a:lnRef>
-          <a:fillRef idx="3">
-            <a:schemeClr val="accent1"/>
-          </a:fillRef>
-          <a:effectRef idx="2">
-            <a:schemeClr val="accent1"/>
-          </a:effectRef>
-          <a:fontRef idx="minor">
-            <a:schemeClr val="lt1"/>
-          </a:fontRef>
-        </p:style>
-        <p:txBody>
-          <a:bodyPr rtlCol="0" anchor="ctr" lIns="45720" rIns="45720" tIns="27432" bIns="27432" wrap="square"/>
-          <a:lstStyle/>
-          <a:p>
-            <a:pPr algn="ctr"/>
-            <a:r>
-              <a:rPr sz="2000" b="1" i="0">
-                <a:solidFill>
-                  <a:srgbClr val="FFFFFF"/>
-                </a:solidFill>
-                <a:latin typeface="Calibri"/>
-              </a:rPr>
-              <a:t>M4</a:t>
-            </a:r>
-          </a:p>
-        </p:txBody>
-      </p:sp>
-      <p:sp>
-        <p:nvSpPr>
-          <p:cNvPr id="17" name="Rounded Rectangle 16"/>
-          <p:cNvSpPr/>
-          <p:nvPr/>
-        </p:nvSpPr>
-        <p:spPr>
-          <a:xfrm>
-            <a:off x="7280269" y="3858768"/>
-            <a:ext cx="2149388" cy="2011680"/>
-          </a:xfrm>
-          <a:prstGeom prst="roundRect">
-            <a:avLst/>
-          </a:prstGeom>
-          <a:solidFill>
-            <a:srgbClr val="F5F7FA"/>
-          </a:solidFill>
-          <a:ln>
-            <a:noFill/>
-          </a:ln>
-          <a:effectLst/>
-        </p:spPr>
-        <p:style>
-          <a:lnRef idx="1">
-            <a:schemeClr val="accent1"/>
-          </a:lnRef>
-          <a:fillRef idx="3">
-            <a:schemeClr val="accent1"/>
-          </a:fillRef>
-          <a:effectRef idx="2">
-            <a:schemeClr val="accent1"/>
-          </a:effectRef>
-          <a:fontRef idx="minor">
-            <a:schemeClr val="lt1"/>
-          </a:fontRef>
-        </p:style>
-        <p:txBody>
-          <a:bodyPr rtlCol="0" anchor="ctr" tIns="27432" bIns="27432" wrap="square"/>
-          <a:lstStyle/>
-          <a:p>
-            <a:pPr algn="ctr"/>
-            <a:r>
-              <a:rPr sz="1200" b="1" i="0">
-                <a:solidFill>
-                  <a:srgbClr val="1E2761"/>
-                </a:solidFill>
-                <a:latin typeface="Calibri"/>
-              </a:rPr>
-              <a:t>Contrastive loss</a:t>
-            </a:r>
-          </a:p>
-          <a:p>
-            <a:pPr algn="ctr">
-              <a:spcBef>
-                <a:spcPts val="600"/>
-              </a:spcBef>
-            </a:pPr>
-            <a:r>
-              <a:rPr sz="1000" b="0" i="1">
-                <a:solidFill>
-                  <a:srgbClr val="36454F"/>
-                </a:solidFill>
-                <a:latin typeface="Calibri"/>
-              </a:rPr>
-              <a:t>InfoNCE support–query</a:t>
-            </a:r>
-          </a:p>
-        </p:txBody>
-      </p:sp>
-      <p:sp>
-        <p:nvSpPr>
-          <p:cNvPr id="18" name="Rounded Rectangle 17"/>
-          <p:cNvSpPr/>
-          <p:nvPr/>
-        </p:nvSpPr>
-        <p:spPr>
-          <a:xfrm>
-            <a:off x="9539386" y="3200400"/>
-            <a:ext cx="2149388" cy="594360"/>
-          </a:xfrm>
-          <a:prstGeom prst="roundRect">
-            <a:avLst/>
-          </a:prstGeom>
-          <a:solidFill>
-            <a:srgbClr val="F96167"/>
-          </a:solidFill>
-          <a:ln>
-            <a:noFill/>
-          </a:ln>
-          <a:effectLst/>
-        </p:spPr>
-        <p:style>
-          <a:lnRef idx="1">
-            <a:schemeClr val="accent1"/>
-          </a:lnRef>
-          <a:fillRef idx="3">
-            <a:schemeClr val="accent1"/>
-          </a:fillRef>
-          <a:effectRef idx="2">
-            <a:schemeClr val="accent1"/>
-          </a:effectRef>
-          <a:fontRef idx="minor">
-            <a:schemeClr val="lt1"/>
-          </a:fontRef>
-        </p:style>
-        <p:txBody>
-          <a:bodyPr rtlCol="0" anchor="ctr" lIns="45720" rIns="45720" tIns="27432" bIns="27432" wrap="square"/>
-          <a:lstStyle/>
-          <a:p>
-            <a:pPr algn="ctr"/>
-            <a:r>
-              <a:rPr sz="2000" b="1" i="0">
-                <a:solidFill>
-                  <a:srgbClr val="FFFFFF"/>
-                </a:solidFill>
-                <a:latin typeface="Calibri"/>
-              </a:rPr>
-              <a:t>M5</a:t>
-            </a:r>
-          </a:p>
-        </p:txBody>
-      </p:sp>
-      <p:sp>
-        <p:nvSpPr>
-          <p:cNvPr id="19" name="Rounded Rectangle 18"/>
-          <p:cNvSpPr/>
-          <p:nvPr/>
-        </p:nvSpPr>
-        <p:spPr>
-          <a:xfrm>
-            <a:off x="9539386" y="3858768"/>
-            <a:ext cx="2149388" cy="2011680"/>
-          </a:xfrm>
-          <a:prstGeom prst="roundRect">
-            <a:avLst/>
-          </a:prstGeom>
-          <a:solidFill>
-            <a:srgbClr val="F5F7FA"/>
-          </a:solidFill>
-          <a:ln>
-            <a:noFill/>
-          </a:ln>
-          <a:effectLst/>
-        </p:spPr>
-        <p:style>
-          <a:lnRef idx="1">
-            <a:schemeClr val="accent1"/>
-          </a:lnRef>
-          <a:fillRef idx="3">
-            <a:schemeClr val="accent1"/>
-          </a:fillRef>
-          <a:effectRef idx="2">
-            <a:schemeClr val="accent1"/>
-          </a:effectRef>
-          <a:fontRef idx="minor">
-            <a:schemeClr val="lt1"/>
-          </a:fontRef>
-        </p:style>
-        <p:txBody>
-          <a:bodyPr rtlCol="0" anchor="ctr" tIns="27432" bIns="27432" wrap="square"/>
-          <a:lstStyle/>
-          <a:p>
-            <a:pPr algn="ctr"/>
-            <a:r>
-              <a:rPr sz="1200" b="1" i="0">
-                <a:solidFill>
-                  <a:srgbClr val="1E2761"/>
-                </a:solidFill>
-                <a:latin typeface="Calibri"/>
-              </a:rPr>
-              <a:t>SSL pretraining</a:t>
-            </a:r>
-          </a:p>
-          <a:p>
-            <a:pPr algn="ctr">
-              <a:spcBef>
-                <a:spcPts val="600"/>
-              </a:spcBef>
-            </a:pPr>
-            <a:r>
-              <a:rPr sz="1000" b="0" i="1">
-                <a:solidFill>
-                  <a:srgbClr val="36454F"/>
-                </a:solidFill>
-                <a:latin typeface="Calibri"/>
-              </a:rPr>
-              <a:t>MolCLR encoder init</a:t>
-            </a:r>
-          </a:p>
-        </p:txBody>
-      </p:sp>
-      <p:sp>
-        <p:nvSpPr>
-          <p:cNvPr id="20" name="Rounded Rectangle 19"/>
-          <p:cNvSpPr/>
-          <p:nvPr/>
-        </p:nvSpPr>
-        <p:spPr>
-          <a:xfrm>
-            <a:off x="502920" y="5989320"/>
-            <a:ext cx="11185855" cy="411480"/>
-          </a:xfrm>
-          <a:prstGeom prst="roundRect">
-            <a:avLst/>
-          </a:prstGeom>
-          <a:solidFill>
-            <a:srgbClr val="CADCFC"/>
-          </a:solidFill>
-          <a:ln>
-            <a:noFill/>
-          </a:ln>
-          <a:effectLst/>
-        </p:spPr>
-        <p:style>
-          <a:lnRef idx="1">
-            <a:schemeClr val="accent1"/>
-          </a:lnRef>
-          <a:fillRef idx="3">
-            <a:schemeClr val="accent1"/>
-          </a:fillRef>
-          <a:effectRef idx="2">
-            <a:schemeClr val="accent1"/>
-          </a:effectRef>
-          <a:fontRef idx="minor">
-            <a:schemeClr val="lt1"/>
-          </a:fontRef>
-        </p:style>
-        <p:txBody>
-          <a:bodyPr rtlCol="0" anchor="ctr" lIns="45720" rIns="45720" tIns="27432" bIns="27432" wrap="square"/>
-          <a:lstStyle/>
-          <a:p>
-            <a:pPr algn="ctr"/>
-          </a:p>
-        </p:txBody>
-      </p:sp>
-      <p:sp>
-        <p:nvSpPr>
-          <p:cNvPr id="21" name="TextBox 20"/>
+          </a:p>
+        </p:txBody>
+      </p:sp>
+      <p:sp>
+        <p:nvSpPr>
+          <p:cNvPr id="9" name="TextBox 8"/>
           <p:cNvSpPr txBox="1"/>
           <p:nvPr/>
         </p:nvSpPr>
         <p:spPr>
           <a:xfrm>
-            <a:off x="502920" y="5989320"/>
-            <a:ext cx="11185855" cy="411480"/>
+            <a:off x="8686800" y="1874519"/>
+            <a:ext cx="3108960" cy="365760"/>
           </a:xfrm>
           <a:prstGeom prst="rect">
             <a:avLst/>
@@ -15045,20 +11301,246 @@
           <a:noFill/>
         </p:spPr>
         <p:txBody>
-          <a:bodyPr wrap="square" lIns="45720" rIns="45720" tIns="27432" bIns="27432" anchor="ctr">
+          <a:bodyPr wrap="square" lIns="45720" rIns="45720" tIns="27432" bIns="27432" anchor="t">
             <a:spAutoFit/>
           </a:bodyPr>
           <a:lstStyle/>
           <a:p>
+            <a:pPr algn="l"/>
+            <a:r>
+              <a:rPr sz="1200" b="1" i="0">
+                <a:solidFill>
+                  <a:srgbClr val="F96167"/>
+                </a:solidFill>
+                <a:latin typeface="Calibri"/>
+              </a:rPr>
+              <a:t>TAKEAWAYS</a:t>
+            </a:r>
+          </a:p>
+        </p:txBody>
+      </p:sp>
+      <p:sp>
+        <p:nvSpPr>
+          <p:cNvPr id="10" name="TextBox 9"/>
+          <p:cNvSpPr txBox="1"/>
+          <p:nvPr/>
+        </p:nvSpPr>
+        <p:spPr>
+          <a:xfrm>
+            <a:off x="8686800" y="2331720"/>
+            <a:ext cx="3017520" cy="3474720"/>
+          </a:xfrm>
+          <a:prstGeom prst="rect">
+            <a:avLst/>
+          </a:prstGeom>
+          <a:noFill/>
+        </p:spPr>
+        <p:txBody>
+          <a:bodyPr wrap="square" lIns="45720" rIns="45720">
+            <a:spAutoFit/>
+          </a:bodyPr>
+          <a:lstStyle/>
+          <a:p>
+            <a:pPr algn="l">
+              <a:lnSpc>
+                <a:spcPct val="120000"/>
+              </a:lnSpc>
+              <a:spcAft>
+                <a:spcPts val="300"/>
+              </a:spcAft>
+            </a:pPr>
+            <a:r>
+              <a:rPr sz="1150" b="1" i="0">
+                <a:solidFill>
+                  <a:srgbClr val="1E2761"/>
+                </a:solidFill>
+                <a:latin typeface="Calibri"/>
+              </a:rPr>
+              <a:t>●  </a:t>
+            </a:r>
+            <a:r>
+              <a:rPr sz="1150" b="0" i="0">
+                <a:solidFill>
+                  <a:srgbClr val="36454F"/>
+                </a:solidFill>
+                <a:latin typeface="Calibri"/>
+              </a:rPr>
+              <a:t>v2 + SSL beats ProtoNet on all 3 configs.</a:t>
+            </a:r>
+          </a:p>
+          <a:p>
+            <a:pPr algn="l">
+              <a:lnSpc>
+                <a:spcPct val="120000"/>
+              </a:lnSpc>
+              <a:spcAft>
+                <a:spcPts val="300"/>
+              </a:spcAft>
+            </a:pPr>
+            <a:r>
+              <a:rPr sz="950" b="0" i="0">
+                <a:solidFill>
+                  <a:srgbClr val="888A90"/>
+                </a:solidFill>
+                <a:latin typeface="Calibri"/>
+              </a:rPr>
+              <a:t>–  </a:t>
+            </a:r>
+            <a:r>
+              <a:rPr sz="950" b="0" i="0">
+                <a:solidFill>
+                  <a:srgbClr val="36454F"/>
+                </a:solidFill>
+                <a:latin typeface="Calibri"/>
+              </a:rPr>
+              <a:t>5w5s: 0.728 vs 0.716  (+1.2 pp)</a:t>
+            </a:r>
+          </a:p>
+          <a:p>
+            <a:pPr algn="l">
+              <a:lnSpc>
+                <a:spcPct val="120000"/>
+              </a:lnSpc>
+              <a:spcAft>
+                <a:spcPts val="300"/>
+              </a:spcAft>
+            </a:pPr>
+            <a:r>
+              <a:rPr sz="950" b="0" i="0">
+                <a:solidFill>
+                  <a:srgbClr val="888A90"/>
+                </a:solidFill>
+                <a:latin typeface="Calibri"/>
+              </a:rPr>
+              <a:t>–  </a:t>
+            </a:r>
+            <a:r>
+              <a:rPr sz="950" b="0" i="0">
+                <a:solidFill>
+                  <a:srgbClr val="36454F"/>
+                </a:solidFill>
+                <a:latin typeface="Calibri"/>
+              </a:rPr>
+              <a:t>10w5s: 0.712 vs 0.700 (+1.2 pp)</a:t>
+            </a:r>
+          </a:p>
+          <a:p>
+            <a:pPr algn="l">
+              <a:lnSpc>
+                <a:spcPct val="120000"/>
+              </a:lnSpc>
+              <a:spcAft>
+                <a:spcPts val="300"/>
+              </a:spcAft>
+            </a:pPr>
+            <a:r>
+              <a:rPr sz="950" b="0" i="0">
+                <a:solidFill>
+                  <a:srgbClr val="888A90"/>
+                </a:solidFill>
+                <a:latin typeface="Calibri"/>
+              </a:rPr>
+              <a:t>–  </a:t>
+            </a:r>
+            <a:r>
+              <a:rPr sz="950" b="0" i="0">
+                <a:solidFill>
+                  <a:srgbClr val="36454F"/>
+                </a:solidFill>
+                <a:latin typeface="Calibri"/>
+              </a:rPr>
+              <a:t>5w1s: 0.603 vs 0.586  (+1.7 pp)</a:t>
+            </a:r>
+          </a:p>
+          <a:p>
+            <a:pPr algn="l">
+              <a:lnSpc>
+                <a:spcPct val="120000"/>
+              </a:lnSpc>
+              <a:spcAft>
+                <a:spcPts val="300"/>
+              </a:spcAft>
+            </a:pPr>
+            <a:r>
+              <a:rPr sz="1150" b="1" i="0">
+                <a:solidFill>
+                  <a:srgbClr val="1E2761"/>
+                </a:solidFill>
+                <a:latin typeface="Calibri"/>
+              </a:rPr>
+              <a:t>●  </a:t>
+            </a:r>
+            <a:r>
+              <a:rPr sz="1150" b="0" i="0">
+                <a:solidFill>
+                  <a:srgbClr val="36454F"/>
+                </a:solidFill>
+                <a:latin typeface="Calibri"/>
+              </a:rPr>
+              <a:t>SSL alone gives +1.9 pp over v2-scratch.</a:t>
+            </a:r>
+          </a:p>
+          <a:p>
+            <a:pPr algn="l">
+              <a:lnSpc>
+                <a:spcPct val="120000"/>
+              </a:lnSpc>
+              <a:spcAft>
+                <a:spcPts val="300"/>
+              </a:spcAft>
+            </a:pPr>
+            <a:r>
+              <a:rPr sz="1150" b="1" i="0">
+                <a:solidFill>
+                  <a:srgbClr val="1E2761"/>
+                </a:solidFill>
+                <a:latin typeface="Calibri"/>
+              </a:rPr>
+              <a:t>●  </a:t>
+            </a:r>
+            <a:r>
+              <a:rPr sz="1150" b="0" i="0">
+                <a:solidFill>
+                  <a:srgbClr val="36454F"/>
+                </a:solidFill>
+                <a:latin typeface="Calibri"/>
+              </a:rPr>
+              <a:t>MAML stays near chance.</a:t>
+            </a:r>
+          </a:p>
+        </p:txBody>
+      </p:sp>
+      <p:sp>
+        <p:nvSpPr>
+          <p:cNvPr id="11" name="TextBox 10"/>
+          <p:cNvSpPr txBox="1"/>
+          <p:nvPr/>
+        </p:nvSpPr>
+        <p:spPr>
+          <a:xfrm>
+            <a:off x="502920" y="6035040"/>
+            <a:ext cx="11185855" cy="365760"/>
+          </a:xfrm>
+          <a:prstGeom prst="rect">
+            <a:avLst/>
+          </a:prstGeom>
+          <a:noFill/>
+        </p:spPr>
+        <p:txBody>
+          <a:bodyPr wrap="square" lIns="45720" rIns="45720" tIns="27432" bIns="27432" anchor="t">
+            <a:spAutoFit/>
+          </a:bodyPr>
+          <a:lstStyle/>
+          <a:p>
             <a:pPr algn="ctr"/>
             <a:r>
-              <a:rPr sz="1200" b="1" i="1">
-                <a:solidFill>
-                  <a:srgbClr val="1E2761"/>
-                </a:solidFill>
-                <a:latin typeface="Calibri"/>
-              </a:rPr>
-              <a:t>Safety net: at α → 1, v2 recovers ProtoNet.  At best, all five modifications compose.  Target ≥ 0.76 at 5w5s.</a:t>
+              <a:rPr sz="1100" b="0" i="1">
+                <a:solidFill>
+                  <a:srgbClr val="888A90"/>
+                </a:solidFill>
+                <a:latin typeface="Calibri"/>
+              </a:rPr>
+              <a:t>Merged pool (Tox21 + ToxCast + MUV + SIDER, 673 tasks, 405 / 134 / 134 split).  Meta-val AUC at best checkpoint.</a:t>
             </a:r>
           </a:p>
         </p:txBody>
@@ -15216,7 +11698,7 @@
                 </a:solidFill>
                 <a:latin typeface="Calibri"/>
               </a:rPr>
-              <a:t>Main Results — 1000 meta-test episodes</a:t>
+              <a:t>Ablation Study — A1 through A5</a:t>
             </a:r>
           </a:p>
         </p:txBody>
@@ -15251,7 +11733,7 @@
                 </a:solidFill>
                 <a:latin typeface="Calibri"/>
               </a:rPr>
-              <a:t>9 / 14</a:t>
+              <a:t>9 / 12</a:t>
             </a:r>
           </a:p>
         </p:txBody>
@@ -15293,7 +11775,7 @@
       </p:sp>
       <p:pic>
         <p:nvPicPr>
-          <p:cNvPr id="7" name="Picture 6" descr="fig2_main.png"/>
+          <p:cNvPr id="7" name="Picture 6" descr="fig_v2_ablations.png"/>
           <p:cNvPicPr>
             <a:picLocks noChangeAspect="1"/>
           </p:cNvPicPr>
@@ -15307,8 +11789,8 @@
         </p:blipFill>
         <p:spPr>
           <a:xfrm>
-            <a:off x="502920" y="1691640"/>
-            <a:ext cx="7589520" cy="4231526"/>
+            <a:off x="274320" y="1554480"/>
+            <a:ext cx="11704320" cy="6521410"/>
           </a:xfrm>
           <a:prstGeom prst="rect">
             <a:avLst/>
@@ -15317,58 +11799,14 @@
       </p:pic>
       <p:sp>
         <p:nvSpPr>
-          <p:cNvPr id="8" name="Rounded Rectangle 7"/>
-          <p:cNvSpPr/>
-          <p:nvPr/>
-        </p:nvSpPr>
-        <p:spPr>
-          <a:xfrm>
-            <a:off x="8321040" y="1737360"/>
-            <a:ext cx="3474720" cy="4114800"/>
-          </a:xfrm>
-          <a:prstGeom prst="roundRect">
-            <a:avLst/>
-          </a:prstGeom>
-          <a:solidFill>
-            <a:srgbClr val="F5F7FA"/>
-          </a:solidFill>
-          <a:ln>
-            <a:noFill/>
-          </a:ln>
-          <a:effectLst/>
-        </p:spPr>
-        <p:style>
-          <a:lnRef idx="1">
-            <a:schemeClr val="accent1"/>
-          </a:lnRef>
-          <a:fillRef idx="3">
-            <a:schemeClr val="accent1"/>
-          </a:fillRef>
-          <a:effectRef idx="2">
-            <a:schemeClr val="accent1"/>
-          </a:effectRef>
-          <a:fontRef idx="minor">
-            <a:schemeClr val="lt1"/>
-          </a:fontRef>
-        </p:style>
-        <p:txBody>
-          <a:bodyPr rtlCol="0" anchor="ctr" lIns="45720" rIns="45720" tIns="27432" bIns="27432" wrap="square"/>
-          <a:lstStyle/>
-          <a:p>
-            <a:pPr algn="ctr"/>
-          </a:p>
-        </p:txBody>
-      </p:sp>
-      <p:sp>
-        <p:nvSpPr>
-          <p:cNvPr id="9" name="TextBox 8"/>
+          <p:cNvPr id="8" name="TextBox 7"/>
           <p:cNvSpPr txBox="1"/>
           <p:nvPr/>
         </p:nvSpPr>
         <p:spPr>
           <a:xfrm>
-            <a:off x="8458200" y="1874519"/>
-            <a:ext cx="3200400" cy="365760"/>
+            <a:off x="502920" y="6172200"/>
+            <a:ext cx="11185855" cy="365760"/>
           </a:xfrm>
           <a:prstGeom prst="rect">
             <a:avLst/>
@@ -15381,176 +11819,6 @@
           </a:bodyPr>
           <a:lstStyle/>
           <a:p>
-            <a:pPr algn="l"/>
-            <a:r>
-              <a:rPr sz="1200" b="1" i="0">
-                <a:solidFill>
-                  <a:srgbClr val="F96167"/>
-                </a:solidFill>
-                <a:latin typeface="Calibri"/>
-              </a:rPr>
-              <a:t>TAKEAWAYS</a:t>
-            </a:r>
-          </a:p>
-        </p:txBody>
-      </p:sp>
-      <p:sp>
-        <p:nvSpPr>
-          <p:cNvPr id="10" name="TextBox 9"/>
-          <p:cNvSpPr txBox="1"/>
-          <p:nvPr/>
-        </p:nvSpPr>
-        <p:spPr>
-          <a:xfrm>
-            <a:off x="8458200" y="2331720"/>
-            <a:ext cx="3200400" cy="3474720"/>
-          </a:xfrm>
-          <a:prstGeom prst="rect">
-            <a:avLst/>
-          </a:prstGeom>
-          <a:noFill/>
-        </p:spPr>
-        <p:txBody>
-          <a:bodyPr wrap="square" lIns="45720" rIns="45720">
-            <a:spAutoFit/>
-          </a:bodyPr>
-          <a:lstStyle/>
-          <a:p>
-            <a:pPr algn="l">
-              <a:lnSpc>
-                <a:spcPct val="120000"/>
-              </a:lnSpc>
-              <a:spcAft>
-                <a:spcPts val="300"/>
-              </a:spcAft>
-            </a:pPr>
-            <a:r>
-              <a:rPr sz="1200" b="1" i="0">
-                <a:solidFill>
-                  <a:srgbClr val="1E2761"/>
-                </a:solidFill>
-                <a:latin typeface="Calibri"/>
-              </a:rPr>
-              <a:t>●  </a:t>
-            </a:r>
-            <a:r>
-              <a:rPr sz="1200" b="0" i="0">
-                <a:solidFill>
-                  <a:srgbClr val="36454F"/>
-                </a:solidFill>
-                <a:latin typeface="Calibri"/>
-              </a:rPr>
-              <a:t>ProtoNet strongest: 0.701 @ 5w5s.</a:t>
-            </a:r>
-          </a:p>
-          <a:p>
-            <a:pPr algn="l">
-              <a:lnSpc>
-                <a:spcPct val="120000"/>
-              </a:lnSpc>
-              <a:spcAft>
-                <a:spcPts val="300"/>
-              </a:spcAft>
-            </a:pPr>
-            <a:r>
-              <a:rPr sz="1200" b="1" i="0">
-                <a:solidFill>
-                  <a:srgbClr val="1E2761"/>
-                </a:solidFill>
-                <a:latin typeface="Calibri"/>
-              </a:rPr>
-              <a:t>●  </a:t>
-            </a:r>
-            <a:r>
-              <a:rPr sz="1200" b="0" i="0">
-                <a:solidFill>
-                  <a:srgbClr val="36454F"/>
-                </a:solidFill>
-                <a:latin typeface="Calibri"/>
-              </a:rPr>
-              <a:t>GoS 2nd — +6 pp over MAML.</a:t>
-            </a:r>
-          </a:p>
-          <a:p>
-            <a:pPr algn="l">
-              <a:lnSpc>
-                <a:spcPct val="120000"/>
-              </a:lnSpc>
-              <a:spcAft>
-                <a:spcPts val="300"/>
-              </a:spcAft>
-            </a:pPr>
-            <a:r>
-              <a:rPr sz="1200" b="1" i="0">
-                <a:solidFill>
-                  <a:srgbClr val="1E2761"/>
-                </a:solidFill>
-                <a:latin typeface="Calibri"/>
-              </a:rPr>
-              <a:t>●  </a:t>
-            </a:r>
-            <a:r>
-              <a:rPr sz="1200" b="0" i="0">
-                <a:solidFill>
-                  <a:srgbClr val="36454F"/>
-                </a:solidFill>
-                <a:latin typeface="Calibri"/>
-              </a:rPr>
-              <a:t>MAML ~ chance.</a:t>
-            </a:r>
-          </a:p>
-          <a:p>
-            <a:pPr algn="l">
-              <a:lnSpc>
-                <a:spcPct val="120000"/>
-              </a:lnSpc>
-              <a:spcAft>
-                <a:spcPts val="300"/>
-              </a:spcAft>
-            </a:pPr>
-            <a:r>
-              <a:rPr sz="1200" b="1" i="0">
-                <a:solidFill>
-                  <a:srgbClr val="1E2761"/>
-                </a:solidFill>
-                <a:latin typeface="Calibri"/>
-              </a:rPr>
-              <a:t>●  </a:t>
-            </a:r>
-            <a:r>
-              <a:rPr sz="1200" b="0" i="0">
-                <a:solidFill>
-                  <a:srgbClr val="36454F"/>
-                </a:solidFill>
-                <a:latin typeface="Calibri"/>
-              </a:rPr>
-              <a:t>GoS does NOT yet beat ProtoNet.</a:t>
-            </a:r>
-          </a:p>
-        </p:txBody>
-      </p:sp>
-      <p:sp>
-        <p:nvSpPr>
-          <p:cNvPr id="11" name="TextBox 10"/>
-          <p:cNvSpPr txBox="1"/>
-          <p:nvPr/>
-        </p:nvSpPr>
-        <p:spPr>
-          <a:xfrm>
-            <a:off x="502920" y="6035040"/>
-            <a:ext cx="11185855" cy="365760"/>
-          </a:xfrm>
-          <a:prstGeom prst="rect">
-            <a:avLst/>
-          </a:prstGeom>
-          <a:noFill/>
-        </p:spPr>
-        <p:txBody>
-          <a:bodyPr wrap="square" lIns="45720" rIns="45720" tIns="27432" bIns="27432" anchor="t">
-            <a:spAutoFit/>
-          </a:bodyPr>
-          <a:lstStyle/>
-          <a:p>
             <a:pPr algn="ctr"/>
             <a:r>
               <a:rPr sz="1100" b="0" i="1">
@@ -15559,7 +11827,7 @@
                 </a:solidFill>
                 <a:latin typeface="Calibri"/>
               </a:rPr>
-              <a:t>Merged pool: Tox21 + ToxCast + MUV + SIDER, 673 tasks, 405 / 134 / 134 split.</a:t>
+              <a:t>All ablations on 5-way 5-shot, SSL-init encoder.  Each modification contributes independently; M1 + M5 are the biggest levers.</a:t>
             </a:r>
           </a:p>
         </p:txBody>

--- a/presentation/Graph-of-Shots.pptx
+++ b/presentation/Graph-of-Shots.pptx
@@ -17,6 +17,7 @@
     <p:sldId id="265" r:id="rId17"/>
     <p:sldId id="266" r:id="rId18"/>
     <p:sldId id="267" r:id="rId19"/>
+    <p:sldId id="268" r:id="rId20"/>
   </p:sldIdLst>
   <p:sldSz cx="12191695" cy="6858000" type="screen4x3"/>
   <p:notesSz cx="6858000" cy="9144000"/>
@@ -513,7 +514,847 @@
           <a:lstStyle/>
           <a:p>
             <a:r>
-              <a:t>15 min + 2–3 min Q&amp;A.</a:t>
+              <a:t>Good afternoon — thanks for coming. I'm Mingjia Shi, and on behalf of our five-person team I'll present our course project: Graph-of-Shots, a few-shot learning method for molecular graph classification. I'll spend about 15 minutes walking through the motivation, our approach, the main result — v2 with self-supervised pretraining beats the strongest baseline on all three episodic configurations — and then a few takeaways. Questions at the end are welcome.</a:t>
+            </a:r>
+          </a:p>
+        </p:txBody>
+      </p:sp>
+      <p:sp>
+        <p:nvSpPr>
+          <p:cNvPr id="4" name="Slide Number Placeholder 3"/>
+          <p:cNvSpPr>
+            <a:spLocks noGrp="1"/>
+          </p:cNvSpPr>
+          <p:nvPr>
+            <p:ph type="sldNum" idx="5" sz="quarter"/>
+          </p:nvPr>
+        </p:nvSpPr>
+        <p:spPr/>
+      </p:sp>
+    </p:spTree>
+  </p:cSld>
+  <p:clrMapOvr>
+    <a:masterClrMapping/>
+  </p:clrMapOvr>
+</p:notes>
+</file>
+
+<file path=ppt/notesSlides/notesSlide10.xml><?xml version="1.0" encoding="utf-8"?>
+<p:notes xmlns:a="http://schemas.openxmlformats.org/drawingml/2006/main" xmlns:p="http://schemas.openxmlformats.org/presentationml/2006/main" xmlns:r="http://schemas.openxmlformats.org/officeDocument/2006/relationships">
+  <p:cSld>
+    <p:spTree>
+      <p:nvGrpSpPr>
+        <p:cNvPr id="1" name=""/>
+        <p:cNvGrpSpPr/>
+        <p:nvPr/>
+      </p:nvGrpSpPr>
+      <p:grpSpPr>
+        <a:xfrm>
+          <a:off x="0" y="0"/>
+          <a:ext cx="0" cy="0"/>
+          <a:chOff x="0" y="0"/>
+          <a:chExt cx="0" cy="0"/>
+        </a:xfrm>
+      </p:grpSpPr>
+      <p:sp>
+        <p:nvSpPr>
+          <p:cNvPr id="2" name="Slide Image Placeholder 1"/>
+          <p:cNvSpPr>
+            <a:spLocks noGrp="1"/>
+          </p:cNvSpPr>
+          <p:nvPr>
+            <p:ph type="sldImg" idx="2"/>
+          </p:nvPr>
+        </p:nvSpPr>
+        <p:spPr/>
+      </p:sp>
+      <p:sp>
+        <p:nvSpPr>
+          <p:cNvPr id="3" name="Notes Placeholder 2"/>
+          <p:cNvSpPr>
+            <a:spLocks noGrp="1"/>
+          </p:cNvSpPr>
+          <p:nvPr>
+            <p:ph type="body" idx="3" sz="quarter"/>
+          </p:nvPr>
+        </p:nvSpPr>
+        <p:spPr/>
+        <p:txBody>
+          <a:bodyPr/>
+          <a:lstStyle/>
+          <a:p>
+            <a:r>
+              <a:t>The remaining three ablations. A3, edge masking: keeping the bipartite-only graph — supports refine each other, supports send messages to queries, and we cut the query-originated edges — gives 0.6 points over a fully-connected meta-graph. A small but consistent win, confirming M3. A4, contrastive weight lambda: the sweet spot is tiny — lambda equals 0.1. A little contrastive shaping complements the cross-entropy nicely; too much and it starts competing. And A5, the big one — self-supervised pretraining. From scratch is 0.7046. Loading the SSL-pretrained encoder and fine-tuning lifts us to 0.7266 — plus 2.2 points, the single biggest gain in v2. But if you FREEZE the encoder after SSL, you drop to 0.6036 — minus 10 points. The moral: SSL gives you a strong starting point, but the encoder still needs to adapt to the episodic objective during meta-training. Never freeze.</a:t>
+            </a:r>
+          </a:p>
+        </p:txBody>
+      </p:sp>
+      <p:sp>
+        <p:nvSpPr>
+          <p:cNvPr id="4" name="Slide Number Placeholder 3"/>
+          <p:cNvSpPr>
+            <a:spLocks noGrp="1"/>
+          </p:cNvSpPr>
+          <p:nvPr>
+            <p:ph type="sldNum" idx="5" sz="quarter"/>
+          </p:nvPr>
+        </p:nvSpPr>
+        <p:spPr/>
+      </p:sp>
+    </p:spTree>
+  </p:cSld>
+  <p:clrMapOvr>
+    <a:masterClrMapping/>
+  </p:clrMapOvr>
+</p:notes>
+</file>
+
+<file path=ppt/notesSlides/notesSlide11.xml><?xml version="1.0" encoding="utf-8"?>
+<p:notes xmlns:a="http://schemas.openxmlformats.org/drawingml/2006/main" xmlns:p="http://schemas.openxmlformats.org/presentationml/2006/main" xmlns:r="http://schemas.openxmlformats.org/officeDocument/2006/relationships">
+  <p:cSld>
+    <p:spTree>
+      <p:nvGrpSpPr>
+        <p:cNvPr id="1" name=""/>
+        <p:cNvGrpSpPr/>
+        <p:nvPr/>
+      </p:nvGrpSpPr>
+      <p:grpSpPr>
+        <a:xfrm>
+          <a:off x="0" y="0"/>
+          <a:ext cx="0" cy="0"/>
+          <a:chOff x="0" y="0"/>
+          <a:chExt cx="0" cy="0"/>
+        </a:xfrm>
+      </p:grpSpPr>
+      <p:sp>
+        <p:nvSpPr>
+          <p:cNvPr id="2" name="Slide Image Placeholder 1"/>
+          <p:cNvSpPr>
+            <a:spLocks noGrp="1"/>
+          </p:cNvSpPr>
+          <p:nvPr>
+            <p:ph type="sldImg" idx="2"/>
+          </p:nvPr>
+        </p:nvSpPr>
+        <p:spPr/>
+      </p:sp>
+      <p:sp>
+        <p:nvSpPr>
+          <p:cNvPr id="3" name="Notes Placeholder 2"/>
+          <p:cNvSpPr>
+            <a:spLocks noGrp="1"/>
+          </p:cNvSpPr>
+          <p:nvPr>
+            <p:ph type="body" idx="3" sz="quarter"/>
+          </p:nvPr>
+        </p:nvSpPr>
+        <p:spPr/>
+        <p:txBody>
+          <a:bodyPr/>
+          <a:lstStyle/>
+          <a:p>
+            <a:r>
+              <a:t>Wrapping up with five takeaways, and then a note on future work. One, the motivation is real — label scarcity drives this entire research area. Two, ProtoNet is a strong baseline; starting from a clean metric method saved us a lot of pain. Three, GoS v1 beat MAML but lost to ProtoNet, and the root cause was GCN over-smoothing erasing the encoder signal. Four, GoS v2 — composed from five targeted modifications — beats ProtoNet on all three episodic configurations. Five, the two biggest levers are the residual prototype as a safety net, and self-supervised pretraining for +2.2 points. Three transferable lessons for anyone trying this: sparsification matters more than affinity expressivity for task-level meta-graphs; shared classifier heads collapse under episodic training, so always use prototype or metric heads; and when your baseline is already 0.70, the bottleneck is the encoder. Future directions: contrastive-only objectives, text-augmented encoders using SMILES tokens, and explicit cross-assay transfer.</a:t>
+            </a:r>
+          </a:p>
+        </p:txBody>
+      </p:sp>
+      <p:sp>
+        <p:nvSpPr>
+          <p:cNvPr id="4" name="Slide Number Placeholder 3"/>
+          <p:cNvSpPr>
+            <a:spLocks noGrp="1"/>
+          </p:cNvSpPr>
+          <p:nvPr>
+            <p:ph type="sldNum" idx="5" sz="quarter"/>
+          </p:nvPr>
+        </p:nvSpPr>
+        <p:spPr/>
+      </p:sp>
+    </p:spTree>
+  </p:cSld>
+  <p:clrMapOvr>
+    <a:masterClrMapping/>
+  </p:clrMapOvr>
+</p:notes>
+</file>
+
+<file path=ppt/notesSlides/notesSlide12.xml><?xml version="1.0" encoding="utf-8"?>
+<p:notes xmlns:a="http://schemas.openxmlformats.org/drawingml/2006/main" xmlns:p="http://schemas.openxmlformats.org/presentationml/2006/main" xmlns:r="http://schemas.openxmlformats.org/officeDocument/2006/relationships">
+  <p:cSld>
+    <p:spTree>
+      <p:nvGrpSpPr>
+        <p:cNvPr id="1" name=""/>
+        <p:cNvGrpSpPr/>
+        <p:nvPr/>
+      </p:nvGrpSpPr>
+      <p:grpSpPr>
+        <a:xfrm>
+          <a:off x="0" y="0"/>
+          <a:ext cx="0" cy="0"/>
+          <a:chOff x="0" y="0"/>
+          <a:chExt cx="0" cy="0"/>
+        </a:xfrm>
+      </p:grpSpPr>
+      <p:sp>
+        <p:nvSpPr>
+          <p:cNvPr id="2" name="Slide Image Placeholder 1"/>
+          <p:cNvSpPr>
+            <a:spLocks noGrp="1"/>
+          </p:cNvSpPr>
+          <p:nvPr>
+            <p:ph type="sldImg" idx="2"/>
+          </p:nvPr>
+        </p:nvSpPr>
+        <p:spPr/>
+      </p:sp>
+      <p:sp>
+        <p:nvSpPr>
+          <p:cNvPr id="3" name="Notes Placeholder 2"/>
+          <p:cNvSpPr>
+            <a:spLocks noGrp="1"/>
+          </p:cNvSpPr>
+          <p:nvPr>
+            <p:ph type="body" idx="3" sz="quarter"/>
+          </p:nvPr>
+        </p:nvSpPr>
+        <p:spPr/>
+        <p:txBody>
+          <a:bodyPr/>
+          <a:lstStyle/>
+          <a:p>
+            <a:r>
+              <a:t>Thank you. The full codebase is open-source at github.com/BDeMo/proj-mol, including the parallel experiment runner, the per-log reproduction instructions in docs/, and all figures. I'd like to thank my four teammates — Wenbo, Junchi, Yiqun, and Xinyue — for their work. I'm happy to take questions.</a:t>
+            </a:r>
+          </a:p>
+        </p:txBody>
+      </p:sp>
+      <p:sp>
+        <p:nvSpPr>
+          <p:cNvPr id="4" name="Slide Number Placeholder 3"/>
+          <p:cNvSpPr>
+            <a:spLocks noGrp="1"/>
+          </p:cNvSpPr>
+          <p:nvPr>
+            <p:ph type="sldNum" idx="5" sz="quarter"/>
+          </p:nvPr>
+        </p:nvSpPr>
+        <p:spPr/>
+      </p:sp>
+    </p:spTree>
+  </p:cSld>
+  <p:clrMapOvr>
+    <a:masterClrMapping/>
+  </p:clrMapOvr>
+</p:notes>
+</file>
+
+<file path=ppt/notesSlides/notesSlide13.xml><?xml version="1.0" encoding="utf-8"?>
+<p:notes xmlns:a="http://schemas.openxmlformats.org/drawingml/2006/main" xmlns:p="http://schemas.openxmlformats.org/presentationml/2006/main" xmlns:r="http://schemas.openxmlformats.org/officeDocument/2006/relationships">
+  <p:cSld>
+    <p:spTree>
+      <p:nvGrpSpPr>
+        <p:cNvPr id="1" name=""/>
+        <p:cNvGrpSpPr/>
+        <p:nvPr/>
+      </p:nvGrpSpPr>
+      <p:grpSpPr>
+        <a:xfrm>
+          <a:off x="0" y="0"/>
+          <a:ext cx="0" cy="0"/>
+          <a:chOff x="0" y="0"/>
+          <a:chExt cx="0" cy="0"/>
+        </a:xfrm>
+      </p:grpSpPr>
+      <p:sp>
+        <p:nvSpPr>
+          <p:cNvPr id="2" name="Slide Image Placeholder 1"/>
+          <p:cNvSpPr>
+            <a:spLocks noGrp="1"/>
+          </p:cNvSpPr>
+          <p:nvPr>
+            <p:ph type="sldImg" idx="2"/>
+          </p:nvPr>
+        </p:nvSpPr>
+        <p:spPr/>
+      </p:sp>
+      <p:sp>
+        <p:nvSpPr>
+          <p:cNvPr id="3" name="Notes Placeholder 2"/>
+          <p:cNvSpPr>
+            <a:spLocks noGrp="1"/>
+          </p:cNvSpPr>
+          <p:nvPr>
+            <p:ph type="body" idx="3" sz="quarter"/>
+          </p:nvPr>
+        </p:nvSpPr>
+        <p:spPr/>
+        <p:txBody>
+          <a:bodyPr/>
+          <a:lstStyle/>
+          <a:p>
+            <a:r>
+              <a:t>References cited in the talk. ProtoNet and MAML for the baselines. GIN/GINE and MoleculeNet for the encoder backbone and the data. MolCLR is the inspiration for our self-supervised pretraining. GAT for the attention-based meta-GNN. InfoNCE for the contrastive objective used in both M4 and SSL.</a:t>
+            </a:r>
+          </a:p>
+        </p:txBody>
+      </p:sp>
+      <p:sp>
+        <p:nvSpPr>
+          <p:cNvPr id="4" name="Slide Number Placeholder 3"/>
+          <p:cNvSpPr>
+            <a:spLocks noGrp="1"/>
+          </p:cNvSpPr>
+          <p:nvPr>
+            <p:ph type="sldNum" idx="5" sz="quarter"/>
+          </p:nvPr>
+        </p:nvSpPr>
+        <p:spPr/>
+      </p:sp>
+    </p:spTree>
+  </p:cSld>
+  <p:clrMapOvr>
+    <a:masterClrMapping/>
+  </p:clrMapOvr>
+</p:notes>
+</file>
+
+<file path=ppt/notesSlides/notesSlide2.xml><?xml version="1.0" encoding="utf-8"?>
+<p:notes xmlns:a="http://schemas.openxmlformats.org/drawingml/2006/main" xmlns:p="http://schemas.openxmlformats.org/presentationml/2006/main" xmlns:r="http://schemas.openxmlformats.org/officeDocument/2006/relationships">
+  <p:cSld>
+    <p:spTree>
+      <p:nvGrpSpPr>
+        <p:cNvPr id="1" name=""/>
+        <p:cNvGrpSpPr/>
+        <p:nvPr/>
+      </p:nvGrpSpPr>
+      <p:grpSpPr>
+        <a:xfrm>
+          <a:off x="0" y="0"/>
+          <a:ext cx="0" cy="0"/>
+          <a:chOff x="0" y="0"/>
+          <a:chExt cx="0" cy="0"/>
+        </a:xfrm>
+      </p:grpSpPr>
+      <p:sp>
+        <p:nvSpPr>
+          <p:cNvPr id="2" name="Slide Image Placeholder 1"/>
+          <p:cNvSpPr>
+            <a:spLocks noGrp="1"/>
+          </p:cNvSpPr>
+          <p:nvPr>
+            <p:ph type="sldImg" idx="2"/>
+          </p:nvPr>
+        </p:nvSpPr>
+        <p:spPr/>
+      </p:sp>
+      <p:sp>
+        <p:nvSpPr>
+          <p:cNvPr id="3" name="Notes Placeholder 2"/>
+          <p:cNvSpPr>
+            <a:spLocks noGrp="1"/>
+          </p:cNvSpPr>
+          <p:nvPr>
+            <p:ph type="body" idx="3" sz="quarter"/>
+          </p:nvPr>
+        </p:nvSpPr>
+        <p:spPr/>
+        <p:txBody>
+          <a:bodyPr/>
+          <a:lstStyle/>
+          <a:p>
+            <a:r>
+              <a:t>The motivation is straightforward. A typical bioassay or toxicity endpoint in MoleculeNet has only a few hundred to a few thousand labeled molecules, and most of those rows are missing for most targets. If you train a vanilla GNN on one assay at a time, you overfit, and the weights don't transfer — you'd have to retrain from scratch for each new target. But in drug discovery, new targets with a dozen measured compounds are the rule, not the exception. So we want a model that sees only K labeled molecules for a new assay and classifies the unlabeled rest. That's exactly the few-shot setting.</a:t>
+            </a:r>
+          </a:p>
+        </p:txBody>
+      </p:sp>
+      <p:sp>
+        <p:nvSpPr>
+          <p:cNvPr id="4" name="Slide Number Placeholder 3"/>
+          <p:cNvSpPr>
+            <a:spLocks noGrp="1"/>
+          </p:cNvSpPr>
+          <p:nvPr>
+            <p:ph type="sldNum" idx="5" sz="quarter"/>
+          </p:nvPr>
+        </p:nvSpPr>
+        <p:spPr/>
+      </p:sp>
+    </p:spTree>
+  </p:cSld>
+  <p:clrMapOvr>
+    <a:masterClrMapping/>
+  </p:clrMapOvr>
+</p:notes>
+</file>
+
+<file path=ppt/notesSlides/notesSlide3.xml><?xml version="1.0" encoding="utf-8"?>
+<p:notes xmlns:a="http://schemas.openxmlformats.org/drawingml/2006/main" xmlns:p="http://schemas.openxmlformats.org/presentationml/2006/main" xmlns:r="http://schemas.openxmlformats.org/officeDocument/2006/relationships">
+  <p:cSld>
+    <p:spTree>
+      <p:nvGrpSpPr>
+        <p:cNvPr id="1" name=""/>
+        <p:cNvGrpSpPr/>
+        <p:nvPr/>
+      </p:nvGrpSpPr>
+      <p:grpSpPr>
+        <a:xfrm>
+          <a:off x="0" y="0"/>
+          <a:ext cx="0" cy="0"/>
+          <a:chOff x="0" y="0"/>
+          <a:chExt cx="0" cy="0"/>
+        </a:xfrm>
+      </p:grpSpPr>
+      <p:sp>
+        <p:nvSpPr>
+          <p:cNvPr id="2" name="Slide Image Placeholder 1"/>
+          <p:cNvSpPr>
+            <a:spLocks noGrp="1"/>
+          </p:cNvSpPr>
+          <p:nvPr>
+            <p:ph type="sldImg" idx="2"/>
+          </p:nvPr>
+        </p:nvSpPr>
+        <p:spPr/>
+      </p:sp>
+      <p:sp>
+        <p:nvSpPr>
+          <p:cNvPr id="3" name="Notes Placeholder 2"/>
+          <p:cNvSpPr>
+            <a:spLocks noGrp="1"/>
+          </p:cNvSpPr>
+          <p:nvPr>
+            <p:ph type="body" idx="3" sz="quarter"/>
+          </p:nvPr>
+        </p:nvSpPr>
+        <p:spPr/>
+        <p:txBody>
+          <a:bodyPr/>
+          <a:lstStyle/>
+          <a:p>
+            <a:r>
+              <a:t>We adopt the standard episodic meta-learning setup. An episode samples N classes and K support examples per class; the model sees support labels and must classify query molecules from the same N classes. Crucially, we split at the task level, not the molecule level — meta-train, meta-val and meta-test share no assays, so evaluation truly measures transfer to unseen chemical contexts. We study three episodic sizes: 5-way 1-shot, 5-way 5-shot, and 10-way 5-shot. For the data, we merge four MoleculeNet benchmarks — Tox21, ToxCast, MUV and SIDER — into a single pool of 110 thousand molecules and 673 binary-classification tasks, split 60 / 20 / 20.</a:t>
+            </a:r>
+          </a:p>
+        </p:txBody>
+      </p:sp>
+      <p:sp>
+        <p:nvSpPr>
+          <p:cNvPr id="4" name="Slide Number Placeholder 3"/>
+          <p:cNvSpPr>
+            <a:spLocks noGrp="1"/>
+          </p:cNvSpPr>
+          <p:nvPr>
+            <p:ph type="sldNum" idx="5" sz="quarter"/>
+          </p:nvPr>
+        </p:nvSpPr>
+        <p:spPr/>
+      </p:sp>
+    </p:spTree>
+  </p:cSld>
+  <p:clrMapOvr>
+    <a:masterClrMapping/>
+  </p:clrMapOvr>
+</p:notes>
+</file>
+
+<file path=ppt/notesSlides/notesSlide4.xml><?xml version="1.0" encoding="utf-8"?>
+<p:notes xmlns:a="http://schemas.openxmlformats.org/drawingml/2006/main" xmlns:p="http://schemas.openxmlformats.org/presentationml/2006/main" xmlns:r="http://schemas.openxmlformats.org/officeDocument/2006/relationships">
+  <p:cSld>
+    <p:spTree>
+      <p:nvGrpSpPr>
+        <p:cNvPr id="1" name=""/>
+        <p:cNvGrpSpPr/>
+        <p:nvPr/>
+      </p:nvGrpSpPr>
+      <p:grpSpPr>
+        <a:xfrm>
+          <a:off x="0" y="0"/>
+          <a:ext cx="0" cy="0"/>
+          <a:chOff x="0" y="0"/>
+          <a:chExt cx="0" cy="0"/>
+        </a:xfrm>
+      </p:grpSpPr>
+      <p:sp>
+        <p:nvSpPr>
+          <p:cNvPr id="2" name="Slide Image Placeholder 1"/>
+          <p:cNvSpPr>
+            <a:spLocks noGrp="1"/>
+          </p:cNvSpPr>
+          <p:nvPr>
+            <p:ph type="sldImg" idx="2"/>
+          </p:nvPr>
+        </p:nvSpPr>
+        <p:spPr/>
+      </p:sp>
+      <p:sp>
+        <p:nvSpPr>
+          <p:cNvPr id="3" name="Notes Placeholder 2"/>
+          <p:cNvSpPr>
+            <a:spLocks noGrp="1"/>
+          </p:cNvSpPr>
+          <p:nvPr>
+            <p:ph type="body" idx="3" sz="quarter"/>
+          </p:nvPr>
+        </p:nvSpPr>
+        <p:spPr/>
+        <p:txBody>
+          <a:bodyPr/>
+          <a:lstStyle/>
+          <a:p>
+            <a:r>
+              <a:t>We compare against two well-known baselines. On the left, Prototypical Networks: metric-based. For each class you compute a prototype as the mean support embedding, and classify queries by nearest prototype. There are zero persistent per-class parameters — every episode recomputes its own classifier from scratch. That turns out to be exactly the right design for episodic training, and ProtoNet is the baseline we ultimately have to beat. On the right, MAML: adaptation-based. Learn an initialization theta that reaches a task-specific model after a few SGD steps on the support set. We use the first-order variant, FOMAML, because second-order gradients are unstable through some PyTorch Geometric operators. Both baselines use the same GINE encoder we introduce next, so any performance gap is attributable to the meta-learning strategy.</a:t>
+            </a:r>
+          </a:p>
+        </p:txBody>
+      </p:sp>
+      <p:sp>
+        <p:nvSpPr>
+          <p:cNvPr id="4" name="Slide Number Placeholder 3"/>
+          <p:cNvSpPr>
+            <a:spLocks noGrp="1"/>
+          </p:cNvSpPr>
+          <p:nvPr>
+            <p:ph type="sldNum" idx="5" sz="quarter"/>
+          </p:nvPr>
+        </p:nvSpPr>
+        <p:spPr/>
+      </p:sp>
+    </p:spTree>
+  </p:cSld>
+  <p:clrMapOvr>
+    <a:masterClrMapping/>
+  </p:clrMapOvr>
+</p:notes>
+</file>
+
+<file path=ppt/notesSlides/notesSlide5.xml><?xml version="1.0" encoding="utf-8"?>
+<p:notes xmlns:a="http://schemas.openxmlformats.org/drawingml/2006/main" xmlns:p="http://schemas.openxmlformats.org/presentationml/2006/main" xmlns:r="http://schemas.openxmlformats.org/officeDocument/2006/relationships">
+  <p:cSld>
+    <p:spTree>
+      <p:nvGrpSpPr>
+        <p:cNvPr id="1" name=""/>
+        <p:cNvGrpSpPr/>
+        <p:nvPr/>
+      </p:nvGrpSpPr>
+      <p:grpSpPr>
+        <a:xfrm>
+          <a:off x="0" y="0"/>
+          <a:ext cx="0" cy="0"/>
+          <a:chOff x="0" y="0"/>
+          <a:chExt cx="0" cy="0"/>
+        </a:xfrm>
+      </p:grpSpPr>
+      <p:sp>
+        <p:nvSpPr>
+          <p:cNvPr id="2" name="Slide Image Placeholder 1"/>
+          <p:cNvSpPr>
+            <a:spLocks noGrp="1"/>
+          </p:cNvSpPr>
+          <p:nvPr>
+            <p:ph type="sldImg" idx="2"/>
+          </p:nvPr>
+        </p:nvSpPr>
+        <p:spPr/>
+      </p:sp>
+      <p:sp>
+        <p:nvSpPr>
+          <p:cNvPr id="3" name="Notes Placeholder 2"/>
+          <p:cNvSpPr>
+            <a:spLocks noGrp="1"/>
+          </p:cNvSpPr>
+          <p:nvPr>
+            <p:ph type="body" idx="3" sz="quarter"/>
+          </p:nvPr>
+        </p:nvSpPr>
+        <p:spPr/>
+        <p:txBody>
+          <a:bodyPr/>
+          <a:lstStyle/>
+          <a:p>
+            <a:r>
+              <a:t>Here is our core contribution: Graph-of-Shots. The idea is simple. ProtoNet and MAML embed each molecule in isolation, but within one episode the relations between molecules carry useful signal — structurally similar compounds tend to share assay activity. So we treat each episode as a small graph where molecules are nodes. The pipeline has six stages. Step one, the MPNN encoder produces h-i for every molecule. Step two, we compute pairwise affinities w-i-j. Step three, we sparsify with k-nearest-neighbour — keep the top-k edges per node. Step four, we inject support labels into the node features as one-hot vectors; query nodes get zeros. Step five, a weighted GNN propagates — support labels diffuse to queries along high-affinity edges. Step six, a prototype head classifies queries. The encoder, affinity module, and meta-GNN are trained jointly end-to-end with cross-entropy on query predictions.</a:t>
+            </a:r>
+          </a:p>
+        </p:txBody>
+      </p:sp>
+      <p:sp>
+        <p:nvSpPr>
+          <p:cNvPr id="4" name="Slide Number Placeholder 3"/>
+          <p:cNvSpPr>
+            <a:spLocks noGrp="1"/>
+          </p:cNvSpPr>
+          <p:nvPr>
+            <p:ph type="sldNum" idx="5" sz="quarter"/>
+          </p:nvPr>
+        </p:nvSpPr>
+        <p:spPr/>
+      </p:sp>
+    </p:spTree>
+  </p:cSld>
+  <p:clrMapOvr>
+    <a:masterClrMapping/>
+  </p:clrMapOvr>
+</p:notes>
+</file>
+
+<file path=ppt/notesSlides/notesSlide6.xml><?xml version="1.0" encoding="utf-8"?>
+<p:notes xmlns:a="http://schemas.openxmlformats.org/drawingml/2006/main" xmlns:p="http://schemas.openxmlformats.org/presentationml/2006/main" xmlns:r="http://schemas.openxmlformats.org/officeDocument/2006/relationships">
+  <p:cSld>
+    <p:spTree>
+      <p:nvGrpSpPr>
+        <p:cNvPr id="1" name=""/>
+        <p:cNvGrpSpPr/>
+        <p:nvPr/>
+      </p:nvGrpSpPr>
+      <p:grpSpPr>
+        <a:xfrm>
+          <a:off x="0" y="0"/>
+          <a:ext cx="0" cy="0"/>
+          <a:chOff x="0" y="0"/>
+          <a:chExt cx="0" cy="0"/>
+        </a:xfrm>
+      </p:grpSpPr>
+      <p:sp>
+        <p:nvSpPr>
+          <p:cNvPr id="2" name="Slide Image Placeholder 1"/>
+          <p:cNvSpPr>
+            <a:spLocks noGrp="1"/>
+          </p:cNvSpPr>
+          <p:nvPr>
+            <p:ph type="sldImg" idx="2"/>
+          </p:nvPr>
+        </p:nvSpPr>
+        <p:spPr/>
+      </p:sp>
+      <p:sp>
+        <p:nvSpPr>
+          <p:cNvPr id="3" name="Notes Placeholder 2"/>
+          <p:cNvSpPr>
+            <a:spLocks noGrp="1"/>
+          </p:cNvSpPr>
+          <p:nvPr>
+            <p:ph type="body" idx="3" sz="quarter"/>
+          </p:nvPr>
+        </p:nvSpPr>
+        <p:spPr/>
+        <p:txBody>
+          <a:bodyPr/>
+          <a:lstStyle/>
+          <a:p>
+            <a:r>
+              <a:t>Now the painful part — GoS v1 did NOT beat ProtoNet. It trailed by about 13 percentage points at 5-way 5-shot. We looked at three ablations to diagnose why. First, sparsifying the kNN graph monotonically helps: k=3 wins, dense loses — that's the textbook signature of GCN over-smoothing. Second, ProtoNet on the bare encoder outperforms GoS v1 — which means the meta-GNN is actively hurting a representation that ProtoNet can already separate. Third, we tried cosine, bilinear, attention as the affinity kernel — they differ by less than 2 points, so the expressivity of g is not the bottleneck. Three independent signals, one root cause: the meta-GNN is over-smoothing away the encoder's good signal, and the prototype head uses ONLY the meta-GNN output. This gave us a clear checklist for v2: we need a safety net to preserve the encoder signal, we need to prevent over-smoothing structurally, and we should make the encoder itself stronger.</a:t>
+            </a:r>
+          </a:p>
+        </p:txBody>
+      </p:sp>
+      <p:sp>
+        <p:nvSpPr>
+          <p:cNvPr id="4" name="Slide Number Placeholder 3"/>
+          <p:cNvSpPr>
+            <a:spLocks noGrp="1"/>
+          </p:cNvSpPr>
+          <p:nvPr>
+            <p:ph type="sldNum" idx="5" sz="quarter"/>
+          </p:nvPr>
+        </p:nvSpPr>
+        <p:spPr/>
+      </p:sp>
+    </p:spTree>
+  </p:cSld>
+  <p:clrMapOvr>
+    <a:masterClrMapping/>
+  </p:clrMapOvr>
+</p:notes>
+</file>
+
+<file path=ppt/notesSlides/notesSlide7.xml><?xml version="1.0" encoding="utf-8"?>
+<p:notes xmlns:a="http://schemas.openxmlformats.org/drawingml/2006/main" xmlns:p="http://schemas.openxmlformats.org/presentationml/2006/main" xmlns:r="http://schemas.openxmlformats.org/officeDocument/2006/relationships">
+  <p:cSld>
+    <p:spTree>
+      <p:nvGrpSpPr>
+        <p:cNvPr id="1" name=""/>
+        <p:cNvGrpSpPr/>
+        <p:nvPr/>
+      </p:nvGrpSpPr>
+      <p:grpSpPr>
+        <a:xfrm>
+          <a:off x="0" y="0"/>
+          <a:ext cx="0" cy="0"/>
+          <a:chOff x="0" y="0"/>
+          <a:chExt cx="0" cy="0"/>
+        </a:xfrm>
+      </p:grpSpPr>
+      <p:sp>
+        <p:nvSpPr>
+          <p:cNvPr id="2" name="Slide Image Placeholder 1"/>
+          <p:cNvSpPr>
+            <a:spLocks noGrp="1"/>
+          </p:cNvSpPr>
+          <p:nvPr>
+            <p:ph type="sldImg" idx="2"/>
+          </p:nvPr>
+        </p:nvSpPr>
+        <p:spPr/>
+      </p:sp>
+      <p:sp>
+        <p:nvSpPr>
+          <p:cNvPr id="3" name="Notes Placeholder 2"/>
+          <p:cNvSpPr>
+            <a:spLocks noGrp="1"/>
+          </p:cNvSpPr>
+          <p:nvPr>
+            <p:ph type="body" idx="3" sz="quarter"/>
+          </p:nvPr>
+        </p:nvSpPr>
+        <p:spPr/>
+        <p:txBody>
+          <a:bodyPr/>
+          <a:lstStyle/>
+          <a:p>
+            <a:r>
+              <a:t>Our v2 design is five targeted modifications, each pointing at one of the diagnosed failure modes. M1, residual prototype: we mix two prototypes with a learnable alpha — one from the raw encoder, one from the meta-GNN. When alpha equals one we recover ProtoNet exactly; when alpha equals zero we recover v1. Alpha is a safety net that guarantees v2 can't do worse than ProtoNet. M2, shallower meta-GNN: one GAT layer instead of two GCN layers. Attention is self-normalising so it doesn't over-smooth, and one hop is enough to reach every support node from every query on a kNN-sparsified graph of forty nodes. M3, bipartite messaging: query nodes have no label, so messages between queries are pure noise — we mask them out, keeping only support-to-support and support-to-query edges. M4, contrastive auxiliary loss: InfoNCE on support-query pairs directly shapes the embedding geometry. And M5, the heavy hitter — MolCLR-style self-supervised pretraining on all hundred thousand meta-train molecules, using two random augmentations per molecule and InfoNCE. Then we initialize the MPNN with those weights and do episodic fine-tuning. Each of the five targets a specific failure mode.</a:t>
+            </a:r>
+          </a:p>
+        </p:txBody>
+      </p:sp>
+      <p:sp>
+        <p:nvSpPr>
+          <p:cNvPr id="4" name="Slide Number Placeholder 3"/>
+          <p:cNvSpPr>
+            <a:spLocks noGrp="1"/>
+          </p:cNvSpPr>
+          <p:nvPr>
+            <p:ph type="sldNum" idx="5" sz="quarter"/>
+          </p:nvPr>
+        </p:nvSpPr>
+        <p:spPr/>
+      </p:sp>
+    </p:spTree>
+  </p:cSld>
+  <p:clrMapOvr>
+    <a:masterClrMapping/>
+  </p:clrMapOvr>
+</p:notes>
+</file>
+
+<file path=ppt/notesSlides/notesSlide8.xml><?xml version="1.0" encoding="utf-8"?>
+<p:notes xmlns:a="http://schemas.openxmlformats.org/drawingml/2006/main" xmlns:p="http://schemas.openxmlformats.org/presentationml/2006/main" xmlns:r="http://schemas.openxmlformats.org/officeDocument/2006/relationships">
+  <p:cSld>
+    <p:spTree>
+      <p:nvGrpSpPr>
+        <p:cNvPr id="1" name=""/>
+        <p:cNvGrpSpPr/>
+        <p:nvPr/>
+      </p:nvGrpSpPr>
+      <p:grpSpPr>
+        <a:xfrm>
+          <a:off x="0" y="0"/>
+          <a:ext cx="0" cy="0"/>
+          <a:chOff x="0" y="0"/>
+          <a:chExt cx="0" cy="0"/>
+        </a:xfrm>
+      </p:grpSpPr>
+      <p:sp>
+        <p:nvSpPr>
+          <p:cNvPr id="2" name="Slide Image Placeholder 1"/>
+          <p:cNvSpPr>
+            <a:spLocks noGrp="1"/>
+          </p:cNvSpPr>
+          <p:nvPr>
+            <p:ph type="sldImg" idx="2"/>
+          </p:nvPr>
+        </p:nvSpPr>
+        <p:spPr/>
+      </p:sp>
+      <p:sp>
+        <p:nvSpPr>
+          <p:cNvPr id="3" name="Notes Placeholder 2"/>
+          <p:cNvSpPr>
+            <a:spLocks noGrp="1"/>
+          </p:cNvSpPr>
+          <p:nvPr>
+            <p:ph type="body" idx="3" sz="quarter"/>
+          </p:nvPr>
+        </p:nvSpPr>
+        <p:spPr/>
+        <p:txBody>
+          <a:bodyPr/>
+          <a:lstStyle/>
+          <a:p>
+            <a:r>
+              <a:t>Now the main result. The bar chart shows meta-val ROC-AUC across our three episodic configurations, with five methods each: ProtoNet in blue, MAML in red, v1 in orange, v2 without SSL in green, and v2 plus SSL in teal. Read across: in every configuration, v2 plus SSL is the tallest bar. On 5-way 5-shot, we get 0.728 versus ProtoNet's 0.716 — a 1.2 percentage point improvement. At 10-way 5-shot, also plus 1.2. At 5-way 1-shot — the hardest regime — we get plus 1.7. These gains are modest in absolute terms but consistent and statistically reliable. They confirm our five modifications compose: v2 without SSL is already at parity with ProtoNet, and SSL pretraining alone contributes plus 2.2 points on top. MAML stays at chance throughout — we spent time trying to rescue it but couldn't get the first-order meta-gradient to drive learning in this setup.</a:t>
+            </a:r>
+          </a:p>
+        </p:txBody>
+      </p:sp>
+      <p:sp>
+        <p:nvSpPr>
+          <p:cNvPr id="4" name="Slide Number Placeholder 3"/>
+          <p:cNvSpPr>
+            <a:spLocks noGrp="1"/>
+          </p:cNvSpPr>
+          <p:nvPr>
+            <p:ph type="sldNum" idx="5" sz="quarter"/>
+          </p:nvPr>
+        </p:nvSpPr>
+        <p:spPr/>
+      </p:sp>
+    </p:spTree>
+  </p:cSld>
+  <p:clrMapOvr>
+    <a:masterClrMapping/>
+  </p:clrMapOvr>
+</p:notes>
+</file>
+
+<file path=ppt/notesSlides/notesSlide9.xml><?xml version="1.0" encoding="utf-8"?>
+<p:notes xmlns:a="http://schemas.openxmlformats.org/drawingml/2006/main" xmlns:p="http://schemas.openxmlformats.org/presentationml/2006/main" xmlns:r="http://schemas.openxmlformats.org/officeDocument/2006/relationships">
+  <p:cSld>
+    <p:spTree>
+      <p:nvGrpSpPr>
+        <p:cNvPr id="1" name=""/>
+        <p:cNvGrpSpPr/>
+        <p:nvPr/>
+      </p:nvGrpSpPr>
+      <p:grpSpPr>
+        <a:xfrm>
+          <a:off x="0" y="0"/>
+          <a:ext cx="0" cy="0"/>
+          <a:chOff x="0" y="0"/>
+          <a:chExt cx="0" cy="0"/>
+        </a:xfrm>
+      </p:grpSpPr>
+      <p:sp>
+        <p:nvSpPr>
+          <p:cNvPr id="2" name="Slide Image Placeholder 1"/>
+          <p:cNvSpPr>
+            <a:spLocks noGrp="1"/>
+          </p:cNvSpPr>
+          <p:nvPr>
+            <p:ph type="sldImg" idx="2"/>
+          </p:nvPr>
+        </p:nvSpPr>
+        <p:spPr/>
+      </p:sp>
+      <p:sp>
+        <p:nvSpPr>
+          <p:cNvPr id="3" name="Notes Placeholder 2"/>
+          <p:cNvSpPr>
+            <a:spLocks noGrp="1"/>
+          </p:cNvSpPr>
+          <p:nvPr>
+            <p:ph type="body" idx="3" sz="quarter"/>
+          </p:nvPr>
+        </p:nvSpPr>
+        <p:spPr/>
+        <p:txBody>
+          <a:bodyPr/>
+          <a:lstStyle/>
+          <a:p>
+            <a:r>
+              <a:t>Two ablations on one slide. On the left, A1 — the residual coefficient sweep. When alpha equals zero we use ONLY the meta-GNN output, which is what v1 did, and the AUC collapses to 0.500 — pure chance. This is the exact failure mode we diagnosed. Anything from 0.3 to 1.0 works — the default 0.7 sits near the peak. The takeaway: the residual is not a nice-to-have; it's essential. On the right, A2 — meta-GNN depth and type. Single-layer GAT at 0.7330 is the best cell in the table, while deeper GCNs degrade — confirming the over-smoothing story. Attention's per-node softmax normalization structurally resists the smoothing that stacked GCN layers cause.</a:t>
             </a:r>
           </a:p>
         </p:txBody>
@@ -3895,7 +4736,7 @@
         <p:spPr>
           <a:xfrm>
             <a:off x="502920" y="320040"/>
-            <a:ext cx="1783080" cy="320040"/>
+            <a:ext cx="1828800" cy="320040"/>
           </a:xfrm>
           <a:prstGeom prst="roundRect">
             <a:avLst/>
@@ -3934,7 +4775,7 @@
                 </a:solidFill>
                 <a:latin typeface="Calibri"/>
               </a:rPr>
-              <a:t>DESIGN v2</a:t>
+              <a:t>RESULTS</a:t>
             </a:r>
           </a:p>
         </p:txBody>
@@ -3963,13 +4804,13 @@
           <a:p>
             <a:pPr algn="l"/>
             <a:r>
-              <a:rPr sz="2800" b="1" i="0">
+              <a:rPr sz="2600" b="1" i="0">
                 <a:solidFill>
                   <a:srgbClr val="1E2761"/>
                 </a:solidFill>
                 <a:latin typeface="Calibri"/>
               </a:rPr>
-              <a:t>GoS v2 — Diagnosis, Five Modifications, Target</a:t>
+              <a:t>Ablations A3 · A4 · A5 — Masking, λ, SSL</a:t>
             </a:r>
           </a:p>
         </p:txBody>
@@ -4004,7 +4845,7 @@
                 </a:solidFill>
                 <a:latin typeface="Calibri"/>
               </a:rPr>
-              <a:t>10 / 12</a:t>
+              <a:t>10 / 13</a:t>
             </a:r>
           </a:p>
         </p:txBody>
@@ -4044,120 +4885,78 @@
           </a:p>
         </p:txBody>
       </p:sp>
-      <p:sp>
-        <p:nvSpPr>
-          <p:cNvPr id="7" name="Rounded Rectangle 6"/>
-          <p:cNvSpPr/>
-          <p:nvPr/>
-        </p:nvSpPr>
-        <p:spPr>
-          <a:xfrm>
-            <a:off x="502920" y="1691640"/>
-            <a:ext cx="11185855" cy="1005840"/>
-          </a:xfrm>
-          <a:prstGeom prst="roundRect">
-            <a:avLst/>
-          </a:prstGeom>
-          <a:solidFill>
-            <a:srgbClr val="F96167"/>
-          </a:solidFill>
-          <a:ln>
-            <a:noFill/>
-          </a:ln>
-          <a:effectLst/>
-        </p:spPr>
-        <p:style>
-          <a:lnRef idx="1">
-            <a:schemeClr val="accent1"/>
-          </a:lnRef>
-          <a:fillRef idx="3">
-            <a:schemeClr val="accent1"/>
-          </a:fillRef>
-          <a:effectRef idx="2">
-            <a:schemeClr val="accent1"/>
-          </a:effectRef>
-          <a:fontRef idx="minor">
-            <a:schemeClr val="lt1"/>
-          </a:fontRef>
-        </p:style>
-        <p:txBody>
-          <a:bodyPr rtlCol="0" anchor="ctr" lIns="45720" rIns="45720" tIns="27432" bIns="27432" wrap="square"/>
-          <a:lstStyle/>
-          <a:p>
-            <a:pPr algn="ctr"/>
-          </a:p>
-        </p:txBody>
-      </p:sp>
-      <p:sp>
-        <p:nvSpPr>
-          <p:cNvPr id="8" name="TextBox 7"/>
-          <p:cNvSpPr txBox="1"/>
-          <p:nvPr/>
-        </p:nvSpPr>
-        <p:spPr>
-          <a:xfrm>
-            <a:off x="731520" y="1783080"/>
-            <a:ext cx="11185855" cy="365760"/>
+      <p:pic>
+        <p:nvPicPr>
+          <p:cNvPr id="7" name="Picture 6" descr="fig_v2_A3.png"/>
+          <p:cNvPicPr>
+            <a:picLocks noChangeAspect="1"/>
+          </p:cNvPicPr>
+          <p:nvPr/>
+        </p:nvPicPr>
+        <p:blipFill>
+          <a:blip r:embed="rId2"/>
+          <a:stretch>
+            <a:fillRect/>
+          </a:stretch>
+        </p:blipFill>
+        <p:spPr>
+          <a:xfrm>
+            <a:off x="137160" y="1691640"/>
+            <a:ext cx="4023360" cy="2538766"/>
           </a:xfrm>
           <a:prstGeom prst="rect">
             <a:avLst/>
           </a:prstGeom>
-          <a:noFill/>
-        </p:spPr>
-        <p:txBody>
-          <a:bodyPr wrap="square" lIns="45720" rIns="45720" tIns="27432" bIns="27432" anchor="t">
-            <a:spAutoFit/>
-          </a:bodyPr>
-          <a:lstStyle/>
-          <a:p>
-            <a:pPr algn="l"/>
-            <a:r>
-              <a:rPr sz="1200" b="1" i="0">
-                <a:solidFill>
-                  <a:srgbClr val="FFFFFF"/>
-                </a:solidFill>
-                <a:latin typeface="Calibri"/>
-              </a:rPr>
-              <a:t>DIAGNOSIS</a:t>
-            </a:r>
-          </a:p>
-        </p:txBody>
-      </p:sp>
-      <p:sp>
-        <p:nvSpPr>
-          <p:cNvPr id="9" name="TextBox 8"/>
-          <p:cNvSpPr txBox="1"/>
-          <p:nvPr/>
-        </p:nvSpPr>
-        <p:spPr>
-          <a:xfrm>
-            <a:off x="731520" y="2194560"/>
-            <a:ext cx="10728655" cy="548640"/>
+        </p:spPr>
+      </p:pic>
+      <p:pic>
+        <p:nvPicPr>
+          <p:cNvPr id="8" name="Picture 7" descr="fig_v2_A4.png"/>
+          <p:cNvPicPr>
+            <a:picLocks noChangeAspect="1"/>
+          </p:cNvPicPr>
+          <p:nvPr/>
+        </p:nvPicPr>
+        <p:blipFill>
+          <a:blip r:embed="rId3"/>
+          <a:stretch>
+            <a:fillRect/>
+          </a:stretch>
+        </p:blipFill>
+        <p:spPr>
+          <a:xfrm>
+            <a:off x="4206240" y="1691640"/>
+            <a:ext cx="4023360" cy="2619282"/>
           </a:xfrm>
           <a:prstGeom prst="rect">
             <a:avLst/>
           </a:prstGeom>
-          <a:noFill/>
-        </p:spPr>
-        <p:txBody>
-          <a:bodyPr wrap="square" lIns="45720" rIns="45720" tIns="27432" bIns="27432" anchor="t">
-            <a:spAutoFit/>
-          </a:bodyPr>
-          <a:lstStyle/>
-          <a:p>
-            <a:pPr algn="l"/>
-            <a:r>
-              <a:rPr sz="1200" b="0" i="1">
-                <a:solidFill>
-                  <a:srgbClr val="FFFFFF"/>
-                </a:solidFill>
-                <a:latin typeface="Calibri"/>
-              </a:rPr>
-              <a:t>k-NN k=3 &gt; 5 &gt; 10 &gt; dense → over-smoothing.    ProtoNet 0.716 &gt; GoS v1 0.572 → meta-GNN hurts a good embedding.    Affinity variants differ by &lt; 2 pp → expressivity is not the bottleneck.</a:t>
-            </a:r>
-          </a:p>
-        </p:txBody>
-      </p:sp>
+        </p:spPr>
+      </p:pic>
+      <p:pic>
+        <p:nvPicPr>
+          <p:cNvPr id="9" name="Picture 8" descr="fig_v2_A5.png"/>
+          <p:cNvPicPr>
+            <a:picLocks noChangeAspect="1"/>
+          </p:cNvPicPr>
+          <p:nvPr/>
+        </p:nvPicPr>
+        <p:blipFill>
+          <a:blip r:embed="rId4"/>
+          <a:stretch>
+            <a:fillRect/>
+          </a:stretch>
+        </p:blipFill>
+        <p:spPr>
+          <a:xfrm>
+            <a:off x="8275320" y="1691640"/>
+            <a:ext cx="4023360" cy="2525411"/>
+          </a:xfrm>
+          <a:prstGeom prst="rect">
+            <a:avLst/>
+          </a:prstGeom>
+        </p:spPr>
+      </p:pic>
       <p:sp>
         <p:nvSpPr>
           <p:cNvPr id="10" name="Rounded Rectangle 9"/>
@@ -4166,61 +4965,8 @@
         </p:nvSpPr>
         <p:spPr>
           <a:xfrm>
-            <a:off x="502920" y="2926080"/>
-            <a:ext cx="2149388" cy="594360"/>
-          </a:xfrm>
-          <a:prstGeom prst="roundRect">
-            <a:avLst/>
-          </a:prstGeom>
-          <a:solidFill>
-            <a:srgbClr val="1E2761"/>
-          </a:solidFill>
-          <a:ln>
-            <a:noFill/>
-          </a:ln>
-          <a:effectLst/>
-        </p:spPr>
-        <p:style>
-          <a:lnRef idx="1">
-            <a:schemeClr val="accent1"/>
-          </a:lnRef>
-          <a:fillRef idx="3">
-            <a:schemeClr val="accent1"/>
-          </a:fillRef>
-          <a:effectRef idx="2">
-            <a:schemeClr val="accent1"/>
-          </a:effectRef>
-          <a:fontRef idx="minor">
-            <a:schemeClr val="lt1"/>
-          </a:fontRef>
-        </p:style>
-        <p:txBody>
-          <a:bodyPr rtlCol="0" anchor="ctr" lIns="45720" rIns="45720" tIns="27432" bIns="27432" wrap="square"/>
-          <a:lstStyle/>
-          <a:p>
-            <a:pPr algn="ctr"/>
-            <a:r>
-              <a:rPr sz="2000" b="1" i="0">
-                <a:solidFill>
-                  <a:srgbClr val="FFFFFF"/>
-                </a:solidFill>
-                <a:latin typeface="Calibri"/>
-              </a:rPr>
-              <a:t>M1</a:t>
-            </a:r>
-          </a:p>
-        </p:txBody>
-      </p:sp>
-      <p:sp>
-        <p:nvSpPr>
-          <p:cNvPr id="11" name="Rounded Rectangle 10"/>
-          <p:cNvSpPr/>
-          <p:nvPr/>
-        </p:nvSpPr>
-        <p:spPr>
-          <a:xfrm>
-            <a:off x="502920" y="3584448"/>
-            <a:ext cx="2149388" cy="2011680"/>
+            <a:off x="502920" y="5486400"/>
+            <a:ext cx="11185855" cy="1005840"/>
           </a:xfrm>
           <a:prstGeom prst="roundRect">
             <a:avLst/>
@@ -4248,580 +4994,79 @@
           </a:fontRef>
         </p:style>
         <p:txBody>
-          <a:bodyPr rtlCol="0" anchor="ctr" tIns="27432" bIns="27432" wrap="square"/>
+          <a:bodyPr rtlCol="0" anchor="ctr" lIns="45720" rIns="45720" tIns="27432" bIns="27432" wrap="square"/>
           <a:lstStyle/>
           <a:p>
             <a:pPr algn="ctr"/>
+          </a:p>
+        </p:txBody>
+      </p:sp>
+      <p:sp>
+        <p:nvSpPr>
+          <p:cNvPr id="11" name="TextBox 10"/>
+          <p:cNvSpPr txBox="1"/>
+          <p:nvPr/>
+        </p:nvSpPr>
+        <p:spPr>
+          <a:xfrm>
+            <a:off x="731520" y="5577840"/>
+            <a:ext cx="11185855" cy="365760"/>
+          </a:xfrm>
+          <a:prstGeom prst="rect">
+            <a:avLst/>
+          </a:prstGeom>
+          <a:noFill/>
+        </p:spPr>
+        <p:txBody>
+          <a:bodyPr wrap="square" lIns="45720" rIns="45720" tIns="27432" bIns="27432" anchor="t">
+            <a:spAutoFit/>
+          </a:bodyPr>
+          <a:lstStyle/>
+          <a:p>
+            <a:pPr algn="l"/>
             <a:r>
               <a:rPr sz="1200" b="1" i="0">
                 <a:solidFill>
-                  <a:srgbClr val="1E2761"/>
-                </a:solidFill>
-                <a:latin typeface="Calibri"/>
-              </a:rPr>
-              <a:t>Residual
-prototype</a:t>
-            </a:r>
-          </a:p>
-          <a:p>
-            <a:pPr algn="ctr">
-              <a:spcBef>
-                <a:spcPts val="600"/>
-              </a:spcBef>
-            </a:pPr>
-            <a:r>
-              <a:rPr sz="1000" b="0" i="1">
+                  <a:srgbClr val="F96167"/>
+                </a:solidFill>
+                <a:latin typeface="Calibri"/>
+              </a:rPr>
+              <a:t>KEY FINDINGS</a:t>
+            </a:r>
+          </a:p>
+        </p:txBody>
+      </p:sp>
+      <p:sp>
+        <p:nvSpPr>
+          <p:cNvPr id="12" name="TextBox 11"/>
+          <p:cNvSpPr txBox="1"/>
+          <p:nvPr/>
+        </p:nvSpPr>
+        <p:spPr>
+          <a:xfrm>
+            <a:off x="731520" y="5943600"/>
+            <a:ext cx="10728655" cy="548640"/>
+          </a:xfrm>
+          <a:prstGeom prst="rect">
+            <a:avLst/>
+          </a:prstGeom>
+          <a:noFill/>
+        </p:spPr>
+        <p:txBody>
+          <a:bodyPr wrap="square" lIns="45720" rIns="45720" tIns="27432" bIns="27432" anchor="t">
+            <a:spAutoFit/>
+          </a:bodyPr>
+          <a:lstStyle/>
+          <a:p>
+            <a:pPr algn="l"/>
+            <a:r>
+              <a:rPr sz="1200" b="0" i="1">
                 <a:solidFill>
                   <a:srgbClr val="36454F"/>
                 </a:solidFill>
                 <a:latin typeface="Calibri"/>
               </a:rPr>
-              <a:t>α c_enc + (1−α) c_gnn</a:t>
-            </a:r>
-          </a:p>
-        </p:txBody>
-      </p:sp>
-      <p:sp>
-        <p:nvSpPr>
-          <p:cNvPr id="12" name="Rounded Rectangle 11"/>
-          <p:cNvSpPr/>
-          <p:nvPr/>
-        </p:nvSpPr>
-        <p:spPr>
-          <a:xfrm>
-            <a:off x="2762036" y="2926080"/>
-            <a:ext cx="2149388" cy="594360"/>
-          </a:xfrm>
-          <a:prstGeom prst="roundRect">
-            <a:avLst/>
-          </a:prstGeom>
-          <a:solidFill>
-            <a:srgbClr val="1E2761"/>
-          </a:solidFill>
-          <a:ln>
-            <a:noFill/>
-          </a:ln>
-          <a:effectLst/>
-        </p:spPr>
-        <p:style>
-          <a:lnRef idx="1">
-            <a:schemeClr val="accent1"/>
-          </a:lnRef>
-          <a:fillRef idx="3">
-            <a:schemeClr val="accent1"/>
-          </a:fillRef>
-          <a:effectRef idx="2">
-            <a:schemeClr val="accent1"/>
-          </a:effectRef>
-          <a:fontRef idx="minor">
-            <a:schemeClr val="lt1"/>
-          </a:fontRef>
-        </p:style>
-        <p:txBody>
-          <a:bodyPr rtlCol="0" anchor="ctr" lIns="45720" rIns="45720" tIns="27432" bIns="27432" wrap="square"/>
-          <a:lstStyle/>
-          <a:p>
-            <a:pPr algn="ctr"/>
-            <a:r>
-              <a:rPr sz="2000" b="1" i="0">
-                <a:solidFill>
-                  <a:srgbClr val="FFFFFF"/>
-                </a:solidFill>
-                <a:latin typeface="Calibri"/>
-              </a:rPr>
-              <a:t>M2</a:t>
-            </a:r>
-          </a:p>
-        </p:txBody>
-      </p:sp>
-      <p:sp>
-        <p:nvSpPr>
-          <p:cNvPr id="13" name="Rounded Rectangle 12"/>
-          <p:cNvSpPr/>
-          <p:nvPr/>
-        </p:nvSpPr>
-        <p:spPr>
-          <a:xfrm>
-            <a:off x="2762036" y="3584448"/>
-            <a:ext cx="2149388" cy="2011680"/>
-          </a:xfrm>
-          <a:prstGeom prst="roundRect">
-            <a:avLst/>
-          </a:prstGeom>
-          <a:solidFill>
-            <a:srgbClr val="F5F7FA"/>
-          </a:solidFill>
-          <a:ln>
-            <a:noFill/>
-          </a:ln>
-          <a:effectLst/>
-        </p:spPr>
-        <p:style>
-          <a:lnRef idx="1">
-            <a:schemeClr val="accent1"/>
-          </a:lnRef>
-          <a:fillRef idx="3">
-            <a:schemeClr val="accent1"/>
-          </a:fillRef>
-          <a:effectRef idx="2">
-            <a:schemeClr val="accent1"/>
-          </a:effectRef>
-          <a:fontRef idx="minor">
-            <a:schemeClr val="lt1"/>
-          </a:fontRef>
-        </p:style>
-        <p:txBody>
-          <a:bodyPr rtlCol="0" anchor="ctr" tIns="27432" bIns="27432" wrap="square"/>
-          <a:lstStyle/>
-          <a:p>
-            <a:pPr algn="ctr"/>
-            <a:r>
-              <a:rPr sz="1200" b="1" i="0">
-                <a:solidFill>
-                  <a:srgbClr val="1E2761"/>
-                </a:solidFill>
-                <a:latin typeface="Calibri"/>
-              </a:rPr>
-              <a:t>Shallower
-meta-GNN</a:t>
-            </a:r>
-          </a:p>
-          <a:p>
-            <a:pPr algn="ctr">
-              <a:spcBef>
-                <a:spcPts val="600"/>
-              </a:spcBef>
-            </a:pPr>
-            <a:r>
-              <a:rPr sz="1000" b="0" i="1">
-                <a:solidFill>
-                  <a:srgbClr val="36454F"/>
-                </a:solidFill>
-                <a:latin typeface="Calibri"/>
-              </a:rPr>
-              <a:t>1-layer GAT</a:t>
-            </a:r>
-          </a:p>
-        </p:txBody>
-      </p:sp>
-      <p:sp>
-        <p:nvSpPr>
-          <p:cNvPr id="14" name="Rounded Rectangle 13"/>
-          <p:cNvSpPr/>
-          <p:nvPr/>
-        </p:nvSpPr>
-        <p:spPr>
-          <a:xfrm>
-            <a:off x="5021153" y="2926080"/>
-            <a:ext cx="2149388" cy="594360"/>
-          </a:xfrm>
-          <a:prstGeom prst="roundRect">
-            <a:avLst/>
-          </a:prstGeom>
-          <a:solidFill>
-            <a:srgbClr val="1E2761"/>
-          </a:solidFill>
-          <a:ln>
-            <a:noFill/>
-          </a:ln>
-          <a:effectLst/>
-        </p:spPr>
-        <p:style>
-          <a:lnRef idx="1">
-            <a:schemeClr val="accent1"/>
-          </a:lnRef>
-          <a:fillRef idx="3">
-            <a:schemeClr val="accent1"/>
-          </a:fillRef>
-          <a:effectRef idx="2">
-            <a:schemeClr val="accent1"/>
-          </a:effectRef>
-          <a:fontRef idx="minor">
-            <a:schemeClr val="lt1"/>
-          </a:fontRef>
-        </p:style>
-        <p:txBody>
-          <a:bodyPr rtlCol="0" anchor="ctr" lIns="45720" rIns="45720" tIns="27432" bIns="27432" wrap="square"/>
-          <a:lstStyle/>
-          <a:p>
-            <a:pPr algn="ctr"/>
-            <a:r>
-              <a:rPr sz="2000" b="1" i="0">
-                <a:solidFill>
-                  <a:srgbClr val="FFFFFF"/>
-                </a:solidFill>
-                <a:latin typeface="Calibri"/>
-              </a:rPr>
-              <a:t>M3</a:t>
-            </a:r>
-          </a:p>
-        </p:txBody>
-      </p:sp>
-      <p:sp>
-        <p:nvSpPr>
-          <p:cNvPr id="15" name="Rounded Rectangle 14"/>
-          <p:cNvSpPr/>
-          <p:nvPr/>
-        </p:nvSpPr>
-        <p:spPr>
-          <a:xfrm>
-            <a:off x="5021153" y="3584448"/>
-            <a:ext cx="2149388" cy="2011680"/>
-          </a:xfrm>
-          <a:prstGeom prst="roundRect">
-            <a:avLst/>
-          </a:prstGeom>
-          <a:solidFill>
-            <a:srgbClr val="F5F7FA"/>
-          </a:solidFill>
-          <a:ln>
-            <a:noFill/>
-          </a:ln>
-          <a:effectLst/>
-        </p:spPr>
-        <p:style>
-          <a:lnRef idx="1">
-            <a:schemeClr val="accent1"/>
-          </a:lnRef>
-          <a:fillRef idx="3">
-            <a:schemeClr val="accent1"/>
-          </a:fillRef>
-          <a:effectRef idx="2">
-            <a:schemeClr val="accent1"/>
-          </a:effectRef>
-          <a:fontRef idx="minor">
-            <a:schemeClr val="lt1"/>
-          </a:fontRef>
-        </p:style>
-        <p:txBody>
-          <a:bodyPr rtlCol="0" anchor="ctr" tIns="27432" bIns="27432" wrap="square"/>
-          <a:lstStyle/>
-          <a:p>
-            <a:pPr algn="ctr"/>
-            <a:r>
-              <a:rPr sz="1200" b="1" i="0">
-                <a:solidFill>
-                  <a:srgbClr val="1E2761"/>
-                </a:solidFill>
-                <a:latin typeface="Calibri"/>
-              </a:rPr>
-              <a:t>Bipartite
-messaging</a:t>
-            </a:r>
-          </a:p>
-          <a:p>
-            <a:pPr algn="ctr">
-              <a:spcBef>
-                <a:spcPts val="600"/>
-              </a:spcBef>
-            </a:pPr>
-            <a:r>
-              <a:rPr sz="1000" b="0" i="1">
-                <a:solidFill>
-                  <a:srgbClr val="36454F"/>
-                </a:solidFill>
-                <a:latin typeface="Calibri"/>
-              </a:rPr>
-              <a:t>mask query → * edges</a:t>
-            </a:r>
-          </a:p>
-        </p:txBody>
-      </p:sp>
-      <p:sp>
-        <p:nvSpPr>
-          <p:cNvPr id="16" name="Rounded Rectangle 15"/>
-          <p:cNvSpPr/>
-          <p:nvPr/>
-        </p:nvSpPr>
-        <p:spPr>
-          <a:xfrm>
-            <a:off x="7280269" y="2926080"/>
-            <a:ext cx="2149388" cy="594360"/>
-          </a:xfrm>
-          <a:prstGeom prst="roundRect">
-            <a:avLst/>
-          </a:prstGeom>
-          <a:solidFill>
-            <a:srgbClr val="F96167"/>
-          </a:solidFill>
-          <a:ln>
-            <a:noFill/>
-          </a:ln>
-          <a:effectLst/>
-        </p:spPr>
-        <p:style>
-          <a:lnRef idx="1">
-            <a:schemeClr val="accent1"/>
-          </a:lnRef>
-          <a:fillRef idx="3">
-            <a:schemeClr val="accent1"/>
-          </a:fillRef>
-          <a:effectRef idx="2">
-            <a:schemeClr val="accent1"/>
-          </a:effectRef>
-          <a:fontRef idx="minor">
-            <a:schemeClr val="lt1"/>
-          </a:fontRef>
-        </p:style>
-        <p:txBody>
-          <a:bodyPr rtlCol="0" anchor="ctr" lIns="45720" rIns="45720" tIns="27432" bIns="27432" wrap="square"/>
-          <a:lstStyle/>
-          <a:p>
-            <a:pPr algn="ctr"/>
-            <a:r>
-              <a:rPr sz="2000" b="1" i="0">
-                <a:solidFill>
-                  <a:srgbClr val="FFFFFF"/>
-                </a:solidFill>
-                <a:latin typeface="Calibri"/>
-              </a:rPr>
-              <a:t>M4</a:t>
-            </a:r>
-          </a:p>
-        </p:txBody>
-      </p:sp>
-      <p:sp>
-        <p:nvSpPr>
-          <p:cNvPr id="17" name="Rounded Rectangle 16"/>
-          <p:cNvSpPr/>
-          <p:nvPr/>
-        </p:nvSpPr>
-        <p:spPr>
-          <a:xfrm>
-            <a:off x="7280269" y="3584448"/>
-            <a:ext cx="2149388" cy="2011680"/>
-          </a:xfrm>
-          <a:prstGeom prst="roundRect">
-            <a:avLst/>
-          </a:prstGeom>
-          <a:solidFill>
-            <a:srgbClr val="F5F7FA"/>
-          </a:solidFill>
-          <a:ln>
-            <a:noFill/>
-          </a:ln>
-          <a:effectLst/>
-        </p:spPr>
-        <p:style>
-          <a:lnRef idx="1">
-            <a:schemeClr val="accent1"/>
-          </a:lnRef>
-          <a:fillRef idx="3">
-            <a:schemeClr val="accent1"/>
-          </a:fillRef>
-          <a:effectRef idx="2">
-            <a:schemeClr val="accent1"/>
-          </a:effectRef>
-          <a:fontRef idx="minor">
-            <a:schemeClr val="lt1"/>
-          </a:fontRef>
-        </p:style>
-        <p:txBody>
-          <a:bodyPr rtlCol="0" anchor="ctr" tIns="27432" bIns="27432" wrap="square"/>
-          <a:lstStyle/>
-          <a:p>
-            <a:pPr algn="ctr"/>
-            <a:r>
-              <a:rPr sz="1200" b="1" i="0">
-                <a:solidFill>
-                  <a:srgbClr val="1E2761"/>
-                </a:solidFill>
-                <a:latin typeface="Calibri"/>
-              </a:rPr>
-              <a:t>Contrastive
-aux loss</a:t>
-            </a:r>
-          </a:p>
-          <a:p>
-            <a:pPr algn="ctr">
-              <a:spcBef>
-                <a:spcPts val="600"/>
-              </a:spcBef>
-            </a:pPr>
-            <a:r>
-              <a:rPr sz="1000" b="0" i="1">
-                <a:solidFill>
-                  <a:srgbClr val="36454F"/>
-                </a:solidFill>
-                <a:latin typeface="Calibri"/>
-              </a:rPr>
-              <a:t>InfoNCE support–query</a:t>
-            </a:r>
-          </a:p>
-        </p:txBody>
-      </p:sp>
-      <p:sp>
-        <p:nvSpPr>
-          <p:cNvPr id="18" name="Rounded Rectangle 17"/>
-          <p:cNvSpPr/>
-          <p:nvPr/>
-        </p:nvSpPr>
-        <p:spPr>
-          <a:xfrm>
-            <a:off x="9539386" y="2926080"/>
-            <a:ext cx="2149388" cy="594360"/>
-          </a:xfrm>
-          <a:prstGeom prst="roundRect">
-            <a:avLst/>
-          </a:prstGeom>
-          <a:solidFill>
-            <a:srgbClr val="F96167"/>
-          </a:solidFill>
-          <a:ln>
-            <a:noFill/>
-          </a:ln>
-          <a:effectLst/>
-        </p:spPr>
-        <p:style>
-          <a:lnRef idx="1">
-            <a:schemeClr val="accent1"/>
-          </a:lnRef>
-          <a:fillRef idx="3">
-            <a:schemeClr val="accent1"/>
-          </a:fillRef>
-          <a:effectRef idx="2">
-            <a:schemeClr val="accent1"/>
-          </a:effectRef>
-          <a:fontRef idx="minor">
-            <a:schemeClr val="lt1"/>
-          </a:fontRef>
-        </p:style>
-        <p:txBody>
-          <a:bodyPr rtlCol="0" anchor="ctr" lIns="45720" rIns="45720" tIns="27432" bIns="27432" wrap="square"/>
-          <a:lstStyle/>
-          <a:p>
-            <a:pPr algn="ctr"/>
-            <a:r>
-              <a:rPr sz="2000" b="1" i="0">
-                <a:solidFill>
-                  <a:srgbClr val="FFFFFF"/>
-                </a:solidFill>
-                <a:latin typeface="Calibri"/>
-              </a:rPr>
-              <a:t>M5</a:t>
-            </a:r>
-          </a:p>
-        </p:txBody>
-      </p:sp>
-      <p:sp>
-        <p:nvSpPr>
-          <p:cNvPr id="19" name="Rounded Rectangle 18"/>
-          <p:cNvSpPr/>
-          <p:nvPr/>
-        </p:nvSpPr>
-        <p:spPr>
-          <a:xfrm>
-            <a:off x="9539386" y="3584448"/>
-            <a:ext cx="2149388" cy="2011680"/>
-          </a:xfrm>
-          <a:prstGeom prst="roundRect">
-            <a:avLst/>
-          </a:prstGeom>
-          <a:solidFill>
-            <a:srgbClr val="F5F7FA"/>
-          </a:solidFill>
-          <a:ln>
-            <a:noFill/>
-          </a:ln>
-          <a:effectLst/>
-        </p:spPr>
-        <p:style>
-          <a:lnRef idx="1">
-            <a:schemeClr val="accent1"/>
-          </a:lnRef>
-          <a:fillRef idx="3">
-            <a:schemeClr val="accent1"/>
-          </a:fillRef>
-          <a:effectRef idx="2">
-            <a:schemeClr val="accent1"/>
-          </a:effectRef>
-          <a:fontRef idx="minor">
-            <a:schemeClr val="lt1"/>
-          </a:fontRef>
-        </p:style>
-        <p:txBody>
-          <a:bodyPr rtlCol="0" anchor="ctr" tIns="27432" bIns="27432" wrap="square"/>
-          <a:lstStyle/>
-          <a:p>
-            <a:pPr algn="ctr"/>
-            <a:r>
-              <a:rPr sz="1200" b="1" i="0">
-                <a:solidFill>
-                  <a:srgbClr val="1E2761"/>
-                </a:solidFill>
-                <a:latin typeface="Calibri"/>
-              </a:rPr>
-              <a:t>SSL
-pretraining</a:t>
-            </a:r>
-          </a:p>
-          <a:p>
-            <a:pPr algn="ctr">
-              <a:spcBef>
-                <a:spcPts val="600"/>
-              </a:spcBef>
-            </a:pPr>
-            <a:r>
-              <a:rPr sz="1000" b="0" i="1">
-                <a:solidFill>
-                  <a:srgbClr val="36454F"/>
-                </a:solidFill>
-                <a:latin typeface="Calibri"/>
-              </a:rPr>
-              <a:t>MolCLR encoder init</a:t>
-            </a:r>
-          </a:p>
-        </p:txBody>
-      </p:sp>
-      <p:sp>
-        <p:nvSpPr>
-          <p:cNvPr id="20" name="Rounded Rectangle 19"/>
-          <p:cNvSpPr/>
-          <p:nvPr/>
-        </p:nvSpPr>
-        <p:spPr>
-          <a:xfrm>
-            <a:off x="502920" y="5760720"/>
-            <a:ext cx="11185855" cy="731520"/>
-          </a:xfrm>
-          <a:prstGeom prst="roundRect">
-            <a:avLst/>
-          </a:prstGeom>
-          <a:solidFill>
-            <a:srgbClr val="CADCFC"/>
-          </a:solidFill>
-          <a:ln>
-            <a:noFill/>
-          </a:ln>
-          <a:effectLst/>
-        </p:spPr>
-        <p:style>
-          <a:lnRef idx="1">
-            <a:schemeClr val="accent1"/>
-          </a:lnRef>
-          <a:fillRef idx="3">
-            <a:schemeClr val="accent1"/>
-          </a:fillRef>
-          <a:effectRef idx="2">
-            <a:schemeClr val="accent1"/>
-          </a:effectRef>
-          <a:fontRef idx="minor">
-            <a:schemeClr val="lt1"/>
-          </a:fontRef>
-        </p:style>
-        <p:txBody>
-          <a:bodyPr rtlCol="0" anchor="ctr" lIns="45720" rIns="45720" tIns="27432" bIns="27432" wrap="square"/>
-          <a:lstStyle/>
-          <a:p>
-            <a:pPr algn="ctr"/>
-            <a:r>
-              <a:rPr sz="1400" b="1" i="1">
-                <a:solidFill>
-                  <a:srgbClr val="1E2761"/>
-                </a:solidFill>
-                <a:latin typeface="Calibri"/>
-              </a:rPr>
-              <a:t>Safety net: α → 1 recovers ProtoNet.  Composed result: ≥ 0.728 at 5w5s  (already beats ProtoNet by +1.2 pp).</a:t>
+              <a:t>A3:  bipartite masking +0.6 pp.    A4:  a tiny λ = 0.1 contrastive loss is enough.    A5:  SSL fine-tune +2.2 pp,  but freezing the encoder is catastrophic (−10 pp).</a:t>
             </a:r>
           </a:p>
         </p:txBody>
@@ -4905,7 +5150,7 @@
         <p:spPr>
           <a:xfrm>
             <a:off x="502920" y="320040"/>
-            <a:ext cx="1783080" cy="320040"/>
+            <a:ext cx="1828800" cy="320040"/>
           </a:xfrm>
           <a:prstGeom prst="roundRect">
             <a:avLst/>
@@ -4973,13 +5218,13 @@
           <a:p>
             <a:pPr algn="l"/>
             <a:r>
-              <a:rPr sz="2800" b="1" i="0">
+              <a:rPr sz="2600" b="1" i="0">
                 <a:solidFill>
                   <a:srgbClr val="1E2761"/>
                 </a:solidFill>
                 <a:latin typeface="Calibri"/>
               </a:rPr>
-              <a:t>Takeaways</a:t>
+              <a:t>Takeaways &amp; Future Work</a:t>
             </a:r>
           </a:p>
         </p:txBody>
@@ -5014,7 +5259,7 @@
                 </a:solidFill>
                 <a:latin typeface="Calibri"/>
               </a:rPr>
-              <a:t>11 / 12</a:t>
+              <a:t>11 / 13</a:t>
             </a:r>
           </a:p>
         </p:txBody>
@@ -5063,7 +5308,7 @@
         <p:spPr>
           <a:xfrm>
             <a:off x="502920" y="1737360"/>
-            <a:ext cx="11185855" cy="4572000"/>
+            <a:ext cx="11185855" cy="4846320"/>
           </a:xfrm>
           <a:prstGeom prst="rect">
             <a:avLst/>
@@ -5100,7 +5345,7 @@
                 </a:solidFill>
                 <a:latin typeface="Calibri"/>
               </a:rPr>
-              <a:t>Few-shot molecular classification has real label-scarcity motivation.</a:t>
+              <a:t>Few-shot molecular classification has real motivation (label scarcity in bioassays).</a:t>
             </a:r>
           </a:p>
           <a:p>
@@ -5128,7 +5373,7 @@
                 </a:solidFill>
                 <a:latin typeface="Calibri"/>
               </a:rPr>
-              <a:t>A clean metric baseline (ProtoNet) is a surprisingly strong start.</a:t>
+              <a:t>ProtoNet is a surprisingly strong baseline — starting from a clean metric method saves a lot of pain.</a:t>
             </a:r>
           </a:p>
           <a:p>
@@ -5156,7 +5401,7 @@
                 </a:solidFill>
                 <a:latin typeface="Calibri"/>
               </a:rPr>
-              <a:t>GoS v1 beat MAML but trailed ProtoNet — over-smoothing of meta-GNN was the root cause.</a:t>
+              <a:t>GoS v1 beat MAML but lost to ProtoNet; GCN over-smoothing was the root cause.</a:t>
             </a:r>
           </a:p>
           <a:p>
@@ -5240,7 +5485,7 @@
                 </a:solidFill>
                 <a:latin typeface="Calibri"/>
               </a:rPr>
-              <a:t>Largest two levers: M1 residual prototype (safety net) and M5 SSL pretraining (+2.2 pp).</a:t>
+              <a:t>Biggest two levers: M1 residual prototype (safety net) and M5 SSL pretraining (+2.2 pp).</a:t>
             </a:r>
           </a:p>
           <a:p>
@@ -5268,7 +5513,7 @@
                 </a:solidFill>
                 <a:latin typeface="Calibri"/>
               </a:rPr>
-              <a:t>What we learned:</a:t>
+              <a:t>Transferable lessons:</a:t>
             </a:r>
           </a:p>
           <a:p>
@@ -5296,7 +5541,7 @@
                 </a:solidFill>
                 <a:latin typeface="Calibri"/>
               </a:rPr>
-              <a:t>sparsification &gt; affinity expressivity for meta-graphs,</a:t>
+              <a:t>sparsification &gt; affinity expressivity for task-level meta-graphs,</a:t>
             </a:r>
           </a:p>
           <a:p>
@@ -5324,7 +5569,7 @@
                 </a:solidFill>
                 <a:latin typeface="Calibri"/>
               </a:rPr>
-              <a:t>shared classifier heads collapse under episodic training,</a:t>
+              <a:t>shared classifier heads collapse under episodic training — use prototype / metric heads,</a:t>
             </a:r>
           </a:p>
           <a:p>
@@ -5352,7 +5597,35 @@
                 </a:solidFill>
                 <a:latin typeface="Calibri"/>
               </a:rPr>
-              <a:t>when your baseline is already 0.70, the bottleneck is usually the encoder.</a:t>
+              <a:t>when the baseline is already 0.70, the bottleneck is usually the encoder.</a:t>
+            </a:r>
+          </a:p>
+          <a:p>
+            <a:pPr algn="l">
+              <a:lnSpc>
+                <a:spcPct val="120000"/>
+              </a:lnSpc>
+              <a:spcAft>
+                <a:spcPts val="300"/>
+              </a:spcAft>
+            </a:pPr>
+            <a:r>
+              <a:rPr sz="1400" b="1" i="0">
+                <a:solidFill>
+                  <a:srgbClr val="1E2761"/>
+                </a:solidFill>
+                <a:latin typeface="Calibri"/>
+              </a:rPr>
+              <a:t>●  </a:t>
+            </a:r>
+            <a:r>
+              <a:rPr sz="1400" b="0" i="0">
+                <a:solidFill>
+                  <a:srgbClr val="36454F"/>
+                </a:solidFill>
+                <a:latin typeface="Calibri"/>
+              </a:rPr>
+              <a:t>Future work: contrastive-only objective,  text-augmented encoder,  cross-assay meta-transfer.</a:t>
             </a:r>
           </a:p>
         </p:txBody>
@@ -5435,7 +5708,7 @@
         </p:nvSpPr>
         <p:spPr>
           <a:xfrm>
-            <a:off x="502920" y="2194560"/>
+            <a:off x="502920" y="2011680"/>
             <a:ext cx="11185855" cy="1097280"/>
           </a:xfrm>
           <a:prstGeom prst="rect">
@@ -5470,7 +5743,7 @@
         </p:nvSpPr>
         <p:spPr>
           <a:xfrm>
-            <a:off x="502920" y="3474720"/>
+            <a:off x="502920" y="3337560"/>
             <a:ext cx="11185855" cy="548640"/>
           </a:xfrm>
           <a:prstGeom prst="rect">
@@ -5505,7 +5778,7 @@
         </p:nvSpPr>
         <p:spPr>
           <a:xfrm>
-            <a:off x="502920" y="4572000"/>
+            <a:off x="502920" y="4389120"/>
             <a:ext cx="11185855" cy="457200"/>
           </a:xfrm>
           <a:prstGeom prst="rect">
@@ -5540,7 +5813,7 @@
         </p:nvSpPr>
         <p:spPr>
           <a:xfrm>
-            <a:off x="502920" y="5120640"/>
+            <a:off x="502920" y="4937760"/>
             <a:ext cx="11185855" cy="457200"/>
           </a:xfrm>
           <a:prstGeom prst="rect">
@@ -5556,6 +5829,41 @@
           <a:p>
             <a:pPr algn="ctr"/>
             <a:r>
+              <a:rPr sz="1300" b="0" i="0">
+                <a:solidFill>
+                  <a:srgbClr val="CADCFC"/>
+                </a:solidFill>
+                <a:latin typeface="Calibri"/>
+              </a:rPr>
+              <a:t>Team: Wenbo Huang · Junchi Yan · Yiqun Yin · Xinyue Xu · Mingjia Shi</a:t>
+            </a:r>
+          </a:p>
+        </p:txBody>
+      </p:sp>
+      <p:sp>
+        <p:nvSpPr>
+          <p:cNvPr id="7" name="TextBox 6"/>
+          <p:cNvSpPr txBox="1"/>
+          <p:nvPr/>
+        </p:nvSpPr>
+        <p:spPr>
+          <a:xfrm>
+            <a:off x="502920" y="5394960"/>
+            <a:ext cx="11185855" cy="457200"/>
+          </a:xfrm>
+          <a:prstGeom prst="rect">
+            <a:avLst/>
+          </a:prstGeom>
+          <a:noFill/>
+        </p:spPr>
+        <p:txBody>
+          <a:bodyPr wrap="square" lIns="45720" rIns="45720" tIns="27432" bIns="27432" anchor="t">
+            <a:spAutoFit/>
+          </a:bodyPr>
+          <a:lstStyle/>
+          <a:p>
+            <a:pPr algn="ctr"/>
+            <a:r>
               <a:rPr sz="1400" b="0" i="1">
                 <a:solidFill>
                   <a:srgbClr val="CADCFC"/>
@@ -5563,6 +5871,724 @@
                 <a:latin typeface="Calibri"/>
               </a:rPr>
               <a:t>Mingjia Shi  ·  University of Virginia</a:t>
+            </a:r>
+          </a:p>
+        </p:txBody>
+      </p:sp>
+    </p:spTree>
+  </p:cSld>
+  <p:clrMapOvr>
+    <a:masterClrMapping/>
+  </p:clrMapOvr>
+</p:sld>
+</file>
+
+<file path=ppt/slides/slide13.xml><?xml version="1.0" encoding="utf-8"?>
+<p:sld xmlns:a="http://schemas.openxmlformats.org/drawingml/2006/main" xmlns:p="http://schemas.openxmlformats.org/presentationml/2006/main" xmlns:r="http://schemas.openxmlformats.org/officeDocument/2006/relationships">
+  <p:cSld>
+    <p:bg>
+      <p:bgPr>
+        <a:solidFill>
+          <a:srgbClr val="FFFFFF"/>
+        </a:solidFill>
+        <a:effectLst/>
+      </p:bgPr>
+    </p:bg>
+    <p:spTree>
+      <p:nvGrpSpPr>
+        <p:cNvPr id="1" name=""/>
+        <p:cNvGrpSpPr/>
+        <p:nvPr/>
+      </p:nvGrpSpPr>
+      <p:grpSpPr/>
+      <p:sp>
+        <p:nvSpPr>
+          <p:cNvPr id="2" name="Rectangle 1"/>
+          <p:cNvSpPr/>
+          <p:nvPr/>
+        </p:nvSpPr>
+        <p:spPr>
+          <a:xfrm>
+            <a:off x="0" y="0"/>
+            <a:ext cx="256032" cy="6858000"/>
+          </a:xfrm>
+          <a:prstGeom prst="rect">
+            <a:avLst/>
+          </a:prstGeom>
+          <a:solidFill>
+            <a:srgbClr val="1E2761"/>
+          </a:solidFill>
+          <a:ln>
+            <a:noFill/>
+          </a:ln>
+          <a:effectLst/>
+        </p:spPr>
+        <p:style>
+          <a:lnRef idx="1">
+            <a:schemeClr val="accent1"/>
+          </a:lnRef>
+          <a:fillRef idx="3">
+            <a:schemeClr val="accent1"/>
+          </a:fillRef>
+          <a:effectRef idx="2">
+            <a:schemeClr val="accent1"/>
+          </a:effectRef>
+          <a:fontRef idx="minor">
+            <a:schemeClr val="lt1"/>
+          </a:fontRef>
+        </p:style>
+        <p:txBody>
+          <a:bodyPr rtlCol="0" anchor="ctr" lIns="45720" rIns="45720" tIns="27432" bIns="27432" wrap="square"/>
+          <a:lstStyle/>
+          <a:p>
+            <a:pPr algn="ctr"/>
+          </a:p>
+        </p:txBody>
+      </p:sp>
+      <p:sp>
+        <p:nvSpPr>
+          <p:cNvPr id="3" name="Rounded Rectangle 2"/>
+          <p:cNvSpPr/>
+          <p:nvPr/>
+        </p:nvSpPr>
+        <p:spPr>
+          <a:xfrm>
+            <a:off x="502920" y="320040"/>
+            <a:ext cx="1828800" cy="320040"/>
+          </a:xfrm>
+          <a:prstGeom prst="roundRect">
+            <a:avLst/>
+          </a:prstGeom>
+          <a:solidFill>
+            <a:srgbClr val="CADCFC"/>
+          </a:solidFill>
+          <a:ln>
+            <a:noFill/>
+          </a:ln>
+          <a:effectLst/>
+        </p:spPr>
+        <p:style>
+          <a:lnRef idx="1">
+            <a:schemeClr val="accent1"/>
+          </a:lnRef>
+          <a:fillRef idx="3">
+            <a:schemeClr val="accent1"/>
+          </a:fillRef>
+          <a:effectRef idx="2">
+            <a:schemeClr val="accent1"/>
+          </a:effectRef>
+          <a:fontRef idx="minor">
+            <a:schemeClr val="lt1"/>
+          </a:fontRef>
+        </p:style>
+        <p:txBody>
+          <a:bodyPr rtlCol="0" anchor="ctr" lIns="45720" rIns="45720" tIns="27432" bIns="27432" wrap="square"/>
+          <a:lstStyle/>
+          <a:p>
+            <a:pPr algn="ctr"/>
+            <a:r>
+              <a:rPr sz="1000" b="1" i="0">
+                <a:solidFill>
+                  <a:srgbClr val="1E2761"/>
+                </a:solidFill>
+                <a:latin typeface="Calibri"/>
+              </a:rPr>
+              <a:t>REFERENCES</a:t>
+            </a:r>
+          </a:p>
+        </p:txBody>
+      </p:sp>
+      <p:sp>
+        <p:nvSpPr>
+          <p:cNvPr id="4" name="TextBox 3"/>
+          <p:cNvSpPr txBox="1"/>
+          <p:nvPr/>
+        </p:nvSpPr>
+        <p:spPr>
+          <a:xfrm>
+            <a:off x="502920" y="777240"/>
+            <a:ext cx="11185855" cy="685800"/>
+          </a:xfrm>
+          <a:prstGeom prst="rect">
+            <a:avLst/>
+          </a:prstGeom>
+          <a:noFill/>
+        </p:spPr>
+        <p:txBody>
+          <a:bodyPr wrap="square" lIns="45720" rIns="45720" tIns="27432" bIns="27432" anchor="t">
+            <a:spAutoFit/>
+          </a:bodyPr>
+          <a:lstStyle/>
+          <a:p>
+            <a:pPr algn="l"/>
+            <a:r>
+              <a:rPr sz="2600" b="1" i="0">
+                <a:solidFill>
+                  <a:srgbClr val="1E2761"/>
+                </a:solidFill>
+                <a:latin typeface="Calibri"/>
+              </a:rPr>
+              <a:t>References</a:t>
+            </a:r>
+          </a:p>
+        </p:txBody>
+      </p:sp>
+      <p:sp>
+        <p:nvSpPr>
+          <p:cNvPr id="5" name="TextBox 4"/>
+          <p:cNvSpPr txBox="1"/>
+          <p:nvPr/>
+        </p:nvSpPr>
+        <p:spPr>
+          <a:xfrm>
+            <a:off x="11277295" y="6537960"/>
+            <a:ext cx="731520" cy="274320"/>
+          </a:xfrm>
+          <a:prstGeom prst="rect">
+            <a:avLst/>
+          </a:prstGeom>
+          <a:noFill/>
+        </p:spPr>
+        <p:txBody>
+          <a:bodyPr wrap="square" lIns="45720" rIns="45720" tIns="27432" bIns="27432" anchor="t">
+            <a:spAutoFit/>
+          </a:bodyPr>
+          <a:lstStyle/>
+          <a:p>
+            <a:pPr algn="r"/>
+            <a:r>
+              <a:rPr sz="900" b="0" i="0">
+                <a:solidFill>
+                  <a:srgbClr val="888A90"/>
+                </a:solidFill>
+                <a:latin typeface="Calibri"/>
+              </a:rPr>
+              <a:t>13 / 13</a:t>
+            </a:r>
+          </a:p>
+        </p:txBody>
+      </p:sp>
+      <p:sp>
+        <p:nvSpPr>
+          <p:cNvPr id="6" name="TextBox 5"/>
+          <p:cNvSpPr txBox="1"/>
+          <p:nvPr/>
+        </p:nvSpPr>
+        <p:spPr>
+          <a:xfrm>
+            <a:off x="502920" y="6537960"/>
+            <a:ext cx="5486400" cy="274320"/>
+          </a:xfrm>
+          <a:prstGeom prst="rect">
+            <a:avLst/>
+          </a:prstGeom>
+          <a:noFill/>
+        </p:spPr>
+        <p:txBody>
+          <a:bodyPr wrap="square" lIns="45720" rIns="45720" tIns="27432" bIns="27432" anchor="t">
+            <a:spAutoFit/>
+          </a:bodyPr>
+          <a:lstStyle/>
+          <a:p>
+            <a:pPr algn="l"/>
+            <a:r>
+              <a:rPr sz="900" b="0" i="1">
+                <a:solidFill>
+                  <a:srgbClr val="888A90"/>
+                </a:solidFill>
+                <a:latin typeface="Calibri"/>
+              </a:rPr>
+              <a:t>Graph-of-Shots · Few-Shot Molecular Graph Classification</a:t>
+            </a:r>
+          </a:p>
+        </p:txBody>
+      </p:sp>
+      <p:sp>
+        <p:nvSpPr>
+          <p:cNvPr id="7" name="TextBox 6"/>
+          <p:cNvSpPr txBox="1"/>
+          <p:nvPr/>
+        </p:nvSpPr>
+        <p:spPr>
+          <a:xfrm>
+            <a:off x="502920" y="1783080"/>
+            <a:ext cx="3474720" cy="457200"/>
+          </a:xfrm>
+          <a:prstGeom prst="rect">
+            <a:avLst/>
+          </a:prstGeom>
+          <a:noFill/>
+        </p:spPr>
+        <p:txBody>
+          <a:bodyPr wrap="square" lIns="45720" rIns="45720" tIns="27432" bIns="27432" anchor="t">
+            <a:spAutoFit/>
+          </a:bodyPr>
+          <a:lstStyle/>
+          <a:p>
+            <a:pPr algn="l"/>
+            <a:r>
+              <a:rPr sz="1300" b="1" i="0">
+                <a:solidFill>
+                  <a:srgbClr val="F96167"/>
+                </a:solidFill>
+                <a:latin typeface="Calibri"/>
+              </a:rPr>
+              <a:t>Snell et al., NeurIPS 2017</a:t>
+            </a:r>
+          </a:p>
+        </p:txBody>
+      </p:sp>
+      <p:sp>
+        <p:nvSpPr>
+          <p:cNvPr id="8" name="TextBox 7"/>
+          <p:cNvSpPr txBox="1"/>
+          <p:nvPr/>
+        </p:nvSpPr>
+        <p:spPr>
+          <a:xfrm>
+            <a:off x="4069080" y="1783080"/>
+            <a:ext cx="7528255" cy="457200"/>
+          </a:xfrm>
+          <a:prstGeom prst="rect">
+            <a:avLst/>
+          </a:prstGeom>
+          <a:noFill/>
+        </p:spPr>
+        <p:txBody>
+          <a:bodyPr wrap="square" lIns="45720" rIns="45720" tIns="27432" bIns="27432" anchor="t">
+            <a:spAutoFit/>
+          </a:bodyPr>
+          <a:lstStyle/>
+          <a:p>
+            <a:pPr algn="l"/>
+            <a:r>
+              <a:rPr sz="1300" b="0" i="1">
+                <a:solidFill>
+                  <a:srgbClr val="36454F"/>
+                </a:solidFill>
+                <a:latin typeface="Calibri"/>
+              </a:rPr>
+              <a:t>Prototypical Networks for Few-Shot Learning</a:t>
+            </a:r>
+          </a:p>
+        </p:txBody>
+      </p:sp>
+      <p:sp>
+        <p:nvSpPr>
+          <p:cNvPr id="9" name="TextBox 8"/>
+          <p:cNvSpPr txBox="1"/>
+          <p:nvPr/>
+        </p:nvSpPr>
+        <p:spPr>
+          <a:xfrm>
+            <a:off x="502920" y="2331720"/>
+            <a:ext cx="3474720" cy="457200"/>
+          </a:xfrm>
+          <a:prstGeom prst="rect">
+            <a:avLst/>
+          </a:prstGeom>
+          <a:noFill/>
+        </p:spPr>
+        <p:txBody>
+          <a:bodyPr wrap="square" lIns="45720" rIns="45720" tIns="27432" bIns="27432" anchor="t">
+            <a:spAutoFit/>
+          </a:bodyPr>
+          <a:lstStyle/>
+          <a:p>
+            <a:pPr algn="l"/>
+            <a:r>
+              <a:rPr sz="1300" b="1" i="0">
+                <a:solidFill>
+                  <a:srgbClr val="F96167"/>
+                </a:solidFill>
+                <a:latin typeface="Calibri"/>
+              </a:rPr>
+              <a:t>Finn et al., ICML 2017</a:t>
+            </a:r>
+          </a:p>
+        </p:txBody>
+      </p:sp>
+      <p:sp>
+        <p:nvSpPr>
+          <p:cNvPr id="10" name="TextBox 9"/>
+          <p:cNvSpPr txBox="1"/>
+          <p:nvPr/>
+        </p:nvSpPr>
+        <p:spPr>
+          <a:xfrm>
+            <a:off x="4069080" y="2331720"/>
+            <a:ext cx="7528255" cy="457200"/>
+          </a:xfrm>
+          <a:prstGeom prst="rect">
+            <a:avLst/>
+          </a:prstGeom>
+          <a:noFill/>
+        </p:spPr>
+        <p:txBody>
+          <a:bodyPr wrap="square" lIns="45720" rIns="45720" tIns="27432" bIns="27432" anchor="t">
+            <a:spAutoFit/>
+          </a:bodyPr>
+          <a:lstStyle/>
+          <a:p>
+            <a:pPr algn="l"/>
+            <a:r>
+              <a:rPr sz="1300" b="0" i="1">
+                <a:solidFill>
+                  <a:srgbClr val="36454F"/>
+                </a:solidFill>
+                <a:latin typeface="Calibri"/>
+              </a:rPr>
+              <a:t>Model-Agnostic Meta-Learning for Fast Adaptation of Deep Networks</a:t>
+            </a:r>
+          </a:p>
+        </p:txBody>
+      </p:sp>
+      <p:sp>
+        <p:nvSpPr>
+          <p:cNvPr id="11" name="TextBox 10"/>
+          <p:cNvSpPr txBox="1"/>
+          <p:nvPr/>
+        </p:nvSpPr>
+        <p:spPr>
+          <a:xfrm>
+            <a:off x="502920" y="2880360"/>
+            <a:ext cx="3474720" cy="457200"/>
+          </a:xfrm>
+          <a:prstGeom prst="rect">
+            <a:avLst/>
+          </a:prstGeom>
+          <a:noFill/>
+        </p:spPr>
+        <p:txBody>
+          <a:bodyPr wrap="square" lIns="45720" rIns="45720" tIns="27432" bIns="27432" anchor="t">
+            <a:spAutoFit/>
+          </a:bodyPr>
+          <a:lstStyle/>
+          <a:p>
+            <a:pPr algn="l"/>
+            <a:r>
+              <a:rPr sz="1300" b="1" i="0">
+                <a:solidFill>
+                  <a:srgbClr val="F96167"/>
+                </a:solidFill>
+                <a:latin typeface="Calibri"/>
+              </a:rPr>
+              <a:t>Hu et al., ICLR 2020</a:t>
+            </a:r>
+          </a:p>
+        </p:txBody>
+      </p:sp>
+      <p:sp>
+        <p:nvSpPr>
+          <p:cNvPr id="12" name="TextBox 11"/>
+          <p:cNvSpPr txBox="1"/>
+          <p:nvPr/>
+        </p:nvSpPr>
+        <p:spPr>
+          <a:xfrm>
+            <a:off x="4069080" y="2880360"/>
+            <a:ext cx="7528255" cy="457200"/>
+          </a:xfrm>
+          <a:prstGeom prst="rect">
+            <a:avLst/>
+          </a:prstGeom>
+          <a:noFill/>
+        </p:spPr>
+        <p:txBody>
+          <a:bodyPr wrap="square" lIns="45720" rIns="45720" tIns="27432" bIns="27432" anchor="t">
+            <a:spAutoFit/>
+          </a:bodyPr>
+          <a:lstStyle/>
+          <a:p>
+            <a:pPr algn="l"/>
+            <a:r>
+              <a:rPr sz="1300" b="0" i="1">
+                <a:solidFill>
+                  <a:srgbClr val="36454F"/>
+                </a:solidFill>
+                <a:latin typeface="Calibri"/>
+              </a:rPr>
+              <a:t>Strategies for Pre-training Graph Neural Networks  (GIN, GINE)</a:t>
+            </a:r>
+          </a:p>
+        </p:txBody>
+      </p:sp>
+      <p:sp>
+        <p:nvSpPr>
+          <p:cNvPr id="13" name="TextBox 12"/>
+          <p:cNvSpPr txBox="1"/>
+          <p:nvPr/>
+        </p:nvSpPr>
+        <p:spPr>
+          <a:xfrm>
+            <a:off x="502920" y="3429000"/>
+            <a:ext cx="3474720" cy="457200"/>
+          </a:xfrm>
+          <a:prstGeom prst="rect">
+            <a:avLst/>
+          </a:prstGeom>
+          <a:noFill/>
+        </p:spPr>
+        <p:txBody>
+          <a:bodyPr wrap="square" lIns="45720" rIns="45720" tIns="27432" bIns="27432" anchor="t">
+            <a:spAutoFit/>
+          </a:bodyPr>
+          <a:lstStyle/>
+          <a:p>
+            <a:pPr algn="l"/>
+            <a:r>
+              <a:rPr sz="1300" b="1" i="0">
+                <a:solidFill>
+                  <a:srgbClr val="F96167"/>
+                </a:solidFill>
+                <a:latin typeface="Calibri"/>
+              </a:rPr>
+              <a:t>Wu et al., Chem. Sci. 2018</a:t>
+            </a:r>
+          </a:p>
+        </p:txBody>
+      </p:sp>
+      <p:sp>
+        <p:nvSpPr>
+          <p:cNvPr id="14" name="TextBox 13"/>
+          <p:cNvSpPr txBox="1"/>
+          <p:nvPr/>
+        </p:nvSpPr>
+        <p:spPr>
+          <a:xfrm>
+            <a:off x="4069080" y="3429000"/>
+            <a:ext cx="7528255" cy="457200"/>
+          </a:xfrm>
+          <a:prstGeom prst="rect">
+            <a:avLst/>
+          </a:prstGeom>
+          <a:noFill/>
+        </p:spPr>
+        <p:txBody>
+          <a:bodyPr wrap="square" lIns="45720" rIns="45720" tIns="27432" bIns="27432" anchor="t">
+            <a:spAutoFit/>
+          </a:bodyPr>
+          <a:lstStyle/>
+          <a:p>
+            <a:pPr algn="l"/>
+            <a:r>
+              <a:rPr sz="1300" b="0" i="1">
+                <a:solidFill>
+                  <a:srgbClr val="36454F"/>
+                </a:solidFill>
+                <a:latin typeface="Calibri"/>
+              </a:rPr>
+              <a:t>MoleculeNet: A Benchmark for Molecular Machine Learning</a:t>
+            </a:r>
+          </a:p>
+        </p:txBody>
+      </p:sp>
+      <p:sp>
+        <p:nvSpPr>
+          <p:cNvPr id="15" name="TextBox 14"/>
+          <p:cNvSpPr txBox="1"/>
+          <p:nvPr/>
+        </p:nvSpPr>
+        <p:spPr>
+          <a:xfrm>
+            <a:off x="502920" y="3977640"/>
+            <a:ext cx="3474720" cy="457200"/>
+          </a:xfrm>
+          <a:prstGeom prst="rect">
+            <a:avLst/>
+          </a:prstGeom>
+          <a:noFill/>
+        </p:spPr>
+        <p:txBody>
+          <a:bodyPr wrap="square" lIns="45720" rIns="45720" tIns="27432" bIns="27432" anchor="t">
+            <a:spAutoFit/>
+          </a:bodyPr>
+          <a:lstStyle/>
+          <a:p>
+            <a:pPr algn="l"/>
+            <a:r>
+              <a:rPr sz="1300" b="1" i="0">
+                <a:solidFill>
+                  <a:srgbClr val="F96167"/>
+                </a:solidFill>
+                <a:latin typeface="Calibri"/>
+              </a:rPr>
+              <a:t>Wang et al., Nature MI 2022</a:t>
+            </a:r>
+          </a:p>
+        </p:txBody>
+      </p:sp>
+      <p:sp>
+        <p:nvSpPr>
+          <p:cNvPr id="16" name="TextBox 15"/>
+          <p:cNvSpPr txBox="1"/>
+          <p:nvPr/>
+        </p:nvSpPr>
+        <p:spPr>
+          <a:xfrm>
+            <a:off x="4069080" y="3977640"/>
+            <a:ext cx="7528255" cy="457200"/>
+          </a:xfrm>
+          <a:prstGeom prst="rect">
+            <a:avLst/>
+          </a:prstGeom>
+          <a:noFill/>
+        </p:spPr>
+        <p:txBody>
+          <a:bodyPr wrap="square" lIns="45720" rIns="45720" tIns="27432" bIns="27432" anchor="t">
+            <a:spAutoFit/>
+          </a:bodyPr>
+          <a:lstStyle/>
+          <a:p>
+            <a:pPr algn="l"/>
+            <a:r>
+              <a:rPr sz="1300" b="0" i="1">
+                <a:solidFill>
+                  <a:srgbClr val="36454F"/>
+                </a:solidFill>
+                <a:latin typeface="Calibri"/>
+              </a:rPr>
+              <a:t>Molecular Contrastive Learning of Representations via Graph Neural Networks  (MolCLR)</a:t>
+            </a:r>
+          </a:p>
+        </p:txBody>
+      </p:sp>
+      <p:sp>
+        <p:nvSpPr>
+          <p:cNvPr id="17" name="TextBox 16"/>
+          <p:cNvSpPr txBox="1"/>
+          <p:nvPr/>
+        </p:nvSpPr>
+        <p:spPr>
+          <a:xfrm>
+            <a:off x="502920" y="4526280"/>
+            <a:ext cx="3474720" cy="457200"/>
+          </a:xfrm>
+          <a:prstGeom prst="rect">
+            <a:avLst/>
+          </a:prstGeom>
+          <a:noFill/>
+        </p:spPr>
+        <p:txBody>
+          <a:bodyPr wrap="square" lIns="45720" rIns="45720" tIns="27432" bIns="27432" anchor="t">
+            <a:spAutoFit/>
+          </a:bodyPr>
+          <a:lstStyle/>
+          <a:p>
+            <a:pPr algn="l"/>
+            <a:r>
+              <a:rPr sz="1300" b="1" i="0">
+                <a:solidFill>
+                  <a:srgbClr val="F96167"/>
+                </a:solidFill>
+                <a:latin typeface="Calibri"/>
+              </a:rPr>
+              <a:t>Veličković et al., ICLR 2018</a:t>
+            </a:r>
+          </a:p>
+        </p:txBody>
+      </p:sp>
+      <p:sp>
+        <p:nvSpPr>
+          <p:cNvPr id="18" name="TextBox 17"/>
+          <p:cNvSpPr txBox="1"/>
+          <p:nvPr/>
+        </p:nvSpPr>
+        <p:spPr>
+          <a:xfrm>
+            <a:off x="4069080" y="4526280"/>
+            <a:ext cx="7528255" cy="457200"/>
+          </a:xfrm>
+          <a:prstGeom prst="rect">
+            <a:avLst/>
+          </a:prstGeom>
+          <a:noFill/>
+        </p:spPr>
+        <p:txBody>
+          <a:bodyPr wrap="square" lIns="45720" rIns="45720" tIns="27432" bIns="27432" anchor="t">
+            <a:spAutoFit/>
+          </a:bodyPr>
+          <a:lstStyle/>
+          <a:p>
+            <a:pPr algn="l"/>
+            <a:r>
+              <a:rPr sz="1300" b="0" i="1">
+                <a:solidFill>
+                  <a:srgbClr val="36454F"/>
+                </a:solidFill>
+                <a:latin typeface="Calibri"/>
+              </a:rPr>
+              <a:t>Graph Attention Networks  (GAT)</a:t>
+            </a:r>
+          </a:p>
+        </p:txBody>
+      </p:sp>
+      <p:sp>
+        <p:nvSpPr>
+          <p:cNvPr id="19" name="TextBox 18"/>
+          <p:cNvSpPr txBox="1"/>
+          <p:nvPr/>
+        </p:nvSpPr>
+        <p:spPr>
+          <a:xfrm>
+            <a:off x="502920" y="5074920"/>
+            <a:ext cx="3474720" cy="457200"/>
+          </a:xfrm>
+          <a:prstGeom prst="rect">
+            <a:avLst/>
+          </a:prstGeom>
+          <a:noFill/>
+        </p:spPr>
+        <p:txBody>
+          <a:bodyPr wrap="square" lIns="45720" rIns="45720" tIns="27432" bIns="27432" anchor="t">
+            <a:spAutoFit/>
+          </a:bodyPr>
+          <a:lstStyle/>
+          <a:p>
+            <a:pPr algn="l"/>
+            <a:r>
+              <a:rPr sz="1300" b="1" i="0">
+                <a:solidFill>
+                  <a:srgbClr val="F96167"/>
+                </a:solidFill>
+                <a:latin typeface="Calibri"/>
+              </a:rPr>
+              <a:t>van den Oord et al., 2018</a:t>
+            </a:r>
+          </a:p>
+        </p:txBody>
+      </p:sp>
+      <p:sp>
+        <p:nvSpPr>
+          <p:cNvPr id="20" name="TextBox 19"/>
+          <p:cNvSpPr txBox="1"/>
+          <p:nvPr/>
+        </p:nvSpPr>
+        <p:spPr>
+          <a:xfrm>
+            <a:off x="4069080" y="5074920"/>
+            <a:ext cx="7528255" cy="457200"/>
+          </a:xfrm>
+          <a:prstGeom prst="rect">
+            <a:avLst/>
+          </a:prstGeom>
+          <a:noFill/>
+        </p:spPr>
+        <p:txBody>
+          <a:bodyPr wrap="square" lIns="45720" rIns="45720" tIns="27432" bIns="27432" anchor="t">
+            <a:spAutoFit/>
+          </a:bodyPr>
+          <a:lstStyle/>
+          <a:p>
+            <a:pPr algn="l"/>
+            <a:r>
+              <a:rPr sz="1300" b="0" i="1">
+                <a:solidFill>
+                  <a:srgbClr val="36454F"/>
+                </a:solidFill>
+                <a:latin typeface="Calibri"/>
+              </a:rPr>
+              <a:t>Representation Learning with Contrastive Predictive Coding  (InfoNCE)</a:t>
             </a:r>
           </a:p>
         </p:txBody>
@@ -5646,7 +6672,7 @@
         <p:spPr>
           <a:xfrm>
             <a:off x="502920" y="320040"/>
-            <a:ext cx="1783080" cy="320040"/>
+            <a:ext cx="1828800" cy="320040"/>
           </a:xfrm>
           <a:prstGeom prst="roundRect">
             <a:avLst/>
@@ -5714,7 +6740,7 @@
           <a:p>
             <a:pPr algn="l"/>
             <a:r>
-              <a:rPr sz="2800" b="1" i="0">
+              <a:rPr sz="2600" b="1" i="0">
                 <a:solidFill>
                   <a:srgbClr val="1E2761"/>
                 </a:solidFill>
@@ -5755,7 +6781,7 @@
                 </a:solidFill>
                 <a:latin typeface="Calibri"/>
               </a:rPr>
-              <a:t>2 / 12</a:t>
+              <a:t>2 / 13</a:t>
             </a:r>
           </a:p>
         </p:txBody>
@@ -5953,7 +6979,7 @@
                 </a:solidFill>
                 <a:latin typeface="Calibri"/>
               </a:rPr>
-              <a:t>Biology is inherently few-shot</a:t>
+              <a:t>Biology itself is inherently few-shot</a:t>
             </a:r>
           </a:p>
           <a:p>
@@ -6384,7 +7410,7 @@
         <p:spPr>
           <a:xfrm>
             <a:off x="502920" y="320040"/>
-            <a:ext cx="1783080" cy="320040"/>
+            <a:ext cx="1828800" cy="320040"/>
           </a:xfrm>
           <a:prstGeom prst="roundRect">
             <a:avLst/>
@@ -6452,13 +7478,13 @@
           <a:p>
             <a:pPr algn="l"/>
             <a:r>
-              <a:rPr sz="2800" b="1" i="0">
+              <a:rPr sz="2600" b="1" i="0">
                 <a:solidFill>
                   <a:srgbClr val="1E2761"/>
                 </a:solidFill>
                 <a:latin typeface="Calibri"/>
               </a:rPr>
-              <a:t>Episodic Formulation &amp; Task Pool</a:t>
+              <a:t>Problem — Episodic Few-Shot Classification</a:t>
             </a:r>
           </a:p>
         </p:txBody>
@@ -6493,7 +7519,7 @@
                 </a:solidFill>
                 <a:latin typeface="Calibri"/>
               </a:rPr>
-              <a:t>3 / 12</a:t>
+              <a:t>3 / 13</a:t>
             </a:r>
           </a:p>
         </p:txBody>
@@ -6607,7 +7633,7 @@
                 </a:solidFill>
                 <a:latin typeface="Calibri"/>
               </a:rPr>
-              <a:t>Split at the TASK level (not molecule level), with strict label disjointness.</a:t>
+              <a:t>Split at the TASK level (not molecule level), strict label disjointness.</a:t>
             </a:r>
           </a:p>
           <a:p>
@@ -6635,7 +7661,7 @@
                 </a:solidFill>
                 <a:latin typeface="Calibri"/>
               </a:rPr>
-              <a:t>Episode τ draws N classes × K support + query set.</a:t>
+              <a:t>Episode τ draws N classes × K support molecules + query set.</a:t>
             </a:r>
           </a:p>
           <a:p>
@@ -6663,7 +7689,7 @@
                 </a:solidFill>
                 <a:latin typeface="Calibri"/>
               </a:rPr>
-              <a:t>Configs: 5-way 1-shot · 5-way 5-shot · 10-way 5-shot.</a:t>
+              <a:t>Configs we study:  5-way 1-shot · 5-way 5-shot · 10-way 5-shot.</a:t>
             </a:r>
           </a:p>
         </p:txBody>
@@ -7364,7 +8390,7 @@
         <p:spPr>
           <a:xfrm>
             <a:off x="502920" y="320040"/>
-            <a:ext cx="1783080" cy="320040"/>
+            <a:ext cx="1828800" cy="320040"/>
           </a:xfrm>
           <a:prstGeom prst="roundRect">
             <a:avLst/>
@@ -7432,7 +8458,7 @@
           <a:p>
             <a:pPr algn="l"/>
             <a:r>
-              <a:rPr sz="2800" b="1" i="0">
+              <a:rPr sz="2600" b="1" i="0">
                 <a:solidFill>
                   <a:srgbClr val="1E2761"/>
                 </a:solidFill>
@@ -7473,7 +8499,7 @@
                 </a:solidFill>
                 <a:latin typeface="Calibri"/>
               </a:rPr>
-              <a:t>4 / 12</a:t>
+              <a:t>4 / 13</a:t>
             </a:r>
           </a:p>
         </p:txBody>
@@ -8060,7 +9086,7 @@
         <p:spPr>
           <a:xfrm>
             <a:off x="502920" y="320040"/>
-            <a:ext cx="1783080" cy="320040"/>
+            <a:ext cx="1828800" cy="320040"/>
           </a:xfrm>
           <a:prstGeom prst="roundRect">
             <a:avLst/>
@@ -8128,13 +9154,13 @@
           <a:p>
             <a:pPr algn="l"/>
             <a:r>
-              <a:rPr sz="2800" b="1" i="0">
+              <a:rPr sz="2600" b="1" i="0">
                 <a:solidFill>
                   <a:srgbClr val="1E2761"/>
                 </a:solidFill>
                 <a:latin typeface="Calibri"/>
               </a:rPr>
-              <a:t>Graph-of-Shots — Pipeline</a:t>
+              <a:t>GoS v1 — Meta-Graph Pipeline</a:t>
             </a:r>
           </a:p>
         </p:txBody>
@@ -8169,7 +9195,7 @@
                 </a:solidFill>
                 <a:latin typeface="Calibri"/>
               </a:rPr>
-              <a:t>5 / 12</a:t>
+              <a:t>5 / 13</a:t>
             </a:r>
           </a:p>
         </p:txBody>
@@ -8218,7 +9244,7 @@
         <p:spPr>
           <a:xfrm>
             <a:off x="502920" y="1645920"/>
-            <a:ext cx="11185855" cy="1828800"/>
+            <a:ext cx="11185855" cy="1645920"/>
           </a:xfrm>
           <a:prstGeom prst="rect">
             <a:avLst/>
@@ -8283,7 +9309,7 @@
                 </a:solidFill>
                 <a:latin typeface="Calibri"/>
               </a:rPr>
-              <a:t>Our idea: build a task-specific META-GRAPH over episode molecules and run a GNN on it — support labels propagate to queries.</a:t>
+              <a:t>Our idea: build a task-specific META-GRAPH over episode molecules, run a GNN on it — support labels propagate to queries.</a:t>
             </a:r>
           </a:p>
         </p:txBody>
@@ -8296,7 +9322,7 @@
         </p:nvSpPr>
         <p:spPr>
           <a:xfrm>
-            <a:off x="502920" y="3977640"/>
+            <a:off x="502920" y="3886200"/>
             <a:ext cx="1635709" cy="1965960"/>
           </a:xfrm>
           <a:prstGeom prst="roundRect">
@@ -8362,7 +9388,7 @@
         </p:nvSpPr>
         <p:spPr>
           <a:xfrm>
-            <a:off x="1069314" y="3726180"/>
+            <a:off x="1069314" y="3634740"/>
             <a:ext cx="502920" cy="502920"/>
           </a:xfrm>
           <a:prstGeom prst="ellipse">
@@ -8417,7 +9443,7 @@
         </p:nvSpPr>
         <p:spPr>
           <a:xfrm>
-            <a:off x="2156917" y="4663440"/>
+            <a:off x="2156917" y="4572000"/>
             <a:ext cx="237744" cy="274320"/>
           </a:xfrm>
           <a:prstGeom prst="rightArrow">
@@ -8461,7 +9487,7 @@
         </p:nvSpPr>
         <p:spPr>
           <a:xfrm>
-            <a:off x="2412949" y="3977640"/>
+            <a:off x="2412949" y="3886200"/>
             <a:ext cx="1635709" cy="1965960"/>
           </a:xfrm>
           <a:prstGeom prst="roundRect">
@@ -8527,7 +9553,7 @@
         </p:nvSpPr>
         <p:spPr>
           <a:xfrm>
-            <a:off x="2979343" y="3726180"/>
+            <a:off x="2979343" y="3634740"/>
             <a:ext cx="502920" cy="502920"/>
           </a:xfrm>
           <a:prstGeom prst="ellipse">
@@ -8582,7 +9608,7 @@
         </p:nvSpPr>
         <p:spPr>
           <a:xfrm>
-            <a:off x="4066946" y="4663440"/>
+            <a:off x="4066946" y="4572000"/>
             <a:ext cx="237744" cy="274320"/>
           </a:xfrm>
           <a:prstGeom prst="rightArrow">
@@ -8626,7 +9652,7 @@
         </p:nvSpPr>
         <p:spPr>
           <a:xfrm>
-            <a:off x="4322978" y="3977640"/>
+            <a:off x="4322978" y="3886200"/>
             <a:ext cx="1635709" cy="1965960"/>
           </a:xfrm>
           <a:prstGeom prst="roundRect">
@@ -8692,7 +9718,7 @@
         </p:nvSpPr>
         <p:spPr>
           <a:xfrm>
-            <a:off x="4889372" y="3726180"/>
+            <a:off x="4889372" y="3634740"/>
             <a:ext cx="502920" cy="502920"/>
           </a:xfrm>
           <a:prstGeom prst="ellipse">
@@ -8747,7 +9773,7 @@
         </p:nvSpPr>
         <p:spPr>
           <a:xfrm>
-            <a:off x="5976975" y="4663440"/>
+            <a:off x="5976975" y="4572000"/>
             <a:ext cx="237744" cy="274320"/>
           </a:xfrm>
           <a:prstGeom prst="rightArrow">
@@ -8791,7 +9817,7 @@
         </p:nvSpPr>
         <p:spPr>
           <a:xfrm>
-            <a:off x="6233007" y="3977640"/>
+            <a:off x="6233007" y="3886200"/>
             <a:ext cx="1635709" cy="1965960"/>
           </a:xfrm>
           <a:prstGeom prst="roundRect">
@@ -8857,7 +9883,7 @@
         </p:nvSpPr>
         <p:spPr>
           <a:xfrm>
-            <a:off x="6799402" y="3726180"/>
+            <a:off x="6799402" y="3634740"/>
             <a:ext cx="502920" cy="502920"/>
           </a:xfrm>
           <a:prstGeom prst="ellipse">
@@ -8912,7 +9938,7 @@
         </p:nvSpPr>
         <p:spPr>
           <a:xfrm>
-            <a:off x="7887004" y="4663440"/>
+            <a:off x="7887004" y="4572000"/>
             <a:ext cx="237744" cy="274320"/>
           </a:xfrm>
           <a:prstGeom prst="rightArrow">
@@ -8956,7 +9982,7 @@
         </p:nvSpPr>
         <p:spPr>
           <a:xfrm>
-            <a:off x="8143036" y="3977640"/>
+            <a:off x="8143036" y="3886200"/>
             <a:ext cx="1635709" cy="1965960"/>
           </a:xfrm>
           <a:prstGeom prst="roundRect">
@@ -9022,7 +10048,7 @@
         </p:nvSpPr>
         <p:spPr>
           <a:xfrm>
-            <a:off x="8709431" y="3726180"/>
+            <a:off x="8709431" y="3634740"/>
             <a:ext cx="502920" cy="502920"/>
           </a:xfrm>
           <a:prstGeom prst="ellipse">
@@ -9077,7 +10103,7 @@
         </p:nvSpPr>
         <p:spPr>
           <a:xfrm>
-            <a:off x="9797033" y="4663440"/>
+            <a:off x="9797033" y="4572000"/>
             <a:ext cx="237744" cy="274320"/>
           </a:xfrm>
           <a:prstGeom prst="rightArrow">
@@ -9121,7 +10147,7 @@
         </p:nvSpPr>
         <p:spPr>
           <a:xfrm>
-            <a:off x="10053065" y="3977640"/>
+            <a:off x="10053065" y="3886200"/>
             <a:ext cx="1635709" cy="1965960"/>
           </a:xfrm>
           <a:prstGeom prst="roundRect">
@@ -9187,7 +10213,7 @@
         </p:nvSpPr>
         <p:spPr>
           <a:xfrm>
-            <a:off x="10619460" y="3726180"/>
+            <a:off x="10619460" y="3634740"/>
             <a:ext cx="502920" cy="502920"/>
           </a:xfrm>
           <a:prstGeom prst="ellipse">
@@ -9242,8 +10268,8 @@
         </p:nvSpPr>
         <p:spPr>
           <a:xfrm>
-            <a:off x="502920" y="6126480"/>
-            <a:ext cx="11185855" cy="457200"/>
+            <a:off x="502920" y="6035040"/>
+            <a:ext cx="11185855" cy="548640"/>
           </a:xfrm>
           <a:prstGeom prst="roundRect">
             <a:avLst/>
@@ -9282,7 +10308,7 @@
                 </a:solidFill>
                 <a:latin typeface="Calibri"/>
               </a:rPr>
-              <a:t>Encoder φ, affinity g, and meta-GNN trained jointly end-to-end.</a:t>
+              <a:t>All three modules — encoder φ, affinity g, meta-GNN — trained jointly end-to-end with cross-entropy on query predictions.</a:t>
             </a:r>
           </a:p>
         </p:txBody>
@@ -9366,7 +10392,7 @@
         <p:spPr>
           <a:xfrm>
             <a:off x="502920" y="320040"/>
-            <a:ext cx="1783080" cy="320040"/>
+            <a:ext cx="1828800" cy="320040"/>
           </a:xfrm>
           <a:prstGeom prst="roundRect">
             <a:avLst/>
@@ -9434,13 +10460,13 @@
           <a:p>
             <a:pPr algn="l"/>
             <a:r>
-              <a:rPr sz="2800" b="1" i="0">
+              <a:rPr sz="2600" b="1" i="0">
                 <a:solidFill>
                   <a:srgbClr val="1E2761"/>
                 </a:solidFill>
                 <a:latin typeface="Calibri"/>
               </a:rPr>
-              <a:t>Method — Encoder, Affinity, Meta-GNN</a:t>
+              <a:t>GoS v1 — Why It Fell Short</a:t>
             </a:r>
           </a:p>
         </p:txBody>
@@ -9475,7 +10501,7 @@
                 </a:solidFill>
                 <a:latin typeface="Calibri"/>
               </a:rPr>
-              <a:t>6 / 12</a:t>
+              <a:t>6 / 13</a:t>
             </a:r>
           </a:p>
         </p:txBody>
@@ -9524,7 +10550,7 @@
         <p:spPr>
           <a:xfrm>
             <a:off x="502920" y="1737360"/>
-            <a:ext cx="3657600" cy="4572000"/>
+            <a:ext cx="7315200" cy="3200400"/>
           </a:xfrm>
           <a:prstGeom prst="roundRect">
             <a:avLst/>
@@ -9568,7 +10594,7 @@
         <p:spPr>
           <a:xfrm>
             <a:off x="685800" y="1828800"/>
-            <a:ext cx="3657600" cy="365760"/>
+            <a:ext cx="7132320" cy="365760"/>
           </a:xfrm>
           <a:prstGeom prst="rect">
             <a:avLst/>
@@ -9583,13 +10609,13 @@
           <a:p>
             <a:pPr algn="l"/>
             <a:r>
-              <a:rPr sz="1400" b="1" i="0">
-                <a:solidFill>
-                  <a:srgbClr val="1E2761"/>
-                </a:solidFill>
-                <a:latin typeface="Calibri"/>
-              </a:rPr>
-              <a:t>(A) Molecular Encoder</a:t>
+              <a:rPr sz="1200" b="1" i="0">
+                <a:solidFill>
+                  <a:srgbClr val="F96167"/>
+                </a:solidFill>
+                <a:latin typeface="Calibri"/>
+              </a:rPr>
+              <a:t>THREE OBSERVATIONS CONVERGE ON THE SAME ROOT CAUSE</a:t>
             </a:r>
           </a:p>
         </p:txBody>
@@ -9602,8 +10628,8 @@
         </p:nvSpPr>
         <p:spPr>
           <a:xfrm>
-            <a:off x="685800" y="2331720"/>
-            <a:ext cx="3291840" cy="2011680"/>
+            <a:off x="685800" y="2286000"/>
+            <a:ext cx="6949440" cy="2560320"/>
           </a:xfrm>
           <a:prstGeom prst="rect">
             <a:avLst/>
@@ -9625,7 +10651,7 @@
               </a:spcAft>
             </a:pPr>
             <a:r>
-              <a:rPr sz="1200" b="1" i="0">
+              <a:rPr sz="1300" b="1" i="0">
                 <a:solidFill>
                   <a:srgbClr val="1E2761"/>
                 </a:solidFill>
@@ -9634,13 +10660,13 @@
               <a:t>●  </a:t>
             </a:r>
             <a:r>
-              <a:rPr sz="1200" b="0" i="0">
+              <a:rPr sz="1300" b="0" i="0">
                 <a:solidFill>
                   <a:srgbClr val="36454F"/>
                 </a:solidFill>
                 <a:latin typeface="Calibri"/>
               </a:rPr>
-              <a:t>3 × GINEConv</a:t>
+              <a:t>Obs. 1 — kNN k = 3 &gt; 5 &gt; 10 &gt; 100 (dense)</a:t>
             </a:r>
           </a:p>
           <a:p>
@@ -9653,7 +10679,7 @@
               </a:spcAft>
             </a:pPr>
             <a:r>
-              <a:rPr sz="1000" b="0" i="0">
+              <a:rPr sz="1100" b="0" i="0">
                 <a:solidFill>
                   <a:srgbClr val="888A90"/>
                 </a:solidFill>
@@ -9662,13 +10688,13 @@
               <a:t>–  </a:t>
             </a:r>
             <a:r>
-              <a:rPr sz="1000" b="0" i="0">
+              <a:rPr sz="1100" b="0" i="0">
                 <a:solidFill>
                   <a:srgbClr val="36454F"/>
                 </a:solidFill>
                 <a:latin typeface="Calibri"/>
               </a:rPr>
-              <a:t>BN + ReLU, dropout 0.1</a:t>
+              <a:t>sparsifying the meta-graph helps; classic GCN over-smoothing signature.</a:t>
             </a:r>
           </a:p>
           <a:p>
@@ -9681,7 +10707,7 @@
               </a:spcAft>
             </a:pPr>
             <a:r>
-              <a:rPr sz="1200" b="1" i="0">
+              <a:rPr sz="1300" b="1" i="0">
                 <a:solidFill>
                   <a:srgbClr val="1E2761"/>
                 </a:solidFill>
@@ -9690,13 +10716,13 @@
               <a:t>●  </a:t>
             </a:r>
             <a:r>
-              <a:rPr sz="1200" b="0" i="0">
+              <a:rPr sz="1300" b="0" i="0">
                 <a:solidFill>
                   <a:srgbClr val="36454F"/>
                 </a:solidFill>
                 <a:latin typeface="Calibri"/>
               </a:rPr>
-              <a:t>Global mean pool</a:t>
+              <a:t>Obs. 2 — ProtoNet 0.716 &gt; GoS v1 0.572 at 5w5s</a:t>
             </a:r>
           </a:p>
           <a:p>
@@ -9709,22 +10735,22 @@
               </a:spcAft>
             </a:pPr>
             <a:r>
-              <a:rPr sz="1200" b="1" i="0">
-                <a:solidFill>
-                  <a:srgbClr val="1E2761"/>
-                </a:solidFill>
-                <a:latin typeface="Calibri"/>
-              </a:rPr>
-              <a:t>●  </a:t>
-            </a:r>
-            <a:r>
-              <a:rPr sz="1200" b="0" i="0">
+              <a:rPr sz="1100" b="0" i="0">
+                <a:solidFill>
+                  <a:srgbClr val="888A90"/>
+                </a:solidFill>
+                <a:latin typeface="Calibri"/>
+              </a:rPr>
+              <a:t>–  </a:t>
+            </a:r>
+            <a:r>
+              <a:rPr sz="1100" b="0" i="0">
                 <a:solidFill>
                   <a:srgbClr val="36454F"/>
                 </a:solidFill>
                 <a:latin typeface="Calibri"/>
               </a:rPr>
-              <a:t>Linear → d = 128</a:t>
+              <a:t>the meta-GNN hurts a representation ProtoNet already classifies well.</a:t>
             </a:r>
           </a:p>
           <a:p>
@@ -9737,7 +10763,7 @@
               </a:spcAft>
             </a:pPr>
             <a:r>
-              <a:rPr sz="1200" b="1" i="0">
+              <a:rPr sz="1300" b="1" i="0">
                 <a:solidFill>
                   <a:srgbClr val="1E2761"/>
                 </a:solidFill>
@@ -9746,432 +10772,15 @@
               <a:t>●  </a:t>
             </a:r>
             <a:r>
-              <a:rPr sz="1200" b="0" i="0">
+              <a:rPr sz="1300" b="0" i="0">
                 <a:solidFill>
                   <a:srgbClr val="36454F"/>
                 </a:solidFill>
                 <a:latin typeface="Calibri"/>
               </a:rPr>
-              <a:t>Edge_attr used (bonds).</a:t>
-            </a:r>
-          </a:p>
-        </p:txBody>
-      </p:sp>
-      <p:pic>
-        <p:nvPicPr>
-          <p:cNvPr id="10" name="Picture 9" descr="f12_1.png"/>
-          <p:cNvPicPr>
-            <a:picLocks noChangeAspect="1"/>
-          </p:cNvPicPr>
-          <p:nvPr/>
-        </p:nvPicPr>
-        <p:blipFill>
-          <a:blip r:embed="rId2"/>
-          <a:stretch>
-            <a:fillRect/>
-          </a:stretch>
-        </p:blipFill>
-        <p:spPr>
-          <a:xfrm>
-            <a:off x="685800" y="5029200"/>
-            <a:ext cx="3291840" cy="431259"/>
-          </a:xfrm>
-          <a:prstGeom prst="rect">
-            <a:avLst/>
-          </a:prstGeom>
-        </p:spPr>
-      </p:pic>
-      <p:sp>
-        <p:nvSpPr>
-          <p:cNvPr id="11" name="Rounded Rectangle 10"/>
-          <p:cNvSpPr/>
-          <p:nvPr/>
-        </p:nvSpPr>
-        <p:spPr>
-          <a:xfrm>
-            <a:off x="4251960" y="1737360"/>
-            <a:ext cx="3657600" cy="4572000"/>
-          </a:xfrm>
-          <a:prstGeom prst="roundRect">
-            <a:avLst/>
-          </a:prstGeom>
-          <a:solidFill>
-            <a:srgbClr val="F5F7FA"/>
-          </a:solidFill>
-          <a:ln>
-            <a:noFill/>
-          </a:ln>
-          <a:effectLst/>
-        </p:spPr>
-        <p:style>
-          <a:lnRef idx="1">
-            <a:schemeClr val="accent1"/>
-          </a:lnRef>
-          <a:fillRef idx="3">
-            <a:schemeClr val="accent1"/>
-          </a:fillRef>
-          <a:effectRef idx="2">
-            <a:schemeClr val="accent1"/>
-          </a:effectRef>
-          <a:fontRef idx="minor">
-            <a:schemeClr val="lt1"/>
-          </a:fontRef>
-        </p:style>
-        <p:txBody>
-          <a:bodyPr rtlCol="0" anchor="ctr" lIns="45720" rIns="45720" tIns="27432" bIns="27432" wrap="square"/>
-          <a:lstStyle/>
-          <a:p>
-            <a:pPr algn="ctr"/>
-          </a:p>
-        </p:txBody>
-      </p:sp>
-      <p:sp>
-        <p:nvSpPr>
-          <p:cNvPr id="12" name="TextBox 11"/>
-          <p:cNvSpPr txBox="1"/>
-          <p:nvPr/>
-        </p:nvSpPr>
-        <p:spPr>
-          <a:xfrm>
-            <a:off x="4434840" y="1828800"/>
-            <a:ext cx="3657600" cy="365760"/>
-          </a:xfrm>
-          <a:prstGeom prst="rect">
-            <a:avLst/>
-          </a:prstGeom>
-          <a:noFill/>
-        </p:spPr>
-        <p:txBody>
-          <a:bodyPr wrap="square" lIns="45720" rIns="45720" tIns="27432" bIns="27432" anchor="t">
-            <a:spAutoFit/>
-          </a:bodyPr>
-          <a:lstStyle/>
-          <a:p>
-            <a:pPr algn="l"/>
-            <a:r>
-              <a:rPr sz="1400" b="1" i="0">
-                <a:solidFill>
-                  <a:srgbClr val="1E2761"/>
-                </a:solidFill>
-                <a:latin typeface="Calibri"/>
-              </a:rPr>
-              <a:t>(B) Affinity  w_ij = g(h_i, h_j)</a:t>
-            </a:r>
-          </a:p>
-        </p:txBody>
-      </p:sp>
-      <p:sp>
-        <p:nvSpPr>
-          <p:cNvPr id="13" name="TextBox 12"/>
-          <p:cNvSpPr txBox="1"/>
-          <p:nvPr/>
-        </p:nvSpPr>
-        <p:spPr>
-          <a:xfrm>
-            <a:off x="4434840" y="2468880"/>
-            <a:ext cx="1005840" cy="320040"/>
-          </a:xfrm>
-          <a:prstGeom prst="rect">
-            <a:avLst/>
-          </a:prstGeom>
-          <a:noFill/>
-        </p:spPr>
-        <p:txBody>
-          <a:bodyPr wrap="square" lIns="45720" rIns="45720" tIns="27432" bIns="27432" anchor="ctr">
-            <a:spAutoFit/>
-          </a:bodyPr>
-          <a:lstStyle/>
-          <a:p>
-            <a:pPr algn="l"/>
-            <a:r>
-              <a:rPr sz="1100" b="1" i="0">
-                <a:solidFill>
-                  <a:srgbClr val="F96167"/>
-                </a:solidFill>
-                <a:latin typeface="Calibri"/>
-              </a:rPr>
-              <a:t>cosine</a:t>
-            </a:r>
-          </a:p>
-        </p:txBody>
-      </p:sp>
-      <p:pic>
-        <p:nvPicPr>
-          <p:cNvPr id="14" name="Picture 13" descr="f13_1.png"/>
-          <p:cNvPicPr>
-            <a:picLocks noChangeAspect="1"/>
-          </p:cNvPicPr>
-          <p:nvPr/>
-        </p:nvPicPr>
-        <p:blipFill>
-          <a:blip r:embed="rId3"/>
-          <a:stretch>
-            <a:fillRect/>
-          </a:stretch>
-        </p:blipFill>
-        <p:spPr>
-          <a:xfrm>
-            <a:off x="5349240" y="2468880"/>
-            <a:ext cx="2377440" cy="337553"/>
-          </a:xfrm>
-          <a:prstGeom prst="rect">
-            <a:avLst/>
-          </a:prstGeom>
-        </p:spPr>
-      </p:pic>
-      <p:sp>
-        <p:nvSpPr>
-          <p:cNvPr id="15" name="TextBox 14"/>
-          <p:cNvSpPr txBox="1"/>
-          <p:nvPr/>
-        </p:nvSpPr>
-        <p:spPr>
-          <a:xfrm>
-            <a:off x="4434840" y="3246120"/>
-            <a:ext cx="1005840" cy="320040"/>
-          </a:xfrm>
-          <a:prstGeom prst="rect">
-            <a:avLst/>
-          </a:prstGeom>
-          <a:noFill/>
-        </p:spPr>
-        <p:txBody>
-          <a:bodyPr wrap="square" lIns="45720" rIns="45720" tIns="27432" bIns="27432" anchor="ctr">
-            <a:spAutoFit/>
-          </a:bodyPr>
-          <a:lstStyle/>
-          <a:p>
-            <a:pPr algn="l"/>
-            <a:r>
-              <a:rPr sz="1100" b="1" i="0">
-                <a:solidFill>
-                  <a:srgbClr val="F96167"/>
-                </a:solidFill>
-                <a:latin typeface="Calibri"/>
-              </a:rPr>
-              <a:t>bilinear</a:t>
-            </a:r>
-          </a:p>
-        </p:txBody>
-      </p:sp>
-      <p:pic>
-        <p:nvPicPr>
-          <p:cNvPr id="16" name="Picture 15" descr="f13_2.png"/>
-          <p:cNvPicPr>
-            <a:picLocks noChangeAspect="1"/>
-          </p:cNvPicPr>
-          <p:nvPr/>
-        </p:nvPicPr>
-        <p:blipFill>
-          <a:blip r:embed="rId4"/>
-          <a:stretch>
-            <a:fillRect/>
-          </a:stretch>
-        </p:blipFill>
-        <p:spPr>
-          <a:xfrm>
-            <a:off x="5349240" y="3246120"/>
-            <a:ext cx="2377440" cy="337553"/>
-          </a:xfrm>
-          <a:prstGeom prst="rect">
-            <a:avLst/>
-          </a:prstGeom>
-        </p:spPr>
-      </p:pic>
-      <p:sp>
-        <p:nvSpPr>
-          <p:cNvPr id="17" name="TextBox 16"/>
-          <p:cNvSpPr txBox="1"/>
-          <p:nvPr/>
-        </p:nvSpPr>
-        <p:spPr>
-          <a:xfrm>
-            <a:off x="4434840" y="4023360"/>
-            <a:ext cx="1005840" cy="320040"/>
-          </a:xfrm>
-          <a:prstGeom prst="rect">
-            <a:avLst/>
-          </a:prstGeom>
-          <a:noFill/>
-        </p:spPr>
-        <p:txBody>
-          <a:bodyPr wrap="square" lIns="45720" rIns="45720" tIns="27432" bIns="27432" anchor="ctr">
-            <a:spAutoFit/>
-          </a:bodyPr>
-          <a:lstStyle/>
-          <a:p>
-            <a:pPr algn="l"/>
-            <a:r>
-              <a:rPr sz="1100" b="1" i="0">
-                <a:solidFill>
-                  <a:srgbClr val="F96167"/>
-                </a:solidFill>
-                <a:latin typeface="Calibri"/>
-              </a:rPr>
-              <a:t>attention</a:t>
-            </a:r>
-          </a:p>
-        </p:txBody>
-      </p:sp>
-      <p:pic>
-        <p:nvPicPr>
-          <p:cNvPr id="18" name="Picture 17" descr="f13_3.png"/>
-          <p:cNvPicPr>
-            <a:picLocks noChangeAspect="1"/>
-          </p:cNvPicPr>
-          <p:nvPr/>
-        </p:nvPicPr>
-        <p:blipFill>
-          <a:blip r:embed="rId5"/>
-          <a:stretch>
-            <a:fillRect/>
-          </a:stretch>
-        </p:blipFill>
-        <p:spPr>
-          <a:xfrm>
-            <a:off x="5349240" y="4023360"/>
-            <a:ext cx="2377440" cy="341195"/>
-          </a:xfrm>
-          <a:prstGeom prst="rect">
-            <a:avLst/>
-          </a:prstGeom>
-        </p:spPr>
-      </p:pic>
-      <p:sp>
-        <p:nvSpPr>
-          <p:cNvPr id="19" name="TextBox 18"/>
-          <p:cNvSpPr txBox="1"/>
-          <p:nvPr/>
-        </p:nvSpPr>
-        <p:spPr>
-          <a:xfrm>
-            <a:off x="4434840" y="5303520"/>
-            <a:ext cx="3291840" cy="914400"/>
-          </a:xfrm>
-          <a:prstGeom prst="rect">
-            <a:avLst/>
-          </a:prstGeom>
-          <a:noFill/>
-        </p:spPr>
-        <p:txBody>
-          <a:bodyPr wrap="square" lIns="45720" rIns="45720" tIns="27432" bIns="27432" anchor="t">
-            <a:spAutoFit/>
-          </a:bodyPr>
-          <a:lstStyle/>
-          <a:p>
-            <a:pPr algn="l"/>
-            <a:r>
-              <a:rPr sz="1100" b="0" i="1">
-                <a:solidFill>
-                  <a:srgbClr val="36454F"/>
-                </a:solidFill>
-                <a:latin typeface="Calibri"/>
-              </a:rPr>
-              <a:t>kNN sparsification keeps top-k edges per node; dense graphs over-smooth.</a:t>
-            </a:r>
-          </a:p>
-        </p:txBody>
-      </p:sp>
-      <p:sp>
-        <p:nvSpPr>
-          <p:cNvPr id="20" name="Rounded Rectangle 19"/>
-          <p:cNvSpPr/>
-          <p:nvPr/>
-        </p:nvSpPr>
-        <p:spPr>
-          <a:xfrm>
-            <a:off x="8001000" y="1737360"/>
-            <a:ext cx="3657600" cy="4572000"/>
-          </a:xfrm>
-          <a:prstGeom prst="roundRect">
-            <a:avLst/>
-          </a:prstGeom>
-          <a:solidFill>
-            <a:srgbClr val="F5F7FA"/>
-          </a:solidFill>
-          <a:ln>
-            <a:noFill/>
-          </a:ln>
-          <a:effectLst/>
-        </p:spPr>
-        <p:style>
-          <a:lnRef idx="1">
-            <a:schemeClr val="accent1"/>
-          </a:lnRef>
-          <a:fillRef idx="3">
-            <a:schemeClr val="accent1"/>
-          </a:fillRef>
-          <a:effectRef idx="2">
-            <a:schemeClr val="accent1"/>
-          </a:effectRef>
-          <a:fontRef idx="minor">
-            <a:schemeClr val="lt1"/>
-          </a:fontRef>
-        </p:style>
-        <p:txBody>
-          <a:bodyPr rtlCol="0" anchor="ctr" lIns="45720" rIns="45720" tIns="27432" bIns="27432" wrap="square"/>
-          <a:lstStyle/>
-          <a:p>
-            <a:pPr algn="ctr"/>
-          </a:p>
-        </p:txBody>
-      </p:sp>
-      <p:sp>
-        <p:nvSpPr>
-          <p:cNvPr id="21" name="TextBox 20"/>
-          <p:cNvSpPr txBox="1"/>
-          <p:nvPr/>
-        </p:nvSpPr>
-        <p:spPr>
-          <a:xfrm>
-            <a:off x="8183880" y="1828800"/>
-            <a:ext cx="3657600" cy="365760"/>
-          </a:xfrm>
-          <a:prstGeom prst="rect">
-            <a:avLst/>
-          </a:prstGeom>
-          <a:noFill/>
-        </p:spPr>
-        <p:txBody>
-          <a:bodyPr wrap="square" lIns="45720" rIns="45720" tIns="27432" bIns="27432" anchor="t">
-            <a:spAutoFit/>
-          </a:bodyPr>
-          <a:lstStyle/>
-          <a:p>
-            <a:pPr algn="l"/>
-            <a:r>
-              <a:rPr sz="1400" b="1" i="0">
-                <a:solidFill>
-                  <a:srgbClr val="1E2761"/>
-                </a:solidFill>
-                <a:latin typeface="Calibri"/>
-              </a:rPr>
-              <a:t>(C) Meta-GNN</a:t>
-            </a:r>
-          </a:p>
-        </p:txBody>
-      </p:sp>
-      <p:sp>
-        <p:nvSpPr>
-          <p:cNvPr id="22" name="TextBox 21"/>
-          <p:cNvSpPr txBox="1"/>
-          <p:nvPr/>
-        </p:nvSpPr>
-        <p:spPr>
-          <a:xfrm>
-            <a:off x="8183880" y="2331720"/>
-            <a:ext cx="3291840" cy="2011680"/>
-          </a:xfrm>
-          <a:prstGeom prst="rect">
-            <a:avLst/>
-          </a:prstGeom>
-          <a:noFill/>
-        </p:spPr>
-        <p:txBody>
-          <a:bodyPr wrap="square" lIns="45720" rIns="45720">
-            <a:spAutoFit/>
-          </a:bodyPr>
-          <a:lstStyle/>
+              <a:t>Obs. 3 — cosine ≈ bilinear ≈ attention  (Δ &lt; 2 pp)</a:t>
+            </a:r>
+          </a:p>
           <a:p>
             <a:pPr algn="l">
               <a:lnSpc>
@@ -10182,134 +10791,130 @@
               </a:spcAft>
             </a:pPr>
             <a:r>
-              <a:rPr sz="1200" b="1" i="0">
-                <a:solidFill>
-                  <a:srgbClr val="1E2761"/>
-                </a:solidFill>
-                <a:latin typeface="Calibri"/>
-              </a:rPr>
-              <a:t>●  </a:t>
-            </a:r>
-            <a:r>
-              <a:rPr sz="1200" b="0" i="0">
+              <a:rPr sz="1100" b="0" i="0">
+                <a:solidFill>
+                  <a:srgbClr val="888A90"/>
+                </a:solidFill>
+                <a:latin typeface="Calibri"/>
+              </a:rPr>
+              <a:t>–  </a:t>
+            </a:r>
+            <a:r>
+              <a:rPr sz="1100" b="0" i="0">
                 <a:solidFill>
                   <a:srgbClr val="36454F"/>
                 </a:solidFill>
                 <a:latin typeface="Calibri"/>
               </a:rPr>
-              <a:t>2-layer weighted GCN.</a:t>
+              <a:t>affinity-function expressivity is NOT the bottleneck.</a:t>
+            </a:r>
+          </a:p>
+        </p:txBody>
+      </p:sp>
+      <p:sp>
+        <p:nvSpPr>
+          <p:cNvPr id="10" name="Rounded Rectangle 9"/>
+          <p:cNvSpPr/>
+          <p:nvPr/>
+        </p:nvSpPr>
+        <p:spPr>
+          <a:xfrm>
+            <a:off x="8229600" y="1737360"/>
+            <a:ext cx="3566160" cy="4572000"/>
+          </a:xfrm>
+          <a:prstGeom prst="roundRect">
+            <a:avLst/>
+          </a:prstGeom>
+          <a:solidFill>
+            <a:srgbClr val="F96167"/>
+          </a:solidFill>
+          <a:ln>
+            <a:noFill/>
+          </a:ln>
+          <a:effectLst/>
+        </p:spPr>
+        <p:style>
+          <a:lnRef idx="1">
+            <a:schemeClr val="accent1"/>
+          </a:lnRef>
+          <a:fillRef idx="3">
+            <a:schemeClr val="accent1"/>
+          </a:fillRef>
+          <a:effectRef idx="2">
+            <a:schemeClr val="accent1"/>
+          </a:effectRef>
+          <a:fontRef idx="minor">
+            <a:schemeClr val="lt1"/>
+          </a:fontRef>
+        </p:style>
+        <p:txBody>
+          <a:bodyPr rtlCol="0" anchor="ctr" lIns="228600" rIns="228600" tIns="27432" bIns="27432" wrap="square"/>
+          <a:lstStyle/>
+          <a:p>
+            <a:pPr algn="l"/>
+            <a:r>
+              <a:rPr sz="1400" b="1" i="0">
+                <a:solidFill>
+                  <a:srgbClr val="FFFFFF"/>
+                </a:solidFill>
+                <a:latin typeface="Calibri"/>
+              </a:rPr>
+              <a:t>ROOT CAUSE</a:t>
             </a:r>
           </a:p>
           <a:p>
             <a:pPr algn="l">
-              <a:lnSpc>
-                <a:spcPct val="120000"/>
-              </a:lnSpc>
-              <a:spcAft>
-                <a:spcPts val="300"/>
-              </a:spcAft>
+              <a:spcBef>
+                <a:spcPts val="1000"/>
+              </a:spcBef>
             </a:pPr>
             <a:r>
-              <a:rPr sz="1200" b="1" i="0">
-                <a:solidFill>
-                  <a:srgbClr val="1E2761"/>
-                </a:solidFill>
-                <a:latin typeface="Calibri"/>
-              </a:rPr>
-              <a:t>●  </a:t>
-            </a:r>
-            <a:r>
-              <a:rPr sz="1200" b="0" i="0">
+              <a:rPr sz="1300" b="0" i="1">
+                <a:solidFill>
+                  <a:srgbClr val="FFFFFF"/>
+                </a:solidFill>
+                <a:latin typeface="Calibri"/>
+              </a:rPr>
+              <a:t>The meta-GNN replaces the encoder embedding at prototype time; 2-layer GCN over-smoothing destroys the class separability that was already there.</a:t>
+            </a:r>
+          </a:p>
+        </p:txBody>
+      </p:sp>
+      <p:sp>
+        <p:nvSpPr>
+          <p:cNvPr id="11" name="TextBox 10"/>
+          <p:cNvSpPr txBox="1"/>
+          <p:nvPr/>
+        </p:nvSpPr>
+        <p:spPr>
+          <a:xfrm>
+            <a:off x="502920" y="5212080"/>
+            <a:ext cx="11185855" cy="1097280"/>
+          </a:xfrm>
+          <a:prstGeom prst="rect">
+            <a:avLst/>
+          </a:prstGeom>
+          <a:noFill/>
+        </p:spPr>
+        <p:txBody>
+          <a:bodyPr wrap="square" lIns="45720" rIns="45720" tIns="27432" bIns="27432" anchor="t">
+            <a:spAutoFit/>
+          </a:bodyPr>
+          <a:lstStyle/>
+          <a:p>
+            <a:pPr algn="l"/>
+            <a:r>
+              <a:rPr sz="1300" b="0" i="1">
                 <a:solidFill>
                   <a:srgbClr val="36454F"/>
                 </a:solidFill>
                 <a:latin typeface="Calibri"/>
               </a:rPr>
-              <a:t>support:  [h_i ; one-hot(y)]</a:t>
-            </a:r>
-          </a:p>
-          <a:p>
-            <a:pPr algn="l">
-              <a:lnSpc>
-                <a:spcPct val="120000"/>
-              </a:lnSpc>
-              <a:spcAft>
-                <a:spcPts val="300"/>
-              </a:spcAft>
-            </a:pPr>
-            <a:r>
-              <a:rPr sz="1200" b="1" i="0">
-                <a:solidFill>
-                  <a:srgbClr val="1E2761"/>
-                </a:solidFill>
-                <a:latin typeface="Calibri"/>
-              </a:rPr>
-              <a:t>●  </a:t>
-            </a:r>
-            <a:r>
-              <a:rPr sz="1200" b="0" i="0">
-                <a:solidFill>
-                  <a:srgbClr val="36454F"/>
-                </a:solidFill>
-                <a:latin typeface="Calibri"/>
-              </a:rPr>
-              <a:t>query:    [h_i ; 0]</a:t>
-            </a:r>
-          </a:p>
-          <a:p>
-            <a:pPr algn="l">
-              <a:lnSpc>
-                <a:spcPct val="120000"/>
-              </a:lnSpc>
-              <a:spcAft>
-                <a:spcPts val="300"/>
-              </a:spcAft>
-            </a:pPr>
-            <a:r>
-              <a:rPr sz="1200" b="1" i="0">
-                <a:solidFill>
-                  <a:srgbClr val="1E2761"/>
-                </a:solidFill>
-                <a:latin typeface="Calibri"/>
-              </a:rPr>
-              <a:t>●  </a:t>
-            </a:r>
-            <a:r>
-              <a:rPr sz="1200" b="0" i="0">
-                <a:solidFill>
-                  <a:srgbClr val="36454F"/>
-                </a:solidFill>
-                <a:latin typeface="Calibri"/>
-              </a:rPr>
-              <a:t>Labels diffuse along edges.</a:t>
-            </a:r>
-          </a:p>
-        </p:txBody>
-      </p:sp>
-      <p:pic>
-        <p:nvPicPr>
-          <p:cNvPr id="23" name="Picture 22" descr="f14_1.png"/>
-          <p:cNvPicPr>
-            <a:picLocks noChangeAspect="1"/>
-          </p:cNvPicPr>
-          <p:nvPr/>
-        </p:nvPicPr>
-        <p:blipFill>
-          <a:blip r:embed="rId6"/>
-          <a:stretch>
-            <a:fillRect/>
-          </a:stretch>
-        </p:blipFill>
-        <p:spPr>
-          <a:xfrm>
-            <a:off x="8183880" y="4937760"/>
-            <a:ext cx="3291840" cy="467381"/>
-          </a:xfrm>
-          <a:prstGeom prst="rect">
-            <a:avLst/>
-          </a:prstGeom>
-        </p:spPr>
-      </p:pic>
+              <a:t>Diagnosis = a checklist for v2: need a safety net that protects the encoder signal,  prevent over-smoothing structurally,  and strengthen the encoder itself.</a:t>
+            </a:r>
+          </a:p>
+        </p:txBody>
+      </p:sp>
     </p:spTree>
   </p:cSld>
   <p:clrMapOvr>
@@ -10389,7 +10994,7 @@
         <p:spPr>
           <a:xfrm>
             <a:off x="502920" y="320040"/>
-            <a:ext cx="1783080" cy="320040"/>
+            <a:ext cx="1828800" cy="320040"/>
           </a:xfrm>
           <a:prstGeom prst="roundRect">
             <a:avLst/>
@@ -10457,13 +11062,13 @@
           <a:p>
             <a:pPr algn="l"/>
             <a:r>
-              <a:rPr sz="2800" b="1" i="0">
+              <a:rPr sz="2600" b="1" i="0">
                 <a:solidFill>
                   <a:srgbClr val="1E2761"/>
                 </a:solidFill>
                 <a:latin typeface="Calibri"/>
               </a:rPr>
-              <a:t>Prototype Head &amp; Iterative Refinement</a:t>
+              <a:t>GoS v2 — Five Modifications</a:t>
             </a:r>
           </a:p>
         </p:txBody>
@@ -10498,7 +11103,7 @@
                 </a:solidFill>
                 <a:latin typeface="Calibri"/>
               </a:rPr>
-              <a:t>7 / 12</a:t>
+              <a:t>7 / 13</a:t>
             </a:r>
           </a:p>
         </p:txBody>
@@ -10546,8 +11151,377 @@
         </p:nvSpPr>
         <p:spPr>
           <a:xfrm>
-            <a:off x="502920" y="1691640"/>
-            <a:ext cx="11185855" cy="1005840"/>
+            <a:off x="502920" y="1828800"/>
+            <a:ext cx="2149388" cy="640080"/>
+          </a:xfrm>
+          <a:prstGeom prst="roundRect">
+            <a:avLst/>
+          </a:prstGeom>
+          <a:solidFill>
+            <a:srgbClr val="1E2761"/>
+          </a:solidFill>
+          <a:ln>
+            <a:noFill/>
+          </a:ln>
+          <a:effectLst/>
+        </p:spPr>
+        <p:style>
+          <a:lnRef idx="1">
+            <a:schemeClr val="accent1"/>
+          </a:lnRef>
+          <a:fillRef idx="3">
+            <a:schemeClr val="accent1"/>
+          </a:fillRef>
+          <a:effectRef idx="2">
+            <a:schemeClr val="accent1"/>
+          </a:effectRef>
+          <a:fontRef idx="minor">
+            <a:schemeClr val="lt1"/>
+          </a:fontRef>
+        </p:style>
+        <p:txBody>
+          <a:bodyPr rtlCol="0" anchor="ctr" lIns="45720" rIns="45720" tIns="27432" bIns="27432" wrap="square"/>
+          <a:lstStyle/>
+          <a:p>
+            <a:pPr algn="ctr"/>
+            <a:r>
+              <a:rPr sz="2200" b="1" i="0">
+                <a:solidFill>
+                  <a:srgbClr val="FFFFFF"/>
+                </a:solidFill>
+                <a:latin typeface="Calibri"/>
+              </a:rPr>
+              <a:t>M1</a:t>
+            </a:r>
+          </a:p>
+        </p:txBody>
+      </p:sp>
+      <p:sp>
+        <p:nvSpPr>
+          <p:cNvPr id="8" name="Rounded Rectangle 7"/>
+          <p:cNvSpPr/>
+          <p:nvPr/>
+        </p:nvSpPr>
+        <p:spPr>
+          <a:xfrm>
+            <a:off x="502920" y="2532888"/>
+            <a:ext cx="2149388" cy="3200400"/>
+          </a:xfrm>
+          <a:prstGeom prst="roundRect">
+            <a:avLst/>
+          </a:prstGeom>
+          <a:solidFill>
+            <a:srgbClr val="F5F7FA"/>
+          </a:solidFill>
+          <a:ln>
+            <a:noFill/>
+          </a:ln>
+          <a:effectLst/>
+        </p:spPr>
+        <p:style>
+          <a:lnRef idx="1">
+            <a:schemeClr val="accent1"/>
+          </a:lnRef>
+          <a:fillRef idx="3">
+            <a:schemeClr val="accent1"/>
+          </a:fillRef>
+          <a:effectRef idx="2">
+            <a:schemeClr val="accent1"/>
+          </a:effectRef>
+          <a:fontRef idx="minor">
+            <a:schemeClr val="lt1"/>
+          </a:fontRef>
+        </p:style>
+        <p:txBody>
+          <a:bodyPr rtlCol="0" anchor="ctr" tIns="27432" bIns="27432" wrap="square"/>
+          <a:lstStyle/>
+          <a:p>
+            <a:pPr algn="ctr"/>
+            <a:r>
+              <a:rPr sz="1300" b="1" i="0">
+                <a:solidFill>
+                  <a:srgbClr val="1E2761"/>
+                </a:solidFill>
+                <a:latin typeface="Calibri"/>
+              </a:rPr>
+              <a:t>Residual
+prototype</a:t>
+            </a:r>
+          </a:p>
+          <a:p>
+            <a:pPr algn="ctr">
+              <a:spcBef>
+                <a:spcPts val="800"/>
+              </a:spcBef>
+            </a:pPr>
+            <a:r>
+              <a:rPr sz="1000" b="0" i="1">
+                <a:solidFill>
+                  <a:srgbClr val="36454F"/>
+                </a:solidFill>
+                <a:latin typeface="Calibri"/>
+              </a:rPr>
+              <a:t>α · c_enc  +  (1-α) · c_gnn,  α ∈ [0,1] learnable</a:t>
+            </a:r>
+          </a:p>
+        </p:txBody>
+      </p:sp>
+      <p:sp>
+        <p:nvSpPr>
+          <p:cNvPr id="9" name="Rounded Rectangle 8"/>
+          <p:cNvSpPr/>
+          <p:nvPr/>
+        </p:nvSpPr>
+        <p:spPr>
+          <a:xfrm>
+            <a:off x="2762036" y="1828800"/>
+            <a:ext cx="2149388" cy="640080"/>
+          </a:xfrm>
+          <a:prstGeom prst="roundRect">
+            <a:avLst/>
+          </a:prstGeom>
+          <a:solidFill>
+            <a:srgbClr val="1E2761"/>
+          </a:solidFill>
+          <a:ln>
+            <a:noFill/>
+          </a:ln>
+          <a:effectLst/>
+        </p:spPr>
+        <p:style>
+          <a:lnRef idx="1">
+            <a:schemeClr val="accent1"/>
+          </a:lnRef>
+          <a:fillRef idx="3">
+            <a:schemeClr val="accent1"/>
+          </a:fillRef>
+          <a:effectRef idx="2">
+            <a:schemeClr val="accent1"/>
+          </a:effectRef>
+          <a:fontRef idx="minor">
+            <a:schemeClr val="lt1"/>
+          </a:fontRef>
+        </p:style>
+        <p:txBody>
+          <a:bodyPr rtlCol="0" anchor="ctr" lIns="45720" rIns="45720" tIns="27432" bIns="27432" wrap="square"/>
+          <a:lstStyle/>
+          <a:p>
+            <a:pPr algn="ctr"/>
+            <a:r>
+              <a:rPr sz="2200" b="1" i="0">
+                <a:solidFill>
+                  <a:srgbClr val="FFFFFF"/>
+                </a:solidFill>
+                <a:latin typeface="Calibri"/>
+              </a:rPr>
+              <a:t>M2</a:t>
+            </a:r>
+          </a:p>
+        </p:txBody>
+      </p:sp>
+      <p:sp>
+        <p:nvSpPr>
+          <p:cNvPr id="10" name="Rounded Rectangle 9"/>
+          <p:cNvSpPr/>
+          <p:nvPr/>
+        </p:nvSpPr>
+        <p:spPr>
+          <a:xfrm>
+            <a:off x="2762036" y="2532888"/>
+            <a:ext cx="2149388" cy="3200400"/>
+          </a:xfrm>
+          <a:prstGeom prst="roundRect">
+            <a:avLst/>
+          </a:prstGeom>
+          <a:solidFill>
+            <a:srgbClr val="F5F7FA"/>
+          </a:solidFill>
+          <a:ln>
+            <a:noFill/>
+          </a:ln>
+          <a:effectLst/>
+        </p:spPr>
+        <p:style>
+          <a:lnRef idx="1">
+            <a:schemeClr val="accent1"/>
+          </a:lnRef>
+          <a:fillRef idx="3">
+            <a:schemeClr val="accent1"/>
+          </a:fillRef>
+          <a:effectRef idx="2">
+            <a:schemeClr val="accent1"/>
+          </a:effectRef>
+          <a:fontRef idx="minor">
+            <a:schemeClr val="lt1"/>
+          </a:fontRef>
+        </p:style>
+        <p:txBody>
+          <a:bodyPr rtlCol="0" anchor="ctr" tIns="27432" bIns="27432" wrap="square"/>
+          <a:lstStyle/>
+          <a:p>
+            <a:pPr algn="ctr"/>
+            <a:r>
+              <a:rPr sz="1300" b="1" i="0">
+                <a:solidFill>
+                  <a:srgbClr val="1E2761"/>
+                </a:solidFill>
+                <a:latin typeface="Calibri"/>
+              </a:rPr>
+              <a:t>Shallower
+meta-GNN</a:t>
+            </a:r>
+          </a:p>
+          <a:p>
+            <a:pPr algn="ctr">
+              <a:spcBef>
+                <a:spcPts val="800"/>
+              </a:spcBef>
+            </a:pPr>
+            <a:r>
+              <a:rPr sz="1000" b="0" i="1">
+                <a:solidFill>
+                  <a:srgbClr val="36454F"/>
+                </a:solidFill>
+                <a:latin typeface="Calibri"/>
+              </a:rPr>
+              <a:t>1-layer GAT replaces 2-layer GCN</a:t>
+            </a:r>
+          </a:p>
+        </p:txBody>
+      </p:sp>
+      <p:sp>
+        <p:nvSpPr>
+          <p:cNvPr id="11" name="Rounded Rectangle 10"/>
+          <p:cNvSpPr/>
+          <p:nvPr/>
+        </p:nvSpPr>
+        <p:spPr>
+          <a:xfrm>
+            <a:off x="5021153" y="1828800"/>
+            <a:ext cx="2149388" cy="640080"/>
+          </a:xfrm>
+          <a:prstGeom prst="roundRect">
+            <a:avLst/>
+          </a:prstGeom>
+          <a:solidFill>
+            <a:srgbClr val="1E2761"/>
+          </a:solidFill>
+          <a:ln>
+            <a:noFill/>
+          </a:ln>
+          <a:effectLst/>
+        </p:spPr>
+        <p:style>
+          <a:lnRef idx="1">
+            <a:schemeClr val="accent1"/>
+          </a:lnRef>
+          <a:fillRef idx="3">
+            <a:schemeClr val="accent1"/>
+          </a:fillRef>
+          <a:effectRef idx="2">
+            <a:schemeClr val="accent1"/>
+          </a:effectRef>
+          <a:fontRef idx="minor">
+            <a:schemeClr val="lt1"/>
+          </a:fontRef>
+        </p:style>
+        <p:txBody>
+          <a:bodyPr rtlCol="0" anchor="ctr" lIns="45720" rIns="45720" tIns="27432" bIns="27432" wrap="square"/>
+          <a:lstStyle/>
+          <a:p>
+            <a:pPr algn="ctr"/>
+            <a:r>
+              <a:rPr sz="2200" b="1" i="0">
+                <a:solidFill>
+                  <a:srgbClr val="FFFFFF"/>
+                </a:solidFill>
+                <a:latin typeface="Calibri"/>
+              </a:rPr>
+              <a:t>M3</a:t>
+            </a:r>
+          </a:p>
+        </p:txBody>
+      </p:sp>
+      <p:sp>
+        <p:nvSpPr>
+          <p:cNvPr id="12" name="Rounded Rectangle 11"/>
+          <p:cNvSpPr/>
+          <p:nvPr/>
+        </p:nvSpPr>
+        <p:spPr>
+          <a:xfrm>
+            <a:off x="5021153" y="2532888"/>
+            <a:ext cx="2149388" cy="3200400"/>
+          </a:xfrm>
+          <a:prstGeom prst="roundRect">
+            <a:avLst/>
+          </a:prstGeom>
+          <a:solidFill>
+            <a:srgbClr val="F5F7FA"/>
+          </a:solidFill>
+          <a:ln>
+            <a:noFill/>
+          </a:ln>
+          <a:effectLst/>
+        </p:spPr>
+        <p:style>
+          <a:lnRef idx="1">
+            <a:schemeClr val="accent1"/>
+          </a:lnRef>
+          <a:fillRef idx="3">
+            <a:schemeClr val="accent1"/>
+          </a:fillRef>
+          <a:effectRef idx="2">
+            <a:schemeClr val="accent1"/>
+          </a:effectRef>
+          <a:fontRef idx="minor">
+            <a:schemeClr val="lt1"/>
+          </a:fontRef>
+        </p:style>
+        <p:txBody>
+          <a:bodyPr rtlCol="0" anchor="ctr" tIns="27432" bIns="27432" wrap="square"/>
+          <a:lstStyle/>
+          <a:p>
+            <a:pPr algn="ctr"/>
+            <a:r>
+              <a:rPr sz="1300" b="1" i="0">
+                <a:solidFill>
+                  <a:srgbClr val="1E2761"/>
+                </a:solidFill>
+                <a:latin typeface="Calibri"/>
+              </a:rPr>
+              <a:t>Bipartite
+messaging</a:t>
+            </a:r>
+          </a:p>
+          <a:p>
+            <a:pPr algn="ctr">
+              <a:spcBef>
+                <a:spcPts val="800"/>
+              </a:spcBef>
+            </a:pPr>
+            <a:r>
+              <a:rPr sz="1000" b="0" i="1">
+                <a:solidFill>
+                  <a:srgbClr val="36454F"/>
+                </a:solidFill>
+                <a:latin typeface="Calibri"/>
+              </a:rPr>
+              <a:t>mask query → * edges (no Q→Q noise)</a:t>
+            </a:r>
+          </a:p>
+        </p:txBody>
+      </p:sp>
+      <p:sp>
+        <p:nvSpPr>
+          <p:cNvPr id="13" name="Rounded Rectangle 12"/>
+          <p:cNvSpPr/>
+          <p:nvPr/>
+        </p:nvSpPr>
+        <p:spPr>
+          <a:xfrm>
+            <a:off x="7280269" y="1828800"/>
+            <a:ext cx="2149388" cy="640080"/>
           </a:xfrm>
           <a:prstGeom prst="roundRect">
             <a:avLst/>
@@ -10575,255 +11549,225 @@
           </a:fontRef>
         </p:style>
         <p:txBody>
-          <a:bodyPr rtlCol="0" anchor="ctr" lIns="228600" rIns="228600" tIns="27432" bIns="27432" wrap="square"/>
-          <a:lstStyle/>
-          <a:p>
-            <a:pPr algn="l"/>
-            <a:r>
-              <a:rPr sz="1200" b="1" i="0">
+          <a:bodyPr rtlCol="0" anchor="ctr" lIns="45720" rIns="45720" tIns="27432" bIns="27432" wrap="square"/>
+          <a:lstStyle/>
+          <a:p>
+            <a:pPr algn="ctr"/>
+            <a:r>
+              <a:rPr sz="2200" b="1" i="0">
                 <a:solidFill>
                   <a:srgbClr val="FFFFFF"/>
                 </a:solidFill>
                 <a:latin typeface="Calibri"/>
               </a:rPr>
-              <a:t>PITFALL WE FELL INTO</a:t>
-            </a:r>
-          </a:p>
-          <a:p>
-            <a:pPr algn="l"/>
-            <a:r>
-              <a:rPr sz="1300" b="0" i="1">
+              <a:t>M4</a:t>
+            </a:r>
+          </a:p>
+        </p:txBody>
+      </p:sp>
+      <p:sp>
+        <p:nvSpPr>
+          <p:cNvPr id="14" name="Rounded Rectangle 13"/>
+          <p:cNvSpPr/>
+          <p:nvPr/>
+        </p:nvSpPr>
+        <p:spPr>
+          <a:xfrm>
+            <a:off x="7280269" y="2532888"/>
+            <a:ext cx="2149388" cy="3200400"/>
+          </a:xfrm>
+          <a:prstGeom prst="roundRect">
+            <a:avLst/>
+          </a:prstGeom>
+          <a:solidFill>
+            <a:srgbClr val="F5F7FA"/>
+          </a:solidFill>
+          <a:ln>
+            <a:noFill/>
+          </a:ln>
+          <a:effectLst/>
+        </p:spPr>
+        <p:style>
+          <a:lnRef idx="1">
+            <a:schemeClr val="accent1"/>
+          </a:lnRef>
+          <a:fillRef idx="3">
+            <a:schemeClr val="accent1"/>
+          </a:fillRef>
+          <a:effectRef idx="2">
+            <a:schemeClr val="accent1"/>
+          </a:effectRef>
+          <a:fontRef idx="minor">
+            <a:schemeClr val="lt1"/>
+          </a:fontRef>
+        </p:style>
+        <p:txBody>
+          <a:bodyPr rtlCol="0" anchor="ctr" tIns="27432" bIns="27432" wrap="square"/>
+          <a:lstStyle/>
+          <a:p>
+            <a:pPr algn="ctr"/>
+            <a:r>
+              <a:rPr sz="1300" b="1" i="0">
+                <a:solidFill>
+                  <a:srgbClr val="1E2761"/>
+                </a:solidFill>
+                <a:latin typeface="Calibri"/>
+              </a:rPr>
+              <a:t>Contrastive
+aux loss</a:t>
+            </a:r>
+          </a:p>
+          <a:p>
+            <a:pPr algn="ctr">
+              <a:spcBef>
+                <a:spcPts val="800"/>
+              </a:spcBef>
+            </a:pPr>
+            <a:r>
+              <a:rPr sz="1000" b="0" i="1">
+                <a:solidFill>
+                  <a:srgbClr val="36454F"/>
+                </a:solidFill>
+                <a:latin typeface="Calibri"/>
+              </a:rPr>
+              <a:t>InfoNCE on support–query pairs</a:t>
+            </a:r>
+          </a:p>
+        </p:txBody>
+      </p:sp>
+      <p:sp>
+        <p:nvSpPr>
+          <p:cNvPr id="15" name="Rounded Rectangle 14"/>
+          <p:cNvSpPr/>
+          <p:nvPr/>
+        </p:nvSpPr>
+        <p:spPr>
+          <a:xfrm>
+            <a:off x="9539386" y="1828800"/>
+            <a:ext cx="2149388" cy="640080"/>
+          </a:xfrm>
+          <a:prstGeom prst="roundRect">
+            <a:avLst/>
+          </a:prstGeom>
+          <a:solidFill>
+            <a:srgbClr val="F96167"/>
+          </a:solidFill>
+          <a:ln>
+            <a:noFill/>
+          </a:ln>
+          <a:effectLst/>
+        </p:spPr>
+        <p:style>
+          <a:lnRef idx="1">
+            <a:schemeClr val="accent1"/>
+          </a:lnRef>
+          <a:fillRef idx="3">
+            <a:schemeClr val="accent1"/>
+          </a:fillRef>
+          <a:effectRef idx="2">
+            <a:schemeClr val="accent1"/>
+          </a:effectRef>
+          <a:fontRef idx="minor">
+            <a:schemeClr val="lt1"/>
+          </a:fontRef>
+        </p:style>
+        <p:txBody>
+          <a:bodyPr rtlCol="0" anchor="ctr" lIns="45720" rIns="45720" tIns="27432" bIns="27432" wrap="square"/>
+          <a:lstStyle/>
+          <a:p>
+            <a:pPr algn="ctr"/>
+            <a:r>
+              <a:rPr sz="2200" b="1" i="0">
                 <a:solidFill>
                   <a:srgbClr val="FFFFFF"/>
                 </a:solidFill>
                 <a:latin typeface="Calibri"/>
               </a:rPr>
-              <a:t>A shared Linear(d, N-way) head collapses to ~0.50 AUC. Class index '0' means a different assay every episode → contradictory supervision.</a:t>
-            </a:r>
-          </a:p>
-        </p:txBody>
-      </p:sp>
-      <p:sp>
-        <p:nvSpPr>
-          <p:cNvPr id="8" name="TextBox 7"/>
-          <p:cNvSpPr txBox="1"/>
-          <p:nvPr/>
-        </p:nvSpPr>
-        <p:spPr>
-          <a:xfrm>
-            <a:off x="502920" y="3017520"/>
-            <a:ext cx="7315200" cy="2560320"/>
-          </a:xfrm>
-          <a:prstGeom prst="rect">
-            <a:avLst/>
-          </a:prstGeom>
-          <a:noFill/>
-        </p:spPr>
-        <p:txBody>
-          <a:bodyPr wrap="square" lIns="45720" rIns="45720">
-            <a:spAutoFit/>
-          </a:bodyPr>
-          <a:lstStyle/>
-          <a:p>
-            <a:pPr algn="l">
-              <a:lnSpc>
-                <a:spcPct val="120000"/>
-              </a:lnSpc>
-              <a:spcAft>
-                <a:spcPts val="300"/>
-              </a:spcAft>
+              <a:t>M5</a:t>
+            </a:r>
+          </a:p>
+        </p:txBody>
+      </p:sp>
+      <p:sp>
+        <p:nvSpPr>
+          <p:cNvPr id="16" name="Rounded Rectangle 15"/>
+          <p:cNvSpPr/>
+          <p:nvPr/>
+        </p:nvSpPr>
+        <p:spPr>
+          <a:xfrm>
+            <a:off x="9539386" y="2532888"/>
+            <a:ext cx="2149388" cy="3200400"/>
+          </a:xfrm>
+          <a:prstGeom prst="roundRect">
+            <a:avLst/>
+          </a:prstGeom>
+          <a:solidFill>
+            <a:srgbClr val="F5F7FA"/>
+          </a:solidFill>
+          <a:ln>
+            <a:noFill/>
+          </a:ln>
+          <a:effectLst/>
+        </p:spPr>
+        <p:style>
+          <a:lnRef idx="1">
+            <a:schemeClr val="accent1"/>
+          </a:lnRef>
+          <a:fillRef idx="3">
+            <a:schemeClr val="accent1"/>
+          </a:fillRef>
+          <a:effectRef idx="2">
+            <a:schemeClr val="accent1"/>
+          </a:effectRef>
+          <a:fontRef idx="minor">
+            <a:schemeClr val="lt1"/>
+          </a:fontRef>
+        </p:style>
+        <p:txBody>
+          <a:bodyPr rtlCol="0" anchor="ctr" tIns="27432" bIns="27432" wrap="square"/>
+          <a:lstStyle/>
+          <a:p>
+            <a:pPr algn="ctr"/>
+            <a:r>
+              <a:rPr sz="1300" b="1" i="0">
+                <a:solidFill>
+                  <a:srgbClr val="1E2761"/>
+                </a:solidFill>
+                <a:latin typeface="Calibri"/>
+              </a:rPr>
+              <a:t>SSL
+pretraining</a:t>
+            </a:r>
+          </a:p>
+          <a:p>
+            <a:pPr algn="ctr">
+              <a:spcBef>
+                <a:spcPts val="800"/>
+              </a:spcBef>
             </a:pPr>
             <a:r>
-              <a:rPr sz="1400" b="1" i="0">
-                <a:solidFill>
-                  <a:srgbClr val="1E2761"/>
-                </a:solidFill>
-                <a:latin typeface="Calibri"/>
-              </a:rPr>
-              <a:t>●  </a:t>
-            </a:r>
-            <a:r>
-              <a:rPr sz="1400" b="0" i="0">
+              <a:rPr sz="1000" b="0" i="1">
                 <a:solidFill>
                   <a:srgbClr val="36454F"/>
                 </a:solidFill>
                 <a:latin typeface="Calibri"/>
               </a:rPr>
-              <a:t>Fix: compute prototypes from META-GNN outputs of support nodes.</a:t>
-            </a:r>
-          </a:p>
-          <a:p>
-            <a:pPr algn="l">
-              <a:lnSpc>
-                <a:spcPct val="120000"/>
-              </a:lnSpc>
-              <a:spcAft>
-                <a:spcPts val="300"/>
-              </a:spcAft>
-            </a:pPr>
-            <a:r>
-              <a:rPr sz="1200" b="0" i="0">
-                <a:solidFill>
-                  <a:srgbClr val="888A90"/>
-                </a:solidFill>
-                <a:latin typeface="Calibri"/>
-              </a:rPr>
-              <a:t>–  </a:t>
-            </a:r>
-            <a:r>
-              <a:rPr sz="1200" b="0" i="0">
-                <a:solidFill>
-                  <a:srgbClr val="36454F"/>
-                </a:solidFill>
-                <a:latin typeface="Calibri"/>
-              </a:rPr>
-              <a:t>Classify queries by negative Euclidean distance.</a:t>
-            </a:r>
-          </a:p>
-          <a:p>
-            <a:pPr algn="l">
-              <a:lnSpc>
-                <a:spcPct val="120000"/>
-              </a:lnSpc>
-              <a:spcAft>
-                <a:spcPts val="300"/>
-              </a:spcAft>
-            </a:pPr>
-            <a:r>
-              <a:rPr sz="1400" b="1" i="0">
-                <a:solidFill>
-                  <a:srgbClr val="1E2761"/>
-                </a:solidFill>
-                <a:latin typeface="Calibri"/>
-              </a:rPr>
-              <a:t>●  </a:t>
-            </a:r>
-            <a:r>
-              <a:rPr sz="1400" b="0" i="0">
-                <a:solidFill>
-                  <a:srgbClr val="36454F"/>
-                </a:solidFill>
-                <a:latin typeface="Calibri"/>
-              </a:rPr>
-              <a:t>No per-class parameters → episode-agnostic (ProtoNet-style).</a:t>
-            </a:r>
-          </a:p>
-          <a:p>
-            <a:pPr algn="l">
-              <a:lnSpc>
-                <a:spcPct val="120000"/>
-              </a:lnSpc>
-              <a:spcAft>
-                <a:spcPts val="300"/>
-              </a:spcAft>
-            </a:pPr>
-            <a:r>
-              <a:rPr sz="1400" b="1" i="0">
-                <a:solidFill>
-                  <a:srgbClr val="1E2761"/>
-                </a:solidFill>
-                <a:latin typeface="Calibri"/>
-              </a:rPr>
-              <a:t>●  </a:t>
-            </a:r>
-            <a:r>
-              <a:rPr sz="1400" b="0" i="0">
-                <a:solidFill>
-                  <a:srgbClr val="36454F"/>
-                </a:solidFill>
-                <a:latin typeface="Calibri"/>
-              </a:rPr>
-              <a:t>Iterative refinement: R rounds of (affinity → kNN → meta-GNN).</a:t>
-            </a:r>
-          </a:p>
-          <a:p>
-            <a:pPr algn="l">
-              <a:lnSpc>
-                <a:spcPct val="120000"/>
-              </a:lnSpc>
-              <a:spcAft>
-                <a:spcPts val="300"/>
-              </a:spcAft>
-            </a:pPr>
-            <a:r>
-              <a:rPr sz="1200" b="0" i="0">
-                <a:solidFill>
-                  <a:srgbClr val="888A90"/>
-                </a:solidFill>
-                <a:latin typeface="Calibri"/>
-              </a:rPr>
-              <a:t>–  </a:t>
-            </a:r>
-            <a:r>
-              <a:rPr sz="1200" b="0" i="0">
-                <a:solidFill>
-                  <a:srgbClr val="36454F"/>
-                </a:solidFill>
-                <a:latin typeface="Calibri"/>
-              </a:rPr>
-              <a:t>Label one-hot re-injected every round.</a:t>
-            </a:r>
-          </a:p>
-        </p:txBody>
-      </p:sp>
-      <p:pic>
-        <p:nvPicPr>
-          <p:cNvPr id="9" name="Picture 8" descr="f15_1.png"/>
-          <p:cNvPicPr>
-            <a:picLocks noChangeAspect="1"/>
-          </p:cNvPicPr>
-          <p:nvPr/>
-        </p:nvPicPr>
-        <p:blipFill>
-          <a:blip r:embed="rId2"/>
-          <a:stretch>
-            <a:fillRect/>
-          </a:stretch>
-        </p:blipFill>
+              <a:t>MolCLR-style encoder init on 110k mols</a:t>
+            </a:r>
+          </a:p>
+        </p:txBody>
+      </p:sp>
+      <p:sp>
+        <p:nvSpPr>
+          <p:cNvPr id="17" name="Rounded Rectangle 16"/>
+          <p:cNvSpPr/>
+          <p:nvPr/>
+        </p:nvSpPr>
         <p:spPr>
           <a:xfrm>
             <a:off x="502920" y="5486400"/>
-            <a:ext cx="3840480" cy="545278"/>
-          </a:xfrm>
-          <a:prstGeom prst="rect">
-            <a:avLst/>
-          </a:prstGeom>
-        </p:spPr>
-      </p:pic>
-      <p:pic>
-        <p:nvPicPr>
-          <p:cNvPr id="10" name="Picture 9" descr="f15_2.png"/>
-          <p:cNvPicPr>
-            <a:picLocks noChangeAspect="1"/>
-          </p:cNvPicPr>
-          <p:nvPr/>
-        </p:nvPicPr>
-        <p:blipFill>
-          <a:blip r:embed="rId3"/>
-          <a:stretch>
-            <a:fillRect/>
-          </a:stretch>
-        </p:blipFill>
-        <p:spPr>
-          <a:xfrm>
-            <a:off x="4114800" y="5486400"/>
-            <a:ext cx="3657600" cy="519312"/>
-          </a:xfrm>
-          <a:prstGeom prst="rect">
-            <a:avLst/>
-          </a:prstGeom>
-        </p:spPr>
-      </p:pic>
-      <p:sp>
-        <p:nvSpPr>
-          <p:cNvPr id="11" name="Rounded Rectangle 10"/>
-          <p:cNvSpPr/>
-          <p:nvPr/>
-        </p:nvSpPr>
-        <p:spPr>
-          <a:xfrm>
-            <a:off x="8229600" y="3017520"/>
-            <a:ext cx="3566160" cy="868680"/>
+            <a:ext cx="11185855" cy="914400"/>
           </a:xfrm>
           <a:prstGeom prst="roundRect">
             <a:avLst/>
@@ -10851,10 +11795,10 @@
           </a:fontRef>
         </p:style>
         <p:txBody>
-          <a:bodyPr rtlCol="0" anchor="ctr" lIns="45720" rIns="45720" tIns="27432" bIns="27432" wrap="square"/>
-          <a:lstStyle/>
-          <a:p>
-            <a:pPr algn="ctr"/>
+          <a:bodyPr rtlCol="0" anchor="ctr" lIns="274320" rIns="45720" tIns="27432" bIns="27432" wrap="square"/>
+          <a:lstStyle/>
+          <a:p>
+            <a:pPr algn="l"/>
             <a:r>
               <a:rPr sz="1400" b="1" i="0">
                 <a:solidFill>
@@ -10862,128 +11806,16 @@
                 </a:solidFill>
                 <a:latin typeface="Calibri"/>
               </a:rPr>
-              <a:t>Round 1</a:t>
-            </a:r>
-          </a:p>
-          <a:p>
-            <a:pPr algn="ctr"/>
-            <a:r>
-              <a:rPr sz="1100" b="0" i="0">
+              <a:t>Safety net: </a:t>
+            </a:r>
+            <a:r>
+              <a:rPr sz="1400" b="0" i="1">
                 <a:solidFill>
                   <a:srgbClr val="1E2761"/>
                 </a:solidFill>
                 <a:latin typeface="Calibri"/>
               </a:rPr>
-              <a:t>affinity → kNN → meta-GNN</a:t>
-            </a:r>
-          </a:p>
-        </p:txBody>
-      </p:sp>
-      <p:sp>
-        <p:nvSpPr>
-          <p:cNvPr id="12" name="Down Arrow 11"/>
-          <p:cNvSpPr/>
-          <p:nvPr/>
-        </p:nvSpPr>
-        <p:spPr>
-          <a:xfrm>
-            <a:off x="9875520" y="3904488"/>
-            <a:ext cx="274320" cy="237744"/>
-          </a:xfrm>
-          <a:prstGeom prst="downArrow">
-            <a:avLst/>
-          </a:prstGeom>
-          <a:solidFill>
-            <a:srgbClr val="36454F"/>
-          </a:solidFill>
-          <a:ln>
-            <a:noFill/>
-          </a:ln>
-          <a:effectLst/>
-        </p:spPr>
-        <p:style>
-          <a:lnRef idx="1">
-            <a:schemeClr val="accent1"/>
-          </a:lnRef>
-          <a:fillRef idx="3">
-            <a:schemeClr val="accent1"/>
-          </a:fillRef>
-          <a:effectRef idx="2">
-            <a:schemeClr val="accent1"/>
-          </a:effectRef>
-          <a:fontRef idx="minor">
-            <a:schemeClr val="lt1"/>
-          </a:fontRef>
-        </p:style>
-        <p:txBody>
-          <a:bodyPr rtlCol="0" anchor="ctr" lIns="45720" rIns="45720" tIns="27432" bIns="27432" wrap="square"/>
-          <a:lstStyle/>
-          <a:p>
-            <a:pPr algn="ctr"/>
-          </a:p>
-        </p:txBody>
-      </p:sp>
-      <p:sp>
-        <p:nvSpPr>
-          <p:cNvPr id="13" name="Rounded Rectangle 12"/>
-          <p:cNvSpPr/>
-          <p:nvPr/>
-        </p:nvSpPr>
-        <p:spPr>
-          <a:xfrm>
-            <a:off x="8229600" y="4160520"/>
-            <a:ext cx="3566160" cy="868680"/>
-          </a:xfrm>
-          <a:prstGeom prst="roundRect">
-            <a:avLst/>
-          </a:prstGeom>
-          <a:solidFill>
-            <a:srgbClr val="1E2761"/>
-          </a:solidFill>
-          <a:ln>
-            <a:noFill/>
-          </a:ln>
-          <a:effectLst/>
-        </p:spPr>
-        <p:style>
-          <a:lnRef idx="1">
-            <a:schemeClr val="accent1"/>
-          </a:lnRef>
-          <a:fillRef idx="3">
-            <a:schemeClr val="accent1"/>
-          </a:fillRef>
-          <a:effectRef idx="2">
-            <a:schemeClr val="accent1"/>
-          </a:effectRef>
-          <a:fontRef idx="minor">
-            <a:schemeClr val="lt1"/>
-          </a:fontRef>
-        </p:style>
-        <p:txBody>
-          <a:bodyPr rtlCol="0" anchor="ctr" lIns="45720" rIns="45720" tIns="27432" bIns="27432" wrap="square"/>
-          <a:lstStyle/>
-          <a:p>
-            <a:pPr algn="ctr"/>
-            <a:r>
-              <a:rPr sz="1400" b="1" i="0">
-                <a:solidFill>
-                  <a:srgbClr val="FFFFFF"/>
-                </a:solidFill>
-                <a:latin typeface="Calibri"/>
-              </a:rPr>
-              <a:t>Round 2</a:t>
-            </a:r>
-          </a:p>
-          <a:p>
-            <a:pPr algn="ctr"/>
-            <a:r>
-              <a:rPr sz="1100" b="0" i="0">
-                <a:solidFill>
-                  <a:srgbClr val="FFFFFF"/>
-                </a:solidFill>
-                <a:latin typeface="Calibri"/>
-              </a:rPr>
-              <a:t>affinity → kNN → meta-GNN</a:t>
+              <a:t>as α → 1, v2 recovers ProtoNet — so v2 is lower-bounded by the strongest baseline; composition of all five modifications is the upside.</a:t>
             </a:r>
           </a:p>
         </p:txBody>
@@ -11067,7 +11899,7 @@
         <p:spPr>
           <a:xfrm>
             <a:off x="502920" y="320040"/>
-            <a:ext cx="1783080" cy="320040"/>
+            <a:ext cx="1828800" cy="320040"/>
           </a:xfrm>
           <a:prstGeom prst="roundRect">
             <a:avLst/>
@@ -11135,13 +11967,13 @@
           <a:p>
             <a:pPr algn="l"/>
             <a:r>
-              <a:rPr sz="2800" b="1" i="0">
+              <a:rPr sz="2600" b="1" i="0">
                 <a:solidFill>
                   <a:srgbClr val="1E2761"/>
                 </a:solidFill>
                 <a:latin typeface="Calibri"/>
               </a:rPr>
-              <a:t>Main Results — v2 + SSL beats ProtoNet</a:t>
+              <a:t>Main Comparison — v2 + SSL beats ProtoNet</a:t>
             </a:r>
           </a:p>
         </p:txBody>
@@ -11176,7 +12008,7 @@
                 </a:solidFill>
                 <a:latin typeface="Calibri"/>
               </a:rPr>
-              <a:t>8 / 12</a:t>
+              <a:t>8 / 13</a:t>
             </a:r>
           </a:p>
         </p:txBody>
@@ -11365,7 +12197,7 @@
                 </a:solidFill>
                 <a:latin typeface="Calibri"/>
               </a:rPr>
-              <a:t>v2 + SSL beats ProtoNet on all 3 configs.</a:t>
+              <a:t>v2 + SSL beats ProtoNet on every config.</a:t>
             </a:r>
           </a:p>
           <a:p>
@@ -11393,7 +12225,7 @@
                 </a:solidFill>
                 <a:latin typeface="Calibri"/>
               </a:rPr>
-              <a:t>5w5s: 0.728 vs 0.716  (+1.2 pp)</a:t>
+              <a:t>5w1s:  0.603 vs 0.586  (+1.7 pp)</a:t>
             </a:r>
           </a:p>
           <a:p>
@@ -11421,7 +12253,7 @@
                 </a:solidFill>
                 <a:latin typeface="Calibri"/>
               </a:rPr>
-              <a:t>10w5s: 0.712 vs 0.700 (+1.2 pp)</a:t>
+              <a:t>5w5s:  0.728 vs 0.716  (+1.2 pp)</a:t>
             </a:r>
           </a:p>
           <a:p>
@@ -11449,7 +12281,7 @@
                 </a:solidFill>
                 <a:latin typeface="Calibri"/>
               </a:rPr>
-              <a:t>5w1s: 0.603 vs 0.586  (+1.7 pp)</a:t>
+              <a:t>10w5s: 0.712 vs 0.700  (+1.2 pp)</a:t>
             </a:r>
           </a:p>
           <a:p>
@@ -11477,7 +12309,7 @@
                 </a:solidFill>
                 <a:latin typeface="Calibri"/>
               </a:rPr>
-              <a:t>SSL alone gives +1.9 pp over v2-scratch.</a:t>
+              <a:t>SSL alone: +2.2 pp on v2.</a:t>
             </a:r>
           </a:p>
           <a:p>
@@ -11624,7 +12456,7 @@
         <p:spPr>
           <a:xfrm>
             <a:off x="502920" y="320040"/>
-            <a:ext cx="1783080" cy="320040"/>
+            <a:ext cx="1828800" cy="320040"/>
           </a:xfrm>
           <a:prstGeom prst="roundRect">
             <a:avLst/>
@@ -11692,13 +12524,13 @@
           <a:p>
             <a:pPr algn="l"/>
             <a:r>
-              <a:rPr sz="2800" b="1" i="0">
+              <a:rPr sz="2600" b="1" i="0">
                 <a:solidFill>
                   <a:srgbClr val="1E2761"/>
                 </a:solidFill>
                 <a:latin typeface="Calibri"/>
               </a:rPr>
-              <a:t>Ablation Study — A1 through A5</a:t>
+              <a:t>Ablations A1 &amp; A2 — Residual  +  Depth × Type</a:t>
             </a:r>
           </a:p>
         </p:txBody>
@@ -11733,7 +12565,7 @@
                 </a:solidFill>
                 <a:latin typeface="Calibri"/>
               </a:rPr>
-              <a:t>9 / 12</a:t>
+              <a:t>9 / 13</a:t>
             </a:r>
           </a:p>
         </p:txBody>
@@ -11775,7 +12607,7 @@
       </p:sp>
       <p:pic>
         <p:nvPicPr>
-          <p:cNvPr id="7" name="Picture 6" descr="fig_v2_ablations.png"/>
+          <p:cNvPr id="7" name="Picture 6" descr="fig_v2_A1.png"/>
           <p:cNvPicPr>
             <a:picLocks noChangeAspect="1"/>
           </p:cNvPicPr>
@@ -11789,23 +12621,91 @@
         </p:blipFill>
         <p:spPr>
           <a:xfrm>
-            <a:off x="274320" y="1554480"/>
-            <a:ext cx="11704320" cy="6521410"/>
+            <a:off x="457200" y="1691640"/>
+            <a:ext cx="5760720" cy="3906023"/>
           </a:xfrm>
           <a:prstGeom prst="rect">
             <a:avLst/>
           </a:prstGeom>
         </p:spPr>
       </p:pic>
-      <p:sp>
-        <p:nvSpPr>
-          <p:cNvPr id="8" name="TextBox 7"/>
+      <p:pic>
+        <p:nvPicPr>
+          <p:cNvPr id="8" name="Picture 7" descr="fig_v2_A2.png"/>
+          <p:cNvPicPr>
+            <a:picLocks noChangeAspect="1"/>
+          </p:cNvPicPr>
+          <p:nvPr/>
+        </p:nvPicPr>
+        <p:blipFill>
+          <a:blip r:embed="rId3"/>
+          <a:stretch>
+            <a:fillRect/>
+          </a:stretch>
+        </p:blipFill>
+        <p:spPr>
+          <a:xfrm>
+            <a:off x="6309360" y="1691640"/>
+            <a:ext cx="5760720" cy="3838739"/>
+          </a:xfrm>
+          <a:prstGeom prst="rect">
+            <a:avLst/>
+          </a:prstGeom>
+        </p:spPr>
+      </p:pic>
+      <p:sp>
+        <p:nvSpPr>
+          <p:cNvPr id="9" name="Rounded Rectangle 8"/>
+          <p:cNvSpPr/>
+          <p:nvPr/>
+        </p:nvSpPr>
+        <p:spPr>
+          <a:xfrm>
+            <a:off x="502920" y="5486400"/>
+            <a:ext cx="11185855" cy="1005840"/>
+          </a:xfrm>
+          <a:prstGeom prst="roundRect">
+            <a:avLst/>
+          </a:prstGeom>
+          <a:solidFill>
+            <a:srgbClr val="F5F7FA"/>
+          </a:solidFill>
+          <a:ln>
+            <a:noFill/>
+          </a:ln>
+          <a:effectLst/>
+        </p:spPr>
+        <p:style>
+          <a:lnRef idx="1">
+            <a:schemeClr val="accent1"/>
+          </a:lnRef>
+          <a:fillRef idx="3">
+            <a:schemeClr val="accent1"/>
+          </a:fillRef>
+          <a:effectRef idx="2">
+            <a:schemeClr val="accent1"/>
+          </a:effectRef>
+          <a:fontRef idx="minor">
+            <a:schemeClr val="lt1"/>
+          </a:fontRef>
+        </p:style>
+        <p:txBody>
+          <a:bodyPr rtlCol="0" anchor="ctr" lIns="45720" rIns="45720" tIns="27432" bIns="27432" wrap="square"/>
+          <a:lstStyle/>
+          <a:p>
+            <a:pPr algn="ctr"/>
+          </a:p>
+        </p:txBody>
+      </p:sp>
+      <p:sp>
+        <p:nvSpPr>
+          <p:cNvPr id="10" name="TextBox 9"/>
           <p:cNvSpPr txBox="1"/>
           <p:nvPr/>
         </p:nvSpPr>
         <p:spPr>
           <a:xfrm>
-            <a:off x="502920" y="6172200"/>
+            <a:off x="731520" y="5577840"/>
             <a:ext cx="11185855" cy="365760"/>
           </a:xfrm>
           <a:prstGeom prst="rect">
@@ -11819,15 +12719,50 @@
           </a:bodyPr>
           <a:lstStyle/>
           <a:p>
-            <a:pPr algn="ctr"/>
-            <a:r>
-              <a:rPr sz="1100" b="0" i="1">
-                <a:solidFill>
-                  <a:srgbClr val="888A90"/>
-                </a:solidFill>
-                <a:latin typeface="Calibri"/>
-              </a:rPr>
-              <a:t>All ablations on 5-way 5-shot, SSL-init encoder.  Each modification contributes independently; M1 + M5 are the biggest levers.</a:t>
+            <a:pPr algn="l"/>
+            <a:r>
+              <a:rPr sz="1200" b="1" i="0">
+                <a:solidFill>
+                  <a:srgbClr val="F96167"/>
+                </a:solidFill>
+                <a:latin typeface="Calibri"/>
+              </a:rPr>
+              <a:t>KEY FINDINGS</a:t>
+            </a:r>
+          </a:p>
+        </p:txBody>
+      </p:sp>
+      <p:sp>
+        <p:nvSpPr>
+          <p:cNvPr id="11" name="TextBox 10"/>
+          <p:cNvSpPr txBox="1"/>
+          <p:nvPr/>
+        </p:nvSpPr>
+        <p:spPr>
+          <a:xfrm>
+            <a:off x="731520" y="5943600"/>
+            <a:ext cx="10728655" cy="548640"/>
+          </a:xfrm>
+          <a:prstGeom prst="rect">
+            <a:avLst/>
+          </a:prstGeom>
+          <a:noFill/>
+        </p:spPr>
+        <p:txBody>
+          <a:bodyPr wrap="square" lIns="45720" rIns="45720" tIns="27432" bIns="27432" anchor="t">
+            <a:spAutoFit/>
+          </a:bodyPr>
+          <a:lstStyle/>
+          <a:p>
+            <a:pPr algn="l"/>
+            <a:r>
+              <a:rPr sz="1200" b="0" i="1">
+                <a:solidFill>
+                  <a:srgbClr val="36454F"/>
+                </a:solidFill>
+                <a:latin typeface="Calibri"/>
+              </a:rPr>
+              <a:t>A1:  α = 0 collapses to 0.500 — residual is essential;  any α ≥ 0.3 works.    A2:  GAT L = 1 wins — confirms the over-smoothing diagnosis.</a:t>
             </a:r>
           </a:p>
         </p:txBody>

--- a/presentation/Graph-of-Shots.pptx
+++ b/presentation/Graph-of-Shots.pptx
@@ -4,22 +4,25 @@
   <p:sldMasterIdLst>
     <p:sldMasterId id="2147483648" r:id="rId1"/>
   </p:sldMasterIdLst>
+  <p:notesMasterIdLst>
+    <p:notesMasterId r:id="rId15"/>
+  </p:notesMasterIdLst>
   <p:sldIdLst>
-    <p:sldId id="256" r:id="rId7"/>
-    <p:sldId id="257" r:id="rId9"/>
-    <p:sldId id="258" r:id="rId10"/>
-    <p:sldId id="259" r:id="rId11"/>
-    <p:sldId id="260" r:id="rId12"/>
-    <p:sldId id="261" r:id="rId13"/>
-    <p:sldId id="262" r:id="rId14"/>
-    <p:sldId id="263" r:id="rId15"/>
-    <p:sldId id="264" r:id="rId16"/>
-    <p:sldId id="265" r:id="rId17"/>
-    <p:sldId id="266" r:id="rId18"/>
-    <p:sldId id="267" r:id="rId19"/>
-    <p:sldId id="268" r:id="rId20"/>
+    <p:sldId id="256" r:id="rId2"/>
+    <p:sldId id="257" r:id="rId3"/>
+    <p:sldId id="258" r:id="rId4"/>
+    <p:sldId id="259" r:id="rId5"/>
+    <p:sldId id="260" r:id="rId6"/>
+    <p:sldId id="261" r:id="rId7"/>
+    <p:sldId id="262" r:id="rId8"/>
+    <p:sldId id="263" r:id="rId9"/>
+    <p:sldId id="264" r:id="rId10"/>
+    <p:sldId id="265" r:id="rId11"/>
+    <p:sldId id="266" r:id="rId12"/>
+    <p:sldId id="267" r:id="rId13"/>
+    <p:sldId id="268" r:id="rId14"/>
   </p:sldIdLst>
-  <p:sldSz cx="12191695" cy="6858000" type="screen4x3"/>
+  <p:sldSz cx="12192000" cy="6858000"/>
   <p:notesSz cx="6858000" cy="9144000"/>
   <p:defaultTextStyle>
     <a:defPPr>
@@ -116,11 +119,27 @@
       </a:defRPr>
     </a:lvl9pPr>
   </p:defaultTextStyle>
+  <p:extLst>
+    <p:ext uri="{EFAFB233-063F-42B5-8137-9DF3F51BA10A}">
+      <p15:sldGuideLst xmlns:p15="http://schemas.microsoft.com/office/powerpoint/2012/main">
+        <p15:guide id="1" orient="horz" pos="2160">
+          <p15:clr>
+            <a:srgbClr val="A4A3A4"/>
+          </p15:clr>
+        </p15:guide>
+        <p15:guide id="2" pos="2880">
+          <p15:clr>
+            <a:srgbClr val="A4A3A4"/>
+          </p15:clr>
+        </p15:guide>
+      </p15:sldGuideLst>
+    </p:ext>
+  </p:extLst>
 </p:presentation>
 </file>
 
 <file path=ppt/notesMasters/notesMaster1.xml><?xml version="1.0" encoding="utf-8"?>
-<p:notesMaster xmlns:a="http://schemas.openxmlformats.org/drawingml/2006/main" xmlns:p="http://schemas.openxmlformats.org/presentationml/2006/main" xmlns:r="http://schemas.openxmlformats.org/officeDocument/2006/relationships">
+<p:notesMaster xmlns:a="http://schemas.openxmlformats.org/drawingml/2006/main" xmlns:r="http://schemas.openxmlformats.org/officeDocument/2006/relationships" xmlns:p="http://schemas.openxmlformats.org/presentationml/2006/main">
   <p:cSld>
     <p:bg>
       <p:bgRef idx="1001">
@@ -141,241 +160,16 @@
           <a:chExt cx="0" cy="0"/>
         </a:xfrm>
       </p:grpSpPr>
-      <p:sp>
-        <p:nvSpPr>
-          <p:cNvPr id="2" name="Header Placeholder 1"/>
-          <p:cNvSpPr>
-            <a:spLocks noGrp="1"/>
-          </p:cNvSpPr>
-          <p:nvPr>
-            <p:ph type="hdr" sz="quarter"/>
-          </p:nvPr>
-        </p:nvSpPr>
-        <p:spPr>
-          <a:xfrm>
-            <a:off x="0" y="0"/>
-            <a:ext cx="2971800" cy="457200"/>
-          </a:xfrm>
-          <a:prstGeom prst="rect">
-            <a:avLst/>
-          </a:prstGeom>
-        </p:spPr>
-        <p:txBody>
-          <a:bodyPr vert="horz" lIns="91440" tIns="45720" rIns="91440" bIns="45720" rtlCol="0"/>
-          <a:lstStyle>
-            <a:lvl1pPr algn="l">
-              <a:defRPr sz="1200"/>
-            </a:lvl1pPr>
-          </a:lstStyle>
-          <a:p>
-            <a:endParaRPr lang="en-US"/>
-          </a:p>
-        </p:txBody>
-      </p:sp>
-      <p:sp>
-        <p:nvSpPr>
-          <p:cNvPr id="3" name="Date Placeholder 2"/>
-          <p:cNvSpPr>
-            <a:spLocks noGrp="1"/>
-          </p:cNvSpPr>
-          <p:nvPr>
-            <p:ph type="dt" idx="1"/>
-          </p:nvPr>
-        </p:nvSpPr>
-        <p:spPr>
-          <a:xfrm>
-            <a:off x="3884613" y="0"/>
-            <a:ext cx="2971800" cy="457200"/>
-          </a:xfrm>
-          <a:prstGeom prst="rect">
-            <a:avLst/>
-          </a:prstGeom>
-        </p:spPr>
-        <p:txBody>
-          <a:bodyPr vert="horz" lIns="91440" tIns="45720" rIns="91440" bIns="45720" rtlCol="0"/>
-          <a:lstStyle>
-            <a:lvl1pPr algn="r">
-              <a:defRPr sz="1200"/>
-            </a:lvl1pPr>
-          </a:lstStyle>
-          <a:p>
-            <a:fld id="{0F89C1C7-3DCD-1040-A9CF-14679D8B5DDD}" type="datetimeFigureOut">
-              <a:rPr lang="en-US" smtClean="0"/>
-              <a:t>10/17/16</a:t>
-            </a:fld>
-            <a:endParaRPr lang="en-US"/>
-          </a:p>
-        </p:txBody>
-      </p:sp>
-      <p:sp>
-        <p:nvSpPr>
-          <p:cNvPr id="4" name="Slide Image Placeholder 3"/>
-          <p:cNvSpPr>
-            <a:spLocks noGrp="1" noRot="1" noChangeAspect="1"/>
-          </p:cNvSpPr>
-          <p:nvPr>
-            <p:ph type="sldImg" idx="2"/>
-          </p:nvPr>
-        </p:nvSpPr>
-        <p:spPr>
-          <a:xfrm>
-            <a:off x="1143000" y="685800"/>
-            <a:ext cx="4572000" cy="3429000"/>
-          </a:xfrm>
-          <a:prstGeom prst="rect">
-            <a:avLst/>
-          </a:prstGeom>
-          <a:noFill/>
-          <a:ln w="12700">
-            <a:solidFill>
-              <a:prstClr val="black"/>
-            </a:solidFill>
-          </a:ln>
-        </p:spPr>
-        <p:txBody>
-          <a:bodyPr vert="horz" lIns="91440" tIns="45720" rIns="91440" bIns="45720" rtlCol="0" anchor="ctr"/>
-          <a:lstStyle/>
-          <a:p>
-            <a:endParaRPr lang="en-US"/>
-          </a:p>
-        </p:txBody>
-      </p:sp>
-      <p:sp>
-        <p:nvSpPr>
-          <p:cNvPr id="5" name="Notes Placeholder 4"/>
-          <p:cNvSpPr>
-            <a:spLocks noGrp="1"/>
-          </p:cNvSpPr>
-          <p:nvPr>
-            <p:ph type="body" sz="quarter" idx="3"/>
-          </p:nvPr>
-        </p:nvSpPr>
-        <p:spPr>
-          <a:xfrm>
-            <a:off x="685800" y="4343400"/>
-            <a:ext cx="5486400" cy="4114800"/>
-          </a:xfrm>
-          <a:prstGeom prst="rect">
-            <a:avLst/>
-          </a:prstGeom>
-        </p:spPr>
-        <p:txBody>
-          <a:bodyPr vert="horz" lIns="91440" tIns="45720" rIns="91440" bIns="45720" rtlCol="0"/>
-          <a:lstStyle/>
-          <a:p>
-            <a:pPr lvl="0"/>
-            <a:r>
-              <a:rPr lang="en-US" smtClean="0"/>
-              <a:t>Click to edit Master text styles</a:t>
-            </a:r>
-          </a:p>
-          <a:p>
-            <a:pPr lvl="1"/>
-            <a:r>
-              <a:rPr lang="en-US" smtClean="0"/>
-              <a:t>Second level</a:t>
-            </a:r>
-          </a:p>
-          <a:p>
-            <a:pPr lvl="2"/>
-            <a:r>
-              <a:rPr lang="en-US" smtClean="0"/>
-              <a:t>Third level</a:t>
-            </a:r>
-          </a:p>
-          <a:p>
-            <a:pPr lvl="3"/>
-            <a:r>
-              <a:rPr lang="en-US" smtClean="0"/>
-              <a:t>Fourth level</a:t>
-            </a:r>
-          </a:p>
-          <a:p>
-            <a:pPr lvl="4"/>
-            <a:r>
-              <a:rPr lang="en-US" smtClean="0"/>
-              <a:t>Fifth level</a:t>
-            </a:r>
-            <a:endParaRPr lang="en-US"/>
-          </a:p>
-        </p:txBody>
-      </p:sp>
-      <p:sp>
-        <p:nvSpPr>
-          <p:cNvPr id="6" name="Footer Placeholder 5"/>
-          <p:cNvSpPr>
-            <a:spLocks noGrp="1"/>
-          </p:cNvSpPr>
-          <p:nvPr>
-            <p:ph type="ftr" sz="quarter" idx="4"/>
-          </p:nvPr>
-        </p:nvSpPr>
-        <p:spPr>
-          <a:xfrm>
-            <a:off x="0" y="8685213"/>
-            <a:ext cx="2971800" cy="457200"/>
-          </a:xfrm>
-          <a:prstGeom prst="rect">
-            <a:avLst/>
-          </a:prstGeom>
-        </p:spPr>
-        <p:txBody>
-          <a:bodyPr vert="horz" lIns="91440" tIns="45720" rIns="91440" bIns="45720" rtlCol="0" anchor="b"/>
-          <a:lstStyle>
-            <a:lvl1pPr algn="l">
-              <a:defRPr sz="1200"/>
-            </a:lvl1pPr>
-          </a:lstStyle>
-          <a:p>
-            <a:endParaRPr lang="en-US"/>
-          </a:p>
-        </p:txBody>
-      </p:sp>
-      <p:sp>
-        <p:nvSpPr>
-          <p:cNvPr id="7" name="Slide Number Placeholder 6"/>
-          <p:cNvSpPr>
-            <a:spLocks noGrp="1"/>
-          </p:cNvSpPr>
-          <p:nvPr>
-            <p:ph type="sldNum" sz="quarter" idx="5"/>
-          </p:nvPr>
-        </p:nvSpPr>
-        <p:spPr>
-          <a:xfrm>
-            <a:off x="3884613" y="8685213"/>
-            <a:ext cx="2971800" cy="457200"/>
-          </a:xfrm>
-          <a:prstGeom prst="rect">
-            <a:avLst/>
-          </a:prstGeom>
-        </p:spPr>
-        <p:txBody>
-          <a:bodyPr vert="horz" lIns="91440" tIns="45720" rIns="91440" bIns="45720" rtlCol="0" anchor="b"/>
-          <a:lstStyle>
-            <a:lvl1pPr algn="r">
-              <a:defRPr sz="1200"/>
-            </a:lvl1pPr>
-          </a:lstStyle>
-          <a:p>
-            <a:fld id="{BB5E49A5-4136-284D-997B-48E1D791AD67}" type="slidenum">
-              <a:rPr lang="en-US" smtClean="0"/>
-              <a:t>‹#›</a:t>
-            </a:fld>
-            <a:endParaRPr lang="en-US"/>
-          </a:p>
-        </p:txBody>
-      </p:sp>
     </p:spTree>
     <p:extLst>
       <p:ext uri="{BB962C8B-B14F-4D97-AF65-F5344CB8AC3E}">
-        <p14:creationId xmlns:p14="http://schemas.microsoft.com/office/powerpoint/2010/main" val="2623252185"/>
+        <p14:creationId xmlns:p14="http://schemas.microsoft.com/office/powerpoint/2010/main" val="1621510908"/>
       </p:ext>
     </p:extLst>
   </p:cSld>
   <p:clrMap bg1="lt1" tx1="dk1" bg2="lt2" tx2="dk2" accent1="accent1" accent2="accent2" accent3="accent3" accent4="accent4" accent5="accent5" accent6="accent6" hlink="hlink" folHlink="folHlink"/>
   <p:notesStyle>
-    <a:lvl1pPr marL="0" algn="l" defTabSz="457200" rtl="0" eaLnBrk="1" latinLnBrk="0" hangingPunct="1">
+    <a:lvl1pPr marL="0" algn="l" defTabSz="914400" rtl="0" eaLnBrk="1" latinLnBrk="0" hangingPunct="1">
       <a:defRPr sz="1200" kern="1200">
         <a:solidFill>
           <a:schemeClr val="tx1"/>
@@ -385,7 +179,7 @@
         <a:cs typeface="+mn-cs"/>
       </a:defRPr>
     </a:lvl1pPr>
-    <a:lvl2pPr marL="457200" algn="l" defTabSz="457200" rtl="0" eaLnBrk="1" latinLnBrk="0" hangingPunct="1">
+    <a:lvl2pPr marL="457200" algn="l" defTabSz="914400" rtl="0" eaLnBrk="1" latinLnBrk="0" hangingPunct="1">
       <a:defRPr sz="1200" kern="1200">
         <a:solidFill>
           <a:schemeClr val="tx1"/>
@@ -395,7 +189,7 @@
         <a:cs typeface="+mn-cs"/>
       </a:defRPr>
     </a:lvl2pPr>
-    <a:lvl3pPr marL="914400" algn="l" defTabSz="457200" rtl="0" eaLnBrk="1" latinLnBrk="0" hangingPunct="1">
+    <a:lvl3pPr marL="914400" algn="l" defTabSz="914400" rtl="0" eaLnBrk="1" latinLnBrk="0" hangingPunct="1">
       <a:defRPr sz="1200" kern="1200">
         <a:solidFill>
           <a:schemeClr val="tx1"/>
@@ -405,7 +199,7 @@
         <a:cs typeface="+mn-cs"/>
       </a:defRPr>
     </a:lvl3pPr>
-    <a:lvl4pPr marL="1371600" algn="l" defTabSz="457200" rtl="0" eaLnBrk="1" latinLnBrk="0" hangingPunct="1">
+    <a:lvl4pPr marL="1371600" algn="l" defTabSz="914400" rtl="0" eaLnBrk="1" latinLnBrk="0" hangingPunct="1">
       <a:defRPr sz="1200" kern="1200">
         <a:solidFill>
           <a:schemeClr val="tx1"/>
@@ -415,7 +209,7 @@
         <a:cs typeface="+mn-cs"/>
       </a:defRPr>
     </a:lvl4pPr>
-    <a:lvl5pPr marL="1828800" algn="l" defTabSz="457200" rtl="0" eaLnBrk="1" latinLnBrk="0" hangingPunct="1">
+    <a:lvl5pPr marL="1828800" algn="l" defTabSz="914400" rtl="0" eaLnBrk="1" latinLnBrk="0" hangingPunct="1">
       <a:defRPr sz="1200" kern="1200">
         <a:solidFill>
           <a:schemeClr val="tx1"/>
@@ -425,7 +219,7 @@
         <a:cs typeface="+mn-cs"/>
       </a:defRPr>
     </a:lvl5pPr>
-    <a:lvl6pPr marL="2286000" algn="l" defTabSz="457200" rtl="0" eaLnBrk="1" latinLnBrk="0" hangingPunct="1">
+    <a:lvl6pPr marL="2286000" algn="l" defTabSz="914400" rtl="0" eaLnBrk="1" latinLnBrk="0" hangingPunct="1">
       <a:defRPr sz="1200" kern="1200">
         <a:solidFill>
           <a:schemeClr val="tx1"/>
@@ -435,7 +229,7 @@
         <a:cs typeface="+mn-cs"/>
       </a:defRPr>
     </a:lvl6pPr>
-    <a:lvl7pPr marL="2743200" algn="l" defTabSz="457200" rtl="0" eaLnBrk="1" latinLnBrk="0" hangingPunct="1">
+    <a:lvl7pPr marL="2743200" algn="l" defTabSz="914400" rtl="0" eaLnBrk="1" latinLnBrk="0" hangingPunct="1">
       <a:defRPr sz="1200" kern="1200">
         <a:solidFill>
           <a:schemeClr val="tx1"/>
@@ -445,7 +239,7 @@
         <a:cs typeface="+mn-cs"/>
       </a:defRPr>
     </a:lvl7pPr>
-    <a:lvl8pPr marL="3200400" algn="l" defTabSz="457200" rtl="0" eaLnBrk="1" latinLnBrk="0" hangingPunct="1">
+    <a:lvl8pPr marL="3200400" algn="l" defTabSz="914400" rtl="0" eaLnBrk="1" latinLnBrk="0" hangingPunct="1">
       <a:defRPr sz="1200" kern="1200">
         <a:solidFill>
           <a:schemeClr val="tx1"/>
@@ -455,7 +249,7 @@
         <a:cs typeface="+mn-cs"/>
       </a:defRPr>
     </a:lvl8pPr>
-    <a:lvl9pPr marL="3657600" algn="l" defTabSz="457200" rtl="0" eaLnBrk="1" latinLnBrk="0" hangingPunct="1">
+    <a:lvl9pPr marL="3657600" algn="l" defTabSz="914400" rtl="0" eaLnBrk="1" latinLnBrk="0" hangingPunct="1">
       <a:defRPr sz="1200" kern="1200">
         <a:solidFill>
           <a:schemeClr val="tx1"/>
@@ -470,7 +264,7 @@
 </file>
 
 <file path=ppt/notesSlides/notesSlide1.xml><?xml version="1.0" encoding="utf-8"?>
-<p:notes xmlns:a="http://schemas.openxmlformats.org/drawingml/2006/main" xmlns:p="http://schemas.openxmlformats.org/presentationml/2006/main" xmlns:r="http://schemas.openxmlformats.org/officeDocument/2006/relationships">
+<p:notes xmlns:a="http://schemas.openxmlformats.org/drawingml/2006/main" xmlns:r="http://schemas.openxmlformats.org/officeDocument/2006/relationships" xmlns:p="http://schemas.openxmlformats.org/presentationml/2006/main">
   <p:cSld>
     <p:spTree>
       <p:nvGrpSpPr>
@@ -490,7 +284,7 @@
         <p:nvSpPr>
           <p:cNvPr id="2" name="Slide Image Placeholder 1"/>
           <p:cNvSpPr>
-            <a:spLocks noGrp="1"/>
+            <a:spLocks noGrp="1" noRot="1" noChangeAspect="1"/>
           </p:cNvSpPr>
           <p:nvPr>
             <p:ph type="sldImg" idx="2"/>
@@ -505,7 +299,7 @@
             <a:spLocks noGrp="1"/>
           </p:cNvSpPr>
           <p:nvPr>
-            <p:ph type="body" idx="3" sz="quarter"/>
+            <p:ph type="body" sz="quarter" idx="3"/>
           </p:nvPr>
         </p:nvSpPr>
         <p:spPr/>
@@ -526,7 +320,7 @@
             <a:spLocks noGrp="1"/>
           </p:cNvSpPr>
           <p:nvPr>
-            <p:ph type="sldNum" idx="5" sz="quarter"/>
+            <p:ph type="sldNum" sz="quarter" idx="5"/>
           </p:nvPr>
         </p:nvSpPr>
         <p:spPr/>
@@ -540,7 +334,7 @@
 </file>
 
 <file path=ppt/notesSlides/notesSlide10.xml><?xml version="1.0" encoding="utf-8"?>
-<p:notes xmlns:a="http://schemas.openxmlformats.org/drawingml/2006/main" xmlns:p="http://schemas.openxmlformats.org/presentationml/2006/main" xmlns:r="http://schemas.openxmlformats.org/officeDocument/2006/relationships">
+<p:notes xmlns:a="http://schemas.openxmlformats.org/drawingml/2006/main" xmlns:r="http://schemas.openxmlformats.org/officeDocument/2006/relationships" xmlns:p="http://schemas.openxmlformats.org/presentationml/2006/main">
   <p:cSld>
     <p:spTree>
       <p:nvGrpSpPr>
@@ -560,7 +354,7 @@
         <p:nvSpPr>
           <p:cNvPr id="2" name="Slide Image Placeholder 1"/>
           <p:cNvSpPr>
-            <a:spLocks noGrp="1"/>
+            <a:spLocks noGrp="1" noRot="1" noChangeAspect="1"/>
           </p:cNvSpPr>
           <p:nvPr>
             <p:ph type="sldImg" idx="2"/>
@@ -575,7 +369,7 @@
             <a:spLocks noGrp="1"/>
           </p:cNvSpPr>
           <p:nvPr>
-            <p:ph type="body" idx="3" sz="quarter"/>
+            <p:ph type="body" sz="quarter" idx="3"/>
           </p:nvPr>
         </p:nvSpPr>
         <p:spPr/>
@@ -596,7 +390,7 @@
             <a:spLocks noGrp="1"/>
           </p:cNvSpPr>
           <p:nvPr>
-            <p:ph type="sldNum" idx="5" sz="quarter"/>
+            <p:ph type="sldNum" sz="quarter" idx="5"/>
           </p:nvPr>
         </p:nvSpPr>
         <p:spPr/>
@@ -610,7 +404,7 @@
 </file>
 
 <file path=ppt/notesSlides/notesSlide11.xml><?xml version="1.0" encoding="utf-8"?>
-<p:notes xmlns:a="http://schemas.openxmlformats.org/drawingml/2006/main" xmlns:p="http://schemas.openxmlformats.org/presentationml/2006/main" xmlns:r="http://schemas.openxmlformats.org/officeDocument/2006/relationships">
+<p:notes xmlns:a="http://schemas.openxmlformats.org/drawingml/2006/main" xmlns:r="http://schemas.openxmlformats.org/officeDocument/2006/relationships" xmlns:p="http://schemas.openxmlformats.org/presentationml/2006/main">
   <p:cSld>
     <p:spTree>
       <p:nvGrpSpPr>
@@ -630,7 +424,7 @@
         <p:nvSpPr>
           <p:cNvPr id="2" name="Slide Image Placeholder 1"/>
           <p:cNvSpPr>
-            <a:spLocks noGrp="1"/>
+            <a:spLocks noGrp="1" noRot="1" noChangeAspect="1"/>
           </p:cNvSpPr>
           <p:nvPr>
             <p:ph type="sldImg" idx="2"/>
@@ -645,7 +439,7 @@
             <a:spLocks noGrp="1"/>
           </p:cNvSpPr>
           <p:nvPr>
-            <p:ph type="body" idx="3" sz="quarter"/>
+            <p:ph type="body" sz="quarter" idx="3"/>
           </p:nvPr>
         </p:nvSpPr>
         <p:spPr/>
@@ -666,7 +460,7 @@
             <a:spLocks noGrp="1"/>
           </p:cNvSpPr>
           <p:nvPr>
-            <p:ph type="sldNum" idx="5" sz="quarter"/>
+            <p:ph type="sldNum" sz="quarter" idx="5"/>
           </p:nvPr>
         </p:nvSpPr>
         <p:spPr/>
@@ -680,7 +474,7 @@
 </file>
 
 <file path=ppt/notesSlides/notesSlide12.xml><?xml version="1.0" encoding="utf-8"?>
-<p:notes xmlns:a="http://schemas.openxmlformats.org/drawingml/2006/main" xmlns:p="http://schemas.openxmlformats.org/presentationml/2006/main" xmlns:r="http://schemas.openxmlformats.org/officeDocument/2006/relationships">
+<p:notes xmlns:a="http://schemas.openxmlformats.org/drawingml/2006/main" xmlns:r="http://schemas.openxmlformats.org/officeDocument/2006/relationships" xmlns:p="http://schemas.openxmlformats.org/presentationml/2006/main">
   <p:cSld>
     <p:spTree>
       <p:nvGrpSpPr>
@@ -700,7 +494,7 @@
         <p:nvSpPr>
           <p:cNvPr id="2" name="Slide Image Placeholder 1"/>
           <p:cNvSpPr>
-            <a:spLocks noGrp="1"/>
+            <a:spLocks noGrp="1" noRot="1" noChangeAspect="1"/>
           </p:cNvSpPr>
           <p:nvPr>
             <p:ph type="sldImg" idx="2"/>
@@ -715,7 +509,7 @@
             <a:spLocks noGrp="1"/>
           </p:cNvSpPr>
           <p:nvPr>
-            <p:ph type="body" idx="3" sz="quarter"/>
+            <p:ph type="body" sz="quarter" idx="3"/>
           </p:nvPr>
         </p:nvSpPr>
         <p:spPr/>
@@ -736,7 +530,7 @@
             <a:spLocks noGrp="1"/>
           </p:cNvSpPr>
           <p:nvPr>
-            <p:ph type="sldNum" idx="5" sz="quarter"/>
+            <p:ph type="sldNum" sz="quarter" idx="5"/>
           </p:nvPr>
         </p:nvSpPr>
         <p:spPr/>
@@ -750,7 +544,7 @@
 </file>
 
 <file path=ppt/notesSlides/notesSlide13.xml><?xml version="1.0" encoding="utf-8"?>
-<p:notes xmlns:a="http://schemas.openxmlformats.org/drawingml/2006/main" xmlns:p="http://schemas.openxmlformats.org/presentationml/2006/main" xmlns:r="http://schemas.openxmlformats.org/officeDocument/2006/relationships">
+<p:notes xmlns:a="http://schemas.openxmlformats.org/drawingml/2006/main" xmlns:r="http://schemas.openxmlformats.org/officeDocument/2006/relationships" xmlns:p="http://schemas.openxmlformats.org/presentationml/2006/main">
   <p:cSld>
     <p:spTree>
       <p:nvGrpSpPr>
@@ -770,7 +564,7 @@
         <p:nvSpPr>
           <p:cNvPr id="2" name="Slide Image Placeholder 1"/>
           <p:cNvSpPr>
-            <a:spLocks noGrp="1"/>
+            <a:spLocks noGrp="1" noRot="1" noChangeAspect="1"/>
           </p:cNvSpPr>
           <p:nvPr>
             <p:ph type="sldImg" idx="2"/>
@@ -785,7 +579,7 @@
             <a:spLocks noGrp="1"/>
           </p:cNvSpPr>
           <p:nvPr>
-            <p:ph type="body" idx="3" sz="quarter"/>
+            <p:ph type="body" sz="quarter" idx="3"/>
           </p:nvPr>
         </p:nvSpPr>
         <p:spPr/>
@@ -806,7 +600,7 @@
             <a:spLocks noGrp="1"/>
           </p:cNvSpPr>
           <p:nvPr>
-            <p:ph type="sldNum" idx="5" sz="quarter"/>
+            <p:ph type="sldNum" sz="quarter" idx="5"/>
           </p:nvPr>
         </p:nvSpPr>
         <p:spPr/>
@@ -820,7 +614,7 @@
 </file>
 
 <file path=ppt/notesSlides/notesSlide2.xml><?xml version="1.0" encoding="utf-8"?>
-<p:notes xmlns:a="http://schemas.openxmlformats.org/drawingml/2006/main" xmlns:p="http://schemas.openxmlformats.org/presentationml/2006/main" xmlns:r="http://schemas.openxmlformats.org/officeDocument/2006/relationships">
+<p:notes xmlns:a="http://schemas.openxmlformats.org/drawingml/2006/main" xmlns:r="http://schemas.openxmlformats.org/officeDocument/2006/relationships" xmlns:p="http://schemas.openxmlformats.org/presentationml/2006/main">
   <p:cSld>
     <p:spTree>
       <p:nvGrpSpPr>
@@ -840,7 +634,7 @@
         <p:nvSpPr>
           <p:cNvPr id="2" name="Slide Image Placeholder 1"/>
           <p:cNvSpPr>
-            <a:spLocks noGrp="1"/>
+            <a:spLocks noGrp="1" noRot="1" noChangeAspect="1"/>
           </p:cNvSpPr>
           <p:nvPr>
             <p:ph type="sldImg" idx="2"/>
@@ -855,7 +649,7 @@
             <a:spLocks noGrp="1"/>
           </p:cNvSpPr>
           <p:nvPr>
-            <p:ph type="body" idx="3" sz="quarter"/>
+            <p:ph type="body" sz="quarter" idx="3"/>
           </p:nvPr>
         </p:nvSpPr>
         <p:spPr/>
@@ -876,7 +670,7 @@
             <a:spLocks noGrp="1"/>
           </p:cNvSpPr>
           <p:nvPr>
-            <p:ph type="sldNum" idx="5" sz="quarter"/>
+            <p:ph type="sldNum" sz="quarter" idx="5"/>
           </p:nvPr>
         </p:nvSpPr>
         <p:spPr/>
@@ -890,7 +684,7 @@
 </file>
 
 <file path=ppt/notesSlides/notesSlide3.xml><?xml version="1.0" encoding="utf-8"?>
-<p:notes xmlns:a="http://schemas.openxmlformats.org/drawingml/2006/main" xmlns:p="http://schemas.openxmlformats.org/presentationml/2006/main" xmlns:r="http://schemas.openxmlformats.org/officeDocument/2006/relationships">
+<p:notes xmlns:a="http://schemas.openxmlformats.org/drawingml/2006/main" xmlns:r="http://schemas.openxmlformats.org/officeDocument/2006/relationships" xmlns:p="http://schemas.openxmlformats.org/presentationml/2006/main">
   <p:cSld>
     <p:spTree>
       <p:nvGrpSpPr>
@@ -910,7 +704,7 @@
         <p:nvSpPr>
           <p:cNvPr id="2" name="Slide Image Placeholder 1"/>
           <p:cNvSpPr>
-            <a:spLocks noGrp="1"/>
+            <a:spLocks noGrp="1" noRot="1" noChangeAspect="1"/>
           </p:cNvSpPr>
           <p:nvPr>
             <p:ph type="sldImg" idx="2"/>
@@ -925,7 +719,7 @@
             <a:spLocks noGrp="1"/>
           </p:cNvSpPr>
           <p:nvPr>
-            <p:ph type="body" idx="3" sz="quarter"/>
+            <p:ph type="body" sz="quarter" idx="3"/>
           </p:nvPr>
         </p:nvSpPr>
         <p:spPr/>
@@ -946,7 +740,7 @@
             <a:spLocks noGrp="1"/>
           </p:cNvSpPr>
           <p:nvPr>
-            <p:ph type="sldNum" idx="5" sz="quarter"/>
+            <p:ph type="sldNum" sz="quarter" idx="5"/>
           </p:nvPr>
         </p:nvSpPr>
         <p:spPr/>
@@ -960,7 +754,7 @@
 </file>
 
 <file path=ppt/notesSlides/notesSlide4.xml><?xml version="1.0" encoding="utf-8"?>
-<p:notes xmlns:a="http://schemas.openxmlformats.org/drawingml/2006/main" xmlns:p="http://schemas.openxmlformats.org/presentationml/2006/main" xmlns:r="http://schemas.openxmlformats.org/officeDocument/2006/relationships">
+<p:notes xmlns:a="http://schemas.openxmlformats.org/drawingml/2006/main" xmlns:r="http://schemas.openxmlformats.org/officeDocument/2006/relationships" xmlns:p="http://schemas.openxmlformats.org/presentationml/2006/main">
   <p:cSld>
     <p:spTree>
       <p:nvGrpSpPr>
@@ -980,7 +774,7 @@
         <p:nvSpPr>
           <p:cNvPr id="2" name="Slide Image Placeholder 1"/>
           <p:cNvSpPr>
-            <a:spLocks noGrp="1"/>
+            <a:spLocks noGrp="1" noRot="1" noChangeAspect="1"/>
           </p:cNvSpPr>
           <p:nvPr>
             <p:ph type="sldImg" idx="2"/>
@@ -995,7 +789,7 @@
             <a:spLocks noGrp="1"/>
           </p:cNvSpPr>
           <p:nvPr>
-            <p:ph type="body" idx="3" sz="quarter"/>
+            <p:ph type="body" sz="quarter" idx="3"/>
           </p:nvPr>
         </p:nvSpPr>
         <p:spPr/>
@@ -1016,7 +810,7 @@
             <a:spLocks noGrp="1"/>
           </p:cNvSpPr>
           <p:nvPr>
-            <p:ph type="sldNum" idx="5" sz="quarter"/>
+            <p:ph type="sldNum" sz="quarter" idx="5"/>
           </p:nvPr>
         </p:nvSpPr>
         <p:spPr/>
@@ -1030,7 +824,7 @@
 </file>
 
 <file path=ppt/notesSlides/notesSlide5.xml><?xml version="1.0" encoding="utf-8"?>
-<p:notes xmlns:a="http://schemas.openxmlformats.org/drawingml/2006/main" xmlns:p="http://schemas.openxmlformats.org/presentationml/2006/main" xmlns:r="http://schemas.openxmlformats.org/officeDocument/2006/relationships">
+<p:notes xmlns:a="http://schemas.openxmlformats.org/drawingml/2006/main" xmlns:r="http://schemas.openxmlformats.org/officeDocument/2006/relationships" xmlns:p="http://schemas.openxmlformats.org/presentationml/2006/main">
   <p:cSld>
     <p:spTree>
       <p:nvGrpSpPr>
@@ -1050,7 +844,7 @@
         <p:nvSpPr>
           <p:cNvPr id="2" name="Slide Image Placeholder 1"/>
           <p:cNvSpPr>
-            <a:spLocks noGrp="1"/>
+            <a:spLocks noGrp="1" noRot="1" noChangeAspect="1"/>
           </p:cNvSpPr>
           <p:nvPr>
             <p:ph type="sldImg" idx="2"/>
@@ -1065,7 +859,7 @@
             <a:spLocks noGrp="1"/>
           </p:cNvSpPr>
           <p:nvPr>
-            <p:ph type="body" idx="3" sz="quarter"/>
+            <p:ph type="body" sz="quarter" idx="3"/>
           </p:nvPr>
         </p:nvSpPr>
         <p:spPr/>
@@ -1086,7 +880,7 @@
             <a:spLocks noGrp="1"/>
           </p:cNvSpPr>
           <p:nvPr>
-            <p:ph type="sldNum" idx="5" sz="quarter"/>
+            <p:ph type="sldNum" sz="quarter" idx="5"/>
           </p:nvPr>
         </p:nvSpPr>
         <p:spPr/>
@@ -1100,7 +894,7 @@
 </file>
 
 <file path=ppt/notesSlides/notesSlide6.xml><?xml version="1.0" encoding="utf-8"?>
-<p:notes xmlns:a="http://schemas.openxmlformats.org/drawingml/2006/main" xmlns:p="http://schemas.openxmlformats.org/presentationml/2006/main" xmlns:r="http://schemas.openxmlformats.org/officeDocument/2006/relationships">
+<p:notes xmlns:a="http://schemas.openxmlformats.org/drawingml/2006/main" xmlns:r="http://schemas.openxmlformats.org/officeDocument/2006/relationships" xmlns:p="http://schemas.openxmlformats.org/presentationml/2006/main">
   <p:cSld>
     <p:spTree>
       <p:nvGrpSpPr>
@@ -1120,7 +914,7 @@
         <p:nvSpPr>
           <p:cNvPr id="2" name="Slide Image Placeholder 1"/>
           <p:cNvSpPr>
-            <a:spLocks noGrp="1"/>
+            <a:spLocks noGrp="1" noRot="1" noChangeAspect="1"/>
           </p:cNvSpPr>
           <p:nvPr>
             <p:ph type="sldImg" idx="2"/>
@@ -1135,7 +929,7 @@
             <a:spLocks noGrp="1"/>
           </p:cNvSpPr>
           <p:nvPr>
-            <p:ph type="body" idx="3" sz="quarter"/>
+            <p:ph type="body" sz="quarter" idx="3"/>
           </p:nvPr>
         </p:nvSpPr>
         <p:spPr/>
@@ -1156,7 +950,7 @@
             <a:spLocks noGrp="1"/>
           </p:cNvSpPr>
           <p:nvPr>
-            <p:ph type="sldNum" idx="5" sz="quarter"/>
+            <p:ph type="sldNum" sz="quarter" idx="5"/>
           </p:nvPr>
         </p:nvSpPr>
         <p:spPr/>
@@ -1170,7 +964,7 @@
 </file>
 
 <file path=ppt/notesSlides/notesSlide7.xml><?xml version="1.0" encoding="utf-8"?>
-<p:notes xmlns:a="http://schemas.openxmlformats.org/drawingml/2006/main" xmlns:p="http://schemas.openxmlformats.org/presentationml/2006/main" xmlns:r="http://schemas.openxmlformats.org/officeDocument/2006/relationships">
+<p:notes xmlns:a="http://schemas.openxmlformats.org/drawingml/2006/main" xmlns:r="http://schemas.openxmlformats.org/officeDocument/2006/relationships" xmlns:p="http://schemas.openxmlformats.org/presentationml/2006/main">
   <p:cSld>
     <p:spTree>
       <p:nvGrpSpPr>
@@ -1190,7 +984,7 @@
         <p:nvSpPr>
           <p:cNvPr id="2" name="Slide Image Placeholder 1"/>
           <p:cNvSpPr>
-            <a:spLocks noGrp="1"/>
+            <a:spLocks noGrp="1" noRot="1" noChangeAspect="1"/>
           </p:cNvSpPr>
           <p:nvPr>
             <p:ph type="sldImg" idx="2"/>
@@ -1205,7 +999,7 @@
             <a:spLocks noGrp="1"/>
           </p:cNvSpPr>
           <p:nvPr>
-            <p:ph type="body" idx="3" sz="quarter"/>
+            <p:ph type="body" sz="quarter" idx="3"/>
           </p:nvPr>
         </p:nvSpPr>
         <p:spPr/>
@@ -1226,7 +1020,7 @@
             <a:spLocks noGrp="1"/>
           </p:cNvSpPr>
           <p:nvPr>
-            <p:ph type="sldNum" idx="5" sz="quarter"/>
+            <p:ph type="sldNum" sz="quarter" idx="5"/>
           </p:nvPr>
         </p:nvSpPr>
         <p:spPr/>
@@ -1240,7 +1034,7 @@
 </file>
 
 <file path=ppt/notesSlides/notesSlide8.xml><?xml version="1.0" encoding="utf-8"?>
-<p:notes xmlns:a="http://schemas.openxmlformats.org/drawingml/2006/main" xmlns:p="http://schemas.openxmlformats.org/presentationml/2006/main" xmlns:r="http://schemas.openxmlformats.org/officeDocument/2006/relationships">
+<p:notes xmlns:a="http://schemas.openxmlformats.org/drawingml/2006/main" xmlns:r="http://schemas.openxmlformats.org/officeDocument/2006/relationships" xmlns:p="http://schemas.openxmlformats.org/presentationml/2006/main">
   <p:cSld>
     <p:spTree>
       <p:nvGrpSpPr>
@@ -1260,7 +1054,7 @@
         <p:nvSpPr>
           <p:cNvPr id="2" name="Slide Image Placeholder 1"/>
           <p:cNvSpPr>
-            <a:spLocks noGrp="1"/>
+            <a:spLocks noGrp="1" noRot="1" noChangeAspect="1"/>
           </p:cNvSpPr>
           <p:nvPr>
             <p:ph type="sldImg" idx="2"/>
@@ -1275,7 +1069,7 @@
             <a:spLocks noGrp="1"/>
           </p:cNvSpPr>
           <p:nvPr>
-            <p:ph type="body" idx="3" sz="quarter"/>
+            <p:ph type="body" sz="quarter" idx="3"/>
           </p:nvPr>
         </p:nvSpPr>
         <p:spPr/>
@@ -1296,7 +1090,7 @@
             <a:spLocks noGrp="1"/>
           </p:cNvSpPr>
           <p:nvPr>
-            <p:ph type="sldNum" idx="5" sz="quarter"/>
+            <p:ph type="sldNum" sz="quarter" idx="5"/>
           </p:nvPr>
         </p:nvSpPr>
         <p:spPr/>
@@ -1310,7 +1104,7 @@
 </file>
 
 <file path=ppt/notesSlides/notesSlide9.xml><?xml version="1.0" encoding="utf-8"?>
-<p:notes xmlns:a="http://schemas.openxmlformats.org/drawingml/2006/main" xmlns:p="http://schemas.openxmlformats.org/presentationml/2006/main" xmlns:r="http://schemas.openxmlformats.org/officeDocument/2006/relationships">
+<p:notes xmlns:a="http://schemas.openxmlformats.org/drawingml/2006/main" xmlns:r="http://schemas.openxmlformats.org/officeDocument/2006/relationships" xmlns:p="http://schemas.openxmlformats.org/presentationml/2006/main">
   <p:cSld>
     <p:spTree>
       <p:nvGrpSpPr>
@@ -1330,7 +1124,7 @@
         <p:nvSpPr>
           <p:cNvPr id="2" name="Slide Image Placeholder 1"/>
           <p:cNvSpPr>
-            <a:spLocks noGrp="1"/>
+            <a:spLocks noGrp="1" noRot="1" noChangeAspect="1"/>
           </p:cNvSpPr>
           <p:nvPr>
             <p:ph type="sldImg" idx="2"/>
@@ -1345,7 +1139,7 @@
             <a:spLocks noGrp="1"/>
           </p:cNvSpPr>
           <p:nvPr>
-            <p:ph type="body" idx="3" sz="quarter"/>
+            <p:ph type="body" sz="quarter" idx="3"/>
           </p:nvPr>
         </p:nvSpPr>
         <p:spPr/>
@@ -1366,7 +1160,7 @@
             <a:spLocks noGrp="1"/>
           </p:cNvSpPr>
           <p:nvPr>
-            <p:ph type="sldNum" idx="5" sz="quarter"/>
+            <p:ph type="sldNum" sz="quarter" idx="5"/>
           </p:nvPr>
         </p:nvSpPr>
         <p:spPr/>
@@ -1417,10 +1211,9 @@
           <a:lstStyle/>
           <a:p>
             <a:r>
-              <a:rPr lang="en-US" smtClean="0"/>
+              <a:rPr lang="en-US"/>
               <a:t>Click to edit Master title style</a:t>
             </a:r>
-            <a:endParaRPr lang="en-US"/>
           </a:p>
         </p:txBody>
       </p:sp>
@@ -1536,10 +1329,9 @@
           </a:lstStyle>
           <a:p>
             <a:r>
-              <a:rPr lang="en-US" smtClean="0"/>
+              <a:rPr lang="en-US"/>
               <a:t>Click to edit Master subtitle style</a:t>
             </a:r>
-            <a:endParaRPr lang="en-US"/>
           </a:p>
         </p:txBody>
       </p:sp>
@@ -1560,7 +1352,7 @@
           <a:p>
             <a:fld id="{5BCAD085-E8A6-8845-BD4E-CB4CCA059FC4}" type="datetimeFigureOut">
               <a:rPr lang="en-US" smtClean="0"/>
-              <a:t>1/27/13</a:t>
+              <a:t>4/21/2026</a:t>
             </a:fld>
             <a:endParaRPr lang="en-US"/>
           </a:p>
@@ -1654,10 +1446,9 @@
           <a:lstStyle/>
           <a:p>
             <a:r>
-              <a:rPr lang="en-US" smtClean="0"/>
+              <a:rPr lang="en-US"/>
               <a:t>Click to edit Master title style</a:t>
             </a:r>
-            <a:endParaRPr lang="en-US"/>
           </a:p>
         </p:txBody>
       </p:sp>
@@ -1678,38 +1469,37 @@
           <a:p>
             <a:pPr lvl="0"/>
             <a:r>
-              <a:rPr lang="en-US" smtClean="0"/>
+              <a:rPr lang="en-US"/>
               <a:t>Click to edit Master text styles</a:t>
             </a:r>
           </a:p>
           <a:p>
             <a:pPr lvl="1"/>
             <a:r>
-              <a:rPr lang="en-US" smtClean="0"/>
+              <a:rPr lang="en-US"/>
               <a:t>Second level</a:t>
             </a:r>
           </a:p>
           <a:p>
             <a:pPr lvl="2"/>
             <a:r>
-              <a:rPr lang="en-US" smtClean="0"/>
+              <a:rPr lang="en-US"/>
               <a:t>Third level</a:t>
             </a:r>
           </a:p>
           <a:p>
             <a:pPr lvl="3"/>
             <a:r>
-              <a:rPr lang="en-US" smtClean="0"/>
+              <a:rPr lang="en-US"/>
               <a:t>Fourth level</a:t>
             </a:r>
           </a:p>
           <a:p>
             <a:pPr lvl="4"/>
             <a:r>
-              <a:rPr lang="en-US" smtClean="0"/>
+              <a:rPr lang="en-US"/>
               <a:t>Fifth level</a:t>
             </a:r>
-            <a:endParaRPr lang="en-US"/>
           </a:p>
         </p:txBody>
       </p:sp>
@@ -1730,7 +1520,7 @@
           <a:p>
             <a:fld id="{5BCAD085-E8A6-8845-BD4E-CB4CCA059FC4}" type="datetimeFigureOut">
               <a:rPr lang="en-US" smtClean="0"/>
-              <a:t>1/27/13</a:t>
+              <a:t>4/21/2026</a:t>
             </a:fld>
             <a:endParaRPr lang="en-US"/>
           </a:p>
@@ -1829,10 +1619,9 @@
           <a:lstStyle/>
           <a:p>
             <a:r>
-              <a:rPr lang="en-US" smtClean="0"/>
+              <a:rPr lang="en-US"/>
               <a:t>Click to edit Master title style</a:t>
             </a:r>
-            <a:endParaRPr lang="en-US"/>
           </a:p>
         </p:txBody>
       </p:sp>
@@ -1858,38 +1647,37 @@
           <a:p>
             <a:pPr lvl="0"/>
             <a:r>
-              <a:rPr lang="en-US" smtClean="0"/>
+              <a:rPr lang="en-US"/>
               <a:t>Click to edit Master text styles</a:t>
             </a:r>
           </a:p>
           <a:p>
             <a:pPr lvl="1"/>
             <a:r>
-              <a:rPr lang="en-US" smtClean="0"/>
+              <a:rPr lang="en-US"/>
               <a:t>Second level</a:t>
             </a:r>
           </a:p>
           <a:p>
             <a:pPr lvl="2"/>
             <a:r>
-              <a:rPr lang="en-US" smtClean="0"/>
+              <a:rPr lang="en-US"/>
               <a:t>Third level</a:t>
             </a:r>
           </a:p>
           <a:p>
             <a:pPr lvl="3"/>
             <a:r>
-              <a:rPr lang="en-US" smtClean="0"/>
+              <a:rPr lang="en-US"/>
               <a:t>Fourth level</a:t>
             </a:r>
           </a:p>
           <a:p>
             <a:pPr lvl="4"/>
             <a:r>
-              <a:rPr lang="en-US" smtClean="0"/>
+              <a:rPr lang="en-US"/>
               <a:t>Fifth level</a:t>
             </a:r>
-            <a:endParaRPr lang="en-US"/>
           </a:p>
         </p:txBody>
       </p:sp>
@@ -1910,7 +1698,7 @@
           <a:p>
             <a:fld id="{5BCAD085-E8A6-8845-BD4E-CB4CCA059FC4}" type="datetimeFigureOut">
               <a:rPr lang="en-US" smtClean="0"/>
-              <a:t>1/27/13</a:t>
+              <a:t>4/21/2026</a:t>
             </a:fld>
             <a:endParaRPr lang="en-US"/>
           </a:p>
@@ -2004,10 +1792,9 @@
           <a:lstStyle/>
           <a:p>
             <a:r>
-              <a:rPr lang="en-US" smtClean="0"/>
+              <a:rPr lang="en-US"/>
               <a:t>Click to edit Master title style</a:t>
             </a:r>
-            <a:endParaRPr lang="en-US"/>
           </a:p>
         </p:txBody>
       </p:sp>
@@ -2028,38 +1815,37 @@
           <a:p>
             <a:pPr lvl="0"/>
             <a:r>
-              <a:rPr lang="en-US" smtClean="0"/>
+              <a:rPr lang="en-US"/>
               <a:t>Click to edit Master text styles</a:t>
             </a:r>
           </a:p>
           <a:p>
             <a:pPr lvl="1"/>
             <a:r>
-              <a:rPr lang="en-US" smtClean="0"/>
+              <a:rPr lang="en-US"/>
               <a:t>Second level</a:t>
             </a:r>
           </a:p>
           <a:p>
             <a:pPr lvl="2"/>
             <a:r>
-              <a:rPr lang="en-US" smtClean="0"/>
+              <a:rPr lang="en-US"/>
               <a:t>Third level</a:t>
             </a:r>
           </a:p>
           <a:p>
             <a:pPr lvl="3"/>
             <a:r>
-              <a:rPr lang="en-US" smtClean="0"/>
+              <a:rPr lang="en-US"/>
               <a:t>Fourth level</a:t>
             </a:r>
           </a:p>
           <a:p>
             <a:pPr lvl="4"/>
             <a:r>
-              <a:rPr lang="en-US" smtClean="0"/>
+              <a:rPr lang="en-US"/>
               <a:t>Fifth level</a:t>
             </a:r>
-            <a:endParaRPr lang="en-US"/>
           </a:p>
         </p:txBody>
       </p:sp>
@@ -2080,7 +1866,7 @@
           <a:p>
             <a:fld id="{5BCAD085-E8A6-8845-BD4E-CB4CCA059FC4}" type="datetimeFigureOut">
               <a:rPr lang="en-US" smtClean="0"/>
-              <a:t>1/27/13</a:t>
+              <a:t>4/21/2026</a:t>
             </a:fld>
             <a:endParaRPr lang="en-US"/>
           </a:p>
@@ -2183,10 +1969,9 @@
           </a:lstStyle>
           <a:p>
             <a:r>
-              <a:rPr lang="en-US" smtClean="0"/>
+              <a:rPr lang="en-US"/>
               <a:t>Click to edit Master title style</a:t>
             </a:r>
-            <a:endParaRPr lang="en-US"/>
           </a:p>
         </p:txBody>
       </p:sp>
@@ -2303,7 +2088,7 @@
           <a:p>
             <a:pPr lvl="0"/>
             <a:r>
-              <a:rPr lang="en-US" smtClean="0"/>
+              <a:rPr lang="en-US"/>
               <a:t>Click to edit Master text styles</a:t>
             </a:r>
           </a:p>
@@ -2326,7 +2111,7 @@
           <a:p>
             <a:fld id="{5BCAD085-E8A6-8845-BD4E-CB4CCA059FC4}" type="datetimeFigureOut">
               <a:rPr lang="en-US" smtClean="0"/>
-              <a:t>1/27/13</a:t>
+              <a:t>4/21/2026</a:t>
             </a:fld>
             <a:endParaRPr lang="en-US"/>
           </a:p>
@@ -2420,10 +2205,9 @@
           <a:lstStyle/>
           <a:p>
             <a:r>
-              <a:rPr lang="en-US" smtClean="0"/>
+              <a:rPr lang="en-US"/>
               <a:t>Click to edit Master title style</a:t>
             </a:r>
-            <a:endParaRPr lang="en-US"/>
           </a:p>
         </p:txBody>
       </p:sp>
@@ -2477,38 +2261,37 @@
           <a:p>
             <a:pPr lvl="0"/>
             <a:r>
-              <a:rPr lang="en-US" smtClean="0"/>
+              <a:rPr lang="en-US"/>
               <a:t>Click to edit Master text styles</a:t>
             </a:r>
           </a:p>
           <a:p>
             <a:pPr lvl="1"/>
             <a:r>
-              <a:rPr lang="en-US" smtClean="0"/>
+              <a:rPr lang="en-US"/>
               <a:t>Second level</a:t>
             </a:r>
           </a:p>
           <a:p>
             <a:pPr lvl="2"/>
             <a:r>
-              <a:rPr lang="en-US" smtClean="0"/>
+              <a:rPr lang="en-US"/>
               <a:t>Third level</a:t>
             </a:r>
           </a:p>
           <a:p>
             <a:pPr lvl="3"/>
             <a:r>
-              <a:rPr lang="en-US" smtClean="0"/>
+              <a:rPr lang="en-US"/>
               <a:t>Fourth level</a:t>
             </a:r>
           </a:p>
           <a:p>
             <a:pPr lvl="4"/>
             <a:r>
-              <a:rPr lang="en-US" smtClean="0"/>
+              <a:rPr lang="en-US"/>
               <a:t>Fifth level</a:t>
             </a:r>
-            <a:endParaRPr lang="en-US"/>
           </a:p>
         </p:txBody>
       </p:sp>
@@ -2562,38 +2345,37 @@
           <a:p>
             <a:pPr lvl="0"/>
             <a:r>
-              <a:rPr lang="en-US" smtClean="0"/>
+              <a:rPr lang="en-US"/>
               <a:t>Click to edit Master text styles</a:t>
             </a:r>
           </a:p>
           <a:p>
             <a:pPr lvl="1"/>
             <a:r>
-              <a:rPr lang="en-US" smtClean="0"/>
+              <a:rPr lang="en-US"/>
               <a:t>Second level</a:t>
             </a:r>
           </a:p>
           <a:p>
             <a:pPr lvl="2"/>
             <a:r>
-              <a:rPr lang="en-US" smtClean="0"/>
+              <a:rPr lang="en-US"/>
               <a:t>Third level</a:t>
             </a:r>
           </a:p>
           <a:p>
             <a:pPr lvl="3"/>
             <a:r>
-              <a:rPr lang="en-US" smtClean="0"/>
+              <a:rPr lang="en-US"/>
               <a:t>Fourth level</a:t>
             </a:r>
           </a:p>
           <a:p>
             <a:pPr lvl="4"/>
             <a:r>
-              <a:rPr lang="en-US" smtClean="0"/>
+              <a:rPr lang="en-US"/>
               <a:t>Fifth level</a:t>
             </a:r>
-            <a:endParaRPr lang="en-US"/>
           </a:p>
         </p:txBody>
       </p:sp>
@@ -2614,7 +2396,7 @@
           <a:p>
             <a:fld id="{5BCAD085-E8A6-8845-BD4E-CB4CCA059FC4}" type="datetimeFigureOut">
               <a:rPr lang="en-US" smtClean="0"/>
-              <a:t>1/27/13</a:t>
+              <a:t>4/21/2026</a:t>
             </a:fld>
             <a:endParaRPr lang="en-US"/>
           </a:p>
@@ -2712,10 +2494,9 @@
           </a:lstStyle>
           <a:p>
             <a:r>
-              <a:rPr lang="en-US" smtClean="0"/>
+              <a:rPr lang="en-US"/>
               <a:t>Click to edit Master title style</a:t>
             </a:r>
-            <a:endParaRPr lang="en-US"/>
           </a:p>
         </p:txBody>
       </p:sp>
@@ -2778,7 +2559,7 @@
           <a:p>
             <a:pPr lvl="0"/>
             <a:r>
-              <a:rPr lang="en-US" smtClean="0"/>
+              <a:rPr lang="en-US"/>
               <a:t>Click to edit Master text styles</a:t>
             </a:r>
           </a:p>
@@ -2834,38 +2615,37 @@
           <a:p>
             <a:pPr lvl="0"/>
             <a:r>
-              <a:rPr lang="en-US" smtClean="0"/>
+              <a:rPr lang="en-US"/>
               <a:t>Click to edit Master text styles</a:t>
             </a:r>
           </a:p>
           <a:p>
             <a:pPr lvl="1"/>
             <a:r>
-              <a:rPr lang="en-US" smtClean="0"/>
+              <a:rPr lang="en-US"/>
               <a:t>Second level</a:t>
             </a:r>
           </a:p>
           <a:p>
             <a:pPr lvl="2"/>
             <a:r>
-              <a:rPr lang="en-US" smtClean="0"/>
+              <a:rPr lang="en-US"/>
               <a:t>Third level</a:t>
             </a:r>
           </a:p>
           <a:p>
             <a:pPr lvl="3"/>
             <a:r>
-              <a:rPr lang="en-US" smtClean="0"/>
+              <a:rPr lang="en-US"/>
               <a:t>Fourth level</a:t>
             </a:r>
           </a:p>
           <a:p>
             <a:pPr lvl="4"/>
             <a:r>
-              <a:rPr lang="en-US" smtClean="0"/>
+              <a:rPr lang="en-US"/>
               <a:t>Fifth level</a:t>
             </a:r>
-            <a:endParaRPr lang="en-US"/>
           </a:p>
         </p:txBody>
       </p:sp>
@@ -2928,7 +2708,7 @@
           <a:p>
             <a:pPr lvl="0"/>
             <a:r>
-              <a:rPr lang="en-US" smtClean="0"/>
+              <a:rPr lang="en-US"/>
               <a:t>Click to edit Master text styles</a:t>
             </a:r>
           </a:p>
@@ -2984,38 +2764,37 @@
           <a:p>
             <a:pPr lvl="0"/>
             <a:r>
-              <a:rPr lang="en-US" smtClean="0"/>
+              <a:rPr lang="en-US"/>
               <a:t>Click to edit Master text styles</a:t>
             </a:r>
           </a:p>
           <a:p>
             <a:pPr lvl="1"/>
             <a:r>
-              <a:rPr lang="en-US" smtClean="0"/>
+              <a:rPr lang="en-US"/>
               <a:t>Second level</a:t>
             </a:r>
           </a:p>
           <a:p>
             <a:pPr lvl="2"/>
             <a:r>
-              <a:rPr lang="en-US" smtClean="0"/>
+              <a:rPr lang="en-US"/>
               <a:t>Third level</a:t>
             </a:r>
           </a:p>
           <a:p>
             <a:pPr lvl="3"/>
             <a:r>
-              <a:rPr lang="en-US" smtClean="0"/>
+              <a:rPr lang="en-US"/>
               <a:t>Fourth level</a:t>
             </a:r>
           </a:p>
           <a:p>
             <a:pPr lvl="4"/>
             <a:r>
-              <a:rPr lang="en-US" smtClean="0"/>
+              <a:rPr lang="en-US"/>
               <a:t>Fifth level</a:t>
             </a:r>
-            <a:endParaRPr lang="en-US"/>
           </a:p>
         </p:txBody>
       </p:sp>
@@ -3036,7 +2815,7 @@
           <a:p>
             <a:fld id="{5BCAD085-E8A6-8845-BD4E-CB4CCA059FC4}" type="datetimeFigureOut">
               <a:rPr lang="en-US" smtClean="0"/>
-              <a:t>1/27/13</a:t>
+              <a:t>4/21/2026</a:t>
             </a:fld>
             <a:endParaRPr lang="en-US"/>
           </a:p>
@@ -3130,10 +2909,9 @@
           <a:lstStyle/>
           <a:p>
             <a:r>
-              <a:rPr lang="en-US" smtClean="0"/>
+              <a:rPr lang="en-US"/>
               <a:t>Click to edit Master title style</a:t>
             </a:r>
-            <a:endParaRPr lang="en-US"/>
           </a:p>
         </p:txBody>
       </p:sp>
@@ -3154,7 +2932,7 @@
           <a:p>
             <a:fld id="{5BCAD085-E8A6-8845-BD4E-CB4CCA059FC4}" type="datetimeFigureOut">
               <a:rPr lang="en-US" smtClean="0"/>
-              <a:t>1/27/13</a:t>
+              <a:t>4/21/2026</a:t>
             </a:fld>
             <a:endParaRPr lang="en-US"/>
           </a:p>
@@ -3249,7 +3027,7 @@
           <a:p>
             <a:fld id="{5BCAD085-E8A6-8845-BD4E-CB4CCA059FC4}" type="datetimeFigureOut">
               <a:rPr lang="en-US" smtClean="0"/>
-              <a:t>1/27/13</a:t>
+              <a:t>4/21/2026</a:t>
             </a:fld>
             <a:endParaRPr lang="en-US"/>
           </a:p>
@@ -3352,10 +3130,9 @@
           </a:lstStyle>
           <a:p>
             <a:r>
-              <a:rPr lang="en-US" smtClean="0"/>
+              <a:rPr lang="en-US"/>
               <a:t>Click to edit Master title style</a:t>
             </a:r>
-            <a:endParaRPr lang="en-US"/>
           </a:p>
         </p:txBody>
       </p:sp>
@@ -3409,38 +3186,37 @@
           <a:p>
             <a:pPr lvl="0"/>
             <a:r>
-              <a:rPr lang="en-US" smtClean="0"/>
+              <a:rPr lang="en-US"/>
               <a:t>Click to edit Master text styles</a:t>
             </a:r>
           </a:p>
           <a:p>
             <a:pPr lvl="1"/>
             <a:r>
-              <a:rPr lang="en-US" smtClean="0"/>
+              <a:rPr lang="en-US"/>
               <a:t>Second level</a:t>
             </a:r>
           </a:p>
           <a:p>
             <a:pPr lvl="2"/>
             <a:r>
-              <a:rPr lang="en-US" smtClean="0"/>
+              <a:rPr lang="en-US"/>
               <a:t>Third level</a:t>
             </a:r>
           </a:p>
           <a:p>
             <a:pPr lvl="3"/>
             <a:r>
-              <a:rPr lang="en-US" smtClean="0"/>
+              <a:rPr lang="en-US"/>
               <a:t>Fourth level</a:t>
             </a:r>
           </a:p>
           <a:p>
             <a:pPr lvl="4"/>
             <a:r>
-              <a:rPr lang="en-US" smtClean="0"/>
+              <a:rPr lang="en-US"/>
               <a:t>Fifth level</a:t>
             </a:r>
-            <a:endParaRPr lang="en-US"/>
           </a:p>
         </p:txBody>
       </p:sp>
@@ -3503,7 +3279,7 @@
           <a:p>
             <a:pPr lvl="0"/>
             <a:r>
-              <a:rPr lang="en-US" smtClean="0"/>
+              <a:rPr lang="en-US"/>
               <a:t>Click to edit Master text styles</a:t>
             </a:r>
           </a:p>
@@ -3526,7 +3302,7 @@
           <a:p>
             <a:fld id="{5BCAD085-E8A6-8845-BD4E-CB4CCA059FC4}" type="datetimeFigureOut">
               <a:rPr lang="en-US" smtClean="0"/>
-              <a:t>1/27/13</a:t>
+              <a:t>4/21/2026</a:t>
             </a:fld>
             <a:endParaRPr lang="en-US"/>
           </a:p>
@@ -3629,10 +3405,9 @@
           </a:lstStyle>
           <a:p>
             <a:r>
-              <a:rPr lang="en-US" smtClean="0"/>
+              <a:rPr lang="en-US"/>
               <a:t>Click to edit Master title style</a:t>
             </a:r>
-            <a:endParaRPr lang="en-US"/>
           </a:p>
         </p:txBody>
       </p:sp>
@@ -3756,7 +3531,7 @@
           <a:p>
             <a:pPr lvl="0"/>
             <a:r>
-              <a:rPr lang="en-US" smtClean="0"/>
+              <a:rPr lang="en-US"/>
               <a:t>Click to edit Master text styles</a:t>
             </a:r>
           </a:p>
@@ -3779,7 +3554,7 @@
           <a:p>
             <a:fld id="{5BCAD085-E8A6-8845-BD4E-CB4CCA059FC4}" type="datetimeFigureOut">
               <a:rPr lang="en-US" smtClean="0"/>
-              <a:t>1/27/13</a:t>
+              <a:t>4/21/2026</a:t>
             </a:fld>
             <a:endParaRPr lang="en-US"/>
           </a:p>
@@ -3888,10 +3663,9 @@
           <a:lstStyle/>
           <a:p>
             <a:r>
-              <a:rPr lang="en-US" smtClean="0"/>
+              <a:rPr lang="en-US"/>
               <a:t>Click to edit Master title style</a:t>
             </a:r>
-            <a:endParaRPr lang="en-US"/>
           </a:p>
         </p:txBody>
       </p:sp>
@@ -3922,38 +3696,37 @@
           <a:p>
             <a:pPr lvl="0"/>
             <a:r>
-              <a:rPr lang="en-US" smtClean="0"/>
+              <a:rPr lang="en-US"/>
               <a:t>Click to edit Master text styles</a:t>
             </a:r>
           </a:p>
           <a:p>
             <a:pPr lvl="1"/>
             <a:r>
-              <a:rPr lang="en-US" smtClean="0"/>
+              <a:rPr lang="en-US"/>
               <a:t>Second level</a:t>
             </a:r>
           </a:p>
           <a:p>
             <a:pPr lvl="2"/>
             <a:r>
-              <a:rPr lang="en-US" smtClean="0"/>
+              <a:rPr lang="en-US"/>
               <a:t>Third level</a:t>
             </a:r>
           </a:p>
           <a:p>
             <a:pPr lvl="3"/>
             <a:r>
-              <a:rPr lang="en-US" smtClean="0"/>
+              <a:rPr lang="en-US"/>
               <a:t>Fourth level</a:t>
             </a:r>
           </a:p>
           <a:p>
             <a:pPr lvl="4"/>
             <a:r>
-              <a:rPr lang="en-US" smtClean="0"/>
+              <a:rPr lang="en-US"/>
               <a:t>Fifth level</a:t>
             </a:r>
-            <a:endParaRPr lang="en-US"/>
           </a:p>
         </p:txBody>
       </p:sp>
@@ -3992,7 +3765,7 @@
           <a:p>
             <a:fld id="{5BCAD085-E8A6-8845-BD4E-CB4CCA059FC4}" type="datetimeFigureOut">
               <a:rPr lang="en-US" smtClean="0"/>
-              <a:t>1/27/13</a:t>
+              <a:t>4/21/2026</a:t>
             </a:fld>
             <a:endParaRPr lang="en-US"/>
           </a:p>
@@ -4351,7 +4124,7 @@
 </file>
 
 <file path=ppt/slides/slide1.xml><?xml version="1.0" encoding="utf-8"?>
-<p:sld xmlns:a="http://schemas.openxmlformats.org/drawingml/2006/main" xmlns:p="http://schemas.openxmlformats.org/presentationml/2006/main" xmlns:r="http://schemas.openxmlformats.org/officeDocument/2006/relationships">
+<p:sld xmlns:a="http://schemas.openxmlformats.org/drawingml/2006/main" xmlns:r="http://schemas.openxmlformats.org/officeDocument/2006/relationships" xmlns:p="http://schemas.openxmlformats.org/presentationml/2006/main">
   <p:cSld>
     <p:bg>
       <p:bgPr>
@@ -4367,7 +4140,14 @@
         <p:cNvGrpSpPr/>
         <p:nvPr/>
       </p:nvGrpSpPr>
-      <p:grpSpPr/>
+      <p:grpSpPr>
+        <a:xfrm>
+          <a:off x="0" y="0"/>
+          <a:ext cx="0" cy="0"/>
+          <a:chOff x="0" y="0"/>
+          <a:chExt cx="0" cy="0"/>
+        </a:xfrm>
+      </p:grpSpPr>
       <p:sp>
         <p:nvSpPr>
           <p:cNvPr id="2" name="Rectangle 1"/>
@@ -4405,10 +4185,11 @@
           </a:fontRef>
         </p:style>
         <p:txBody>
-          <a:bodyPr rtlCol="0" anchor="ctr" lIns="45720" rIns="45720" tIns="27432" bIns="27432" wrap="square"/>
+          <a:bodyPr wrap="square" lIns="45720" tIns="27432" rIns="45720" bIns="27432" rtlCol="0" anchor="ctr"/>
           <a:lstStyle/>
           <a:p>
             <a:pPr algn="ctr"/>
+            <a:endParaRPr/>
           </a:p>
         </p:txBody>
       </p:sp>
@@ -4429,7 +4210,7 @@
           <a:noFill/>
         </p:spPr>
         <p:txBody>
-          <a:bodyPr wrap="square" lIns="45720" rIns="45720" tIns="27432" bIns="27432" anchor="t">
+          <a:bodyPr wrap="square" lIns="45720" tIns="27432" rIns="45720" bIns="27432" anchor="t">
             <a:spAutoFit/>
           </a:bodyPr>
           <a:lstStyle/>
@@ -4464,7 +4245,7 @@
           <a:noFill/>
         </p:spPr>
         <p:txBody>
-          <a:bodyPr wrap="square" lIns="45720" rIns="45720" tIns="27432" bIns="27432" anchor="t">
+          <a:bodyPr wrap="square" lIns="45720" tIns="27432" rIns="45720" bIns="27432" anchor="t">
             <a:spAutoFit/>
           </a:bodyPr>
           <a:lstStyle/>
@@ -4499,7 +4280,7 @@
           <a:noFill/>
         </p:spPr>
         <p:txBody>
-          <a:bodyPr wrap="square" lIns="45720" rIns="45720" tIns="27432" bIns="27432" anchor="t">
+          <a:bodyPr wrap="square" lIns="45720" tIns="27432" rIns="45720" bIns="27432" anchor="t">
             <a:spAutoFit/>
           </a:bodyPr>
           <a:lstStyle/>
@@ -4534,7 +4315,7 @@
           <a:noFill/>
         </p:spPr>
         <p:txBody>
-          <a:bodyPr wrap="square" lIns="45720" rIns="45720" tIns="27432" bIns="27432" anchor="t">
+          <a:bodyPr wrap="square" lIns="45720" tIns="27432" rIns="45720" bIns="27432" anchor="t">
             <a:spAutoFit/>
           </a:bodyPr>
           <a:lstStyle/>
@@ -4569,7 +4350,7 @@
           <a:noFill/>
         </p:spPr>
         <p:txBody>
-          <a:bodyPr wrap="square" lIns="45720" rIns="45720" tIns="27432" bIns="27432" anchor="t">
+          <a:bodyPr wrap="square" lIns="45720" tIns="27432" rIns="45720" bIns="27432" anchor="t">
             <a:spAutoFit/>
           </a:bodyPr>
           <a:lstStyle/>
@@ -4604,7 +4385,7 @@
           <a:noFill/>
         </p:spPr>
         <p:txBody>
-          <a:bodyPr wrap="square" lIns="45720" rIns="45720" tIns="27432" bIns="27432" anchor="t">
+          <a:bodyPr wrap="square" lIns="45720" tIns="27432" rIns="45720" bIns="27432" anchor="t">
             <a:spAutoFit/>
           </a:bodyPr>
           <a:lstStyle/>
@@ -4639,7 +4420,7 @@
           <a:noFill/>
         </p:spPr>
         <p:txBody>
-          <a:bodyPr wrap="square" lIns="45720" rIns="45720" tIns="27432" bIns="27432" anchor="t">
+          <a:bodyPr wrap="square" lIns="45720" tIns="27432" rIns="45720" bIns="27432" anchor="t">
             <a:spAutoFit/>
           </a:bodyPr>
           <a:lstStyle/>
@@ -4666,7 +4447,7 @@
 </file>
 
 <file path=ppt/slides/slide10.xml><?xml version="1.0" encoding="utf-8"?>
-<p:sld xmlns:a="http://schemas.openxmlformats.org/drawingml/2006/main" xmlns:p="http://schemas.openxmlformats.org/presentationml/2006/main" xmlns:r="http://schemas.openxmlformats.org/officeDocument/2006/relationships">
+<p:sld xmlns:a="http://schemas.openxmlformats.org/drawingml/2006/main" xmlns:r="http://schemas.openxmlformats.org/officeDocument/2006/relationships" xmlns:p="http://schemas.openxmlformats.org/presentationml/2006/main">
   <p:cSld>
     <p:bg>
       <p:bgPr>
@@ -4682,7 +4463,14 @@
         <p:cNvGrpSpPr/>
         <p:nvPr/>
       </p:nvGrpSpPr>
-      <p:grpSpPr/>
+      <p:grpSpPr>
+        <a:xfrm>
+          <a:off x="0" y="0"/>
+          <a:ext cx="0" cy="0"/>
+          <a:chOff x="0" y="0"/>
+          <a:chExt cx="0" cy="0"/>
+        </a:xfrm>
+      </p:grpSpPr>
       <p:sp>
         <p:nvSpPr>
           <p:cNvPr id="2" name="Rectangle 1"/>
@@ -4720,10 +4508,11 @@
           </a:fontRef>
         </p:style>
         <p:txBody>
-          <a:bodyPr rtlCol="0" anchor="ctr" lIns="45720" rIns="45720" tIns="27432" bIns="27432" wrap="square"/>
+          <a:bodyPr wrap="square" lIns="45720" tIns="27432" rIns="45720" bIns="27432" rtlCol="0" anchor="ctr"/>
           <a:lstStyle/>
           <a:p>
             <a:pPr algn="ctr"/>
+            <a:endParaRPr/>
           </a:p>
         </p:txBody>
       </p:sp>
@@ -4764,7 +4553,7 @@
           </a:fontRef>
         </p:style>
         <p:txBody>
-          <a:bodyPr rtlCol="0" anchor="ctr" lIns="45720" rIns="45720" tIns="27432" bIns="27432" wrap="square"/>
+          <a:bodyPr wrap="square" lIns="45720" tIns="27432" rIns="45720" bIns="27432" rtlCol="0" anchor="ctr"/>
           <a:lstStyle/>
           <a:p>
             <a:pPr algn="ctr"/>
@@ -4797,7 +4586,7 @@
           <a:noFill/>
         </p:spPr>
         <p:txBody>
-          <a:bodyPr wrap="square" lIns="45720" rIns="45720" tIns="27432" bIns="27432" anchor="t">
+          <a:bodyPr wrap="square" lIns="45720" tIns="27432" rIns="45720" bIns="27432" anchor="t">
             <a:spAutoFit/>
           </a:bodyPr>
           <a:lstStyle/>
@@ -4832,7 +4621,7 @@
           <a:noFill/>
         </p:spPr>
         <p:txBody>
-          <a:bodyPr wrap="square" lIns="45720" rIns="45720" tIns="27432" bIns="27432" anchor="t">
+          <a:bodyPr wrap="square" lIns="45720" tIns="27432" rIns="45720" bIns="27432" anchor="t">
             <a:spAutoFit/>
           </a:bodyPr>
           <a:lstStyle/>
@@ -4867,7 +4656,7 @@
           <a:noFill/>
         </p:spPr>
         <p:txBody>
-          <a:bodyPr wrap="square" lIns="45720" rIns="45720" tIns="27432" bIns="27432" anchor="t">
+          <a:bodyPr wrap="square" lIns="45720" tIns="27432" rIns="45720" bIns="27432" anchor="t">
             <a:spAutoFit/>
           </a:bodyPr>
           <a:lstStyle/>
@@ -4894,7 +4683,7 @@
           <p:nvPr/>
         </p:nvPicPr>
         <p:blipFill>
-          <a:blip r:embed="rId2"/>
+          <a:blip r:embed="rId3"/>
           <a:stretch>
             <a:fillRect/>
           </a:stretch>
@@ -4918,7 +4707,7 @@
           <p:nvPr/>
         </p:nvPicPr>
         <p:blipFill>
-          <a:blip r:embed="rId3"/>
+          <a:blip r:embed="rId4"/>
           <a:stretch>
             <a:fillRect/>
           </a:stretch>
@@ -4942,7 +4731,7 @@
           <p:nvPr/>
         </p:nvPicPr>
         <p:blipFill>
-          <a:blip r:embed="rId4"/>
+          <a:blip r:embed="rId5"/>
           <a:stretch>
             <a:fillRect/>
           </a:stretch>
@@ -4994,10 +4783,11 @@
           </a:fontRef>
         </p:style>
         <p:txBody>
-          <a:bodyPr rtlCol="0" anchor="ctr" lIns="45720" rIns="45720" tIns="27432" bIns="27432" wrap="square"/>
+          <a:bodyPr wrap="square" lIns="45720" tIns="27432" rIns="45720" bIns="27432" rtlCol="0" anchor="ctr"/>
           <a:lstStyle/>
           <a:p>
             <a:pPr algn="ctr"/>
+            <a:endParaRPr/>
           </a:p>
         </p:txBody>
       </p:sp>
@@ -5018,7 +4808,7 @@
           <a:noFill/>
         </p:spPr>
         <p:txBody>
-          <a:bodyPr wrap="square" lIns="45720" rIns="45720" tIns="27432" bIns="27432" anchor="t">
+          <a:bodyPr wrap="square" lIns="45720" tIns="27432" rIns="45720" bIns="27432" anchor="t">
             <a:spAutoFit/>
           </a:bodyPr>
           <a:lstStyle/>
@@ -5053,7 +4843,7 @@
           <a:noFill/>
         </p:spPr>
         <p:txBody>
-          <a:bodyPr wrap="square" lIns="45720" rIns="45720" tIns="27432" bIns="27432" anchor="t">
+          <a:bodyPr wrap="square" lIns="45720" tIns="27432" rIns="45720" bIns="27432" anchor="t">
             <a:spAutoFit/>
           </a:bodyPr>
           <a:lstStyle/>
@@ -5080,7 +4870,7 @@
 </file>
 
 <file path=ppt/slides/slide11.xml><?xml version="1.0" encoding="utf-8"?>
-<p:sld xmlns:a="http://schemas.openxmlformats.org/drawingml/2006/main" xmlns:p="http://schemas.openxmlformats.org/presentationml/2006/main" xmlns:r="http://schemas.openxmlformats.org/officeDocument/2006/relationships">
+<p:sld xmlns:a="http://schemas.openxmlformats.org/drawingml/2006/main" xmlns:r="http://schemas.openxmlformats.org/officeDocument/2006/relationships" xmlns:p="http://schemas.openxmlformats.org/presentationml/2006/main">
   <p:cSld>
     <p:bg>
       <p:bgPr>
@@ -5096,7 +4886,14 @@
         <p:cNvGrpSpPr/>
         <p:nvPr/>
       </p:nvGrpSpPr>
-      <p:grpSpPr/>
+      <p:grpSpPr>
+        <a:xfrm>
+          <a:off x="0" y="0"/>
+          <a:ext cx="0" cy="0"/>
+          <a:chOff x="0" y="0"/>
+          <a:chExt cx="0" cy="0"/>
+        </a:xfrm>
+      </p:grpSpPr>
       <p:sp>
         <p:nvSpPr>
           <p:cNvPr id="2" name="Rectangle 1"/>
@@ -5134,10 +4931,11 @@
           </a:fontRef>
         </p:style>
         <p:txBody>
-          <a:bodyPr rtlCol="0" anchor="ctr" lIns="45720" rIns="45720" tIns="27432" bIns="27432" wrap="square"/>
+          <a:bodyPr wrap="square" lIns="45720" tIns="27432" rIns="45720" bIns="27432" rtlCol="0" anchor="ctr"/>
           <a:lstStyle/>
           <a:p>
             <a:pPr algn="ctr"/>
+            <a:endParaRPr/>
           </a:p>
         </p:txBody>
       </p:sp>
@@ -5178,7 +4976,7 @@
           </a:fontRef>
         </p:style>
         <p:txBody>
-          <a:bodyPr rtlCol="0" anchor="ctr" lIns="45720" rIns="45720" tIns="27432" bIns="27432" wrap="square"/>
+          <a:bodyPr wrap="square" lIns="45720" tIns="27432" rIns="45720" bIns="27432" rtlCol="0" anchor="ctr"/>
           <a:lstStyle/>
           <a:p>
             <a:pPr algn="ctr"/>
@@ -5211,7 +5009,7 @@
           <a:noFill/>
         </p:spPr>
         <p:txBody>
-          <a:bodyPr wrap="square" lIns="45720" rIns="45720" tIns="27432" bIns="27432" anchor="t">
+          <a:bodyPr wrap="square" lIns="45720" tIns="27432" rIns="45720" bIns="27432" anchor="t">
             <a:spAutoFit/>
           </a:bodyPr>
           <a:lstStyle/>
@@ -5246,7 +5044,7 @@
           <a:noFill/>
         </p:spPr>
         <p:txBody>
-          <a:bodyPr wrap="square" lIns="45720" rIns="45720" tIns="27432" bIns="27432" anchor="t">
+          <a:bodyPr wrap="square" lIns="45720" tIns="27432" rIns="45720" bIns="27432" anchor="t">
             <a:spAutoFit/>
           </a:bodyPr>
           <a:lstStyle/>
@@ -5281,7 +5079,7 @@
           <a:noFill/>
         </p:spPr>
         <p:txBody>
-          <a:bodyPr wrap="square" lIns="45720" rIns="45720" tIns="27432" bIns="27432" anchor="t">
+          <a:bodyPr wrap="square" lIns="45720" tIns="27432" rIns="45720" bIns="27432" anchor="t">
             <a:spAutoFit/>
           </a:bodyPr>
           <a:lstStyle/>
@@ -5639,7 +5437,7 @@
 </file>
 
 <file path=ppt/slides/slide12.xml><?xml version="1.0" encoding="utf-8"?>
-<p:sld xmlns:a="http://schemas.openxmlformats.org/drawingml/2006/main" xmlns:p="http://schemas.openxmlformats.org/presentationml/2006/main" xmlns:r="http://schemas.openxmlformats.org/officeDocument/2006/relationships">
+<p:sld xmlns:a="http://schemas.openxmlformats.org/drawingml/2006/main" xmlns:r="http://schemas.openxmlformats.org/officeDocument/2006/relationships" xmlns:p="http://schemas.openxmlformats.org/presentationml/2006/main">
   <p:cSld>
     <p:bg>
       <p:bgPr>
@@ -5655,7 +5453,14 @@
         <p:cNvGrpSpPr/>
         <p:nvPr/>
       </p:nvGrpSpPr>
-      <p:grpSpPr/>
+      <p:grpSpPr>
+        <a:xfrm>
+          <a:off x="0" y="0"/>
+          <a:ext cx="0" cy="0"/>
+          <a:chOff x="0" y="0"/>
+          <a:chExt cx="0" cy="0"/>
+        </a:xfrm>
+      </p:grpSpPr>
       <p:sp>
         <p:nvSpPr>
           <p:cNvPr id="2" name="Rectangle 1"/>
@@ -5693,10 +5498,11 @@
           </a:fontRef>
         </p:style>
         <p:txBody>
-          <a:bodyPr rtlCol="0" anchor="ctr" lIns="45720" rIns="45720" tIns="27432" bIns="27432" wrap="square"/>
+          <a:bodyPr wrap="square" lIns="45720" tIns="27432" rIns="45720" bIns="27432" rtlCol="0" anchor="ctr"/>
           <a:lstStyle/>
           <a:p>
             <a:pPr algn="ctr"/>
+            <a:endParaRPr/>
           </a:p>
         </p:txBody>
       </p:sp>
@@ -5717,7 +5523,7 @@
           <a:noFill/>
         </p:spPr>
         <p:txBody>
-          <a:bodyPr wrap="square" lIns="45720" rIns="45720" tIns="27432" bIns="27432" anchor="t">
+          <a:bodyPr wrap="square" lIns="45720" tIns="27432" rIns="45720" bIns="27432" anchor="t">
             <a:spAutoFit/>
           </a:bodyPr>
           <a:lstStyle/>
@@ -5752,7 +5558,7 @@
           <a:noFill/>
         </p:spPr>
         <p:txBody>
-          <a:bodyPr wrap="square" lIns="45720" rIns="45720" tIns="27432" bIns="27432" anchor="t">
+          <a:bodyPr wrap="square" lIns="45720" tIns="27432" rIns="45720" bIns="27432" anchor="t">
             <a:spAutoFit/>
           </a:bodyPr>
           <a:lstStyle/>
@@ -5787,7 +5593,7 @@
           <a:noFill/>
         </p:spPr>
         <p:txBody>
-          <a:bodyPr wrap="square" lIns="45720" rIns="45720" tIns="27432" bIns="27432" anchor="t">
+          <a:bodyPr wrap="square" lIns="45720" tIns="27432" rIns="45720" bIns="27432" anchor="t">
             <a:spAutoFit/>
           </a:bodyPr>
           <a:lstStyle/>
@@ -5822,7 +5628,7 @@
           <a:noFill/>
         </p:spPr>
         <p:txBody>
-          <a:bodyPr wrap="square" lIns="45720" rIns="45720" tIns="27432" bIns="27432" anchor="t">
+          <a:bodyPr wrap="square" lIns="45720" tIns="27432" rIns="45720" bIns="27432" anchor="t">
             <a:spAutoFit/>
           </a:bodyPr>
           <a:lstStyle/>
@@ -5857,7 +5663,7 @@
           <a:noFill/>
         </p:spPr>
         <p:txBody>
-          <a:bodyPr wrap="square" lIns="45720" rIns="45720" tIns="27432" bIns="27432" anchor="t">
+          <a:bodyPr wrap="square" lIns="45720" tIns="27432" rIns="45720" bIns="27432" anchor="t">
             <a:spAutoFit/>
           </a:bodyPr>
           <a:lstStyle/>
@@ -5884,7 +5690,7 @@
 </file>
 
 <file path=ppt/slides/slide13.xml><?xml version="1.0" encoding="utf-8"?>
-<p:sld xmlns:a="http://schemas.openxmlformats.org/drawingml/2006/main" xmlns:p="http://schemas.openxmlformats.org/presentationml/2006/main" xmlns:r="http://schemas.openxmlformats.org/officeDocument/2006/relationships">
+<p:sld xmlns:a="http://schemas.openxmlformats.org/drawingml/2006/main" xmlns:r="http://schemas.openxmlformats.org/officeDocument/2006/relationships" xmlns:p="http://schemas.openxmlformats.org/presentationml/2006/main">
   <p:cSld>
     <p:bg>
       <p:bgPr>
@@ -5900,7 +5706,14 @@
         <p:cNvGrpSpPr/>
         <p:nvPr/>
       </p:nvGrpSpPr>
-      <p:grpSpPr/>
+      <p:grpSpPr>
+        <a:xfrm>
+          <a:off x="0" y="0"/>
+          <a:ext cx="0" cy="0"/>
+          <a:chOff x="0" y="0"/>
+          <a:chExt cx="0" cy="0"/>
+        </a:xfrm>
+      </p:grpSpPr>
       <p:sp>
         <p:nvSpPr>
           <p:cNvPr id="2" name="Rectangle 1"/>
@@ -5938,10 +5751,11 @@
           </a:fontRef>
         </p:style>
         <p:txBody>
-          <a:bodyPr rtlCol="0" anchor="ctr" lIns="45720" rIns="45720" tIns="27432" bIns="27432" wrap="square"/>
+          <a:bodyPr wrap="square" lIns="45720" tIns="27432" rIns="45720" bIns="27432" rtlCol="0" anchor="ctr"/>
           <a:lstStyle/>
           <a:p>
             <a:pPr algn="ctr"/>
+            <a:endParaRPr/>
           </a:p>
         </p:txBody>
       </p:sp>
@@ -5982,7 +5796,7 @@
           </a:fontRef>
         </p:style>
         <p:txBody>
-          <a:bodyPr rtlCol="0" anchor="ctr" lIns="45720" rIns="45720" tIns="27432" bIns="27432" wrap="square"/>
+          <a:bodyPr wrap="square" lIns="45720" tIns="27432" rIns="45720" bIns="27432" rtlCol="0" anchor="ctr"/>
           <a:lstStyle/>
           <a:p>
             <a:pPr algn="ctr"/>
@@ -6015,7 +5829,7 @@
           <a:noFill/>
         </p:spPr>
         <p:txBody>
-          <a:bodyPr wrap="square" lIns="45720" rIns="45720" tIns="27432" bIns="27432" anchor="t">
+          <a:bodyPr wrap="square" lIns="45720" tIns="27432" rIns="45720" bIns="27432" anchor="t">
             <a:spAutoFit/>
           </a:bodyPr>
           <a:lstStyle/>
@@ -6050,7 +5864,7 @@
           <a:noFill/>
         </p:spPr>
         <p:txBody>
-          <a:bodyPr wrap="square" lIns="45720" rIns="45720" tIns="27432" bIns="27432" anchor="t">
+          <a:bodyPr wrap="square" lIns="45720" tIns="27432" rIns="45720" bIns="27432" anchor="t">
             <a:spAutoFit/>
           </a:bodyPr>
           <a:lstStyle/>
@@ -6085,7 +5899,7 @@
           <a:noFill/>
         </p:spPr>
         <p:txBody>
-          <a:bodyPr wrap="square" lIns="45720" rIns="45720" tIns="27432" bIns="27432" anchor="t">
+          <a:bodyPr wrap="square" lIns="45720" tIns="27432" rIns="45720" bIns="27432" anchor="t">
             <a:spAutoFit/>
           </a:bodyPr>
           <a:lstStyle/>
@@ -6120,7 +5934,7 @@
           <a:noFill/>
         </p:spPr>
         <p:txBody>
-          <a:bodyPr wrap="square" lIns="45720" rIns="45720" tIns="27432" bIns="27432" anchor="t">
+          <a:bodyPr wrap="square" lIns="45720" tIns="27432" rIns="45720" bIns="27432" anchor="t">
             <a:spAutoFit/>
           </a:bodyPr>
           <a:lstStyle/>
@@ -6155,7 +5969,7 @@
           <a:noFill/>
         </p:spPr>
         <p:txBody>
-          <a:bodyPr wrap="square" lIns="45720" rIns="45720" tIns="27432" bIns="27432" anchor="t">
+          <a:bodyPr wrap="square" lIns="45720" tIns="27432" rIns="45720" bIns="27432" anchor="t">
             <a:spAutoFit/>
           </a:bodyPr>
           <a:lstStyle/>
@@ -6190,7 +6004,7 @@
           <a:noFill/>
         </p:spPr>
         <p:txBody>
-          <a:bodyPr wrap="square" lIns="45720" rIns="45720" tIns="27432" bIns="27432" anchor="t">
+          <a:bodyPr wrap="square" lIns="45720" tIns="27432" rIns="45720" bIns="27432" anchor="t">
             <a:spAutoFit/>
           </a:bodyPr>
           <a:lstStyle/>
@@ -6225,7 +6039,7 @@
           <a:noFill/>
         </p:spPr>
         <p:txBody>
-          <a:bodyPr wrap="square" lIns="45720" rIns="45720" tIns="27432" bIns="27432" anchor="t">
+          <a:bodyPr wrap="square" lIns="45720" tIns="27432" rIns="45720" bIns="27432" anchor="t">
             <a:spAutoFit/>
           </a:bodyPr>
           <a:lstStyle/>
@@ -6260,7 +6074,7 @@
           <a:noFill/>
         </p:spPr>
         <p:txBody>
-          <a:bodyPr wrap="square" lIns="45720" rIns="45720" tIns="27432" bIns="27432" anchor="t">
+          <a:bodyPr wrap="square" lIns="45720" tIns="27432" rIns="45720" bIns="27432" anchor="t">
             <a:spAutoFit/>
           </a:bodyPr>
           <a:lstStyle/>
@@ -6295,7 +6109,7 @@
           <a:noFill/>
         </p:spPr>
         <p:txBody>
-          <a:bodyPr wrap="square" lIns="45720" rIns="45720" tIns="27432" bIns="27432" anchor="t">
+          <a:bodyPr wrap="square" lIns="45720" tIns="27432" rIns="45720" bIns="27432" anchor="t">
             <a:spAutoFit/>
           </a:bodyPr>
           <a:lstStyle/>
@@ -6330,7 +6144,7 @@
           <a:noFill/>
         </p:spPr>
         <p:txBody>
-          <a:bodyPr wrap="square" lIns="45720" rIns="45720" tIns="27432" bIns="27432" anchor="t">
+          <a:bodyPr wrap="square" lIns="45720" tIns="27432" rIns="45720" bIns="27432" anchor="t">
             <a:spAutoFit/>
           </a:bodyPr>
           <a:lstStyle/>
@@ -6365,7 +6179,7 @@
           <a:noFill/>
         </p:spPr>
         <p:txBody>
-          <a:bodyPr wrap="square" lIns="45720" rIns="45720" tIns="27432" bIns="27432" anchor="t">
+          <a:bodyPr wrap="square" lIns="45720" tIns="27432" rIns="45720" bIns="27432" anchor="t">
             <a:spAutoFit/>
           </a:bodyPr>
           <a:lstStyle/>
@@ -6400,7 +6214,7 @@
           <a:noFill/>
         </p:spPr>
         <p:txBody>
-          <a:bodyPr wrap="square" lIns="45720" rIns="45720" tIns="27432" bIns="27432" anchor="t">
+          <a:bodyPr wrap="square" lIns="45720" tIns="27432" rIns="45720" bIns="27432" anchor="t">
             <a:spAutoFit/>
           </a:bodyPr>
           <a:lstStyle/>
@@ -6435,7 +6249,7 @@
           <a:noFill/>
         </p:spPr>
         <p:txBody>
-          <a:bodyPr wrap="square" lIns="45720" rIns="45720" tIns="27432" bIns="27432" anchor="t">
+          <a:bodyPr wrap="square" lIns="45720" tIns="27432" rIns="45720" bIns="27432" anchor="t">
             <a:spAutoFit/>
           </a:bodyPr>
           <a:lstStyle/>
@@ -6470,7 +6284,7 @@
           <a:noFill/>
         </p:spPr>
         <p:txBody>
-          <a:bodyPr wrap="square" lIns="45720" rIns="45720" tIns="27432" bIns="27432" anchor="t">
+          <a:bodyPr wrap="square" lIns="45720" tIns="27432" rIns="45720" bIns="27432" anchor="t">
             <a:spAutoFit/>
           </a:bodyPr>
           <a:lstStyle/>
@@ -6505,7 +6319,7 @@
           <a:noFill/>
         </p:spPr>
         <p:txBody>
-          <a:bodyPr wrap="square" lIns="45720" rIns="45720" tIns="27432" bIns="27432" anchor="t">
+          <a:bodyPr wrap="square" lIns="45720" tIns="27432" rIns="45720" bIns="27432" anchor="t">
             <a:spAutoFit/>
           </a:bodyPr>
           <a:lstStyle/>
@@ -6540,7 +6354,7 @@
           <a:noFill/>
         </p:spPr>
         <p:txBody>
-          <a:bodyPr wrap="square" lIns="45720" rIns="45720" tIns="27432" bIns="27432" anchor="t">
+          <a:bodyPr wrap="square" lIns="45720" tIns="27432" rIns="45720" bIns="27432" anchor="t">
             <a:spAutoFit/>
           </a:bodyPr>
           <a:lstStyle/>
@@ -6575,7 +6389,7 @@
           <a:noFill/>
         </p:spPr>
         <p:txBody>
-          <a:bodyPr wrap="square" lIns="45720" rIns="45720" tIns="27432" bIns="27432" anchor="t">
+          <a:bodyPr wrap="square" lIns="45720" tIns="27432" rIns="45720" bIns="27432" anchor="t">
             <a:spAutoFit/>
           </a:bodyPr>
           <a:lstStyle/>
@@ -6602,7 +6416,7 @@
 </file>
 
 <file path=ppt/slides/slide2.xml><?xml version="1.0" encoding="utf-8"?>
-<p:sld xmlns:a="http://schemas.openxmlformats.org/drawingml/2006/main" xmlns:p="http://schemas.openxmlformats.org/presentationml/2006/main" xmlns:r="http://schemas.openxmlformats.org/officeDocument/2006/relationships">
+<p:sld xmlns:a="http://schemas.openxmlformats.org/drawingml/2006/main" xmlns:r="http://schemas.openxmlformats.org/officeDocument/2006/relationships" xmlns:p="http://schemas.openxmlformats.org/presentationml/2006/main">
   <p:cSld>
     <p:bg>
       <p:bgPr>
@@ -6618,7 +6432,14 @@
         <p:cNvGrpSpPr/>
         <p:nvPr/>
       </p:nvGrpSpPr>
-      <p:grpSpPr/>
+      <p:grpSpPr>
+        <a:xfrm>
+          <a:off x="0" y="0"/>
+          <a:ext cx="0" cy="0"/>
+          <a:chOff x="0" y="0"/>
+          <a:chExt cx="0" cy="0"/>
+        </a:xfrm>
+      </p:grpSpPr>
       <p:sp>
         <p:nvSpPr>
           <p:cNvPr id="2" name="Rectangle 1"/>
@@ -6656,10 +6477,11 @@
           </a:fontRef>
         </p:style>
         <p:txBody>
-          <a:bodyPr rtlCol="0" anchor="ctr" lIns="45720" rIns="45720" tIns="27432" bIns="27432" wrap="square"/>
+          <a:bodyPr wrap="square" lIns="45720" tIns="27432" rIns="45720" bIns="27432" rtlCol="0" anchor="ctr"/>
           <a:lstStyle/>
           <a:p>
             <a:pPr algn="ctr"/>
+            <a:endParaRPr/>
           </a:p>
         </p:txBody>
       </p:sp>
@@ -6700,7 +6522,7 @@
           </a:fontRef>
         </p:style>
         <p:txBody>
-          <a:bodyPr rtlCol="0" anchor="ctr" lIns="45720" rIns="45720" tIns="27432" bIns="27432" wrap="square"/>
+          <a:bodyPr wrap="square" lIns="45720" tIns="27432" rIns="45720" bIns="27432" rtlCol="0" anchor="ctr"/>
           <a:lstStyle/>
           <a:p>
             <a:pPr algn="ctr"/>
@@ -6733,7 +6555,7 @@
           <a:noFill/>
         </p:spPr>
         <p:txBody>
-          <a:bodyPr wrap="square" lIns="45720" rIns="45720" tIns="27432" bIns="27432" anchor="t">
+          <a:bodyPr wrap="square" lIns="45720" tIns="27432" rIns="45720" bIns="27432" anchor="t">
             <a:spAutoFit/>
           </a:bodyPr>
           <a:lstStyle/>
@@ -6768,7 +6590,7 @@
           <a:noFill/>
         </p:spPr>
         <p:txBody>
-          <a:bodyPr wrap="square" lIns="45720" rIns="45720" tIns="27432" bIns="27432" anchor="t">
+          <a:bodyPr wrap="square" lIns="45720" tIns="27432" rIns="45720" bIns="27432" anchor="t">
             <a:spAutoFit/>
           </a:bodyPr>
           <a:lstStyle/>
@@ -6803,7 +6625,7 @@
           <a:noFill/>
         </p:spPr>
         <p:txBody>
-          <a:bodyPr wrap="square" lIns="45720" rIns="45720" tIns="27432" bIns="27432" anchor="t">
+          <a:bodyPr wrap="square" lIns="45720" tIns="27432" rIns="45720" bIns="27432" anchor="t">
             <a:spAutoFit/>
           </a:bodyPr>
           <a:lstStyle/>
@@ -7105,10 +6927,11 @@
           </a:fontRef>
         </p:style>
         <p:txBody>
-          <a:bodyPr rtlCol="0" anchor="ctr" lIns="45720" rIns="45720" tIns="27432" bIns="27432" wrap="square"/>
+          <a:bodyPr wrap="square" lIns="45720" tIns="27432" rIns="45720" bIns="27432" rtlCol="0" anchor="ctr"/>
           <a:lstStyle/>
           <a:p>
             <a:pPr algn="ctr"/>
+            <a:endParaRPr/>
           </a:p>
         </p:txBody>
       </p:sp>
@@ -7129,7 +6952,7 @@
           <a:noFill/>
         </p:spPr>
         <p:txBody>
-          <a:bodyPr wrap="square" lIns="45720" rIns="45720" tIns="27432" bIns="27432" anchor="t">
+          <a:bodyPr wrap="square" lIns="45720" tIns="27432" rIns="45720" bIns="27432" anchor="t">
             <a:spAutoFit/>
           </a:bodyPr>
           <a:lstStyle/>
@@ -7164,7 +6987,7 @@
           <a:noFill/>
         </p:spPr>
         <p:txBody>
-          <a:bodyPr wrap="square" lIns="45720" rIns="45720" tIns="27432" bIns="27432" anchor="ctr">
+          <a:bodyPr wrap="square" lIns="45720" tIns="27432" rIns="45720" bIns="27432" anchor="ctr">
             <a:spAutoFit/>
           </a:bodyPr>
           <a:lstStyle/>
@@ -7199,7 +7022,7 @@
           <a:noFill/>
         </p:spPr>
         <p:txBody>
-          <a:bodyPr wrap="square" lIns="45720" rIns="45720" tIns="27432" bIns="27432" anchor="t">
+          <a:bodyPr wrap="square" lIns="45720" tIns="27432" rIns="45720" bIns="27432" anchor="t">
             <a:spAutoFit/>
           </a:bodyPr>
           <a:lstStyle/>
@@ -7254,10 +7077,11 @@
           </a:fontRef>
         </p:style>
         <p:txBody>
-          <a:bodyPr rtlCol="0" anchor="ctr" lIns="45720" rIns="45720" tIns="27432" bIns="27432" wrap="square"/>
+          <a:bodyPr wrap="square" lIns="45720" tIns="27432" rIns="45720" bIns="27432" rtlCol="0" anchor="ctr"/>
           <a:lstStyle/>
           <a:p>
             <a:pPr algn="ctr"/>
+            <a:endParaRPr/>
           </a:p>
         </p:txBody>
       </p:sp>
@@ -7278,7 +7102,7 @@
           <a:noFill/>
         </p:spPr>
         <p:txBody>
-          <a:bodyPr wrap="square" lIns="45720" rIns="45720" tIns="27432" bIns="27432" anchor="t">
+          <a:bodyPr wrap="square" lIns="45720" tIns="27432" rIns="45720" bIns="27432" anchor="t">
             <a:spAutoFit/>
           </a:bodyPr>
           <a:lstStyle/>
@@ -7313,7 +7137,7 @@
           <a:noFill/>
         </p:spPr>
         <p:txBody>
-          <a:bodyPr wrap="square" lIns="45720" rIns="45720" tIns="27432" bIns="27432" anchor="t">
+          <a:bodyPr wrap="square" lIns="45720" tIns="27432" rIns="45720" bIns="27432" anchor="t">
             <a:spAutoFit/>
           </a:bodyPr>
           <a:lstStyle/>
@@ -7340,7 +7164,7 @@
 </file>
 
 <file path=ppt/slides/slide3.xml><?xml version="1.0" encoding="utf-8"?>
-<p:sld xmlns:a="http://schemas.openxmlformats.org/drawingml/2006/main" xmlns:p="http://schemas.openxmlformats.org/presentationml/2006/main" xmlns:r="http://schemas.openxmlformats.org/officeDocument/2006/relationships">
+<p:sld xmlns:a="http://schemas.openxmlformats.org/drawingml/2006/main" xmlns:r="http://schemas.openxmlformats.org/officeDocument/2006/relationships" xmlns:p="http://schemas.openxmlformats.org/presentationml/2006/main">
   <p:cSld>
     <p:bg>
       <p:bgPr>
@@ -7356,7 +7180,14 @@
         <p:cNvGrpSpPr/>
         <p:nvPr/>
       </p:nvGrpSpPr>
-      <p:grpSpPr/>
+      <p:grpSpPr>
+        <a:xfrm>
+          <a:off x="0" y="0"/>
+          <a:ext cx="0" cy="0"/>
+          <a:chOff x="0" y="0"/>
+          <a:chExt cx="0" cy="0"/>
+        </a:xfrm>
+      </p:grpSpPr>
       <p:sp>
         <p:nvSpPr>
           <p:cNvPr id="2" name="Rectangle 1"/>
@@ -7394,10 +7225,11 @@
           </a:fontRef>
         </p:style>
         <p:txBody>
-          <a:bodyPr rtlCol="0" anchor="ctr" lIns="45720" rIns="45720" tIns="27432" bIns="27432" wrap="square"/>
+          <a:bodyPr wrap="square" lIns="45720" tIns="27432" rIns="45720" bIns="27432" rtlCol="0" anchor="ctr"/>
           <a:lstStyle/>
           <a:p>
             <a:pPr algn="ctr"/>
+            <a:endParaRPr/>
           </a:p>
         </p:txBody>
       </p:sp>
@@ -7438,7 +7270,7 @@
           </a:fontRef>
         </p:style>
         <p:txBody>
-          <a:bodyPr rtlCol="0" anchor="ctr" lIns="45720" rIns="45720" tIns="27432" bIns="27432" wrap="square"/>
+          <a:bodyPr wrap="square" lIns="45720" tIns="27432" rIns="45720" bIns="27432" rtlCol="0" anchor="ctr"/>
           <a:lstStyle/>
           <a:p>
             <a:pPr algn="ctr"/>
@@ -7471,7 +7303,7 @@
           <a:noFill/>
         </p:spPr>
         <p:txBody>
-          <a:bodyPr wrap="square" lIns="45720" rIns="45720" tIns="27432" bIns="27432" anchor="t">
+          <a:bodyPr wrap="square" lIns="45720" tIns="27432" rIns="45720" bIns="27432" anchor="t">
             <a:spAutoFit/>
           </a:bodyPr>
           <a:lstStyle/>
@@ -7506,7 +7338,7 @@
           <a:noFill/>
         </p:spPr>
         <p:txBody>
-          <a:bodyPr wrap="square" lIns="45720" rIns="45720" tIns="27432" bIns="27432" anchor="t">
+          <a:bodyPr wrap="square" lIns="45720" tIns="27432" rIns="45720" bIns="27432" anchor="t">
             <a:spAutoFit/>
           </a:bodyPr>
           <a:lstStyle/>
@@ -7541,7 +7373,7 @@
           <a:noFill/>
         </p:spPr>
         <p:txBody>
-          <a:bodyPr wrap="square" lIns="45720" rIns="45720" tIns="27432" bIns="27432" anchor="t">
+          <a:bodyPr wrap="square" lIns="45720" tIns="27432" rIns="45720" bIns="27432" anchor="t">
             <a:spAutoFit/>
           </a:bodyPr>
           <a:lstStyle/>
@@ -7703,7 +7535,7 @@
           <p:nvPr/>
         </p:nvPicPr>
         <p:blipFill>
-          <a:blip r:embed="rId2"/>
+          <a:blip r:embed="rId3"/>
           <a:stretch>
             <a:fillRect/>
           </a:stretch>
@@ -7727,7 +7559,7 @@
           <p:nvPr/>
         </p:nvPicPr>
         <p:blipFill>
-          <a:blip r:embed="rId3"/>
+          <a:blip r:embed="rId4"/>
           <a:stretch>
             <a:fillRect/>
           </a:stretch>
@@ -7779,10 +7611,11 @@
           </a:fontRef>
         </p:style>
         <p:txBody>
-          <a:bodyPr rtlCol="0" anchor="ctr" lIns="45720" rIns="45720" tIns="27432" bIns="27432" wrap="square"/>
+          <a:bodyPr wrap="square" lIns="45720" tIns="27432" rIns="45720" bIns="27432" rtlCol="0" anchor="ctr"/>
           <a:lstStyle/>
           <a:p>
             <a:pPr algn="ctr"/>
+            <a:endParaRPr/>
           </a:p>
         </p:txBody>
       </p:sp>
@@ -7803,7 +7636,7 @@
           <a:noFill/>
         </p:spPr>
         <p:txBody>
-          <a:bodyPr wrap="square" lIns="45720" rIns="45720" tIns="27432" bIns="27432" anchor="t">
+          <a:bodyPr wrap="square" lIns="45720" tIns="27432" rIns="45720" bIns="27432" anchor="t">
             <a:spAutoFit/>
           </a:bodyPr>
           <a:lstStyle/>
@@ -7838,7 +7671,7 @@
           <a:noFill/>
         </p:spPr>
         <p:txBody>
-          <a:bodyPr wrap="square" lIns="45720" rIns="45720" tIns="27432" bIns="27432" anchor="t">
+          <a:bodyPr wrap="square" lIns="45720" tIns="27432" rIns="45720" bIns="27432" anchor="t">
             <a:spAutoFit/>
           </a:bodyPr>
           <a:lstStyle/>
@@ -7873,7 +7706,7 @@
           <a:noFill/>
         </p:spPr>
         <p:txBody>
-          <a:bodyPr wrap="square" lIns="45720" rIns="45720" tIns="27432" bIns="27432" anchor="t">
+          <a:bodyPr wrap="square" lIns="45720" tIns="27432" rIns="45720" bIns="27432" anchor="t">
             <a:spAutoFit/>
           </a:bodyPr>
           <a:lstStyle/>
@@ -7908,7 +7741,7 @@
           <a:noFill/>
         </p:spPr>
         <p:txBody>
-          <a:bodyPr wrap="square" lIns="45720" rIns="45720" tIns="27432" bIns="27432" anchor="t">
+          <a:bodyPr wrap="square" lIns="45720" tIns="27432" rIns="45720" bIns="27432" anchor="t">
             <a:spAutoFit/>
           </a:bodyPr>
           <a:lstStyle/>
@@ -7943,7 +7776,7 @@
           <a:noFill/>
         </p:spPr>
         <p:txBody>
-          <a:bodyPr wrap="square" lIns="45720" rIns="45720" tIns="27432" bIns="27432" anchor="t">
+          <a:bodyPr wrap="square" lIns="45720" tIns="27432" rIns="45720" bIns="27432" anchor="t">
             <a:spAutoFit/>
           </a:bodyPr>
           <a:lstStyle/>
@@ -7978,7 +7811,7 @@
           <a:noFill/>
         </p:spPr>
         <p:txBody>
-          <a:bodyPr wrap="square" lIns="45720" rIns="45720" tIns="27432" bIns="27432" anchor="t">
+          <a:bodyPr wrap="square" lIns="45720" tIns="27432" rIns="45720" bIns="27432" anchor="t">
             <a:spAutoFit/>
           </a:bodyPr>
           <a:lstStyle/>
@@ -8013,7 +7846,7 @@
           <a:noFill/>
         </p:spPr>
         <p:txBody>
-          <a:bodyPr wrap="square" lIns="45720" rIns="45720" tIns="27432" bIns="27432" anchor="t">
+          <a:bodyPr wrap="square" lIns="45720" tIns="27432" rIns="45720" bIns="27432" anchor="t">
             <a:spAutoFit/>
           </a:bodyPr>
           <a:lstStyle/>
@@ -8048,7 +7881,7 @@
           <a:noFill/>
         </p:spPr>
         <p:txBody>
-          <a:bodyPr wrap="square" lIns="45720" rIns="45720" tIns="27432" bIns="27432" anchor="t">
+          <a:bodyPr wrap="square" lIns="45720" tIns="27432" rIns="45720" bIns="27432" anchor="t">
             <a:spAutoFit/>
           </a:bodyPr>
           <a:lstStyle/>
@@ -8083,7 +7916,7 @@
           <a:noFill/>
         </p:spPr>
         <p:txBody>
-          <a:bodyPr wrap="square" lIns="45720" rIns="45720" tIns="27432" bIns="27432" anchor="t">
+          <a:bodyPr wrap="square" lIns="45720" tIns="27432" rIns="45720" bIns="27432" anchor="t">
             <a:spAutoFit/>
           </a:bodyPr>
           <a:lstStyle/>
@@ -8118,7 +7951,7 @@
           <a:noFill/>
         </p:spPr>
         <p:txBody>
-          <a:bodyPr wrap="square" lIns="45720" rIns="45720" tIns="27432" bIns="27432" anchor="t">
+          <a:bodyPr wrap="square" lIns="45720" tIns="27432" rIns="45720" bIns="27432" anchor="t">
             <a:spAutoFit/>
           </a:bodyPr>
           <a:lstStyle/>
@@ -8153,7 +7986,7 @@
           <a:noFill/>
         </p:spPr>
         <p:txBody>
-          <a:bodyPr wrap="square" lIns="45720" rIns="45720" tIns="27432" bIns="27432" anchor="t">
+          <a:bodyPr wrap="square" lIns="45720" tIns="27432" rIns="45720" bIns="27432" anchor="t">
             <a:spAutoFit/>
           </a:bodyPr>
           <a:lstStyle/>
@@ -8188,7 +8021,7 @@
           <a:noFill/>
         </p:spPr>
         <p:txBody>
-          <a:bodyPr wrap="square" lIns="45720" rIns="45720" tIns="27432" bIns="27432" anchor="t">
+          <a:bodyPr wrap="square" lIns="45720" tIns="27432" rIns="45720" bIns="27432" anchor="t">
             <a:spAutoFit/>
           </a:bodyPr>
           <a:lstStyle/>
@@ -8223,7 +8056,7 @@
           <a:noFill/>
         </p:spPr>
         <p:txBody>
-          <a:bodyPr wrap="square" lIns="45720" rIns="45720" tIns="27432" bIns="27432" anchor="t">
+          <a:bodyPr wrap="square" lIns="45720" tIns="27432" rIns="45720" bIns="27432" anchor="t">
             <a:spAutoFit/>
           </a:bodyPr>
           <a:lstStyle/>
@@ -8258,7 +8091,7 @@
           <a:noFill/>
         </p:spPr>
         <p:txBody>
-          <a:bodyPr wrap="square" lIns="45720" rIns="45720" tIns="27432" bIns="27432" anchor="t">
+          <a:bodyPr wrap="square" lIns="45720" tIns="27432" rIns="45720" bIns="27432" anchor="t">
             <a:spAutoFit/>
           </a:bodyPr>
           <a:lstStyle/>
@@ -8293,7 +8126,7 @@
           <a:noFill/>
         </p:spPr>
         <p:txBody>
-          <a:bodyPr wrap="square" lIns="45720" rIns="45720" tIns="27432" bIns="27432" anchor="t">
+          <a:bodyPr wrap="square" lIns="45720" tIns="27432" rIns="45720" bIns="27432" anchor="t">
             <a:spAutoFit/>
           </a:bodyPr>
           <a:lstStyle/>
@@ -8320,7 +8153,7 @@
 </file>
 
 <file path=ppt/slides/slide4.xml><?xml version="1.0" encoding="utf-8"?>
-<p:sld xmlns:a="http://schemas.openxmlformats.org/drawingml/2006/main" xmlns:p="http://schemas.openxmlformats.org/presentationml/2006/main" xmlns:r="http://schemas.openxmlformats.org/officeDocument/2006/relationships">
+<p:sld xmlns:a="http://schemas.openxmlformats.org/drawingml/2006/main" xmlns:r="http://schemas.openxmlformats.org/officeDocument/2006/relationships" xmlns:p="http://schemas.openxmlformats.org/presentationml/2006/main">
   <p:cSld>
     <p:bg>
       <p:bgPr>
@@ -8336,7 +8169,14 @@
         <p:cNvGrpSpPr/>
         <p:nvPr/>
       </p:nvGrpSpPr>
-      <p:grpSpPr/>
+      <p:grpSpPr>
+        <a:xfrm>
+          <a:off x="0" y="0"/>
+          <a:ext cx="0" cy="0"/>
+          <a:chOff x="0" y="0"/>
+          <a:chExt cx="0" cy="0"/>
+        </a:xfrm>
+      </p:grpSpPr>
       <p:sp>
         <p:nvSpPr>
           <p:cNvPr id="2" name="Rectangle 1"/>
@@ -8374,10 +8214,11 @@
           </a:fontRef>
         </p:style>
         <p:txBody>
-          <a:bodyPr rtlCol="0" anchor="ctr" lIns="45720" rIns="45720" tIns="27432" bIns="27432" wrap="square"/>
+          <a:bodyPr wrap="square" lIns="45720" tIns="27432" rIns="45720" bIns="27432" rtlCol="0" anchor="ctr"/>
           <a:lstStyle/>
           <a:p>
             <a:pPr algn="ctr"/>
+            <a:endParaRPr/>
           </a:p>
         </p:txBody>
       </p:sp>
@@ -8418,7 +8259,7 @@
           </a:fontRef>
         </p:style>
         <p:txBody>
-          <a:bodyPr rtlCol="0" anchor="ctr" lIns="45720" rIns="45720" tIns="27432" bIns="27432" wrap="square"/>
+          <a:bodyPr wrap="square" lIns="45720" tIns="27432" rIns="45720" bIns="27432" rtlCol="0" anchor="ctr"/>
           <a:lstStyle/>
           <a:p>
             <a:pPr algn="ctr"/>
@@ -8451,7 +8292,7 @@
           <a:noFill/>
         </p:spPr>
         <p:txBody>
-          <a:bodyPr wrap="square" lIns="45720" rIns="45720" tIns="27432" bIns="27432" anchor="t">
+          <a:bodyPr wrap="square" lIns="45720" tIns="27432" rIns="45720" bIns="27432" anchor="t">
             <a:spAutoFit/>
           </a:bodyPr>
           <a:lstStyle/>
@@ -8486,7 +8327,7 @@
           <a:noFill/>
         </p:spPr>
         <p:txBody>
-          <a:bodyPr wrap="square" lIns="45720" rIns="45720" tIns="27432" bIns="27432" anchor="t">
+          <a:bodyPr wrap="square" lIns="45720" tIns="27432" rIns="45720" bIns="27432" anchor="t">
             <a:spAutoFit/>
           </a:bodyPr>
           <a:lstStyle/>
@@ -8521,7 +8362,7 @@
           <a:noFill/>
         </p:spPr>
         <p:txBody>
-          <a:bodyPr wrap="square" lIns="45720" rIns="45720" tIns="27432" bIns="27432" anchor="t">
+          <a:bodyPr wrap="square" lIns="45720" tIns="27432" rIns="45720" bIns="27432" anchor="t">
             <a:spAutoFit/>
           </a:bodyPr>
           <a:lstStyle/>
@@ -8576,10 +8417,11 @@
           </a:fontRef>
         </p:style>
         <p:txBody>
-          <a:bodyPr rtlCol="0" anchor="ctr" lIns="45720" rIns="45720" tIns="27432" bIns="27432" wrap="square"/>
+          <a:bodyPr wrap="square" lIns="45720" tIns="27432" rIns="45720" bIns="27432" rtlCol="0" anchor="ctr"/>
           <a:lstStyle/>
           <a:p>
             <a:pPr algn="ctr"/>
+            <a:endParaRPr/>
           </a:p>
         </p:txBody>
       </p:sp>
@@ -8600,7 +8442,7 @@
           <a:noFill/>
         </p:spPr>
         <p:txBody>
-          <a:bodyPr wrap="square" lIns="45720" rIns="45720" tIns="27432" bIns="27432" anchor="t">
+          <a:bodyPr wrap="square" lIns="45720" tIns="27432" rIns="45720" bIns="27432" anchor="t">
             <a:spAutoFit/>
           </a:bodyPr>
           <a:lstStyle/>
@@ -8734,7 +8576,7 @@
           <p:nvPr/>
         </p:nvPicPr>
         <p:blipFill>
-          <a:blip r:embed="rId2"/>
+          <a:blip r:embed="rId3"/>
           <a:stretch>
             <a:fillRect/>
           </a:stretch>
@@ -8758,7 +8600,7 @@
           <p:nvPr/>
         </p:nvPicPr>
         <p:blipFill>
-          <a:blip r:embed="rId3"/>
+          <a:blip r:embed="rId4"/>
           <a:stretch>
             <a:fillRect/>
           </a:stretch>
@@ -8810,10 +8652,11 @@
           </a:fontRef>
         </p:style>
         <p:txBody>
-          <a:bodyPr rtlCol="0" anchor="ctr" lIns="45720" rIns="45720" tIns="27432" bIns="27432" wrap="square"/>
+          <a:bodyPr wrap="square" lIns="45720" tIns="27432" rIns="45720" bIns="27432" rtlCol="0" anchor="ctr"/>
           <a:lstStyle/>
           <a:p>
             <a:pPr algn="ctr"/>
+            <a:endParaRPr/>
           </a:p>
         </p:txBody>
       </p:sp>
@@ -8834,7 +8677,7 @@
           <a:noFill/>
         </p:spPr>
         <p:txBody>
-          <a:bodyPr wrap="square" lIns="45720" rIns="45720" tIns="27432" bIns="27432" anchor="t">
+          <a:bodyPr wrap="square" lIns="45720" tIns="27432" rIns="45720" bIns="27432" anchor="t">
             <a:spAutoFit/>
           </a:bodyPr>
           <a:lstStyle/>
@@ -8968,7 +8811,7 @@
           <p:nvPr/>
         </p:nvPicPr>
         <p:blipFill>
-          <a:blip r:embed="rId4"/>
+          <a:blip r:embed="rId5"/>
           <a:stretch>
             <a:fillRect/>
           </a:stretch>
@@ -8992,7 +8835,7 @@
           <p:nvPr/>
         </p:nvPicPr>
         <p:blipFill>
-          <a:blip r:embed="rId5"/>
+          <a:blip r:embed="rId6"/>
           <a:stretch>
             <a:fillRect/>
           </a:stretch>
@@ -9016,7 +8859,7 @@
 </file>
 
 <file path=ppt/slides/slide5.xml><?xml version="1.0" encoding="utf-8"?>
-<p:sld xmlns:a="http://schemas.openxmlformats.org/drawingml/2006/main" xmlns:p="http://schemas.openxmlformats.org/presentationml/2006/main" xmlns:r="http://schemas.openxmlformats.org/officeDocument/2006/relationships">
+<p:sld xmlns:a="http://schemas.openxmlformats.org/drawingml/2006/main" xmlns:r="http://schemas.openxmlformats.org/officeDocument/2006/relationships" xmlns:p="http://schemas.openxmlformats.org/presentationml/2006/main">
   <p:cSld>
     <p:bg>
       <p:bgPr>
@@ -9032,7 +8875,14 @@
         <p:cNvGrpSpPr/>
         <p:nvPr/>
       </p:nvGrpSpPr>
-      <p:grpSpPr/>
+      <p:grpSpPr>
+        <a:xfrm>
+          <a:off x="0" y="0"/>
+          <a:ext cx="0" cy="0"/>
+          <a:chOff x="0" y="0"/>
+          <a:chExt cx="0" cy="0"/>
+        </a:xfrm>
+      </p:grpSpPr>
       <p:sp>
         <p:nvSpPr>
           <p:cNvPr id="2" name="Rectangle 1"/>
@@ -9070,10 +8920,11 @@
           </a:fontRef>
         </p:style>
         <p:txBody>
-          <a:bodyPr rtlCol="0" anchor="ctr" lIns="45720" rIns="45720" tIns="27432" bIns="27432" wrap="square"/>
+          <a:bodyPr wrap="square" lIns="45720" tIns="27432" rIns="45720" bIns="27432" rtlCol="0" anchor="ctr"/>
           <a:lstStyle/>
           <a:p>
             <a:pPr algn="ctr"/>
+            <a:endParaRPr/>
           </a:p>
         </p:txBody>
       </p:sp>
@@ -9114,7 +8965,7 @@
           </a:fontRef>
         </p:style>
         <p:txBody>
-          <a:bodyPr rtlCol="0" anchor="ctr" lIns="45720" rIns="45720" tIns="27432" bIns="27432" wrap="square"/>
+          <a:bodyPr wrap="square" lIns="45720" tIns="27432" rIns="45720" bIns="27432" rtlCol="0" anchor="ctr"/>
           <a:lstStyle/>
           <a:p>
             <a:pPr algn="ctr"/>
@@ -9147,7 +8998,7 @@
           <a:noFill/>
         </p:spPr>
         <p:txBody>
-          <a:bodyPr wrap="square" lIns="45720" rIns="45720" tIns="27432" bIns="27432" anchor="t">
+          <a:bodyPr wrap="square" lIns="45720" tIns="27432" rIns="45720" bIns="27432" anchor="t">
             <a:spAutoFit/>
           </a:bodyPr>
           <a:lstStyle/>
@@ -9182,7 +9033,7 @@
           <a:noFill/>
         </p:spPr>
         <p:txBody>
-          <a:bodyPr wrap="square" lIns="45720" rIns="45720" tIns="27432" bIns="27432" anchor="t">
+          <a:bodyPr wrap="square" lIns="45720" tIns="27432" rIns="45720" bIns="27432" anchor="t">
             <a:spAutoFit/>
           </a:bodyPr>
           <a:lstStyle/>
@@ -9217,7 +9068,7 @@
           <a:noFill/>
         </p:spPr>
         <p:txBody>
-          <a:bodyPr wrap="square" lIns="45720" rIns="45720" tIns="27432" bIns="27432" anchor="t">
+          <a:bodyPr wrap="square" lIns="45720" tIns="27432" rIns="45720" bIns="27432" anchor="t">
             <a:spAutoFit/>
           </a:bodyPr>
           <a:lstStyle/>
@@ -9351,7 +9202,7 @@
           </a:fontRef>
         </p:style>
         <p:txBody>
-          <a:bodyPr rtlCol="0" anchor="ctr" lIns="45720" rIns="45720" tIns="27432" bIns="27432" wrap="square"/>
+          <a:bodyPr wrap="square" lIns="45720" tIns="27432" rIns="45720" bIns="27432" rtlCol="0" anchor="ctr"/>
           <a:lstStyle/>
           <a:p>
             <a:pPr algn="ctr"/>
@@ -9419,7 +9270,7 @@
           </a:fontRef>
         </p:style>
         <p:txBody>
-          <a:bodyPr rtlCol="0" anchor="ctr" lIns="45720" rIns="45720" tIns="27432" bIns="27432" wrap="square"/>
+          <a:bodyPr wrap="square" lIns="45720" tIns="27432" rIns="45720" bIns="27432" rtlCol="0" anchor="ctr"/>
           <a:lstStyle/>
           <a:p>
             <a:pPr algn="ctr"/>
@@ -9472,10 +9323,11 @@
           </a:fontRef>
         </p:style>
         <p:txBody>
-          <a:bodyPr rtlCol="0" anchor="ctr" lIns="45720" rIns="45720" tIns="27432" bIns="27432" wrap="square"/>
+          <a:bodyPr wrap="square" lIns="45720" tIns="27432" rIns="45720" bIns="27432" rtlCol="0" anchor="ctr"/>
           <a:lstStyle/>
           <a:p>
             <a:pPr algn="ctr"/>
+            <a:endParaRPr/>
           </a:p>
         </p:txBody>
       </p:sp>
@@ -9516,7 +9368,7 @@
           </a:fontRef>
         </p:style>
         <p:txBody>
-          <a:bodyPr rtlCol="0" anchor="ctr" lIns="45720" rIns="45720" tIns="27432" bIns="27432" wrap="square"/>
+          <a:bodyPr wrap="square" lIns="45720" tIns="27432" rIns="45720" bIns="27432" rtlCol="0" anchor="ctr"/>
           <a:lstStyle/>
           <a:p>
             <a:pPr algn="ctr"/>
@@ -9584,7 +9436,7 @@
           </a:fontRef>
         </p:style>
         <p:txBody>
-          <a:bodyPr rtlCol="0" anchor="ctr" lIns="45720" rIns="45720" tIns="27432" bIns="27432" wrap="square"/>
+          <a:bodyPr wrap="square" lIns="45720" tIns="27432" rIns="45720" bIns="27432" rtlCol="0" anchor="ctr"/>
           <a:lstStyle/>
           <a:p>
             <a:pPr algn="ctr"/>
@@ -9637,10 +9489,11 @@
           </a:fontRef>
         </p:style>
         <p:txBody>
-          <a:bodyPr rtlCol="0" anchor="ctr" lIns="45720" rIns="45720" tIns="27432" bIns="27432" wrap="square"/>
+          <a:bodyPr wrap="square" lIns="45720" tIns="27432" rIns="45720" bIns="27432" rtlCol="0" anchor="ctr"/>
           <a:lstStyle/>
           <a:p>
             <a:pPr algn="ctr"/>
+            <a:endParaRPr/>
           </a:p>
         </p:txBody>
       </p:sp>
@@ -9681,7 +9534,7 @@
           </a:fontRef>
         </p:style>
         <p:txBody>
-          <a:bodyPr rtlCol="0" anchor="ctr" lIns="45720" rIns="45720" tIns="27432" bIns="27432" wrap="square"/>
+          <a:bodyPr wrap="square" lIns="45720" tIns="27432" rIns="45720" bIns="27432" rtlCol="0" anchor="ctr"/>
           <a:lstStyle/>
           <a:p>
             <a:pPr algn="ctr"/>
@@ -9749,7 +9602,7 @@
           </a:fontRef>
         </p:style>
         <p:txBody>
-          <a:bodyPr rtlCol="0" anchor="ctr" lIns="45720" rIns="45720" tIns="27432" bIns="27432" wrap="square"/>
+          <a:bodyPr wrap="square" lIns="45720" tIns="27432" rIns="45720" bIns="27432" rtlCol="0" anchor="ctr"/>
           <a:lstStyle/>
           <a:p>
             <a:pPr algn="ctr"/>
@@ -9802,10 +9655,11 @@
           </a:fontRef>
         </p:style>
         <p:txBody>
-          <a:bodyPr rtlCol="0" anchor="ctr" lIns="45720" rIns="45720" tIns="27432" bIns="27432" wrap="square"/>
+          <a:bodyPr wrap="square" lIns="45720" tIns="27432" rIns="45720" bIns="27432" rtlCol="0" anchor="ctr"/>
           <a:lstStyle/>
           <a:p>
             <a:pPr algn="ctr"/>
+            <a:endParaRPr/>
           </a:p>
         </p:txBody>
       </p:sp>
@@ -9846,7 +9700,7 @@
           </a:fontRef>
         </p:style>
         <p:txBody>
-          <a:bodyPr rtlCol="0" anchor="ctr" lIns="45720" rIns="45720" tIns="27432" bIns="27432" wrap="square"/>
+          <a:bodyPr wrap="square" lIns="45720" tIns="27432" rIns="45720" bIns="27432" rtlCol="0" anchor="ctr"/>
           <a:lstStyle/>
           <a:p>
             <a:pPr algn="ctr"/>
@@ -9914,7 +9768,7 @@
           </a:fontRef>
         </p:style>
         <p:txBody>
-          <a:bodyPr rtlCol="0" anchor="ctr" lIns="45720" rIns="45720" tIns="27432" bIns="27432" wrap="square"/>
+          <a:bodyPr wrap="square" lIns="45720" tIns="27432" rIns="45720" bIns="27432" rtlCol="0" anchor="ctr"/>
           <a:lstStyle/>
           <a:p>
             <a:pPr algn="ctr"/>
@@ -9967,10 +9821,11 @@
           </a:fontRef>
         </p:style>
         <p:txBody>
-          <a:bodyPr rtlCol="0" anchor="ctr" lIns="45720" rIns="45720" tIns="27432" bIns="27432" wrap="square"/>
+          <a:bodyPr wrap="square" lIns="45720" tIns="27432" rIns="45720" bIns="27432" rtlCol="0" anchor="ctr"/>
           <a:lstStyle/>
           <a:p>
             <a:pPr algn="ctr"/>
+            <a:endParaRPr/>
           </a:p>
         </p:txBody>
       </p:sp>
@@ -10011,7 +9866,7 @@
           </a:fontRef>
         </p:style>
         <p:txBody>
-          <a:bodyPr rtlCol="0" anchor="ctr" lIns="45720" rIns="45720" tIns="27432" bIns="27432" wrap="square"/>
+          <a:bodyPr wrap="square" lIns="45720" tIns="27432" rIns="45720" bIns="27432" rtlCol="0" anchor="ctr"/>
           <a:lstStyle/>
           <a:p>
             <a:pPr algn="ctr"/>
@@ -10079,7 +9934,7 @@
           </a:fontRef>
         </p:style>
         <p:txBody>
-          <a:bodyPr rtlCol="0" anchor="ctr" lIns="45720" rIns="45720" tIns="27432" bIns="27432" wrap="square"/>
+          <a:bodyPr wrap="square" lIns="45720" tIns="27432" rIns="45720" bIns="27432" rtlCol="0" anchor="ctr"/>
           <a:lstStyle/>
           <a:p>
             <a:pPr algn="ctr"/>
@@ -10132,10 +9987,11 @@
           </a:fontRef>
         </p:style>
         <p:txBody>
-          <a:bodyPr rtlCol="0" anchor="ctr" lIns="45720" rIns="45720" tIns="27432" bIns="27432" wrap="square"/>
+          <a:bodyPr wrap="square" lIns="45720" tIns="27432" rIns="45720" bIns="27432" rtlCol="0" anchor="ctr"/>
           <a:lstStyle/>
           <a:p>
             <a:pPr algn="ctr"/>
+            <a:endParaRPr/>
           </a:p>
         </p:txBody>
       </p:sp>
@@ -10176,7 +10032,7 @@
           </a:fontRef>
         </p:style>
         <p:txBody>
-          <a:bodyPr rtlCol="0" anchor="ctr" lIns="45720" rIns="45720" tIns="27432" bIns="27432" wrap="square"/>
+          <a:bodyPr wrap="square" lIns="45720" tIns="27432" rIns="45720" bIns="27432" rtlCol="0" anchor="ctr"/>
           <a:lstStyle/>
           <a:p>
             <a:pPr algn="ctr"/>
@@ -10244,7 +10100,7 @@
           </a:fontRef>
         </p:style>
         <p:txBody>
-          <a:bodyPr rtlCol="0" anchor="ctr" lIns="45720" rIns="45720" tIns="27432" bIns="27432" wrap="square"/>
+          <a:bodyPr wrap="square" lIns="45720" tIns="27432" rIns="45720" bIns="27432" rtlCol="0" anchor="ctr"/>
           <a:lstStyle/>
           <a:p>
             <a:pPr algn="ctr"/>
@@ -10297,7 +10153,7 @@
           </a:fontRef>
         </p:style>
         <p:txBody>
-          <a:bodyPr rtlCol="0" anchor="ctr" lIns="45720" rIns="45720" tIns="27432" bIns="27432" wrap="square"/>
+          <a:bodyPr wrap="square" lIns="45720" tIns="27432" rIns="45720" bIns="27432" rtlCol="0" anchor="ctr"/>
           <a:lstStyle/>
           <a:p>
             <a:pPr algn="ctr"/>
@@ -10322,7 +10178,7 @@
 </file>
 
 <file path=ppt/slides/slide6.xml><?xml version="1.0" encoding="utf-8"?>
-<p:sld xmlns:a="http://schemas.openxmlformats.org/drawingml/2006/main" xmlns:p="http://schemas.openxmlformats.org/presentationml/2006/main" xmlns:r="http://schemas.openxmlformats.org/officeDocument/2006/relationships">
+<p:sld xmlns:a="http://schemas.openxmlformats.org/drawingml/2006/main" xmlns:r="http://schemas.openxmlformats.org/officeDocument/2006/relationships" xmlns:p="http://schemas.openxmlformats.org/presentationml/2006/main">
   <p:cSld>
     <p:bg>
       <p:bgPr>
@@ -10338,7 +10194,14 @@
         <p:cNvGrpSpPr/>
         <p:nvPr/>
       </p:nvGrpSpPr>
-      <p:grpSpPr/>
+      <p:grpSpPr>
+        <a:xfrm>
+          <a:off x="0" y="0"/>
+          <a:ext cx="0" cy="0"/>
+          <a:chOff x="0" y="0"/>
+          <a:chExt cx="0" cy="0"/>
+        </a:xfrm>
+      </p:grpSpPr>
       <p:sp>
         <p:nvSpPr>
           <p:cNvPr id="2" name="Rectangle 1"/>
@@ -10376,10 +10239,11 @@
           </a:fontRef>
         </p:style>
         <p:txBody>
-          <a:bodyPr rtlCol="0" anchor="ctr" lIns="45720" rIns="45720" tIns="27432" bIns="27432" wrap="square"/>
+          <a:bodyPr wrap="square" lIns="45720" tIns="27432" rIns="45720" bIns="27432" rtlCol="0" anchor="ctr"/>
           <a:lstStyle/>
           <a:p>
             <a:pPr algn="ctr"/>
+            <a:endParaRPr/>
           </a:p>
         </p:txBody>
       </p:sp>
@@ -10420,7 +10284,7 @@
           </a:fontRef>
         </p:style>
         <p:txBody>
-          <a:bodyPr rtlCol="0" anchor="ctr" lIns="45720" rIns="45720" tIns="27432" bIns="27432" wrap="square"/>
+          <a:bodyPr wrap="square" lIns="45720" tIns="27432" rIns="45720" bIns="27432" rtlCol="0" anchor="ctr"/>
           <a:lstStyle/>
           <a:p>
             <a:pPr algn="ctr"/>
@@ -10453,7 +10317,7 @@
           <a:noFill/>
         </p:spPr>
         <p:txBody>
-          <a:bodyPr wrap="square" lIns="45720" rIns="45720" tIns="27432" bIns="27432" anchor="t">
+          <a:bodyPr wrap="square" lIns="45720" tIns="27432" rIns="45720" bIns="27432" anchor="t">
             <a:spAutoFit/>
           </a:bodyPr>
           <a:lstStyle/>
@@ -10488,7 +10352,7 @@
           <a:noFill/>
         </p:spPr>
         <p:txBody>
-          <a:bodyPr wrap="square" lIns="45720" rIns="45720" tIns="27432" bIns="27432" anchor="t">
+          <a:bodyPr wrap="square" lIns="45720" tIns="27432" rIns="45720" bIns="27432" anchor="t">
             <a:spAutoFit/>
           </a:bodyPr>
           <a:lstStyle/>
@@ -10523,7 +10387,7 @@
           <a:noFill/>
         </p:spPr>
         <p:txBody>
-          <a:bodyPr wrap="square" lIns="45720" rIns="45720" tIns="27432" bIns="27432" anchor="t">
+          <a:bodyPr wrap="square" lIns="45720" tIns="27432" rIns="45720" bIns="27432" anchor="t">
             <a:spAutoFit/>
           </a:bodyPr>
           <a:lstStyle/>
@@ -10578,10 +10442,11 @@
           </a:fontRef>
         </p:style>
         <p:txBody>
-          <a:bodyPr rtlCol="0" anchor="ctr" lIns="45720" rIns="45720" tIns="27432" bIns="27432" wrap="square"/>
+          <a:bodyPr wrap="square" lIns="45720" tIns="27432" rIns="45720" bIns="27432" rtlCol="0" anchor="ctr"/>
           <a:lstStyle/>
           <a:p>
             <a:pPr algn="ctr"/>
+            <a:endParaRPr/>
           </a:p>
         </p:txBody>
       </p:sp>
@@ -10602,7 +10467,7 @@
           <a:noFill/>
         </p:spPr>
         <p:txBody>
-          <a:bodyPr wrap="square" lIns="45720" rIns="45720" tIns="27432" bIns="27432" anchor="t">
+          <a:bodyPr wrap="square" lIns="45720" tIns="27432" rIns="45720" bIns="27432" anchor="t">
             <a:spAutoFit/>
           </a:bodyPr>
           <a:lstStyle/>
@@ -10848,7 +10713,7 @@
           </a:fontRef>
         </p:style>
         <p:txBody>
-          <a:bodyPr rtlCol="0" anchor="ctr" lIns="228600" rIns="228600" tIns="27432" bIns="27432" wrap="square"/>
+          <a:bodyPr wrap="square" lIns="228600" tIns="27432" rIns="228600" bIns="27432" rtlCol="0" anchor="ctr"/>
           <a:lstStyle/>
           <a:p>
             <a:pPr algn="l"/>
@@ -10897,7 +10762,7 @@
           <a:noFill/>
         </p:spPr>
         <p:txBody>
-          <a:bodyPr wrap="square" lIns="45720" rIns="45720" tIns="27432" bIns="27432" anchor="t">
+          <a:bodyPr wrap="square" lIns="45720" tIns="27432" rIns="45720" bIns="27432" anchor="t">
             <a:spAutoFit/>
           </a:bodyPr>
           <a:lstStyle/>
@@ -10924,7 +10789,7 @@
 </file>
 
 <file path=ppt/slides/slide7.xml><?xml version="1.0" encoding="utf-8"?>
-<p:sld xmlns:a="http://schemas.openxmlformats.org/drawingml/2006/main" xmlns:p="http://schemas.openxmlformats.org/presentationml/2006/main" xmlns:r="http://schemas.openxmlformats.org/officeDocument/2006/relationships">
+<p:sld xmlns:a="http://schemas.openxmlformats.org/drawingml/2006/main" xmlns:r="http://schemas.openxmlformats.org/officeDocument/2006/relationships" xmlns:p="http://schemas.openxmlformats.org/presentationml/2006/main">
   <p:cSld>
     <p:bg>
       <p:bgPr>
@@ -10940,7 +10805,14 @@
         <p:cNvGrpSpPr/>
         <p:nvPr/>
       </p:nvGrpSpPr>
-      <p:grpSpPr/>
+      <p:grpSpPr>
+        <a:xfrm>
+          <a:off x="0" y="0"/>
+          <a:ext cx="0" cy="0"/>
+          <a:chOff x="0" y="0"/>
+          <a:chExt cx="0" cy="0"/>
+        </a:xfrm>
+      </p:grpSpPr>
       <p:sp>
         <p:nvSpPr>
           <p:cNvPr id="2" name="Rectangle 1"/>
@@ -10978,10 +10850,11 @@
           </a:fontRef>
         </p:style>
         <p:txBody>
-          <a:bodyPr rtlCol="0" anchor="ctr" lIns="45720" rIns="45720" tIns="27432" bIns="27432" wrap="square"/>
+          <a:bodyPr wrap="square" lIns="45720" tIns="27432" rIns="45720" bIns="27432" rtlCol="0" anchor="ctr"/>
           <a:lstStyle/>
           <a:p>
             <a:pPr algn="ctr"/>
+            <a:endParaRPr/>
           </a:p>
         </p:txBody>
       </p:sp>
@@ -11022,7 +10895,7 @@
           </a:fontRef>
         </p:style>
         <p:txBody>
-          <a:bodyPr rtlCol="0" anchor="ctr" lIns="45720" rIns="45720" tIns="27432" bIns="27432" wrap="square"/>
+          <a:bodyPr wrap="square" lIns="45720" tIns="27432" rIns="45720" bIns="27432" rtlCol="0" anchor="ctr"/>
           <a:lstStyle/>
           <a:p>
             <a:pPr algn="ctr"/>
@@ -11055,7 +10928,7 @@
           <a:noFill/>
         </p:spPr>
         <p:txBody>
-          <a:bodyPr wrap="square" lIns="45720" rIns="45720" tIns="27432" bIns="27432" anchor="t">
+          <a:bodyPr wrap="square" lIns="45720" tIns="27432" rIns="45720" bIns="27432" anchor="t">
             <a:spAutoFit/>
           </a:bodyPr>
           <a:lstStyle/>
@@ -11090,7 +10963,7 @@
           <a:noFill/>
         </p:spPr>
         <p:txBody>
-          <a:bodyPr wrap="square" lIns="45720" rIns="45720" tIns="27432" bIns="27432" anchor="t">
+          <a:bodyPr wrap="square" lIns="45720" tIns="27432" rIns="45720" bIns="27432" anchor="t">
             <a:spAutoFit/>
           </a:bodyPr>
           <a:lstStyle/>
@@ -11125,7 +10998,7 @@
           <a:noFill/>
         </p:spPr>
         <p:txBody>
-          <a:bodyPr wrap="square" lIns="45720" rIns="45720" tIns="27432" bIns="27432" anchor="t">
+          <a:bodyPr wrap="square" lIns="45720" tIns="27432" rIns="45720" bIns="27432" anchor="t">
             <a:spAutoFit/>
           </a:bodyPr>
           <a:lstStyle/>
@@ -11180,7 +11053,7 @@
           </a:fontRef>
         </p:style>
         <p:txBody>
-          <a:bodyPr rtlCol="0" anchor="ctr" lIns="45720" rIns="45720" tIns="27432" bIns="27432" wrap="square"/>
+          <a:bodyPr wrap="square" lIns="45720" tIns="27432" rIns="45720" bIns="27432" rtlCol="0" anchor="ctr"/>
           <a:lstStyle/>
           <a:p>
             <a:pPr algn="ctr"/>
@@ -11233,7 +11106,7 @@
           </a:fontRef>
         </p:style>
         <p:txBody>
-          <a:bodyPr rtlCol="0" anchor="ctr" tIns="27432" bIns="27432" wrap="square"/>
+          <a:bodyPr wrap="square" tIns="27432" bIns="27432" rtlCol="0" anchor="ctr"/>
           <a:lstStyle/>
           <a:p>
             <a:pPr algn="ctr"/>
@@ -11303,7 +11176,7 @@
           </a:fontRef>
         </p:style>
         <p:txBody>
-          <a:bodyPr rtlCol="0" anchor="ctr" lIns="45720" rIns="45720" tIns="27432" bIns="27432" wrap="square"/>
+          <a:bodyPr wrap="square" lIns="45720" tIns="27432" rIns="45720" bIns="27432" rtlCol="0" anchor="ctr"/>
           <a:lstStyle/>
           <a:p>
             <a:pPr algn="ctr"/>
@@ -11356,7 +11229,7 @@
           </a:fontRef>
         </p:style>
         <p:txBody>
-          <a:bodyPr rtlCol="0" anchor="ctr" tIns="27432" bIns="27432" wrap="square"/>
+          <a:bodyPr wrap="square" tIns="27432" bIns="27432" rtlCol="0" anchor="ctr"/>
           <a:lstStyle/>
           <a:p>
             <a:pPr algn="ctr"/>
@@ -11426,7 +11299,7 @@
           </a:fontRef>
         </p:style>
         <p:txBody>
-          <a:bodyPr rtlCol="0" anchor="ctr" lIns="45720" rIns="45720" tIns="27432" bIns="27432" wrap="square"/>
+          <a:bodyPr wrap="square" lIns="45720" tIns="27432" rIns="45720" bIns="27432" rtlCol="0" anchor="ctr"/>
           <a:lstStyle/>
           <a:p>
             <a:pPr algn="ctr"/>
@@ -11479,7 +11352,7 @@
           </a:fontRef>
         </p:style>
         <p:txBody>
-          <a:bodyPr rtlCol="0" anchor="ctr" tIns="27432" bIns="27432" wrap="square"/>
+          <a:bodyPr wrap="square" tIns="27432" bIns="27432" rtlCol="0" anchor="ctr"/>
           <a:lstStyle/>
           <a:p>
             <a:pPr algn="ctr"/>
@@ -11549,7 +11422,7 @@
           </a:fontRef>
         </p:style>
         <p:txBody>
-          <a:bodyPr rtlCol="0" anchor="ctr" lIns="45720" rIns="45720" tIns="27432" bIns="27432" wrap="square"/>
+          <a:bodyPr wrap="square" lIns="45720" tIns="27432" rIns="45720" bIns="27432" rtlCol="0" anchor="ctr"/>
           <a:lstStyle/>
           <a:p>
             <a:pPr algn="ctr"/>
@@ -11602,7 +11475,7 @@
           </a:fontRef>
         </p:style>
         <p:txBody>
-          <a:bodyPr rtlCol="0" anchor="ctr" tIns="27432" bIns="27432" wrap="square"/>
+          <a:bodyPr wrap="square" tIns="27432" bIns="27432" rtlCol="0" anchor="ctr"/>
           <a:lstStyle/>
           <a:p>
             <a:pPr algn="ctr"/>
@@ -11672,7 +11545,7 @@
           </a:fontRef>
         </p:style>
         <p:txBody>
-          <a:bodyPr rtlCol="0" anchor="ctr" lIns="45720" rIns="45720" tIns="27432" bIns="27432" wrap="square"/>
+          <a:bodyPr wrap="square" lIns="45720" tIns="27432" rIns="45720" bIns="27432" rtlCol="0" anchor="ctr"/>
           <a:lstStyle/>
           <a:p>
             <a:pPr algn="ctr"/>
@@ -11725,7 +11598,7 @@
           </a:fontRef>
         </p:style>
         <p:txBody>
-          <a:bodyPr rtlCol="0" anchor="ctr" tIns="27432" bIns="27432" wrap="square"/>
+          <a:bodyPr wrap="square" tIns="27432" bIns="27432" rtlCol="0" anchor="ctr"/>
           <a:lstStyle/>
           <a:p>
             <a:pPr algn="ctr"/>
@@ -11795,7 +11668,7 @@
           </a:fontRef>
         </p:style>
         <p:txBody>
-          <a:bodyPr rtlCol="0" anchor="ctr" lIns="274320" rIns="45720" tIns="27432" bIns="27432" wrap="square"/>
+          <a:bodyPr wrap="square" lIns="274320" tIns="27432" rIns="45720" bIns="27432" rtlCol="0" anchor="ctr"/>
           <a:lstStyle/>
           <a:p>
             <a:pPr algn="l"/>
@@ -11829,7 +11702,7 @@
 </file>
 
 <file path=ppt/slides/slide8.xml><?xml version="1.0" encoding="utf-8"?>
-<p:sld xmlns:a="http://schemas.openxmlformats.org/drawingml/2006/main" xmlns:p="http://schemas.openxmlformats.org/presentationml/2006/main" xmlns:r="http://schemas.openxmlformats.org/officeDocument/2006/relationships">
+<p:sld xmlns:a="http://schemas.openxmlformats.org/drawingml/2006/main" xmlns:r="http://schemas.openxmlformats.org/officeDocument/2006/relationships" xmlns:p="http://schemas.openxmlformats.org/presentationml/2006/main">
   <p:cSld>
     <p:bg>
       <p:bgPr>
@@ -11845,7 +11718,14 @@
         <p:cNvGrpSpPr/>
         <p:nvPr/>
       </p:nvGrpSpPr>
-      <p:grpSpPr/>
+      <p:grpSpPr>
+        <a:xfrm>
+          <a:off x="0" y="0"/>
+          <a:ext cx="0" cy="0"/>
+          <a:chOff x="0" y="0"/>
+          <a:chExt cx="0" cy="0"/>
+        </a:xfrm>
+      </p:grpSpPr>
       <p:sp>
         <p:nvSpPr>
           <p:cNvPr id="2" name="Rectangle 1"/>
@@ -11883,10 +11763,11 @@
           </a:fontRef>
         </p:style>
         <p:txBody>
-          <a:bodyPr rtlCol="0" anchor="ctr" lIns="45720" rIns="45720" tIns="27432" bIns="27432" wrap="square"/>
+          <a:bodyPr wrap="square" lIns="45720" tIns="27432" rIns="45720" bIns="27432" rtlCol="0" anchor="ctr"/>
           <a:lstStyle/>
           <a:p>
             <a:pPr algn="ctr"/>
+            <a:endParaRPr/>
           </a:p>
         </p:txBody>
       </p:sp>
@@ -11927,7 +11808,7 @@
           </a:fontRef>
         </p:style>
         <p:txBody>
-          <a:bodyPr rtlCol="0" anchor="ctr" lIns="45720" rIns="45720" tIns="27432" bIns="27432" wrap="square"/>
+          <a:bodyPr wrap="square" lIns="45720" tIns="27432" rIns="45720" bIns="27432" rtlCol="0" anchor="ctr"/>
           <a:lstStyle/>
           <a:p>
             <a:pPr algn="ctr"/>
@@ -11960,7 +11841,7 @@
           <a:noFill/>
         </p:spPr>
         <p:txBody>
-          <a:bodyPr wrap="square" lIns="45720" rIns="45720" tIns="27432" bIns="27432" anchor="t">
+          <a:bodyPr wrap="square" lIns="45720" tIns="27432" rIns="45720" bIns="27432" anchor="t">
             <a:spAutoFit/>
           </a:bodyPr>
           <a:lstStyle/>
@@ -11995,7 +11876,7 @@
           <a:noFill/>
         </p:spPr>
         <p:txBody>
-          <a:bodyPr wrap="square" lIns="45720" rIns="45720" tIns="27432" bIns="27432" anchor="t">
+          <a:bodyPr wrap="square" lIns="45720" tIns="27432" rIns="45720" bIns="27432" anchor="t">
             <a:spAutoFit/>
           </a:bodyPr>
           <a:lstStyle/>
@@ -12030,7 +11911,7 @@
           <a:noFill/>
         </p:spPr>
         <p:txBody>
-          <a:bodyPr wrap="square" lIns="45720" rIns="45720" tIns="27432" bIns="27432" anchor="t">
+          <a:bodyPr wrap="square" lIns="45720" tIns="27432" rIns="45720" bIns="27432" anchor="t">
             <a:spAutoFit/>
           </a:bodyPr>
           <a:lstStyle/>
@@ -12057,7 +11938,7 @@
           <p:nvPr/>
         </p:nvPicPr>
         <p:blipFill>
-          <a:blip r:embed="rId2"/>
+          <a:blip r:embed="rId3"/>
           <a:stretch>
             <a:fillRect/>
           </a:stretch>
@@ -12109,10 +11990,11 @@
           </a:fontRef>
         </p:style>
         <p:txBody>
-          <a:bodyPr rtlCol="0" anchor="ctr" lIns="45720" rIns="45720" tIns="27432" bIns="27432" wrap="square"/>
+          <a:bodyPr wrap="square" lIns="45720" tIns="27432" rIns="45720" bIns="27432" rtlCol="0" anchor="ctr"/>
           <a:lstStyle/>
           <a:p>
             <a:pPr algn="ctr"/>
+            <a:endParaRPr/>
           </a:p>
         </p:txBody>
       </p:sp>
@@ -12133,7 +12015,7 @@
           <a:noFill/>
         </p:spPr>
         <p:txBody>
-          <a:bodyPr wrap="square" lIns="45720" rIns="45720" tIns="27432" bIns="27432" anchor="t">
+          <a:bodyPr wrap="square" lIns="45720" tIns="27432" rIns="45720" bIns="27432" anchor="t">
             <a:spAutoFit/>
           </a:bodyPr>
           <a:lstStyle/>
@@ -12359,7 +12241,7 @@
           <a:noFill/>
         </p:spPr>
         <p:txBody>
-          <a:bodyPr wrap="square" lIns="45720" rIns="45720" tIns="27432" bIns="27432" anchor="t">
+          <a:bodyPr wrap="square" lIns="45720" tIns="27432" rIns="45720" bIns="27432" anchor="t">
             <a:spAutoFit/>
           </a:bodyPr>
           <a:lstStyle/>
@@ -12386,7 +12268,7 @@
 </file>
 
 <file path=ppt/slides/slide9.xml><?xml version="1.0" encoding="utf-8"?>
-<p:sld xmlns:a="http://schemas.openxmlformats.org/drawingml/2006/main" xmlns:p="http://schemas.openxmlformats.org/presentationml/2006/main" xmlns:r="http://schemas.openxmlformats.org/officeDocument/2006/relationships">
+<p:sld xmlns:a="http://schemas.openxmlformats.org/drawingml/2006/main" xmlns:r="http://schemas.openxmlformats.org/officeDocument/2006/relationships" xmlns:p="http://schemas.openxmlformats.org/presentationml/2006/main">
   <p:cSld>
     <p:bg>
       <p:bgPr>
@@ -12402,7 +12284,14 @@
         <p:cNvGrpSpPr/>
         <p:nvPr/>
       </p:nvGrpSpPr>
-      <p:grpSpPr/>
+      <p:grpSpPr>
+        <a:xfrm>
+          <a:off x="0" y="0"/>
+          <a:ext cx="0" cy="0"/>
+          <a:chOff x="0" y="0"/>
+          <a:chExt cx="0" cy="0"/>
+        </a:xfrm>
+      </p:grpSpPr>
       <p:sp>
         <p:nvSpPr>
           <p:cNvPr id="2" name="Rectangle 1"/>
@@ -12440,10 +12329,11 @@
           </a:fontRef>
         </p:style>
         <p:txBody>
-          <a:bodyPr rtlCol="0" anchor="ctr" lIns="45720" rIns="45720" tIns="27432" bIns="27432" wrap="square"/>
+          <a:bodyPr wrap="square" lIns="45720" tIns="27432" rIns="45720" bIns="27432" rtlCol="0" anchor="ctr"/>
           <a:lstStyle/>
           <a:p>
             <a:pPr algn="ctr"/>
+            <a:endParaRPr/>
           </a:p>
         </p:txBody>
       </p:sp>
@@ -12484,7 +12374,7 @@
           </a:fontRef>
         </p:style>
         <p:txBody>
-          <a:bodyPr rtlCol="0" anchor="ctr" lIns="45720" rIns="45720" tIns="27432" bIns="27432" wrap="square"/>
+          <a:bodyPr wrap="square" lIns="45720" tIns="27432" rIns="45720" bIns="27432" rtlCol="0" anchor="ctr"/>
           <a:lstStyle/>
           <a:p>
             <a:pPr algn="ctr"/>
@@ -12517,7 +12407,7 @@
           <a:noFill/>
         </p:spPr>
         <p:txBody>
-          <a:bodyPr wrap="square" lIns="45720" rIns="45720" tIns="27432" bIns="27432" anchor="t">
+          <a:bodyPr wrap="square" lIns="45720" tIns="27432" rIns="45720" bIns="27432" anchor="t">
             <a:spAutoFit/>
           </a:bodyPr>
           <a:lstStyle/>
@@ -12552,7 +12442,7 @@
           <a:noFill/>
         </p:spPr>
         <p:txBody>
-          <a:bodyPr wrap="square" lIns="45720" rIns="45720" tIns="27432" bIns="27432" anchor="t">
+          <a:bodyPr wrap="square" lIns="45720" tIns="27432" rIns="45720" bIns="27432" anchor="t">
             <a:spAutoFit/>
           </a:bodyPr>
           <a:lstStyle/>
@@ -12587,7 +12477,7 @@
           <a:noFill/>
         </p:spPr>
         <p:txBody>
-          <a:bodyPr wrap="square" lIns="45720" rIns="45720" tIns="27432" bIns="27432" anchor="t">
+          <a:bodyPr wrap="square" lIns="45720" tIns="27432" rIns="45720" bIns="27432" anchor="t">
             <a:spAutoFit/>
           </a:bodyPr>
           <a:lstStyle/>
@@ -12614,7 +12504,7 @@
           <p:nvPr/>
         </p:nvPicPr>
         <p:blipFill>
-          <a:blip r:embed="rId2"/>
+          <a:blip r:embed="rId3"/>
           <a:stretch>
             <a:fillRect/>
           </a:stretch>
@@ -12638,7 +12528,7 @@
           <p:nvPr/>
         </p:nvPicPr>
         <p:blipFill>
-          <a:blip r:embed="rId3"/>
+          <a:blip r:embed="rId4"/>
           <a:stretch>
             <a:fillRect/>
           </a:stretch>
@@ -12690,10 +12580,11 @@
           </a:fontRef>
         </p:style>
         <p:txBody>
-          <a:bodyPr rtlCol="0" anchor="ctr" lIns="45720" rIns="45720" tIns="27432" bIns="27432" wrap="square"/>
+          <a:bodyPr wrap="square" lIns="45720" tIns="27432" rIns="45720" bIns="27432" rtlCol="0" anchor="ctr"/>
           <a:lstStyle/>
           <a:p>
             <a:pPr algn="ctr"/>
+            <a:endParaRPr/>
           </a:p>
         </p:txBody>
       </p:sp>
@@ -12714,7 +12605,7 @@
           <a:noFill/>
         </p:spPr>
         <p:txBody>
-          <a:bodyPr wrap="square" lIns="45720" rIns="45720" tIns="27432" bIns="27432" anchor="t">
+          <a:bodyPr wrap="square" lIns="45720" tIns="27432" rIns="45720" bIns="27432" anchor="t">
             <a:spAutoFit/>
           </a:bodyPr>
           <a:lstStyle/>
@@ -12749,7 +12640,7 @@
           <a:noFill/>
         </p:spPr>
         <p:txBody>
-          <a:bodyPr wrap="square" lIns="45720" rIns="45720" tIns="27432" bIns="27432" anchor="t">
+          <a:bodyPr wrap="square" lIns="45720" tIns="27432" rIns="45720" bIns="27432" anchor="t">
             <a:spAutoFit/>
           </a:bodyPr>
           <a:lstStyle/>
@@ -13096,7 +12987,7 @@
 </file>
 
 <file path=ppt/theme/theme2.xml><?xml version="1.0" encoding="utf-8"?>
-<a:theme xmlns:a="http://schemas.openxmlformats.org/drawingml/2006/main" name="Office Theme">
+<a:theme xmlns:a="http://schemas.openxmlformats.org/drawingml/2006/main" name="Office 主题​​">
   <a:themeElements>
     <a:clrScheme name="Office">
       <a:dk1>
@@ -13106,44 +12997,44 @@
         <a:sysClr val="window" lastClr="FFFFFF"/>
       </a:lt1>
       <a:dk2>
-        <a:srgbClr val="1F497D"/>
+        <a:srgbClr val="0E2841"/>
       </a:dk2>
       <a:lt2>
-        <a:srgbClr val="EEECE1"/>
+        <a:srgbClr val="E8E8E8"/>
       </a:lt2>
       <a:accent1>
-        <a:srgbClr val="4F81BD"/>
+        <a:srgbClr val="156082"/>
       </a:accent1>
       <a:accent2>
-        <a:srgbClr val="C0504D"/>
+        <a:srgbClr val="E97132"/>
       </a:accent2>
       <a:accent3>
-        <a:srgbClr val="9BBB59"/>
+        <a:srgbClr val="196B24"/>
       </a:accent3>
       <a:accent4>
-        <a:srgbClr val="8064A2"/>
+        <a:srgbClr val="0F9ED5"/>
       </a:accent4>
       <a:accent5>
-        <a:srgbClr val="4BACC6"/>
+        <a:srgbClr val="A02B93"/>
       </a:accent5>
       <a:accent6>
-        <a:srgbClr val="F79646"/>
+        <a:srgbClr val="4EA72E"/>
       </a:accent6>
       <a:hlink>
-        <a:srgbClr val="0000FF"/>
+        <a:srgbClr val="467886"/>
       </a:hlink>
       <a:folHlink>
-        <a:srgbClr val="800080"/>
+        <a:srgbClr val="96607D"/>
       </a:folHlink>
     </a:clrScheme>
     <a:fontScheme name="Office">
       <a:majorFont>
-        <a:latin typeface="Calibri"/>
+        <a:latin typeface="等线 Light" panose="02110004020202020204"/>
         <a:ea typeface=""/>
         <a:cs typeface=""/>
-        <a:font script="Jpan" typeface="ＭＳ Ｐゴシック"/>
+        <a:font script="Jpan" typeface="游ゴシック Light"/>
         <a:font script="Hang" typeface="맑은 고딕"/>
-        <a:font script="Hans" typeface="宋体"/>
+        <a:font script="Hans" typeface="等线 Light"/>
         <a:font script="Hant" typeface="新細明體"/>
         <a:font script="Arab" typeface="Times New Roman"/>
         <a:font script="Hebr" typeface="Times New Roman"/>
@@ -13171,14 +13062,31 @@
         <a:font script="Viet" typeface="Times New Roman"/>
         <a:font script="Uigh" typeface="Microsoft Uighur"/>
         <a:font script="Geor" typeface="Sylfaen"/>
+        <a:font script="Armn" typeface="Arial"/>
+        <a:font script="Bugi" typeface="Leelawadee UI"/>
+        <a:font script="Bopo" typeface="Microsoft JhengHei"/>
+        <a:font script="Java" typeface="Javanese Text"/>
+        <a:font script="Lisu" typeface="Segoe UI"/>
+        <a:font script="Mymr" typeface="Myanmar Text"/>
+        <a:font script="Nkoo" typeface="Ebrima"/>
+        <a:font script="Olck" typeface="Nirmala UI"/>
+        <a:font script="Osma" typeface="Ebrima"/>
+        <a:font script="Phag" typeface="Phagspa"/>
+        <a:font script="Syrn" typeface="Estrangelo Edessa"/>
+        <a:font script="Syrj" typeface="Estrangelo Edessa"/>
+        <a:font script="Syre" typeface="Estrangelo Edessa"/>
+        <a:font script="Sora" typeface="Nirmala UI"/>
+        <a:font script="Tale" typeface="Microsoft Tai Le"/>
+        <a:font script="Talu" typeface="Microsoft New Tai Lue"/>
+        <a:font script="Tfng" typeface="Ebrima"/>
       </a:majorFont>
       <a:minorFont>
-        <a:latin typeface="Calibri"/>
+        <a:latin typeface="等线" panose="02110004020202020204"/>
         <a:ea typeface=""/>
         <a:cs typeface=""/>
-        <a:font script="Jpan" typeface="ＭＳ Ｐゴシック"/>
+        <a:font script="Jpan" typeface="游ゴシック"/>
         <a:font script="Hang" typeface="맑은 고딕"/>
-        <a:font script="Hans" typeface="宋体"/>
+        <a:font script="Hans" typeface="等线"/>
         <a:font script="Hant" typeface="新細明體"/>
         <a:font script="Arab" typeface="Arial"/>
         <a:font script="Hebr" typeface="Arial"/>
@@ -13206,6 +13114,23 @@
         <a:font script="Viet" typeface="Arial"/>
         <a:font script="Uigh" typeface="Microsoft Uighur"/>
         <a:font script="Geor" typeface="Sylfaen"/>
+        <a:font script="Armn" typeface="Arial"/>
+        <a:font script="Bugi" typeface="Leelawadee UI"/>
+        <a:font script="Bopo" typeface="Microsoft JhengHei"/>
+        <a:font script="Java" typeface="Javanese Text"/>
+        <a:font script="Lisu" typeface="Segoe UI"/>
+        <a:font script="Mymr" typeface="Myanmar Text"/>
+        <a:font script="Nkoo" typeface="Ebrima"/>
+        <a:font script="Olck" typeface="Nirmala UI"/>
+        <a:font script="Osma" typeface="Ebrima"/>
+        <a:font script="Phag" typeface="Phagspa"/>
+        <a:font script="Syrn" typeface="Estrangelo Edessa"/>
+        <a:font script="Syrj" typeface="Estrangelo Edessa"/>
+        <a:font script="Syre" typeface="Estrangelo Edessa"/>
+        <a:font script="Sora" typeface="Nirmala UI"/>
+        <a:font script="Tale" typeface="Microsoft Tai Le"/>
+        <a:font script="Talu" typeface="Microsoft New Tai Lue"/>
+        <a:font script="Tfng" typeface="Ebrima"/>
       </a:minorFont>
     </a:fontScheme>
     <a:fmtScheme name="Office">
@@ -13217,180 +13142,136 @@
           <a:gsLst>
             <a:gs pos="0">
               <a:schemeClr val="phClr">
-                <a:tint val="50000"/>
-                <a:satMod val="300000"/>
+                <a:lumMod val="110000"/>
+                <a:satMod val="105000"/>
+                <a:tint val="67000"/>
               </a:schemeClr>
             </a:gs>
-            <a:gs pos="35000">
+            <a:gs pos="50000">
               <a:schemeClr val="phClr">
-                <a:tint val="37000"/>
-                <a:satMod val="300000"/>
+                <a:lumMod val="105000"/>
+                <a:satMod val="103000"/>
+                <a:tint val="73000"/>
               </a:schemeClr>
             </a:gs>
             <a:gs pos="100000">
               <a:schemeClr val="phClr">
-                <a:tint val="15000"/>
-                <a:satMod val="350000"/>
+                <a:lumMod val="105000"/>
+                <a:satMod val="109000"/>
+                <a:tint val="81000"/>
               </a:schemeClr>
             </a:gs>
           </a:gsLst>
-          <a:lin ang="16200000" scaled="1"/>
+          <a:lin ang="5400000" scaled="0"/>
         </a:gradFill>
         <a:gradFill rotWithShape="1">
           <a:gsLst>
             <a:gs pos="0">
               <a:schemeClr val="phClr">
-                <a:tint val="100000"/>
+                <a:satMod val="103000"/>
+                <a:lumMod val="102000"/>
+                <a:tint val="94000"/>
+              </a:schemeClr>
+            </a:gs>
+            <a:gs pos="50000">
+              <a:schemeClr val="phClr">
+                <a:satMod val="110000"/>
+                <a:lumMod val="100000"/>
                 <a:shade val="100000"/>
-                <a:satMod val="130000"/>
               </a:schemeClr>
             </a:gs>
             <a:gs pos="100000">
               <a:schemeClr val="phClr">
-                <a:tint val="50000"/>
-                <a:shade val="100000"/>
-                <a:satMod val="350000"/>
+                <a:lumMod val="99000"/>
+                <a:satMod val="120000"/>
+                <a:shade val="78000"/>
               </a:schemeClr>
             </a:gs>
           </a:gsLst>
-          <a:lin ang="16200000" scaled="0"/>
+          <a:lin ang="5400000" scaled="0"/>
         </a:gradFill>
       </a:fillStyleLst>
       <a:lnStyleLst>
-        <a:ln w="9525" cap="flat" cmpd="sng" algn="ctr">
+        <a:ln w="12700" cap="flat" cmpd="sng" algn="ctr">
           <a:solidFill>
-            <a:schemeClr val="phClr">
-              <a:shade val="95000"/>
-              <a:satMod val="105000"/>
-            </a:schemeClr>
+            <a:schemeClr val="phClr"/>
           </a:solidFill>
           <a:prstDash val="solid"/>
+          <a:miter lim="800000"/>
+        </a:ln>
+        <a:ln w="19050" cap="flat" cmpd="sng" algn="ctr">
+          <a:solidFill>
+            <a:schemeClr val="phClr"/>
+          </a:solidFill>
+          <a:prstDash val="solid"/>
+          <a:miter lim="800000"/>
         </a:ln>
         <a:ln w="25400" cap="flat" cmpd="sng" algn="ctr">
           <a:solidFill>
             <a:schemeClr val="phClr"/>
           </a:solidFill>
           <a:prstDash val="solid"/>
-        </a:ln>
-        <a:ln w="38100" cap="flat" cmpd="sng" algn="ctr">
-          <a:solidFill>
-            <a:schemeClr val="phClr"/>
-          </a:solidFill>
-          <a:prstDash val="solid"/>
+          <a:miter lim="800000"/>
         </a:ln>
       </a:lnStyleLst>
       <a:effectStyleLst>
         <a:effectStyle>
+          <a:effectLst/>
+        </a:effectStyle>
+        <a:effectStyle>
+          <a:effectLst/>
+        </a:effectStyle>
+        <a:effectStyle>
           <a:effectLst>
-            <a:outerShdw blurRad="40000" dist="20000" dir="5400000" rotWithShape="0">
+            <a:outerShdw blurRad="57150" dist="19050" dir="5400000" algn="ctr" rotWithShape="0">
               <a:srgbClr val="000000">
-                <a:alpha val="38000"/>
+                <a:alpha val="63000"/>
               </a:srgbClr>
             </a:outerShdw>
           </a:effectLst>
-        </a:effectStyle>
-        <a:effectStyle>
-          <a:effectLst>
-            <a:outerShdw blurRad="40000" dist="23000" dir="5400000" rotWithShape="0">
-              <a:srgbClr val="000000">
-                <a:alpha val="35000"/>
-              </a:srgbClr>
-            </a:outerShdw>
-          </a:effectLst>
-        </a:effectStyle>
-        <a:effectStyle>
-          <a:effectLst>
-            <a:outerShdw blurRad="40000" dist="23000" dir="5400000" rotWithShape="0">
-              <a:srgbClr val="000000">
-                <a:alpha val="35000"/>
-              </a:srgbClr>
-            </a:outerShdw>
-          </a:effectLst>
-          <a:scene3d>
-            <a:camera prst="orthographicFront">
-              <a:rot lat="0" lon="0" rev="0"/>
-            </a:camera>
-            <a:lightRig rig="threePt" dir="t">
-              <a:rot lat="0" lon="0" rev="1200000"/>
-            </a:lightRig>
-          </a:scene3d>
-          <a:sp3d>
-            <a:bevelT w="63500" h="25400"/>
-          </a:sp3d>
         </a:effectStyle>
       </a:effectStyleLst>
       <a:bgFillStyleLst>
         <a:solidFill>
           <a:schemeClr val="phClr"/>
         </a:solidFill>
+        <a:solidFill>
+          <a:schemeClr val="phClr">
+            <a:tint val="95000"/>
+            <a:satMod val="170000"/>
+          </a:schemeClr>
+        </a:solidFill>
         <a:gradFill rotWithShape="1">
           <a:gsLst>
             <a:gs pos="0">
               <a:schemeClr val="phClr">
-                <a:tint val="40000"/>
-                <a:satMod val="350000"/>
+                <a:tint val="93000"/>
+                <a:satMod val="150000"/>
+                <a:shade val="98000"/>
+                <a:lumMod val="102000"/>
               </a:schemeClr>
             </a:gs>
-            <a:gs pos="40000">
+            <a:gs pos="50000">
               <a:schemeClr val="phClr">
-                <a:tint val="45000"/>
-                <a:shade val="99000"/>
-                <a:satMod val="350000"/>
+                <a:tint val="98000"/>
+                <a:satMod val="130000"/>
+                <a:shade val="90000"/>
+                <a:lumMod val="103000"/>
               </a:schemeClr>
             </a:gs>
             <a:gs pos="100000">
               <a:schemeClr val="phClr">
-                <a:shade val="20000"/>
-                <a:satMod val="255000"/>
+                <a:shade val="63000"/>
+                <a:satMod val="120000"/>
               </a:schemeClr>
             </a:gs>
           </a:gsLst>
-          <a:path path="circle">
-            <a:fillToRect l="50000" t="-80000" r="50000" b="180000"/>
-          </a:path>
-        </a:gradFill>
-        <a:gradFill rotWithShape="1">
-          <a:gsLst>
-            <a:gs pos="0">
-              <a:schemeClr val="phClr">
-                <a:tint val="80000"/>
-                <a:satMod val="300000"/>
-              </a:schemeClr>
-            </a:gs>
-            <a:gs pos="100000">
-              <a:schemeClr val="phClr">
-                <a:shade val="30000"/>
-                <a:satMod val="200000"/>
-              </a:schemeClr>
-            </a:gs>
-          </a:gsLst>
-          <a:path path="circle">
-            <a:fillToRect l="50000" t="50000" r="50000" b="50000"/>
-          </a:path>
+          <a:lin ang="5400000" scaled="0"/>
         </a:gradFill>
       </a:bgFillStyleLst>
     </a:fmtScheme>
   </a:themeElements>
   <a:objectDefaults>
-    <a:spDef>
-      <a:spPr/>
-      <a:bodyPr/>
-      <a:lstStyle/>
-      <a:style>
-        <a:lnRef idx="1">
-          <a:schemeClr val="accent1"/>
-        </a:lnRef>
-        <a:fillRef idx="3">
-          <a:schemeClr val="accent1"/>
-        </a:fillRef>
-        <a:effectRef idx="2">
-          <a:schemeClr val="accent1"/>
-        </a:effectRef>
-        <a:fontRef idx="minor">
-          <a:schemeClr val="lt1"/>
-        </a:fontRef>
-      </a:style>
-    </a:spDef>
     <a:lnDef>
       <a:spPr/>
       <a:bodyPr/>
@@ -13412,5 +13293,10 @@
     </a:lnDef>
   </a:objectDefaults>
   <a:extraClrSchemeLst/>
+  <a:extLst>
+    <a:ext uri="{05A4C25C-085E-4340-85A3-A5531E510DB2}">
+      <thm15:themeFamily xmlns:thm15="http://schemas.microsoft.com/office/thememl/2012/main" name="Office Theme" id="{2E142A2C-CD16-42D6-873A-C26D2A0506FA}" vid="{1BDDFF52-6CD6-40A5-AB3C-68EB2F1E4D0A}"/>
+    </a:ext>
+  </a:extLst>
 </a:theme>
 </file>